--- a/HackingForums/csbc26_caso_hackingforums.pptx
+++ b/HackingForums/csbc26_caso_hackingforums.pptx
@@ -6,26 +6,26 @@
   </p:sldMasterIdLst>
   <p:sldIdLst>
     <p:sldId id="256" r:id="rId7"/>
-    <p:sldId id="257" r:id="rId8"/>
-    <p:sldId id="258" r:id="rId9"/>
-    <p:sldId id="259" r:id="rId10"/>
-    <p:sldId id="260" r:id="rId11"/>
-    <p:sldId id="261" r:id="rId12"/>
-    <p:sldId id="262" r:id="rId13"/>
-    <p:sldId id="263" r:id="rId14"/>
-    <p:sldId id="264" r:id="rId15"/>
-    <p:sldId id="265" r:id="rId16"/>
-    <p:sldId id="266" r:id="rId17"/>
-    <p:sldId id="267" r:id="rId18"/>
-    <p:sldId id="268" r:id="rId19"/>
-    <p:sldId id="269" r:id="rId20"/>
-    <p:sldId id="270" r:id="rId21"/>
-    <p:sldId id="271" r:id="rId22"/>
-    <p:sldId id="272" r:id="rId23"/>
-    <p:sldId id="273" r:id="rId24"/>
-    <p:sldId id="274" r:id="rId25"/>
-    <p:sldId id="275" r:id="rId26"/>
-    <p:sldId id="276" r:id="rId27"/>
+    <p:sldId id="257" r:id="rId9"/>
+    <p:sldId id="258" r:id="rId10"/>
+    <p:sldId id="259" r:id="rId11"/>
+    <p:sldId id="260" r:id="rId12"/>
+    <p:sldId id="261" r:id="rId13"/>
+    <p:sldId id="262" r:id="rId14"/>
+    <p:sldId id="263" r:id="rId15"/>
+    <p:sldId id="264" r:id="rId16"/>
+    <p:sldId id="265" r:id="rId17"/>
+    <p:sldId id="266" r:id="rId18"/>
+    <p:sldId id="267" r:id="rId19"/>
+    <p:sldId id="268" r:id="rId20"/>
+    <p:sldId id="269" r:id="rId21"/>
+    <p:sldId id="270" r:id="rId22"/>
+    <p:sldId id="271" r:id="rId23"/>
+    <p:sldId id="272" r:id="rId24"/>
+    <p:sldId id="273" r:id="rId25"/>
+    <p:sldId id="274" r:id="rId26"/>
+    <p:sldId id="275" r:id="rId27"/>
+    <p:sldId id="276" r:id="rId28"/>
   </p:sldIdLst>
   <p:sldSz cx="12188952" cy="6858000" type="screen4x3"/>
   <p:notesSz cx="6858000" cy="9144000"/>
@@ -125,6 +125,1826 @@
     </a:lvl9pPr>
   </p:defaultTextStyle>
 </p:presentation>
+</file>
+
+<file path=ppt/notesMasters/notesMaster1.xml><?xml version="1.0" encoding="utf-8"?>
+<p:notesMaster xmlns:a="http://schemas.openxmlformats.org/drawingml/2006/main" xmlns:p="http://schemas.openxmlformats.org/presentationml/2006/main" xmlns:r="http://schemas.openxmlformats.org/officeDocument/2006/relationships">
+  <p:cSld>
+    <p:bg>
+      <p:bgRef idx="1001">
+        <a:schemeClr val="bg1"/>
+      </p:bgRef>
+    </p:bg>
+    <p:spTree>
+      <p:nvGrpSpPr>
+        <p:cNvPr id="1" name=""/>
+        <p:cNvGrpSpPr/>
+        <p:nvPr/>
+      </p:nvGrpSpPr>
+      <p:grpSpPr>
+        <a:xfrm>
+          <a:off x="0" y="0"/>
+          <a:ext cx="0" cy="0"/>
+          <a:chOff x="0" y="0"/>
+          <a:chExt cx="0" cy="0"/>
+        </a:xfrm>
+      </p:grpSpPr>
+      <p:sp>
+        <p:nvSpPr>
+          <p:cNvPr id="2" name="Header Placeholder 1"/>
+          <p:cNvSpPr>
+            <a:spLocks noGrp="1"/>
+          </p:cNvSpPr>
+          <p:nvPr>
+            <p:ph type="hdr" sz="quarter"/>
+          </p:nvPr>
+        </p:nvSpPr>
+        <p:spPr>
+          <a:xfrm>
+            <a:off x="0" y="0"/>
+            <a:ext cx="2971800" cy="457200"/>
+          </a:xfrm>
+          <a:prstGeom prst="rect">
+            <a:avLst/>
+          </a:prstGeom>
+        </p:spPr>
+        <p:txBody>
+          <a:bodyPr vert="horz" lIns="91440" tIns="45720" rIns="91440" bIns="45720" rtlCol="0"/>
+          <a:lstStyle>
+            <a:lvl1pPr algn="l">
+              <a:defRPr sz="1200"/>
+            </a:lvl1pPr>
+          </a:lstStyle>
+          <a:p>
+            <a:endParaRPr lang="en-US"/>
+          </a:p>
+        </p:txBody>
+      </p:sp>
+      <p:sp>
+        <p:nvSpPr>
+          <p:cNvPr id="3" name="Date Placeholder 2"/>
+          <p:cNvSpPr>
+            <a:spLocks noGrp="1"/>
+          </p:cNvSpPr>
+          <p:nvPr>
+            <p:ph type="dt" idx="1"/>
+          </p:nvPr>
+        </p:nvSpPr>
+        <p:spPr>
+          <a:xfrm>
+            <a:off x="3884613" y="0"/>
+            <a:ext cx="2971800" cy="457200"/>
+          </a:xfrm>
+          <a:prstGeom prst="rect">
+            <a:avLst/>
+          </a:prstGeom>
+        </p:spPr>
+        <p:txBody>
+          <a:bodyPr vert="horz" lIns="91440" tIns="45720" rIns="91440" bIns="45720" rtlCol="0"/>
+          <a:lstStyle>
+            <a:lvl1pPr algn="r">
+              <a:defRPr sz="1200"/>
+            </a:lvl1pPr>
+          </a:lstStyle>
+          <a:p>
+            <a:fld id="{0F89C1C7-3DCD-1040-A9CF-14679D8B5DDD}" type="datetimeFigureOut">
+              <a:rPr lang="en-US" smtClean="0"/>
+              <a:t>10/17/16</a:t>
+            </a:fld>
+            <a:endParaRPr lang="en-US"/>
+          </a:p>
+        </p:txBody>
+      </p:sp>
+      <p:sp>
+        <p:nvSpPr>
+          <p:cNvPr id="4" name="Slide Image Placeholder 3"/>
+          <p:cNvSpPr>
+            <a:spLocks noGrp="1" noRot="1" noChangeAspect="1"/>
+          </p:cNvSpPr>
+          <p:nvPr>
+            <p:ph type="sldImg" idx="2"/>
+          </p:nvPr>
+        </p:nvSpPr>
+        <p:spPr>
+          <a:xfrm>
+            <a:off x="1143000" y="685800"/>
+            <a:ext cx="4572000" cy="3429000"/>
+          </a:xfrm>
+          <a:prstGeom prst="rect">
+            <a:avLst/>
+          </a:prstGeom>
+          <a:noFill/>
+          <a:ln w="12700">
+            <a:solidFill>
+              <a:prstClr val="black"/>
+            </a:solidFill>
+          </a:ln>
+        </p:spPr>
+        <p:txBody>
+          <a:bodyPr vert="horz" lIns="91440" tIns="45720" rIns="91440" bIns="45720" rtlCol="0" anchor="ctr"/>
+          <a:lstStyle/>
+          <a:p>
+            <a:endParaRPr lang="en-US"/>
+          </a:p>
+        </p:txBody>
+      </p:sp>
+      <p:sp>
+        <p:nvSpPr>
+          <p:cNvPr id="5" name="Notes Placeholder 4"/>
+          <p:cNvSpPr>
+            <a:spLocks noGrp="1"/>
+          </p:cNvSpPr>
+          <p:nvPr>
+            <p:ph type="body" sz="quarter" idx="3"/>
+          </p:nvPr>
+        </p:nvSpPr>
+        <p:spPr>
+          <a:xfrm>
+            <a:off x="685800" y="4343400"/>
+            <a:ext cx="5486400" cy="4114800"/>
+          </a:xfrm>
+          <a:prstGeom prst="rect">
+            <a:avLst/>
+          </a:prstGeom>
+        </p:spPr>
+        <p:txBody>
+          <a:bodyPr vert="horz" lIns="91440" tIns="45720" rIns="91440" bIns="45720" rtlCol="0"/>
+          <a:lstStyle/>
+          <a:p>
+            <a:pPr lvl="0"/>
+            <a:r>
+              <a:rPr lang="en-US" smtClean="0"/>
+              <a:t>Click to edit Master text styles</a:t>
+            </a:r>
+          </a:p>
+          <a:p>
+            <a:pPr lvl="1"/>
+            <a:r>
+              <a:rPr lang="en-US" smtClean="0"/>
+              <a:t>Second level</a:t>
+            </a:r>
+          </a:p>
+          <a:p>
+            <a:pPr lvl="2"/>
+            <a:r>
+              <a:rPr lang="en-US" smtClean="0"/>
+              <a:t>Third level</a:t>
+            </a:r>
+          </a:p>
+          <a:p>
+            <a:pPr lvl="3"/>
+            <a:r>
+              <a:rPr lang="en-US" smtClean="0"/>
+              <a:t>Fourth level</a:t>
+            </a:r>
+          </a:p>
+          <a:p>
+            <a:pPr lvl="4"/>
+            <a:r>
+              <a:rPr lang="en-US" smtClean="0"/>
+              <a:t>Fifth level</a:t>
+            </a:r>
+            <a:endParaRPr lang="en-US"/>
+          </a:p>
+        </p:txBody>
+      </p:sp>
+      <p:sp>
+        <p:nvSpPr>
+          <p:cNvPr id="6" name="Footer Placeholder 5"/>
+          <p:cNvSpPr>
+            <a:spLocks noGrp="1"/>
+          </p:cNvSpPr>
+          <p:nvPr>
+            <p:ph type="ftr" sz="quarter" idx="4"/>
+          </p:nvPr>
+        </p:nvSpPr>
+        <p:spPr>
+          <a:xfrm>
+            <a:off x="0" y="8685213"/>
+            <a:ext cx="2971800" cy="457200"/>
+          </a:xfrm>
+          <a:prstGeom prst="rect">
+            <a:avLst/>
+          </a:prstGeom>
+        </p:spPr>
+        <p:txBody>
+          <a:bodyPr vert="horz" lIns="91440" tIns="45720" rIns="91440" bIns="45720" rtlCol="0" anchor="b"/>
+          <a:lstStyle>
+            <a:lvl1pPr algn="l">
+              <a:defRPr sz="1200"/>
+            </a:lvl1pPr>
+          </a:lstStyle>
+          <a:p>
+            <a:endParaRPr lang="en-US"/>
+          </a:p>
+        </p:txBody>
+      </p:sp>
+      <p:sp>
+        <p:nvSpPr>
+          <p:cNvPr id="7" name="Slide Number Placeholder 6"/>
+          <p:cNvSpPr>
+            <a:spLocks noGrp="1"/>
+          </p:cNvSpPr>
+          <p:nvPr>
+            <p:ph type="sldNum" sz="quarter" idx="5"/>
+          </p:nvPr>
+        </p:nvSpPr>
+        <p:spPr>
+          <a:xfrm>
+            <a:off x="3884613" y="8685213"/>
+            <a:ext cx="2971800" cy="457200"/>
+          </a:xfrm>
+          <a:prstGeom prst="rect">
+            <a:avLst/>
+          </a:prstGeom>
+        </p:spPr>
+        <p:txBody>
+          <a:bodyPr vert="horz" lIns="91440" tIns="45720" rIns="91440" bIns="45720" rtlCol="0" anchor="b"/>
+          <a:lstStyle>
+            <a:lvl1pPr algn="r">
+              <a:defRPr sz="1200"/>
+            </a:lvl1pPr>
+          </a:lstStyle>
+          <a:p>
+            <a:fld id="{BB5E49A5-4136-284D-997B-48E1D791AD67}" type="slidenum">
+              <a:rPr lang="en-US" smtClean="0"/>
+              <a:t>‹#›</a:t>
+            </a:fld>
+            <a:endParaRPr lang="en-US"/>
+          </a:p>
+        </p:txBody>
+      </p:sp>
+    </p:spTree>
+    <p:extLst>
+      <p:ext uri="{BB962C8B-B14F-4D97-AF65-F5344CB8AC3E}">
+        <p14:creationId xmlns:p14="http://schemas.microsoft.com/office/powerpoint/2010/main" val="2623252185"/>
+      </p:ext>
+    </p:extLst>
+  </p:cSld>
+  <p:clrMap bg1="lt1" tx1="dk1" bg2="lt2" tx2="dk2" accent1="accent1" accent2="accent2" accent3="accent3" accent4="accent4" accent5="accent5" accent6="accent6" hlink="hlink" folHlink="folHlink"/>
+  <p:notesStyle>
+    <a:lvl1pPr marL="0" algn="l" defTabSz="457200" rtl="0" eaLnBrk="1" latinLnBrk="0" hangingPunct="1">
+      <a:defRPr sz="1200" kern="1200">
+        <a:solidFill>
+          <a:schemeClr val="tx1"/>
+        </a:solidFill>
+        <a:latin typeface="+mn-lt"/>
+        <a:ea typeface="+mn-ea"/>
+        <a:cs typeface="+mn-cs"/>
+      </a:defRPr>
+    </a:lvl1pPr>
+    <a:lvl2pPr marL="457200" algn="l" defTabSz="457200" rtl="0" eaLnBrk="1" latinLnBrk="0" hangingPunct="1">
+      <a:defRPr sz="1200" kern="1200">
+        <a:solidFill>
+          <a:schemeClr val="tx1"/>
+        </a:solidFill>
+        <a:latin typeface="+mn-lt"/>
+        <a:ea typeface="+mn-ea"/>
+        <a:cs typeface="+mn-cs"/>
+      </a:defRPr>
+    </a:lvl2pPr>
+    <a:lvl3pPr marL="914400" algn="l" defTabSz="457200" rtl="0" eaLnBrk="1" latinLnBrk="0" hangingPunct="1">
+      <a:defRPr sz="1200" kern="1200">
+        <a:solidFill>
+          <a:schemeClr val="tx1"/>
+        </a:solidFill>
+        <a:latin typeface="+mn-lt"/>
+        <a:ea typeface="+mn-ea"/>
+        <a:cs typeface="+mn-cs"/>
+      </a:defRPr>
+    </a:lvl3pPr>
+    <a:lvl4pPr marL="1371600" algn="l" defTabSz="457200" rtl="0" eaLnBrk="1" latinLnBrk="0" hangingPunct="1">
+      <a:defRPr sz="1200" kern="1200">
+        <a:solidFill>
+          <a:schemeClr val="tx1"/>
+        </a:solidFill>
+        <a:latin typeface="+mn-lt"/>
+        <a:ea typeface="+mn-ea"/>
+        <a:cs typeface="+mn-cs"/>
+      </a:defRPr>
+    </a:lvl4pPr>
+    <a:lvl5pPr marL="1828800" algn="l" defTabSz="457200" rtl="0" eaLnBrk="1" latinLnBrk="0" hangingPunct="1">
+      <a:defRPr sz="1200" kern="1200">
+        <a:solidFill>
+          <a:schemeClr val="tx1"/>
+        </a:solidFill>
+        <a:latin typeface="+mn-lt"/>
+        <a:ea typeface="+mn-ea"/>
+        <a:cs typeface="+mn-cs"/>
+      </a:defRPr>
+    </a:lvl5pPr>
+    <a:lvl6pPr marL="2286000" algn="l" defTabSz="457200" rtl="0" eaLnBrk="1" latinLnBrk="0" hangingPunct="1">
+      <a:defRPr sz="1200" kern="1200">
+        <a:solidFill>
+          <a:schemeClr val="tx1"/>
+        </a:solidFill>
+        <a:latin typeface="+mn-lt"/>
+        <a:ea typeface="+mn-ea"/>
+        <a:cs typeface="+mn-cs"/>
+      </a:defRPr>
+    </a:lvl6pPr>
+    <a:lvl7pPr marL="2743200" algn="l" defTabSz="457200" rtl="0" eaLnBrk="1" latinLnBrk="0" hangingPunct="1">
+      <a:defRPr sz="1200" kern="1200">
+        <a:solidFill>
+          <a:schemeClr val="tx1"/>
+        </a:solidFill>
+        <a:latin typeface="+mn-lt"/>
+        <a:ea typeface="+mn-ea"/>
+        <a:cs typeface="+mn-cs"/>
+      </a:defRPr>
+    </a:lvl7pPr>
+    <a:lvl8pPr marL="3200400" algn="l" defTabSz="457200" rtl="0" eaLnBrk="1" latinLnBrk="0" hangingPunct="1">
+      <a:defRPr sz="1200" kern="1200">
+        <a:solidFill>
+          <a:schemeClr val="tx1"/>
+        </a:solidFill>
+        <a:latin typeface="+mn-lt"/>
+        <a:ea typeface="+mn-ea"/>
+        <a:cs typeface="+mn-cs"/>
+      </a:defRPr>
+    </a:lvl8pPr>
+    <a:lvl9pPr marL="3657600" algn="l" defTabSz="457200" rtl="0" eaLnBrk="1" latinLnBrk="0" hangingPunct="1">
+      <a:defRPr sz="1200" kern="1200">
+        <a:solidFill>
+          <a:schemeClr val="tx1"/>
+        </a:solidFill>
+        <a:latin typeface="+mn-lt"/>
+        <a:ea typeface="+mn-ea"/>
+        <a:cs typeface="+mn-cs"/>
+      </a:defRPr>
+    </a:lvl9pPr>
+  </p:notesStyle>
+</p:notesMaster>
+</file>
+
+<file path=ppt/notesSlides/notesSlide1.xml><?xml version="1.0" encoding="utf-8"?>
+<p:notes xmlns:a="http://schemas.openxmlformats.org/drawingml/2006/main" xmlns:p="http://schemas.openxmlformats.org/presentationml/2006/main" xmlns:r="http://schemas.openxmlformats.org/officeDocument/2006/relationships">
+  <p:cSld>
+    <p:spTree>
+      <p:nvGrpSpPr>
+        <p:cNvPr id="1" name=""/>
+        <p:cNvGrpSpPr/>
+        <p:nvPr/>
+      </p:nvGrpSpPr>
+      <p:grpSpPr>
+        <a:xfrm>
+          <a:off x="0" y="0"/>
+          <a:ext cx="0" cy="0"/>
+          <a:chOff x="0" y="0"/>
+          <a:chExt cx="0" cy="0"/>
+        </a:xfrm>
+      </p:grpSpPr>
+      <p:sp>
+        <p:nvSpPr>
+          <p:cNvPr id="2" name="Slide Image Placeholder 1"/>
+          <p:cNvSpPr>
+            <a:spLocks noGrp="1"/>
+          </p:cNvSpPr>
+          <p:nvPr>
+            <p:ph type="sldImg" idx="2"/>
+          </p:nvPr>
+        </p:nvSpPr>
+        <p:spPr/>
+      </p:sp>
+      <p:sp>
+        <p:nvSpPr>
+          <p:cNvPr id="3" name="Notes Placeholder 2"/>
+          <p:cNvSpPr>
+            <a:spLocks noGrp="1"/>
+          </p:cNvSpPr>
+          <p:nvPr>
+            <p:ph type="body" idx="3" sz="quarter"/>
+          </p:nvPr>
+        </p:nvSpPr>
+        <p:spPr/>
+        <p:txBody>
+          <a:bodyPr/>
+          <a:lstStyle/>
+          <a:p>
+            <a:r>
+              <a:t>Bienvenidos al caso Hacking Forums: vamos a analizar cinco foros underground con casi una década de diferencia entre ellos, desde 2013 hasta 2021. La pregunta que guía toda la sesión es sencilla pero incómoda: ¿es posible identificar a la misma persona operando bajo distintos alias en foros distintos? Vamos a ver un bug real de parsing que nos costó perder tres millones de posts, una decisión de pipeline por idioma, y finalmente un score combinado de atribución cross-foro. Todo lo que van a ver está construido sobre dumps SQL reales, no datos sintéticos.</a:t>
+            </a:r>
+          </a:p>
+        </p:txBody>
+      </p:sp>
+      <p:sp>
+        <p:nvSpPr>
+          <p:cNvPr id="4" name="Slide Number Placeholder 3"/>
+          <p:cNvSpPr>
+            <a:spLocks noGrp="1"/>
+          </p:cNvSpPr>
+          <p:nvPr>
+            <p:ph type="sldNum" idx="5" sz="quarter"/>
+          </p:nvPr>
+        </p:nvSpPr>
+        <p:spPr/>
+      </p:sp>
+    </p:spTree>
+  </p:cSld>
+  <p:clrMapOvr>
+    <a:masterClrMapping/>
+  </p:clrMapOvr>
+</p:notes>
+</file>
+
+<file path=ppt/notesSlides/notesSlide10.xml><?xml version="1.0" encoding="utf-8"?>
+<p:notes xmlns:a="http://schemas.openxmlformats.org/drawingml/2006/main" xmlns:p="http://schemas.openxmlformats.org/presentationml/2006/main" xmlns:r="http://schemas.openxmlformats.org/officeDocument/2006/relationships">
+  <p:cSld>
+    <p:spTree>
+      <p:nvGrpSpPr>
+        <p:cNvPr id="1" name=""/>
+        <p:cNvGrpSpPr/>
+        <p:nvPr/>
+      </p:nvGrpSpPr>
+      <p:grpSpPr>
+        <a:xfrm>
+          <a:off x="0" y="0"/>
+          <a:ext cx="0" cy="0"/>
+          <a:chOff x="0" y="0"/>
+          <a:chExt cx="0" cy="0"/>
+        </a:xfrm>
+      </p:grpSpPr>
+      <p:sp>
+        <p:nvSpPr>
+          <p:cNvPr id="2" name="Slide Image Placeholder 1"/>
+          <p:cNvSpPr>
+            <a:spLocks noGrp="1"/>
+          </p:cNvSpPr>
+          <p:nvPr>
+            <p:ph type="sldImg" idx="2"/>
+          </p:nvPr>
+        </p:nvSpPr>
+        <p:spPr/>
+      </p:sp>
+      <p:sp>
+        <p:nvSpPr>
+          <p:cNvPr id="3" name="Notes Placeholder 2"/>
+          <p:cNvSpPr>
+            <a:spLocks noGrp="1"/>
+          </p:cNvSpPr>
+          <p:nvPr>
+            <p:ph type="body" idx="3" sz="quarter"/>
+          </p:nvPr>
+        </p:nvSpPr>
+        <p:spPr/>
+        <p:txBody>
+          <a:bodyPr/>
+          <a:lstStyle/>
+          <a:p>
+            <a:r>
+              <a:t>Ahora entramos en la parte más forense del caso: construir la red de co-participación y usarla para intentar identificar a la misma persona bajo distintos alias en distintos foros.</a:t>
+            </a:r>
+          </a:p>
+        </p:txBody>
+      </p:sp>
+      <p:sp>
+        <p:nvSpPr>
+          <p:cNvPr id="4" name="Slide Number Placeholder 3"/>
+          <p:cNvSpPr>
+            <a:spLocks noGrp="1"/>
+          </p:cNvSpPr>
+          <p:nvPr>
+            <p:ph type="sldNum" idx="5" sz="quarter"/>
+          </p:nvPr>
+        </p:nvSpPr>
+        <p:spPr/>
+      </p:sp>
+    </p:spTree>
+  </p:cSld>
+  <p:clrMapOvr>
+    <a:masterClrMapping/>
+  </p:clrMapOvr>
+</p:notes>
+</file>
+
+<file path=ppt/notesSlides/notesSlide11.xml><?xml version="1.0" encoding="utf-8"?>
+<p:notes xmlns:a="http://schemas.openxmlformats.org/drawingml/2006/main" xmlns:p="http://schemas.openxmlformats.org/presentationml/2006/main" xmlns:r="http://schemas.openxmlformats.org/officeDocument/2006/relationships">
+  <p:cSld>
+    <p:spTree>
+      <p:nvGrpSpPr>
+        <p:cNvPr id="1" name=""/>
+        <p:cNvGrpSpPr/>
+        <p:nvPr/>
+      </p:nvGrpSpPr>
+      <p:grpSpPr>
+        <a:xfrm>
+          <a:off x="0" y="0"/>
+          <a:ext cx="0" cy="0"/>
+          <a:chOff x="0" y="0"/>
+          <a:chExt cx="0" cy="0"/>
+        </a:xfrm>
+      </p:grpSpPr>
+      <p:sp>
+        <p:nvSpPr>
+          <p:cNvPr id="2" name="Slide Image Placeholder 1"/>
+          <p:cNvSpPr>
+            <a:spLocks noGrp="1"/>
+          </p:cNvSpPr>
+          <p:nvPr>
+            <p:ph type="sldImg" idx="2"/>
+          </p:nvPr>
+        </p:nvSpPr>
+        <p:spPr/>
+      </p:sp>
+      <p:sp>
+        <p:nvSpPr>
+          <p:cNvPr id="3" name="Notes Placeholder 2"/>
+          <p:cNvSpPr>
+            <a:spLocks noGrp="1"/>
+          </p:cNvSpPr>
+          <p:nvPr>
+            <p:ph type="body" idx="3" sz="quarter"/>
+          </p:nvPr>
+        </p:nvSpPr>
+        <p:spPr/>
+        <p:txBody>
+          <a:bodyPr/>
+          <a:lstStyle/>
+          <a:p>
+            <a:r>
+              <a:t>Construimos un grafo donde cada arista conecta a dos usuarios que postearon en el mismo hilo — una señal simple, pero que revela estructura social real. Con una muestra de hasta 5000 threads en OGUsers ya aparece un componente gigante con brokers claramente identificables por su centralidad de intermediación. Esos brokers son justamente los nodos que conectan subcomunidades distintas, y por eso son los candidatos prioritarios cuando después busquemos pivoting cross-foro. La visualización con Plotly, limitada a los 150 nodos de mayor grado, ayuda a comunicar esto sin saturar la vista.</a:t>
+            </a:r>
+          </a:p>
+        </p:txBody>
+      </p:sp>
+      <p:sp>
+        <p:nvSpPr>
+          <p:cNvPr id="4" name="Slide Number Placeholder 3"/>
+          <p:cNvSpPr>
+            <a:spLocks noGrp="1"/>
+          </p:cNvSpPr>
+          <p:nvPr>
+            <p:ph type="sldNum" idx="5" sz="quarter"/>
+          </p:nvPr>
+        </p:nvSpPr>
+        <p:spPr/>
+      </p:sp>
+    </p:spTree>
+  </p:cSld>
+  <p:clrMapOvr>
+    <a:masterClrMapping/>
+  </p:clrMapOvr>
+</p:notes>
+</file>
+
+<file path=ppt/notesSlides/notesSlide12.xml><?xml version="1.0" encoding="utf-8"?>
+<p:notes xmlns:a="http://schemas.openxmlformats.org/drawingml/2006/main" xmlns:p="http://schemas.openxmlformats.org/presentationml/2006/main" xmlns:r="http://schemas.openxmlformats.org/officeDocument/2006/relationships">
+  <p:cSld>
+    <p:spTree>
+      <p:nvGrpSpPr>
+        <p:cNvPr id="1" name=""/>
+        <p:cNvGrpSpPr/>
+        <p:nvPr/>
+      </p:nvGrpSpPr>
+      <p:grpSpPr>
+        <a:xfrm>
+          <a:off x="0" y="0"/>
+          <a:ext cx="0" cy="0"/>
+          <a:chOff x="0" y="0"/>
+          <a:chExt cx="0" cy="0"/>
+        </a:xfrm>
+      </p:grpSpPr>
+      <p:sp>
+        <p:nvSpPr>
+          <p:cNvPr id="2" name="Slide Image Placeholder 1"/>
+          <p:cNvSpPr>
+            <a:spLocks noGrp="1"/>
+          </p:cNvSpPr>
+          <p:nvPr>
+            <p:ph type="sldImg" idx="2"/>
+          </p:nvPr>
+        </p:nvSpPr>
+        <p:spPr/>
+      </p:sp>
+      <p:sp>
+        <p:nvSpPr>
+          <p:cNvPr id="3" name="Notes Placeholder 2"/>
+          <p:cNvSpPr>
+            <a:spLocks noGrp="1"/>
+          </p:cNvSpPr>
+          <p:nvPr>
+            <p:ph type="body" idx="3" sz="quarter"/>
+          </p:nvPr>
+        </p:nvSpPr>
+        <p:spPr/>
+        <p:txBody>
+          <a:bodyPr/>
+          <a:lstStyle/>
+          <a:p>
+            <a:r>
+              <a:t>Aquí tenemos dos niveles de señal con un trade-off clásico entre precisión y cobertura. El matching exacto, con normalización simple de minúsculas, es conservador pero prácticamente no genera falsos positivos: si el mismo handle aparece en dos foros, es una señal fuerte. El fuzzy matching con rapidfuzz al 85% de similitud captura variaciones deliberadas como user_v2 o user123, pero introduce más ruido, así que lo enriquecemos con similitud coseno de embeddings para compensar. La pregunta que quiero dejarles: ¿qué harían ustedes si un handle cambia completamente entre foros? Ahí es donde el matching exacto se queda corto y necesitamos otras señales.</a:t>
+            </a:r>
+          </a:p>
+        </p:txBody>
+      </p:sp>
+      <p:sp>
+        <p:nvSpPr>
+          <p:cNvPr id="4" name="Slide Number Placeholder 3"/>
+          <p:cNvSpPr>
+            <a:spLocks noGrp="1"/>
+          </p:cNvSpPr>
+          <p:nvPr>
+            <p:ph type="sldNum" idx="5" sz="quarter"/>
+          </p:nvPr>
+        </p:nvSpPr>
+        <p:spPr/>
+      </p:sp>
+    </p:spTree>
+  </p:cSld>
+  <p:clrMapOvr>
+    <a:masterClrMapping/>
+  </p:clrMapOvr>
+</p:notes>
+</file>
+
+<file path=ppt/notesSlides/notesSlide13.xml><?xml version="1.0" encoding="utf-8"?>
+<p:notes xmlns:a="http://schemas.openxmlformats.org/drawingml/2006/main" xmlns:p="http://schemas.openxmlformats.org/presentationml/2006/main" xmlns:r="http://schemas.openxmlformats.org/officeDocument/2006/relationships">
+  <p:cSld>
+    <p:spTree>
+      <p:nvGrpSpPr>
+        <p:cNvPr id="1" name=""/>
+        <p:cNvGrpSpPr/>
+        <p:nvPr/>
+      </p:nvGrpSpPr>
+      <p:grpSpPr>
+        <a:xfrm>
+          <a:off x="0" y="0"/>
+          <a:ext cx="0" cy="0"/>
+          <a:chOff x="0" y="0"/>
+          <a:chExt cx="0" cy="0"/>
+        </a:xfrm>
+      </p:grpSpPr>
+      <p:sp>
+        <p:nvSpPr>
+          <p:cNvPr id="2" name="Slide Image Placeholder 1"/>
+          <p:cNvSpPr>
+            <a:spLocks noGrp="1"/>
+          </p:cNvSpPr>
+          <p:nvPr>
+            <p:ph type="sldImg" idx="2"/>
+          </p:nvPr>
+        </p:nvSpPr>
+        <p:spPr/>
+      </p:sp>
+      <p:sp>
+        <p:nvSpPr>
+          <p:cNvPr id="3" name="Notes Placeholder 2"/>
+          <p:cNvSpPr>
+            <a:spLocks noGrp="1"/>
+          </p:cNvSpPr>
+          <p:nvPr>
+            <p:ph type="body" idx="3" sz="quarter"/>
+          </p:nvPr>
+        </p:nvSpPr>
+        <p:spPr/>
+        <p:txBody>
+          <a:bodyPr/>
+          <a:lstStyle/>
+          <a:p>
+            <a:r>
+              <a:t>Este es un bug clásico de series temporales: si ven una gráfica de actividad que arranca en 1970, no es que el foro exista desde entonces, es un timestamp nulo. Cuando dateline vale 0, pandas lo interpreta literalmente como epoch Unix, es decir, 1 de enero de 1970. El fix es simple pero hay que acordarse de aplicarlo: filtrar en el notebook 01 cualquier post con año menor a 2000 antes de hacer análisis temporal. Afecta solo a un pequeño porcentaje de registros, pero si no lo filtran, distorsiona completamente cualquier gráfica de series de tiempo. La regla general que aplica a cualquier dataset: validen siempre el rango de fechas antes de confiar en un análisis temporal.</a:t>
+            </a:r>
+          </a:p>
+        </p:txBody>
+      </p:sp>
+      <p:sp>
+        <p:nvSpPr>
+          <p:cNvPr id="4" name="Slide Number Placeholder 3"/>
+          <p:cNvSpPr>
+            <a:spLocks noGrp="1"/>
+          </p:cNvSpPr>
+          <p:nvPr>
+            <p:ph type="sldNum" idx="5" sz="quarter"/>
+          </p:nvPr>
+        </p:nvSpPr>
+        <p:spPr/>
+      </p:sp>
+    </p:spTree>
+  </p:cSld>
+  <p:clrMapOvr>
+    <a:masterClrMapping/>
+  </p:clrMapOvr>
+</p:notes>
+</file>
+
+<file path=ppt/notesSlides/notesSlide14.xml><?xml version="1.0" encoding="utf-8"?>
+<p:notes xmlns:a="http://schemas.openxmlformats.org/drawingml/2006/main" xmlns:p="http://schemas.openxmlformats.org/presentationml/2006/main" xmlns:r="http://schemas.openxmlformats.org/officeDocument/2006/relationships">
+  <p:cSld>
+    <p:spTree>
+      <p:nvGrpSpPr>
+        <p:cNvPr id="1" name=""/>
+        <p:cNvGrpSpPr/>
+        <p:nvPr/>
+      </p:nvGrpSpPr>
+      <p:grpSpPr>
+        <a:xfrm>
+          <a:off x="0" y="0"/>
+          <a:ext cx="0" cy="0"/>
+          <a:chOff x="0" y="0"/>
+          <a:chExt cx="0" cy="0"/>
+        </a:xfrm>
+      </p:grpSpPr>
+      <p:sp>
+        <p:nvSpPr>
+          <p:cNvPr id="2" name="Slide Image Placeholder 1"/>
+          <p:cNvSpPr>
+            <a:spLocks noGrp="1"/>
+          </p:cNvSpPr>
+          <p:nvPr>
+            <p:ph type="sldImg" idx="2"/>
+          </p:nvPr>
+        </p:nvSpPr>
+        <p:spPr/>
+      </p:sp>
+      <p:sp>
+        <p:nvSpPr>
+          <p:cNvPr id="3" name="Notes Placeholder 2"/>
+          <p:cNvSpPr>
+            <a:spLocks noGrp="1"/>
+          </p:cNvSpPr>
+          <p:nvPr>
+            <p:ph type="body" idx="3" sz="quarter"/>
+          </p:nvPr>
+        </p:nvSpPr>
+        <p:spPr/>
+        <p:txBody>
+          <a:bodyPr/>
+          <a:lstStyle/>
+          <a:p>
+            <a:r>
+              <a:t>Con la red y el pivoting de handles como base, ahora sumamos señal semántica: NER especializado, embeddings cross-foro y un score de atribución combinado.</a:t>
+            </a:r>
+          </a:p>
+        </p:txBody>
+      </p:sp>
+      <p:sp>
+        <p:nvSpPr>
+          <p:cNvPr id="4" name="Slide Number Placeholder 3"/>
+          <p:cNvSpPr>
+            <a:spLocks noGrp="1"/>
+          </p:cNvSpPr>
+          <p:nvPr>
+            <p:ph type="sldNum" idx="5" sz="quarter"/>
+          </p:nvPr>
+        </p:nvSpPr>
+        <p:spPr/>
+      </p:sp>
+    </p:spTree>
+  </p:cSld>
+  <p:clrMapOvr>
+    <a:masterClrMapping/>
+  </p:clrMapOvr>
+</p:notes>
+</file>
+
+<file path=ppt/notesSlides/notesSlide15.xml><?xml version="1.0" encoding="utf-8"?>
+<p:notes xmlns:a="http://schemas.openxmlformats.org/drawingml/2006/main" xmlns:p="http://schemas.openxmlformats.org/presentationml/2006/main" xmlns:r="http://schemas.openxmlformats.org/officeDocument/2006/relationships">
+  <p:cSld>
+    <p:spTree>
+      <p:nvGrpSpPr>
+        <p:cNvPr id="1" name=""/>
+        <p:cNvGrpSpPr/>
+        <p:nvPr/>
+      </p:nvGrpSpPr>
+      <p:grpSpPr>
+        <a:xfrm>
+          <a:off x="0" y="0"/>
+          <a:ext cx="0" cy="0"/>
+          <a:chOff x="0" y="0"/>
+          <a:chExt cx="0" cy="0"/>
+        </a:xfrm>
+      </p:grpSpPr>
+      <p:sp>
+        <p:nvSpPr>
+          <p:cNvPr id="2" name="Slide Image Placeholder 1"/>
+          <p:cNvSpPr>
+            <a:spLocks noGrp="1"/>
+          </p:cNvSpPr>
+          <p:nvPr>
+            <p:ph type="sldImg" idx="2"/>
+          </p:nvPr>
+        </p:nvSpPr>
+        <p:spPr/>
+      </p:sp>
+      <p:sp>
+        <p:nvSpPr>
+          <p:cNvPr id="3" name="Notes Placeholder 2"/>
+          <p:cNvSpPr>
+            <a:spLocks noGrp="1"/>
+          </p:cNvSpPr>
+          <p:nvPr>
+            <p:ph type="body" idx="3" sz="quarter"/>
+          </p:nvPr>
+        </p:nvSpPr>
+        <p:spPr/>
+        <p:txBody>
+          <a:bodyPr/>
+          <a:lstStyle/>
+          <a:p>
+            <a:r>
+              <a:t>Los tipos de entidad estándar como PERSON u ORG no sirven para este dominio, así que definimos tipos propios: ALIAS, TOOL, MALWARE, CVE, MARKETPLACE. La estrategia de muestreo es deliberada: top-50 usuarios por los top-50 posts más largos, solo en los foros de inglés, porque los posts largos son los que más señal aportan. El checkpoint automático cada 10 usuarios no es un detalle menor: si el LLM falla a mitad de proceso, no perdemos todo el trabajo previo. Y Exploit.in queda fuera de este pipeline en concreto porque qwen2.5:14b rinde peor en ruso — ahí usamos DeepPavlov o spaCy ru_core_news_lg.</a:t>
+            </a:r>
+          </a:p>
+        </p:txBody>
+      </p:sp>
+      <p:sp>
+        <p:nvSpPr>
+          <p:cNvPr id="4" name="Slide Number Placeholder 3"/>
+          <p:cNvSpPr>
+            <a:spLocks noGrp="1"/>
+          </p:cNvSpPr>
+          <p:nvPr>
+            <p:ph type="sldNum" idx="5" sz="quarter"/>
+          </p:nvPr>
+        </p:nvSpPr>
+        <p:spPr/>
+      </p:sp>
+    </p:spTree>
+  </p:cSld>
+  <p:clrMapOvr>
+    <a:masterClrMapping/>
+  </p:clrMapOvr>
+</p:notes>
+</file>
+
+<file path=ppt/notesSlides/notesSlide16.xml><?xml version="1.0" encoding="utf-8"?>
+<p:notes xmlns:a="http://schemas.openxmlformats.org/drawingml/2006/main" xmlns:p="http://schemas.openxmlformats.org/presentationml/2006/main" xmlns:r="http://schemas.openxmlformats.org/officeDocument/2006/relationships">
+  <p:cSld>
+    <p:spTree>
+      <p:nvGrpSpPr>
+        <p:cNvPr id="1" name=""/>
+        <p:cNvGrpSpPr/>
+        <p:nvPr/>
+      </p:nvGrpSpPr>
+      <p:grpSpPr>
+        <a:xfrm>
+          <a:off x="0" y="0"/>
+          <a:ext cx="0" cy="0"/>
+          <a:chOff x="0" y="0"/>
+          <a:chExt cx="0" cy="0"/>
+        </a:xfrm>
+      </p:grpSpPr>
+      <p:sp>
+        <p:nvSpPr>
+          <p:cNvPr id="2" name="Slide Image Placeholder 1"/>
+          <p:cNvSpPr>
+            <a:spLocks noGrp="1"/>
+          </p:cNvSpPr>
+          <p:nvPr>
+            <p:ph type="sldImg" idx="2"/>
+          </p:nvPr>
+        </p:nvSpPr>
+        <p:spPr/>
+      </p:sp>
+      <p:sp>
+        <p:nvSpPr>
+          <p:cNvPr id="3" name="Notes Placeholder 2"/>
+          <p:cNvSpPr>
+            <a:spLocks noGrp="1"/>
+          </p:cNvSpPr>
+          <p:nvPr>
+            <p:ph type="body" idx="3" sz="quarter"/>
+          </p:nvPr>
+        </p:nvSpPr>
+        <p:spPr/>
+        <p:txBody>
+          <a:bodyPr/>
+          <a:lstStyle/>
+          <a:p>
+            <a:r>
+              <a:t>El objetivo es representar a cada usuario con un solo vector que se pueda comparar entre foros, y para eso comparamos dos estrategias. La estrategia A concatena todos los posts de un usuario hasta 50 mil caracteres y genera un único vector; la estrategia C toma los 50 posts más largos, genera un embedding por post y promedia. La correlación de Spearman entre ambas estrategias nos dice si preservan la misma estructura relativa entre usuarios, y con unos 21 mil usuarios en A frente a 11 mil en C, esa comparación valida si el muestreo es representativo. Todo esto corre sobre qwen3-embedding de 4096 dimensiones, que al ser multilingüe nos permite incluir a Exploit.in en ruso sin pipeline separado.</a:t>
+            </a:r>
+          </a:p>
+        </p:txBody>
+      </p:sp>
+      <p:sp>
+        <p:nvSpPr>
+          <p:cNvPr id="4" name="Slide Number Placeholder 3"/>
+          <p:cNvSpPr>
+            <a:spLocks noGrp="1"/>
+          </p:cNvSpPr>
+          <p:nvPr>
+            <p:ph type="sldNum" idx="5" sz="quarter"/>
+          </p:nvPr>
+        </p:nvSpPr>
+        <p:spPr/>
+      </p:sp>
+    </p:spTree>
+  </p:cSld>
+  <p:clrMapOvr>
+    <a:masterClrMapping/>
+  </p:clrMapOvr>
+</p:notes>
+</file>
+
+<file path=ppt/notesSlides/notesSlide17.xml><?xml version="1.0" encoding="utf-8"?>
+<p:notes xmlns:a="http://schemas.openxmlformats.org/drawingml/2006/main" xmlns:p="http://schemas.openxmlformats.org/presentationml/2006/main" xmlns:r="http://schemas.openxmlformats.org/officeDocument/2006/relationships">
+  <p:cSld>
+    <p:spTree>
+      <p:nvGrpSpPr>
+        <p:cNvPr id="1" name=""/>
+        <p:cNvGrpSpPr/>
+        <p:nvPr/>
+      </p:nvGrpSpPr>
+      <p:grpSpPr>
+        <a:xfrm>
+          <a:off x="0" y="0"/>
+          <a:ext cx="0" cy="0"/>
+          <a:chOff x="0" y="0"/>
+          <a:chExt cx="0" cy="0"/>
+        </a:xfrm>
+      </p:grpSpPr>
+      <p:sp>
+        <p:nvSpPr>
+          <p:cNvPr id="2" name="Slide Image Placeholder 1"/>
+          <p:cNvSpPr>
+            <a:spLocks noGrp="1"/>
+          </p:cNvSpPr>
+          <p:nvPr>
+            <p:ph type="sldImg" idx="2"/>
+          </p:nvPr>
+        </p:nvSpPr>
+        <p:spPr/>
+      </p:sp>
+      <p:sp>
+        <p:nvSpPr>
+          <p:cNvPr id="3" name="Notes Placeholder 2"/>
+          <p:cNvSpPr>
+            <a:spLocks noGrp="1"/>
+          </p:cNvSpPr>
+          <p:nvPr>
+            <p:ph type="body" idx="3" sz="quarter"/>
+          </p:nvPr>
+        </p:nvSpPr>
+        <p:spPr/>
+        <p:txBody>
+          <a:bodyPr/>
+          <a:lstStyle/>
+          <a:p>
+            <a:r>
+              <a:t>Ninguna señal por sí sola alcanza para afirmar que dos usuarios son la misma persona, y esto es importante para no sobreinterpretar resultados. El handle exacto o fuzzy es fuerte pero trivial de eludir con solo cambiar de nombre; la similitud coseno de embeddings captura el estilo aunque el handle cambie; y Burrows' Delta cross-foro compara la distribución de palabras función, que es mucho más difícil de falsificar deliberadamente. Combinamos las tres en un score único, y en la práctica un score superior a 0.7 con al menos dos señales de acuerdo es lo que consideramos un candidato de alta prioridad para revisión manual. Este umbral no es mágico, es un punto de partida razonable que ustedes deberían ajustar según su tolerancia a falsos positivos.</a:t>
+            </a:r>
+          </a:p>
+        </p:txBody>
+      </p:sp>
+      <p:sp>
+        <p:nvSpPr>
+          <p:cNvPr id="4" name="Slide Number Placeholder 3"/>
+          <p:cNvSpPr>
+            <a:spLocks noGrp="1"/>
+          </p:cNvSpPr>
+          <p:nvPr>
+            <p:ph type="sldNum" idx="5" sz="quarter"/>
+          </p:nvPr>
+        </p:nvSpPr>
+        <p:spPr/>
+      </p:sp>
+    </p:spTree>
+  </p:cSld>
+  <p:clrMapOvr>
+    <a:masterClrMapping/>
+  </p:clrMapOvr>
+</p:notes>
+</file>
+
+<file path=ppt/notesSlides/notesSlide18.xml><?xml version="1.0" encoding="utf-8"?>
+<p:notes xmlns:a="http://schemas.openxmlformats.org/drawingml/2006/main" xmlns:p="http://schemas.openxmlformats.org/presentationml/2006/main" xmlns:r="http://schemas.openxmlformats.org/officeDocument/2006/relationships">
+  <p:cSld>
+    <p:spTree>
+      <p:nvGrpSpPr>
+        <p:cNvPr id="1" name=""/>
+        <p:cNvGrpSpPr/>
+        <p:nvPr/>
+      </p:nvGrpSpPr>
+      <p:grpSpPr>
+        <a:xfrm>
+          <a:off x="0" y="0"/>
+          <a:ext cx="0" cy="0"/>
+          <a:chOff x="0" y="0"/>
+          <a:chExt cx="0" cy="0"/>
+        </a:xfrm>
+      </p:grpSpPr>
+      <p:sp>
+        <p:nvSpPr>
+          <p:cNvPr id="2" name="Slide Image Placeholder 1"/>
+          <p:cNvSpPr>
+            <a:spLocks noGrp="1"/>
+          </p:cNvSpPr>
+          <p:nvPr>
+            <p:ph type="sldImg" idx="2"/>
+          </p:nvPr>
+        </p:nvSpPr>
+        <p:spPr/>
+      </p:sp>
+      <p:sp>
+        <p:nvSpPr>
+          <p:cNvPr id="3" name="Notes Placeholder 2"/>
+          <p:cNvSpPr>
+            <a:spLocks noGrp="1"/>
+          </p:cNvSpPr>
+          <p:nvPr>
+            <p:ph type="body" idx="3" sz="quarter"/>
+          </p:nvPr>
+        </p:nvSpPr>
+        <p:spPr/>
+        <p:txBody>
+          <a:bodyPr/>
+          <a:lstStyle/>
+          <a:p>
+            <a:r>
+              <a:t>Vamos al notebook 03 para ver esto funcionando. En la sección 3 verán primero los handles exactos compartidos entre foros, y después el fuzzy matching mostrando handles similares pero no idénticos — ahí es donde se nota la diferencia de precisión entre ambos métodos. Y en la sección 5 llegamos al score combinado, con el ranking final de candidatos a identidad compartida.</a:t>
+            </a:r>
+          </a:p>
+        </p:txBody>
+      </p:sp>
+      <p:sp>
+        <p:nvSpPr>
+          <p:cNvPr id="4" name="Slide Number Placeholder 3"/>
+          <p:cNvSpPr>
+            <a:spLocks noGrp="1"/>
+          </p:cNvSpPr>
+          <p:nvPr>
+            <p:ph type="sldNum" idx="5" sz="quarter"/>
+          </p:nvPr>
+        </p:nvSpPr>
+        <p:spPr/>
+      </p:sp>
+    </p:spTree>
+  </p:cSld>
+  <p:clrMapOvr>
+    <a:masterClrMapping/>
+  </p:clrMapOvr>
+</p:notes>
+</file>
+
+<file path=ppt/notesSlides/notesSlide19.xml><?xml version="1.0" encoding="utf-8"?>
+<p:notes xmlns:a="http://schemas.openxmlformats.org/drawingml/2006/main" xmlns:p="http://schemas.openxmlformats.org/presentationml/2006/main" xmlns:r="http://schemas.openxmlformats.org/officeDocument/2006/relationships">
+  <p:cSld>
+    <p:spTree>
+      <p:nvGrpSpPr>
+        <p:cNvPr id="1" name=""/>
+        <p:cNvGrpSpPr/>
+        <p:nvPr/>
+      </p:nvGrpSpPr>
+      <p:grpSpPr>
+        <a:xfrm>
+          <a:off x="0" y="0"/>
+          <a:ext cx="0" cy="0"/>
+          <a:chOff x="0" y="0"/>
+          <a:chExt cx="0" cy="0"/>
+        </a:xfrm>
+      </p:grpSpPr>
+      <p:sp>
+        <p:nvSpPr>
+          <p:cNvPr id="2" name="Slide Image Placeholder 1"/>
+          <p:cNvSpPr>
+            <a:spLocks noGrp="1"/>
+          </p:cNvSpPr>
+          <p:nvPr>
+            <p:ph type="sldImg" idx="2"/>
+          </p:nvPr>
+        </p:nvSpPr>
+        <p:spPr/>
+      </p:sp>
+      <p:sp>
+        <p:nvSpPr>
+          <p:cNvPr id="3" name="Notes Placeholder 2"/>
+          <p:cNvSpPr>
+            <a:spLocks noGrp="1"/>
+          </p:cNvSpPr>
+          <p:nvPr>
+            <p:ph type="body" idx="3" sz="quarter"/>
+          </p:nvPr>
+        </p:nvSpPr>
+        <p:spPr/>
+        <p:txBody>
+          <a:bodyPr/>
+          <a:lstStyle/>
+          <a:p>
+            <a:r>
+              <a:t>Cerramos con las conclusiones del caso: qué aprendimos técnicamente y qué aprendizajes metodológicos se pueden llevar a cualquier otro caso de leaks underground.</a:t>
+            </a:r>
+          </a:p>
+        </p:txBody>
+      </p:sp>
+      <p:sp>
+        <p:nvSpPr>
+          <p:cNvPr id="4" name="Slide Number Placeholder 3"/>
+          <p:cNvSpPr>
+            <a:spLocks noGrp="1"/>
+          </p:cNvSpPr>
+          <p:nvPr>
+            <p:ph type="sldNum" idx="5" sz="quarter"/>
+          </p:nvPr>
+        </p:nvSpPr>
+        <p:spPr/>
+      </p:sp>
+    </p:spTree>
+  </p:cSld>
+  <p:clrMapOvr>
+    <a:masterClrMapping/>
+  </p:clrMapOvr>
+</p:notes>
+</file>
+
+<file path=ppt/notesSlides/notesSlide2.xml><?xml version="1.0" encoding="utf-8"?>
+<p:notes xmlns:a="http://schemas.openxmlformats.org/drawingml/2006/main" xmlns:p="http://schemas.openxmlformats.org/presentationml/2006/main" xmlns:r="http://schemas.openxmlformats.org/officeDocument/2006/relationships">
+  <p:cSld>
+    <p:spTree>
+      <p:nvGrpSpPr>
+        <p:cNvPr id="1" name=""/>
+        <p:cNvGrpSpPr/>
+        <p:nvPr/>
+      </p:nvGrpSpPr>
+      <p:grpSpPr>
+        <a:xfrm>
+          <a:off x="0" y="0"/>
+          <a:ext cx="0" cy="0"/>
+          <a:chOff x="0" y="0"/>
+          <a:chExt cx="0" cy="0"/>
+        </a:xfrm>
+      </p:grpSpPr>
+      <p:sp>
+        <p:nvSpPr>
+          <p:cNvPr id="2" name="Slide Image Placeholder 1"/>
+          <p:cNvSpPr>
+            <a:spLocks noGrp="1"/>
+          </p:cNvSpPr>
+          <p:nvPr>
+            <p:ph type="sldImg" idx="2"/>
+          </p:nvPr>
+        </p:nvSpPr>
+        <p:spPr/>
+      </p:sp>
+      <p:sp>
+        <p:nvSpPr>
+          <p:cNvPr id="3" name="Notes Placeholder 2"/>
+          <p:cNvSpPr>
+            <a:spLocks noGrp="1"/>
+          </p:cNvSpPr>
+          <p:nvPr>
+            <p:ph type="body" idx="3" sz="quarter"/>
+          </p:nvPr>
+        </p:nvSpPr>
+        <p:spPr/>
+        <p:txBody>
+          <a:bodyPr/>
+          <a:lstStyle/>
+          <a:p>
+            <a:r>
+              <a:t>Antes de analizar nada, hay que saber qué datos tenemos realmente y en qué estado llegan. Vamos a repasar la tier list de los siete foros evaluados y un bug de parser que casi nos cuesta un dataset completo.</a:t>
+            </a:r>
+          </a:p>
+        </p:txBody>
+      </p:sp>
+      <p:sp>
+        <p:nvSpPr>
+          <p:cNvPr id="4" name="Slide Number Placeholder 3"/>
+          <p:cNvSpPr>
+            <a:spLocks noGrp="1"/>
+          </p:cNvSpPr>
+          <p:nvPr>
+            <p:ph type="sldNum" idx="5" sz="quarter"/>
+          </p:nvPr>
+        </p:nvSpPr>
+        <p:spPr/>
+      </p:sp>
+    </p:spTree>
+  </p:cSld>
+  <p:clrMapOvr>
+    <a:masterClrMapping/>
+  </p:clrMapOvr>
+</p:notes>
+</file>
+
+<file path=ppt/notesSlides/notesSlide20.xml><?xml version="1.0" encoding="utf-8"?>
+<p:notes xmlns:a="http://schemas.openxmlformats.org/drawingml/2006/main" xmlns:p="http://schemas.openxmlformats.org/presentationml/2006/main" xmlns:r="http://schemas.openxmlformats.org/officeDocument/2006/relationships">
+  <p:cSld>
+    <p:spTree>
+      <p:nvGrpSpPr>
+        <p:cNvPr id="1" name=""/>
+        <p:cNvGrpSpPr/>
+        <p:nvPr/>
+      </p:nvGrpSpPr>
+      <p:grpSpPr>
+        <a:xfrm>
+          <a:off x="0" y="0"/>
+          <a:ext cx="0" cy="0"/>
+          <a:chOff x="0" y="0"/>
+          <a:chExt cx="0" cy="0"/>
+        </a:xfrm>
+      </p:grpSpPr>
+      <p:sp>
+        <p:nvSpPr>
+          <p:cNvPr id="2" name="Slide Image Placeholder 1"/>
+          <p:cNvSpPr>
+            <a:spLocks noGrp="1"/>
+          </p:cNvSpPr>
+          <p:nvPr>
+            <p:ph type="sldImg" idx="2"/>
+          </p:nvPr>
+        </p:nvSpPr>
+        <p:spPr/>
+      </p:sp>
+      <p:sp>
+        <p:nvSpPr>
+          <p:cNvPr id="3" name="Notes Placeholder 2"/>
+          <p:cNvSpPr>
+            <a:spLocks noGrp="1"/>
+          </p:cNvSpPr>
+          <p:nvPr>
+            <p:ph type="body" idx="3" sz="quarter"/>
+          </p:nvPr>
+        </p:nvSpPr>
+        <p:spPr/>
+        <p:txBody>
+          <a:bodyPr/>
+          <a:lstStyle/>
+          <a:p>
+            <a:r>
+              <a:t>A la izquierda tienen los hallazgos técnicos concretos de este caso: el bug de IPS 3.x que nos costó 3.2 millones de posts, la necesidad de un pipeline separado para el ruso, el problema de epoch-0 en los timestamps, y la validación de que la combinación de señales cross-foro funciona mejor que cualquiera por separado. A la derecha están los aprendizajes que sí se generalizan a cualquier proyecto de este tipo: detectar idioma antes de aplicar cualquier modelo NLP, testear parsers contra dumps reales porque los schemas reales nunca son tan limpios como la documentación, y validar siempre el rango de fechas. Si tuviera que quedarme con una sola idea de toda la sesión, sería esta: la convergencia de señales gana siempre a la métrica aislada, sin excepción.</a:t>
+            </a:r>
+          </a:p>
+        </p:txBody>
+      </p:sp>
+      <p:sp>
+        <p:nvSpPr>
+          <p:cNvPr id="4" name="Slide Number Placeholder 3"/>
+          <p:cNvSpPr>
+            <a:spLocks noGrp="1"/>
+          </p:cNvSpPr>
+          <p:nvPr>
+            <p:ph type="sldNum" idx="5" sz="quarter"/>
+          </p:nvPr>
+        </p:nvSpPr>
+        <p:spPr/>
+      </p:sp>
+    </p:spTree>
+  </p:cSld>
+  <p:clrMapOvr>
+    <a:masterClrMapping/>
+  </p:clrMapOvr>
+</p:notes>
+</file>
+
+<file path=ppt/notesSlides/notesSlide21.xml><?xml version="1.0" encoding="utf-8"?>
+<p:notes xmlns:a="http://schemas.openxmlformats.org/drawingml/2006/main" xmlns:p="http://schemas.openxmlformats.org/presentationml/2006/main" xmlns:r="http://schemas.openxmlformats.org/officeDocument/2006/relationships">
+  <p:cSld>
+    <p:spTree>
+      <p:nvGrpSpPr>
+        <p:cNvPr id="1" name=""/>
+        <p:cNvGrpSpPr/>
+        <p:nvPr/>
+      </p:nvGrpSpPr>
+      <p:grpSpPr>
+        <a:xfrm>
+          <a:off x="0" y="0"/>
+          <a:ext cx="0" cy="0"/>
+          <a:chOff x="0" y="0"/>
+          <a:chExt cx="0" cy="0"/>
+        </a:xfrm>
+      </p:grpSpPr>
+      <p:sp>
+        <p:nvSpPr>
+          <p:cNvPr id="2" name="Slide Image Placeholder 1"/>
+          <p:cNvSpPr>
+            <a:spLocks noGrp="1"/>
+          </p:cNvSpPr>
+          <p:nvPr>
+            <p:ph type="sldImg" idx="2"/>
+          </p:nvPr>
+        </p:nvSpPr>
+        <p:spPr/>
+      </p:sp>
+      <p:sp>
+        <p:nvSpPr>
+          <p:cNvPr id="3" name="Notes Placeholder 2"/>
+          <p:cNvSpPr>
+            <a:spLocks noGrp="1"/>
+          </p:cNvSpPr>
+          <p:nvPr>
+            <p:ph type="body" idx="3" sz="quarter"/>
+          </p:nvPr>
+        </p:nvSpPr>
+        <p:spPr/>
+        <p:txBody>
+          <a:bodyPr/>
+          <a:lstStyle/>
+          <a:p>
+            <a:r>
+              <a:t>Quiero cerrar con la idea central: los foros underground no son compartimentos estancos, la gente se mueve entre plataformas, y el pivoting de handles es exactamente la técnica que usa threat intelligence en el mundo real para seguirles el rastro. También quiero que recuerden el costo de un bug de ingeniería: un solo error de detección de parser dejó fuera millones de posts sin que nadie se diera cuenta hasta que fuimos a buscarlos explícitamente. Y aunque trabajar en el idioma original —como el ruso de Exploit.in— complica el pipeline, siempre da mejores resultados de estilometría que forzar todo a inglés. Con cinco foros y ocho años de diferencia entre el más antiguo y el más reciente, este caso es en sí mismo un retrato de cómo evolucionó el ecosistema hacking underground.</a:t>
+            </a:r>
+          </a:p>
+        </p:txBody>
+      </p:sp>
+      <p:sp>
+        <p:nvSpPr>
+          <p:cNvPr id="4" name="Slide Number Placeholder 3"/>
+          <p:cNvSpPr>
+            <a:spLocks noGrp="1"/>
+          </p:cNvSpPr>
+          <p:nvPr>
+            <p:ph type="sldNum" idx="5" sz="quarter"/>
+          </p:nvPr>
+        </p:nvSpPr>
+        <p:spPr/>
+      </p:sp>
+    </p:spTree>
+  </p:cSld>
+  <p:clrMapOvr>
+    <a:masterClrMapping/>
+  </p:clrMapOvr>
+</p:notes>
+</file>
+
+<file path=ppt/notesSlides/notesSlide3.xml><?xml version="1.0" encoding="utf-8"?>
+<p:notes xmlns:a="http://schemas.openxmlformats.org/drawingml/2006/main" xmlns:p="http://schemas.openxmlformats.org/presentationml/2006/main" xmlns:r="http://schemas.openxmlformats.org/officeDocument/2006/relationships">
+  <p:cSld>
+    <p:spTree>
+      <p:nvGrpSpPr>
+        <p:cNvPr id="1" name=""/>
+        <p:cNvGrpSpPr/>
+        <p:nvPr/>
+      </p:nvGrpSpPr>
+      <p:grpSpPr>
+        <a:xfrm>
+          <a:off x="0" y="0"/>
+          <a:ext cx="0" cy="0"/>
+          <a:chOff x="0" y="0"/>
+          <a:chExt cx="0" cy="0"/>
+        </a:xfrm>
+      </p:grpSpPr>
+      <p:sp>
+        <p:nvSpPr>
+          <p:cNvPr id="2" name="Slide Image Placeholder 1"/>
+          <p:cNvSpPr>
+            <a:spLocks noGrp="1"/>
+          </p:cNvSpPr>
+          <p:nvPr>
+            <p:ph type="sldImg" idx="2"/>
+          </p:nvPr>
+        </p:nvSpPr>
+        <p:spPr/>
+      </p:sp>
+      <p:sp>
+        <p:nvSpPr>
+          <p:cNvPr id="3" name="Notes Placeholder 2"/>
+          <p:cNvSpPr>
+            <a:spLocks noGrp="1"/>
+          </p:cNvSpPr>
+          <p:nvPr>
+            <p:ph type="body" idx="3" sz="quarter"/>
+          </p:nvPr>
+        </p:nvSpPr>
+        <p:spPr/>
+        <p:txBody>
+          <a:bodyPr/>
+          <a:lstStyle/>
+          <a:p>
+            <a:r>
+              <a:t>Esta tabla es el mapa de decisiones del resto de la sesión: no todos los foros van a recibir el mismo tratamiento analítico. Tier A significa dump SQL completo y utilizable para pivoting; tier A↓ significa que solo tenemos usuarios, sin contenido; tier — significa que lo descartamos directamente. Hackforums.net es un buen ejemplo de dato parcial: sirve para verificar handles pero no aporta nada al análisis de contenido. Void.to es el caso opuesto: un schema vacío que no aporta valor y que descartamos sin remordimientos. La lección aquí es priorizar esfuerzo de análisis donde el dato lo sostiene.</a:t>
+            </a:r>
+          </a:p>
+        </p:txBody>
+      </p:sp>
+      <p:sp>
+        <p:nvSpPr>
+          <p:cNvPr id="4" name="Slide Number Placeholder 3"/>
+          <p:cNvSpPr>
+            <a:spLocks noGrp="1"/>
+          </p:cNvSpPr>
+          <p:nvPr>
+            <p:ph type="sldNum" idx="5" sz="quarter"/>
+          </p:nvPr>
+        </p:nvSpPr>
+        <p:spPr/>
+      </p:sp>
+    </p:spTree>
+  </p:cSld>
+  <p:clrMapOvr>
+    <a:masterClrMapping/>
+  </p:clrMapOvr>
+</p:notes>
+</file>
+
+<file path=ppt/notesSlides/notesSlide4.xml><?xml version="1.0" encoding="utf-8"?>
+<p:notes xmlns:a="http://schemas.openxmlformats.org/drawingml/2006/main" xmlns:p="http://schemas.openxmlformats.org/presentationml/2006/main" xmlns:r="http://schemas.openxmlformats.org/officeDocument/2006/relationships">
+  <p:cSld>
+    <p:spTree>
+      <p:nvGrpSpPr>
+        <p:cNvPr id="1" name=""/>
+        <p:cNvGrpSpPr/>
+        <p:nvPr/>
+      </p:nvGrpSpPr>
+      <p:grpSpPr>
+        <a:xfrm>
+          <a:off x="0" y="0"/>
+          <a:ext cx="0" cy="0"/>
+          <a:chOff x="0" y="0"/>
+          <a:chExt cx="0" cy="0"/>
+        </a:xfrm>
+      </p:grpSpPr>
+      <p:sp>
+        <p:nvSpPr>
+          <p:cNvPr id="2" name="Slide Image Placeholder 1"/>
+          <p:cNvSpPr>
+            <a:spLocks noGrp="1"/>
+          </p:cNvSpPr>
+          <p:nvPr>
+            <p:ph type="sldImg" idx="2"/>
+          </p:nvPr>
+        </p:nvSpPr>
+        <p:spPr/>
+      </p:sp>
+      <p:sp>
+        <p:nvSpPr>
+          <p:cNvPr id="3" name="Notes Placeholder 2"/>
+          <p:cNvSpPr>
+            <a:spLocks noGrp="1"/>
+          </p:cNvSpPr>
+          <p:nvPr>
+            <p:ph type="body" idx="3" sz="quarter"/>
+          </p:nvPr>
+        </p:nvSpPr>
+        <p:spPr/>
+        <p:txBody>
+          <a:bodyPr/>
+          <a:lstStyle/>
+          <a:p>
+            <a:r>
+              <a:t>Este es el bug más caro de todo el proyecto: durante un buen tiempo, Nulled.io cargaba cero posts sin ningún error visible. El problema estaba en is_mybb(), que detectaba erróneamente el schema como MyBB solo porque existía una tabla llamada 'posts' — una coincidencia de nombre, no de estructura real. La solución fue reordenar la lógica: primero ejecutar la detección específica de IPS 3.x comprobando la columna member_id, y solo después caer al detector genérico de MyBB. La lección de fondo, y quiero que se la lleven: nunca confíen en un parser genérico sin testearlo contra dumps reales, porque las variantes de schema no avisan cuando fallan. Perdimos 3.2 millones de posts hasta encontrar esto.</a:t>
+            </a:r>
+          </a:p>
+        </p:txBody>
+      </p:sp>
+      <p:sp>
+        <p:nvSpPr>
+          <p:cNvPr id="4" name="Slide Number Placeholder 3"/>
+          <p:cNvSpPr>
+            <a:spLocks noGrp="1"/>
+          </p:cNvSpPr>
+          <p:nvPr>
+            <p:ph type="sldNum" idx="5" sz="quarter"/>
+          </p:nvPr>
+        </p:nvSpPr>
+        <p:spPr/>
+      </p:sp>
+    </p:spTree>
+  </p:cSld>
+  <p:clrMapOvr>
+    <a:masterClrMapping/>
+  </p:clrMapOvr>
+</p:notes>
+</file>
+
+<file path=ppt/notesSlides/notesSlide5.xml><?xml version="1.0" encoding="utf-8"?>
+<p:notes xmlns:a="http://schemas.openxmlformats.org/drawingml/2006/main" xmlns:p="http://schemas.openxmlformats.org/presentationml/2006/main" xmlns:r="http://schemas.openxmlformats.org/officeDocument/2006/relationships">
+  <p:cSld>
+    <p:spTree>
+      <p:nvGrpSpPr>
+        <p:cNvPr id="1" name=""/>
+        <p:cNvGrpSpPr/>
+        <p:nvPr/>
+      </p:nvGrpSpPr>
+      <p:grpSpPr>
+        <a:xfrm>
+          <a:off x="0" y="0"/>
+          <a:ext cx="0" cy="0"/>
+          <a:chOff x="0" y="0"/>
+          <a:chExt cx="0" cy="0"/>
+        </a:xfrm>
+      </p:grpSpPr>
+      <p:sp>
+        <p:nvSpPr>
+          <p:cNvPr id="2" name="Slide Image Placeholder 1"/>
+          <p:cNvSpPr>
+            <a:spLocks noGrp="1"/>
+          </p:cNvSpPr>
+          <p:nvPr>
+            <p:ph type="sldImg" idx="2"/>
+          </p:nvPr>
+        </p:nvSpPr>
+        <p:spPr/>
+      </p:sp>
+      <p:sp>
+        <p:nvSpPr>
+          <p:cNvPr id="3" name="Notes Placeholder 2"/>
+          <p:cNvSpPr>
+            <a:spLocks noGrp="1"/>
+          </p:cNvSpPr>
+          <p:nvPr>
+            <p:ph type="body" idx="3" sz="quarter"/>
+          </p:nvPr>
+        </p:nvSpPr>
+        <p:spPr/>
+        <p:txBody>
+          <a:bodyPr/>
+          <a:lstStyle/>
+          <a:p>
+            <a:r>
+              <a:t>Pasamos ahora a la exploración de datos, que es donde detectamos algo que condiciona todo el pipeline posterior: el idioma. Vamos a ver por qué cinco foros tan distintos en escala y época necesitan tratamientos diferenciados.</a:t>
+            </a:r>
+          </a:p>
+        </p:txBody>
+      </p:sp>
+      <p:sp>
+        <p:nvSpPr>
+          <p:cNvPr id="4" name="Slide Number Placeholder 3"/>
+          <p:cNvSpPr>
+            <a:spLocks noGrp="1"/>
+          </p:cNvSpPr>
+          <p:nvPr>
+            <p:ph type="sldNum" idx="5" sz="quarter"/>
+          </p:nvPr>
+        </p:nvSpPr>
+        <p:spPr/>
+      </p:sp>
+    </p:spTree>
+  </p:cSld>
+  <p:clrMapOvr>
+    <a:masterClrMapping/>
+  </p:clrMapOvr>
+</p:notes>
+</file>
+
+<file path=ppt/notesSlides/notesSlide6.xml><?xml version="1.0" encoding="utf-8"?>
+<p:notes xmlns:a="http://schemas.openxmlformats.org/drawingml/2006/main" xmlns:p="http://schemas.openxmlformats.org/presentationml/2006/main" xmlns:r="http://schemas.openxmlformats.org/officeDocument/2006/relationships">
+  <p:cSld>
+    <p:spTree>
+      <p:nvGrpSpPr>
+        <p:cNvPr id="1" name=""/>
+        <p:cNvGrpSpPr/>
+        <p:nvPr/>
+      </p:nvGrpSpPr>
+      <p:grpSpPr>
+        <a:xfrm>
+          <a:off x="0" y="0"/>
+          <a:ext cx="0" cy="0"/>
+          <a:chOff x="0" y="0"/>
+          <a:chExt cx="0" cy="0"/>
+        </a:xfrm>
+      </p:grpSpPr>
+      <p:sp>
+        <p:nvSpPr>
+          <p:cNvPr id="2" name="Slide Image Placeholder 1"/>
+          <p:cNvSpPr>
+            <a:spLocks noGrp="1"/>
+          </p:cNvSpPr>
+          <p:nvPr>
+            <p:ph type="sldImg" idx="2"/>
+          </p:nvPr>
+        </p:nvSpPr>
+        <p:spPr/>
+      </p:sp>
+      <p:sp>
+        <p:nvSpPr>
+          <p:cNvPr id="3" name="Notes Placeholder 2"/>
+          <p:cNvSpPr>
+            <a:spLocks noGrp="1"/>
+          </p:cNvSpPr>
+          <p:nvPr>
+            <p:ph type="body" idx="3" sz="quarter"/>
+          </p:nvPr>
+        </p:nvSpPr>
+        <p:spPr/>
+        <p:txBody>
+          <a:bodyPr/>
+          <a:lstStyle/>
+          <a:p>
+            <a:r>
+              <a:t>Miren la diferencia de escala entre OGUsers, con casi cinco millones de posts, y Exploit.in, con apenas ochenta mil: son sesenta veces más datos, y eso afecta directamente qué análisis son estadísticamente robustos en cada foro. También hay una dimensión temporal importante: Exploit.in es de 2013, OGUsers de 2019 y RaidForums de 2021, así que en realidad estamos viendo tres momentos distintos de la evolución del ecosistema underground. La longitud de los posts también cuenta una historia: los foros de hacking tienden a ser más cortos y técnicos que los foros ideológicos que vimos en otros casos del curso. Y esto ya nos deja ver la especialización de cada comunidad: OGUsers gira en torno al acceso, Exploit.in a la técnica, RaidForums a las filtraciones.</a:t>
+            </a:r>
+          </a:p>
+        </p:txBody>
+      </p:sp>
+      <p:sp>
+        <p:nvSpPr>
+          <p:cNvPr id="4" name="Slide Number Placeholder 3"/>
+          <p:cNvSpPr>
+            <a:spLocks noGrp="1"/>
+          </p:cNvSpPr>
+          <p:nvPr>
+            <p:ph type="sldNum" idx="5" sz="quarter"/>
+          </p:nvPr>
+        </p:nvSpPr>
+        <p:spPr/>
+      </p:sp>
+    </p:spTree>
+  </p:cSld>
+  <p:clrMapOvr>
+    <a:masterClrMapping/>
+  </p:clrMapOvr>
+</p:notes>
+</file>
+
+<file path=ppt/notesSlides/notesSlide7.xml><?xml version="1.0" encoding="utf-8"?>
+<p:notes xmlns:a="http://schemas.openxmlformats.org/drawingml/2006/main" xmlns:p="http://schemas.openxmlformats.org/presentationml/2006/main" xmlns:r="http://schemas.openxmlformats.org/officeDocument/2006/relationships">
+  <p:cSld>
+    <p:spTree>
+      <p:nvGrpSpPr>
+        <p:cNvPr id="1" name=""/>
+        <p:cNvGrpSpPr/>
+        <p:nvPr/>
+      </p:nvGrpSpPr>
+      <p:grpSpPr>
+        <a:xfrm>
+          <a:off x="0" y="0"/>
+          <a:ext cx="0" cy="0"/>
+          <a:chOff x="0" y="0"/>
+          <a:chExt cx="0" cy="0"/>
+        </a:xfrm>
+      </p:grpSpPr>
+      <p:sp>
+        <p:nvSpPr>
+          <p:cNvPr id="2" name="Slide Image Placeholder 1"/>
+          <p:cNvSpPr>
+            <a:spLocks noGrp="1"/>
+          </p:cNvSpPr>
+          <p:nvPr>
+            <p:ph type="sldImg" idx="2"/>
+          </p:nvPr>
+        </p:nvSpPr>
+        <p:spPr/>
+      </p:sp>
+      <p:sp>
+        <p:nvSpPr>
+          <p:cNvPr id="3" name="Notes Placeholder 2"/>
+          <p:cNvSpPr>
+            <a:spLocks noGrp="1"/>
+          </p:cNvSpPr>
+          <p:nvPr>
+            <p:ph type="body" idx="3" sz="quarter"/>
+          </p:nvPr>
+        </p:nvSpPr>
+        <p:spPr/>
+        <p:txBody>
+          <a:bodyPr/>
+          <a:lstStyle/>
+          <a:p>
+            <a:r>
+              <a:t>Esta decisión de pipeline no es opcional, es obligatoria: Burrows' Delta, NER y BERTopic dependen del idioma del texto, así que si no detectamos el idioma antes, todo lo que viene después está construido sobre una base rota. El método es simple: muestreamos 500 posts por foro con langdetect, truncados a 2000 caracteres para no sesgar por longitud. Cuatro de los cinco foros son mayoritariamente inglés, pero Exploit.in es más de 80% ruso, así que necesita su propio pipeline en NER, en BERTopic y en Burrows' Delta. La única pieza que sí es común a todos es el embedding qwen3, porque es multilingüe por diseño.</a:t>
+            </a:r>
+          </a:p>
+        </p:txBody>
+      </p:sp>
+      <p:sp>
+        <p:nvSpPr>
+          <p:cNvPr id="4" name="Slide Number Placeholder 3"/>
+          <p:cNvSpPr>
+            <a:spLocks noGrp="1"/>
+          </p:cNvSpPr>
+          <p:nvPr>
+            <p:ph type="sldNum" idx="5" sz="quarter"/>
+          </p:nvPr>
+        </p:nvSpPr>
+        <p:spPr/>
+      </p:sp>
+    </p:spTree>
+  </p:cSld>
+  <p:clrMapOvr>
+    <a:masterClrMapping/>
+  </p:clrMapOvr>
+</p:notes>
+</file>
+
+<file path=ppt/notesSlides/notesSlide8.xml><?xml version="1.0" encoding="utf-8"?>
+<p:notes xmlns:a="http://schemas.openxmlformats.org/drawingml/2006/main" xmlns:p="http://schemas.openxmlformats.org/presentationml/2006/main" xmlns:r="http://schemas.openxmlformats.org/officeDocument/2006/relationships">
+  <p:cSld>
+    <p:spTree>
+      <p:nvGrpSpPr>
+        <p:cNvPr id="1" name=""/>
+        <p:cNvGrpSpPr/>
+        <p:nvPr/>
+      </p:nvGrpSpPr>
+      <p:grpSpPr>
+        <a:xfrm>
+          <a:off x="0" y="0"/>
+          <a:ext cx="0" cy="0"/>
+          <a:chOff x="0" y="0"/>
+          <a:chExt cx="0" cy="0"/>
+        </a:xfrm>
+      </p:grpSpPr>
+      <p:sp>
+        <p:nvSpPr>
+          <p:cNvPr id="2" name="Slide Image Placeholder 1"/>
+          <p:cNvSpPr>
+            <a:spLocks noGrp="1"/>
+          </p:cNvSpPr>
+          <p:nvPr>
+            <p:ph type="sldImg" idx="2"/>
+          </p:nvPr>
+        </p:nvSpPr>
+        <p:spPr/>
+      </p:sp>
+      <p:sp>
+        <p:nvSpPr>
+          <p:cNvPr id="3" name="Notes Placeholder 2"/>
+          <p:cNvSpPr>
+            <a:spLocks noGrp="1"/>
+          </p:cNvSpPr>
+          <p:nvPr>
+            <p:ph type="body" idx="3" sz="quarter"/>
+          </p:nvPr>
+        </p:nvSpPr>
+        <p:spPr/>
+        <p:txBody>
+          <a:bodyPr/>
+          <a:lstStyle/>
+          <a:p>
+            <a:r>
+              <a:t>Esta tabla resume visualmente lo que acabamos de explicar: Exploit.in es la excepción en casi todas las filas, salvo en embeddings, donde el modelo multilingüe nos permite tratarlo igual que al resto. Es un buen recordatorio de que no hace falta reconstruir todo el pipeline quinientas veces: basta con identificar el punto exacto donde el idioma importa y bifurcar solo ahí.</a:t>
+            </a:r>
+          </a:p>
+        </p:txBody>
+      </p:sp>
+      <p:sp>
+        <p:nvSpPr>
+          <p:cNvPr id="4" name="Slide Number Placeholder 3"/>
+          <p:cNvSpPr>
+            <a:spLocks noGrp="1"/>
+          </p:cNvSpPr>
+          <p:nvPr>
+            <p:ph type="sldNum" idx="5" sz="quarter"/>
+          </p:nvPr>
+        </p:nvSpPr>
+        <p:spPr/>
+      </p:sp>
+    </p:spTree>
+  </p:cSld>
+  <p:clrMapOvr>
+    <a:masterClrMapping/>
+  </p:clrMapOvr>
+</p:notes>
+</file>
+
+<file path=ppt/notesSlides/notesSlide9.xml><?xml version="1.0" encoding="utf-8"?>
+<p:notes xmlns:a="http://schemas.openxmlformats.org/drawingml/2006/main" xmlns:p="http://schemas.openxmlformats.org/presentationml/2006/main" xmlns:r="http://schemas.openxmlformats.org/officeDocument/2006/relationships">
+  <p:cSld>
+    <p:spTree>
+      <p:nvGrpSpPr>
+        <p:cNvPr id="1" name=""/>
+        <p:cNvGrpSpPr/>
+        <p:nvPr/>
+      </p:nvGrpSpPr>
+      <p:grpSpPr>
+        <a:xfrm>
+          <a:off x="0" y="0"/>
+          <a:ext cx="0" cy="0"/>
+          <a:chOff x="0" y="0"/>
+          <a:chExt cx="0" cy="0"/>
+        </a:xfrm>
+      </p:grpSpPr>
+      <p:sp>
+        <p:nvSpPr>
+          <p:cNvPr id="2" name="Slide Image Placeholder 1"/>
+          <p:cNvSpPr>
+            <a:spLocks noGrp="1"/>
+          </p:cNvSpPr>
+          <p:nvPr>
+            <p:ph type="sldImg" idx="2"/>
+          </p:nvPr>
+        </p:nvSpPr>
+        <p:spPr/>
+      </p:sp>
+      <p:sp>
+        <p:nvSpPr>
+          <p:cNvPr id="3" name="Notes Placeholder 2"/>
+          <p:cNvSpPr>
+            <a:spLocks noGrp="1"/>
+          </p:cNvSpPr>
+          <p:nvPr>
+            <p:ph type="body" idx="3" sz="quarter"/>
+          </p:nvPr>
+        </p:nvSpPr>
+        <p:spPr/>
+        <p:txBody>
+          <a:bodyPr/>
+          <a:lstStyle/>
+          <a:p>
+            <a:r>
+              <a:t>Vamos a la demo en vivo del notebook 00. Quiero que se fijen especialmente en la sección 5, donde la gráfica de distribución de idioma deja a Exploit.in completamente separado del resto de foros — esa gráfica es literalmente la evidencia visual que justificó la decisión de pipeline que acabamos de ver.</a:t>
+            </a:r>
+          </a:p>
+        </p:txBody>
+      </p:sp>
+      <p:sp>
+        <p:nvSpPr>
+          <p:cNvPr id="4" name="Slide Number Placeholder 3"/>
+          <p:cNvSpPr>
+            <a:spLocks noGrp="1"/>
+          </p:cNvSpPr>
+          <p:nvPr>
+            <p:ph type="sldNum" idx="5" sz="quarter"/>
+          </p:nvPr>
+        </p:nvSpPr>
+        <p:spPr/>
+      </p:sp>
+    </p:spTree>
+  </p:cSld>
+  <p:clrMapOvr>
+    <a:masterClrMapping/>
+  </p:clrMapOvr>
+</p:notes>
 </file>
 
 <file path=ppt/slideLayouts/slideLayout1.xml><?xml version="1.0" encoding="utf-8"?>
@@ -11369,4 +13189,324 @@
   </a:objectDefaults>
   <a:extraClrSchemeLst/>
 </a:theme>
+</file>
+
+<file path=ppt/theme/theme2.xml><?xml version="1.0" encoding="utf-8"?>
+<a:theme xmlns:a="http://schemas.openxmlformats.org/drawingml/2006/main" name="Office Theme">
+  <a:themeElements>
+    <a:clrScheme name="Office">
+      <a:dk1>
+        <a:sysClr val="windowText" lastClr="000000"/>
+      </a:dk1>
+      <a:lt1>
+        <a:sysClr val="window" lastClr="FFFFFF"/>
+      </a:lt1>
+      <a:dk2>
+        <a:srgbClr val="1F497D"/>
+      </a:dk2>
+      <a:lt2>
+        <a:srgbClr val="EEECE1"/>
+      </a:lt2>
+      <a:accent1>
+        <a:srgbClr val="4F81BD"/>
+      </a:accent1>
+      <a:accent2>
+        <a:srgbClr val="C0504D"/>
+      </a:accent2>
+      <a:accent3>
+        <a:srgbClr val="9BBB59"/>
+      </a:accent3>
+      <a:accent4>
+        <a:srgbClr val="8064A2"/>
+      </a:accent4>
+      <a:accent5>
+        <a:srgbClr val="4BACC6"/>
+      </a:accent5>
+      <a:accent6>
+        <a:srgbClr val="F79646"/>
+      </a:accent6>
+      <a:hlink>
+        <a:srgbClr val="0000FF"/>
+      </a:hlink>
+      <a:folHlink>
+        <a:srgbClr val="800080"/>
+      </a:folHlink>
+    </a:clrScheme>
+    <a:fontScheme name="Office">
+      <a:majorFont>
+        <a:latin typeface="Calibri"/>
+        <a:ea typeface=""/>
+        <a:cs typeface=""/>
+        <a:font script="Jpan" typeface="ＭＳ Ｐゴシック"/>
+        <a:font script="Hang" typeface="맑은 고딕"/>
+        <a:font script="Hans" typeface="宋体"/>
+        <a:font script="Hant" typeface="新細明體"/>
+        <a:font script="Arab" typeface="Times New Roman"/>
+        <a:font script="Hebr" typeface="Times New Roman"/>
+        <a:font script="Thai" typeface="Angsana New"/>
+        <a:font script="Ethi" typeface="Nyala"/>
+        <a:font script="Beng" typeface="Vrinda"/>
+        <a:font script="Gujr" typeface="Shruti"/>
+        <a:font script="Khmr" typeface="MoolBoran"/>
+        <a:font script="Knda" typeface="Tunga"/>
+        <a:font script="Guru" typeface="Raavi"/>
+        <a:font script="Cans" typeface="Euphemia"/>
+        <a:font script="Cher" typeface="Plantagenet Cherokee"/>
+        <a:font script="Yiii" typeface="Microsoft Yi Baiti"/>
+        <a:font script="Tibt" typeface="Microsoft Himalaya"/>
+        <a:font script="Thaa" typeface="MV Boli"/>
+        <a:font script="Deva" typeface="Mangal"/>
+        <a:font script="Telu" typeface="Gautami"/>
+        <a:font script="Taml" typeface="Latha"/>
+        <a:font script="Syrc" typeface="Estrangelo Edessa"/>
+        <a:font script="Orya" typeface="Kalinga"/>
+        <a:font script="Mlym" typeface="Kartika"/>
+        <a:font script="Laoo" typeface="DokChampa"/>
+        <a:font script="Sinh" typeface="Iskoola Pota"/>
+        <a:font script="Mong" typeface="Mongolian Baiti"/>
+        <a:font script="Viet" typeface="Times New Roman"/>
+        <a:font script="Uigh" typeface="Microsoft Uighur"/>
+        <a:font script="Geor" typeface="Sylfaen"/>
+      </a:majorFont>
+      <a:minorFont>
+        <a:latin typeface="Calibri"/>
+        <a:ea typeface=""/>
+        <a:cs typeface=""/>
+        <a:font script="Jpan" typeface="ＭＳ Ｐゴシック"/>
+        <a:font script="Hang" typeface="맑은 고딕"/>
+        <a:font script="Hans" typeface="宋体"/>
+        <a:font script="Hant" typeface="新細明體"/>
+        <a:font script="Arab" typeface="Arial"/>
+        <a:font script="Hebr" typeface="Arial"/>
+        <a:font script="Thai" typeface="Cordia New"/>
+        <a:font script="Ethi" typeface="Nyala"/>
+        <a:font script="Beng" typeface="Vrinda"/>
+        <a:font script="Gujr" typeface="Shruti"/>
+        <a:font script="Khmr" typeface="DaunPenh"/>
+        <a:font script="Knda" typeface="Tunga"/>
+        <a:font script="Guru" typeface="Raavi"/>
+        <a:font script="Cans" typeface="Euphemia"/>
+        <a:font script="Cher" typeface="Plantagenet Cherokee"/>
+        <a:font script="Yiii" typeface="Microsoft Yi Baiti"/>
+        <a:font script="Tibt" typeface="Microsoft Himalaya"/>
+        <a:font script="Thaa" typeface="MV Boli"/>
+        <a:font script="Deva" typeface="Mangal"/>
+        <a:font script="Telu" typeface="Gautami"/>
+        <a:font script="Taml" typeface="Latha"/>
+        <a:font script="Syrc" typeface="Estrangelo Edessa"/>
+        <a:font script="Orya" typeface="Kalinga"/>
+        <a:font script="Mlym" typeface="Kartika"/>
+        <a:font script="Laoo" typeface="DokChampa"/>
+        <a:font script="Sinh" typeface="Iskoola Pota"/>
+        <a:font script="Mong" typeface="Mongolian Baiti"/>
+        <a:font script="Viet" typeface="Arial"/>
+        <a:font script="Uigh" typeface="Microsoft Uighur"/>
+        <a:font script="Geor" typeface="Sylfaen"/>
+      </a:minorFont>
+    </a:fontScheme>
+    <a:fmtScheme name="Office">
+      <a:fillStyleLst>
+        <a:solidFill>
+          <a:schemeClr val="phClr"/>
+        </a:solidFill>
+        <a:gradFill rotWithShape="1">
+          <a:gsLst>
+            <a:gs pos="0">
+              <a:schemeClr val="phClr">
+                <a:tint val="50000"/>
+                <a:satMod val="300000"/>
+              </a:schemeClr>
+            </a:gs>
+            <a:gs pos="35000">
+              <a:schemeClr val="phClr">
+                <a:tint val="37000"/>
+                <a:satMod val="300000"/>
+              </a:schemeClr>
+            </a:gs>
+            <a:gs pos="100000">
+              <a:schemeClr val="phClr">
+                <a:tint val="15000"/>
+                <a:satMod val="350000"/>
+              </a:schemeClr>
+            </a:gs>
+          </a:gsLst>
+          <a:lin ang="16200000" scaled="1"/>
+        </a:gradFill>
+        <a:gradFill rotWithShape="1">
+          <a:gsLst>
+            <a:gs pos="0">
+              <a:schemeClr val="phClr">
+                <a:tint val="100000"/>
+                <a:shade val="100000"/>
+                <a:satMod val="130000"/>
+              </a:schemeClr>
+            </a:gs>
+            <a:gs pos="100000">
+              <a:schemeClr val="phClr">
+                <a:tint val="50000"/>
+                <a:shade val="100000"/>
+                <a:satMod val="350000"/>
+              </a:schemeClr>
+            </a:gs>
+          </a:gsLst>
+          <a:lin ang="16200000" scaled="0"/>
+        </a:gradFill>
+      </a:fillStyleLst>
+      <a:lnStyleLst>
+        <a:ln w="9525" cap="flat" cmpd="sng" algn="ctr">
+          <a:solidFill>
+            <a:schemeClr val="phClr">
+              <a:shade val="95000"/>
+              <a:satMod val="105000"/>
+            </a:schemeClr>
+          </a:solidFill>
+          <a:prstDash val="solid"/>
+        </a:ln>
+        <a:ln w="25400" cap="flat" cmpd="sng" algn="ctr">
+          <a:solidFill>
+            <a:schemeClr val="phClr"/>
+          </a:solidFill>
+          <a:prstDash val="solid"/>
+        </a:ln>
+        <a:ln w="38100" cap="flat" cmpd="sng" algn="ctr">
+          <a:solidFill>
+            <a:schemeClr val="phClr"/>
+          </a:solidFill>
+          <a:prstDash val="solid"/>
+        </a:ln>
+      </a:lnStyleLst>
+      <a:effectStyleLst>
+        <a:effectStyle>
+          <a:effectLst>
+            <a:outerShdw blurRad="40000" dist="20000" dir="5400000" rotWithShape="0">
+              <a:srgbClr val="000000">
+                <a:alpha val="38000"/>
+              </a:srgbClr>
+            </a:outerShdw>
+          </a:effectLst>
+        </a:effectStyle>
+        <a:effectStyle>
+          <a:effectLst>
+            <a:outerShdw blurRad="40000" dist="23000" dir="5400000" rotWithShape="0">
+              <a:srgbClr val="000000">
+                <a:alpha val="35000"/>
+              </a:srgbClr>
+            </a:outerShdw>
+          </a:effectLst>
+        </a:effectStyle>
+        <a:effectStyle>
+          <a:effectLst>
+            <a:outerShdw blurRad="40000" dist="23000" dir="5400000" rotWithShape="0">
+              <a:srgbClr val="000000">
+                <a:alpha val="35000"/>
+              </a:srgbClr>
+            </a:outerShdw>
+          </a:effectLst>
+          <a:scene3d>
+            <a:camera prst="orthographicFront">
+              <a:rot lat="0" lon="0" rev="0"/>
+            </a:camera>
+            <a:lightRig rig="threePt" dir="t">
+              <a:rot lat="0" lon="0" rev="1200000"/>
+            </a:lightRig>
+          </a:scene3d>
+          <a:sp3d>
+            <a:bevelT w="63500" h="25400"/>
+          </a:sp3d>
+        </a:effectStyle>
+      </a:effectStyleLst>
+      <a:bgFillStyleLst>
+        <a:solidFill>
+          <a:schemeClr val="phClr"/>
+        </a:solidFill>
+        <a:gradFill rotWithShape="1">
+          <a:gsLst>
+            <a:gs pos="0">
+              <a:schemeClr val="phClr">
+                <a:tint val="40000"/>
+                <a:satMod val="350000"/>
+              </a:schemeClr>
+            </a:gs>
+            <a:gs pos="40000">
+              <a:schemeClr val="phClr">
+                <a:tint val="45000"/>
+                <a:shade val="99000"/>
+                <a:satMod val="350000"/>
+              </a:schemeClr>
+            </a:gs>
+            <a:gs pos="100000">
+              <a:schemeClr val="phClr">
+                <a:shade val="20000"/>
+                <a:satMod val="255000"/>
+              </a:schemeClr>
+            </a:gs>
+          </a:gsLst>
+          <a:path path="circle">
+            <a:fillToRect l="50000" t="-80000" r="50000" b="180000"/>
+          </a:path>
+        </a:gradFill>
+        <a:gradFill rotWithShape="1">
+          <a:gsLst>
+            <a:gs pos="0">
+              <a:schemeClr val="phClr">
+                <a:tint val="80000"/>
+                <a:satMod val="300000"/>
+              </a:schemeClr>
+            </a:gs>
+            <a:gs pos="100000">
+              <a:schemeClr val="phClr">
+                <a:shade val="30000"/>
+                <a:satMod val="200000"/>
+              </a:schemeClr>
+            </a:gs>
+          </a:gsLst>
+          <a:path path="circle">
+            <a:fillToRect l="50000" t="50000" r="50000" b="50000"/>
+          </a:path>
+        </a:gradFill>
+      </a:bgFillStyleLst>
+    </a:fmtScheme>
+  </a:themeElements>
+  <a:objectDefaults>
+    <a:spDef>
+      <a:spPr/>
+      <a:bodyPr/>
+      <a:lstStyle/>
+      <a:style>
+        <a:lnRef idx="1">
+          <a:schemeClr val="accent1"/>
+        </a:lnRef>
+        <a:fillRef idx="3">
+          <a:schemeClr val="accent1"/>
+        </a:fillRef>
+        <a:effectRef idx="2">
+          <a:schemeClr val="accent1"/>
+        </a:effectRef>
+        <a:fontRef idx="minor">
+          <a:schemeClr val="lt1"/>
+        </a:fontRef>
+      </a:style>
+    </a:spDef>
+    <a:lnDef>
+      <a:spPr/>
+      <a:bodyPr/>
+      <a:lstStyle/>
+      <a:style>
+        <a:lnRef idx="2">
+          <a:schemeClr val="accent1"/>
+        </a:lnRef>
+        <a:fillRef idx="0">
+          <a:schemeClr val="accent1"/>
+        </a:fillRef>
+        <a:effectRef idx="1">
+          <a:schemeClr val="accent1"/>
+        </a:effectRef>
+        <a:fontRef idx="minor">
+          <a:schemeClr val="tx1"/>
+        </a:fontRef>
+      </a:style>
+    </a:lnDef>
+  </a:objectDefaults>
+  <a:extraClrSchemeLst/>
+</a:theme>
 </file>
--- a/HackingForums/csbc26_caso_hackingforums.pptx
+++ b/HackingForums/csbc26_caso_hackingforums.pptx
@@ -6091,12 +6091,6 @@
           <a:lstStyle/>
           <a:p>
             <a:r>
-              <a:rPr sz="3400" b="1">
-                <a:solidFill>
-                  <a:srgbClr val="FFFFFF"/>
-                </a:solidFill>
-                <a:latin typeface="Calibri"/>
-              </a:rPr>
               <a:t>Caso Hacking Forums</a:t>
             </a:r>
           </a:p>
@@ -6106,7 +6100,7 @@
                 <a:solidFill>
                   <a:srgbClr val="D6DAE2"/>
                 </a:solidFill>
-                <a:latin typeface="Calibri"/>
+                <a:latin typeface="Arial"/>
               </a:rPr>
               <a:t>Análisis comparativo de cinco foros underground (2013–2021)</a:t>
             </a:r>
@@ -6117,7 +6111,7 @@
                 <a:solidFill>
                   <a:srgbClr val="9AA3B5"/>
                 </a:solidFill>
-                <a:latin typeface="Calibri"/>
+                <a:latin typeface="Arial"/>
               </a:rPr>
               <a:t>CSBC26 · Análisis de Leaks Underground</a:t>
             </a:r>
@@ -6157,34 +6151,31 @@
           <a:bodyPr wrap="square"/>
           <a:lstStyle/>
           <a:p>
+            <a:pPr algn="ctr"/>
             <a:r>
               <a:rPr sz="1300" b="1">
                 <a:solidFill>
-                  <a:srgbClr val="E32B3D"/>
-                </a:solidFill>
-                <a:latin typeface="Calibri"/>
+                  <a:srgbClr val="CD2D37"/>
+                </a:solidFill>
+                <a:latin typeface="Arial"/>
               </a:rPr>
               <a:t>SECCIÓN 3</a:t>
             </a:r>
           </a:p>
           <a:p>
-            <a:r>
-              <a:rPr sz="3000" b="1">
-                <a:solidFill>
-                  <a:srgbClr val="FFFFFF"/>
-                </a:solidFill>
-                <a:latin typeface="Calibri"/>
-              </a:rPr>
+            <a:pPr algn="ctr"/>
+            <a:r>
               <a:t>Red de co-participación y pivoting de handles</a:t>
             </a:r>
           </a:p>
           <a:p>
+            <a:pPr algn="ctr"/>
             <a:r>
               <a:rPr sz="1600">
                 <a:solidFill>
                   <a:srgbClr val="D6DAE2"/>
                 </a:solidFill>
-                <a:latin typeface="Calibri"/>
+                <a:latin typeface="Arial"/>
               </a:rPr>
               <a:t>¿Quién es quién a través de los foros?</a:t>
             </a:r>
@@ -6225,12 +6216,6 @@
           <a:lstStyle/>
           <a:p>
             <a:r>
-              <a:rPr sz="2400" b="1">
-                <a:solidFill>
-                  <a:srgbClr val="1A1A2E"/>
-                </a:solidFill>
-                <a:latin typeface="Calibri"/>
-              </a:rPr>
               <a:t>Red de co-participación — OGUsers como caso de estudio</a:t>
             </a:r>
           </a:p>
@@ -6246,78 +6231,38 @@
             <p:ph type="body" idx="16" sz="quarter"/>
           </p:nvPr>
         </p:nvSpPr>
-        <p:spPr/>
+        <p:spPr>
+          <a:xfrm>
+            <a:off x="1073427" y="2580496"/>
+            <a:ext cx="10084904" cy="3004378"/>
+          </a:xfrm>
+        </p:spPr>
         <p:txBody>
           <a:bodyPr wrap="square"/>
           <a:lstStyle/>
           <a:p>
-            <a:pPr algn="l" marL="0" indent="-228600">
-              <a:buNone/>
-            </a:pPr>
-            <a:r>
-              <a:rPr sz="1900" b="0">
-                <a:solidFill>
-                  <a:srgbClr val="333844"/>
-                </a:solidFill>
-                <a:latin typeface="Calibri"/>
-              </a:rPr>
-              <a:t>▸  Grafo usuario↔usuario: arista si ambos postearon en el mismo hilo</a:t>
-            </a:r>
-          </a:p>
-          <a:p>
-            <a:pPr algn="l" marL="0" indent="-228600">
-              <a:buNone/>
-            </a:pPr>
-            <a:r>
-              <a:rPr sz="1900" b="0">
-                <a:solidFill>
-                  <a:srgbClr val="333844"/>
-                </a:solidFill>
-                <a:latin typeface="Calibri"/>
-              </a:rPr>
-              <a:t>▸  Muestra: hasta 5,000 threads → componente gigante con brokers identificables</a:t>
-            </a:r>
-          </a:p>
-          <a:p>
-            <a:pPr algn="l" marL="0" indent="-228600">
-              <a:buNone/>
-            </a:pPr>
-            <a:r>
-              <a:rPr sz="1900" b="0">
-                <a:solidFill>
-                  <a:srgbClr val="333844"/>
-                </a:solidFill>
-                <a:latin typeface="Calibri"/>
-              </a:rPr>
-              <a:t>▸  Betweenness centrality: revela intermediarios entre subcomunidades</a:t>
-            </a:r>
-          </a:p>
-          <a:p>
-            <a:pPr algn="l" marL="0" indent="-228600">
-              <a:buNone/>
-            </a:pPr>
-            <a:r>
-              <a:rPr sz="1900" b="0">
-                <a:solidFill>
-                  <a:srgbClr val="333844"/>
-                </a:solidFill>
-                <a:latin typeface="Calibri"/>
-              </a:rPr>
-              <a:t>▸  Visualización Plotly: top-150 nodos, color y tamaño por degree</a:t>
-            </a:r>
-          </a:p>
-          <a:p>
-            <a:pPr algn="l" marL="0" indent="-228600">
-              <a:buNone/>
-            </a:pPr>
-            <a:r>
-              <a:rPr sz="1900" b="0">
-                <a:solidFill>
-                  <a:srgbClr val="333844"/>
-                </a:solidFill>
-                <a:latin typeface="Calibri"/>
-              </a:rPr>
-              <a:t>▸  Los brokers de OGUsers son candidatos prioritarios a pivoting cross-foro</a:t>
+            <a:r>
+              <a:t>Grafo usuario↔usuario: arista si ambos postearon en el mismo hilo</a:t>
+            </a:r>
+          </a:p>
+          <a:p>
+            <a:r>
+              <a:t>Muestra: hasta 5,000 threads → componente gigante con brokers identificables</a:t>
+            </a:r>
+          </a:p>
+          <a:p>
+            <a:r>
+              <a:t>Betweenness centrality: revela intermediarios entre subcomunidades</a:t>
+            </a:r>
+          </a:p>
+          <a:p>
+            <a:r>
+              <a:t>Visualización Plotly: top-150 nodos, color y tamaño por degree</a:t>
+            </a:r>
+          </a:p>
+          <a:p>
+            <a:r>
+              <a:t>Los brokers de OGUsers son candidatos prioritarios a pivoting cross-foro</a:t>
             </a:r>
           </a:p>
         </p:txBody>
@@ -6356,12 +6301,6 @@
           <a:lstStyle/>
           <a:p>
             <a:r>
-              <a:rPr sz="2400" b="1">
-                <a:solidFill>
-                  <a:srgbClr val="1A1A2E"/>
-                </a:solidFill>
-                <a:latin typeface="Calibri"/>
-              </a:rPr>
               <a:t>Pivoting de handles — dos niveles de señal</a:t>
             </a:r>
           </a:p>
@@ -6392,7 +6331,7 @@
         </p:nvSpPr>
         <p:spPr>
           <a:xfrm>
-            <a:off x="1051560" y="1691640"/>
+            <a:off x="1051560" y="2194560"/>
             <a:ext cx="4846320" cy="411480"/>
           </a:xfrm>
           <a:prstGeom prst="rect">
@@ -6410,9 +6349,9 @@
             <a:r>
               <a:rPr sz="1600" b="1">
                 <a:solidFill>
-                  <a:srgbClr val="E32B3D"/>
-                </a:solidFill>
-                <a:latin typeface="Calibri"/>
+                  <a:srgbClr val="CD2D37"/>
+                </a:solidFill>
+                <a:latin typeface="Arial"/>
               </a:rPr>
               <a:t>Matching exacto (alta precisión)</a:t>
             </a:r>
@@ -6427,8 +6366,8 @@
         </p:nvSpPr>
         <p:spPr>
           <a:xfrm>
-            <a:off x="1051560" y="2148840"/>
-            <a:ext cx="4846320" cy="3840480"/>
+            <a:off x="1051560" y="2651760"/>
+            <a:ext cx="4846320" cy="3337560"/>
           </a:xfrm>
           <a:prstGeom prst="rect">
             <a:avLst/>
@@ -6444,9 +6383,9 @@
             <a:r>
               <a:rPr sz="1600">
                 <a:solidFill>
-                  <a:srgbClr val="333844"/>
-                </a:solidFill>
-                <a:latin typeface="Calibri"/>
+                  <a:srgbClr val="465461"/>
+                </a:solidFill>
+                <a:latin typeface="Arial"/>
               </a:rPr>
               <a:t>▸  Normalización: lowercase + strip</a:t>
             </a:r>
@@ -6455,9 +6394,9 @@
             <a:r>
               <a:rPr sz="1600">
                 <a:solidFill>
-                  <a:srgbClr val="333844"/>
-                </a:solidFill>
-                <a:latin typeface="Calibri"/>
+                  <a:srgbClr val="465461"/>
+                </a:solidFill>
+                <a:latin typeface="Arial"/>
               </a:rPr>
               <a:t>▸  Coincidencia case-insensitive entre los 5 foros</a:t>
             </a:r>
@@ -6466,9 +6405,9 @@
             <a:r>
               <a:rPr sz="1600">
                 <a:solidFill>
-                  <a:srgbClr val="333844"/>
-                </a:solidFill>
-                <a:latin typeface="Calibri"/>
+                  <a:srgbClr val="465461"/>
+                </a:solidFill>
+                <a:latin typeface="Arial"/>
               </a:rPr>
               <a:t>▸  Resultado: handles en ≥2 foros → candidatos a misma persona</a:t>
             </a:r>
@@ -6477,9 +6416,9 @@
             <a:r>
               <a:rPr sz="1600">
                 <a:solidFill>
-                  <a:srgbClr val="333844"/>
-                </a:solidFill>
-                <a:latin typeface="Calibri"/>
+                  <a:srgbClr val="465461"/>
+                </a:solidFill>
+                <a:latin typeface="Arial"/>
               </a:rPr>
               <a:t>▸  Conservador pero sin falsos positivos</a:t>
             </a:r>
@@ -6494,7 +6433,7 @@
         </p:nvSpPr>
         <p:spPr>
           <a:xfrm>
-            <a:off x="6217920" y="1691640"/>
+            <a:off x="6217920" y="2194560"/>
             <a:ext cx="4846320" cy="411480"/>
           </a:xfrm>
           <a:prstGeom prst="rect">
@@ -6512,9 +6451,9 @@
             <a:r>
               <a:rPr sz="1600" b="1">
                 <a:solidFill>
-                  <a:srgbClr val="E32B3D"/>
-                </a:solidFill>
-                <a:latin typeface="Calibri"/>
+                  <a:srgbClr val="CD2D37"/>
+                </a:solidFill>
+                <a:latin typeface="Arial"/>
               </a:rPr>
               <a:t>Fuzzy matching (mayor cobertura)</a:t>
             </a:r>
@@ -6529,8 +6468,8 @@
         </p:nvSpPr>
         <p:spPr>
           <a:xfrm>
-            <a:off x="6217920" y="2148840"/>
-            <a:ext cx="4846320" cy="3840480"/>
+            <a:off x="6217920" y="2651760"/>
+            <a:ext cx="4846320" cy="3337560"/>
           </a:xfrm>
           <a:prstGeom prst="rect">
             <a:avLst/>
@@ -6546,9 +6485,9 @@
             <a:r>
               <a:rPr sz="1600">
                 <a:solidFill>
-                  <a:srgbClr val="333844"/>
-                </a:solidFill>
-                <a:latin typeface="Calibri"/>
+                  <a:srgbClr val="465461"/>
+                </a:solidFill>
+                <a:latin typeface="Arial"/>
               </a:rPr>
               <a:t>▸  rapidfuzz con threshold ≥85%</a:t>
             </a:r>
@@ -6557,9 +6496,9 @@
             <a:r>
               <a:rPr sz="1600">
                 <a:solidFill>
-                  <a:srgbClr val="333844"/>
-                </a:solidFill>
-                <a:latin typeface="Calibri"/>
+                  <a:srgbClr val="465461"/>
+                </a:solidFill>
+                <a:latin typeface="Arial"/>
               </a:rPr>
               <a:t>▸  Captura variaciones: user_v2, user_, user123</a:t>
             </a:r>
@@ -6568,9 +6507,9 @@
             <a:r>
               <a:rPr sz="1600">
                 <a:solidFill>
-                  <a:srgbClr val="333844"/>
-                </a:solidFill>
-                <a:latin typeface="Calibri"/>
+                  <a:srgbClr val="465461"/>
+                </a:solidFill>
+                <a:latin typeface="Arial"/>
               </a:rPr>
               <a:t>▸  Enriquecido con similitud coseno de embeddings</a:t>
             </a:r>
@@ -6579,9 +6518,9 @@
             <a:r>
               <a:rPr sz="1600">
                 <a:solidFill>
-                  <a:srgbClr val="333844"/>
-                </a:solidFill>
-                <a:latin typeface="Calibri"/>
+                  <a:srgbClr val="465461"/>
+                </a:solidFill>
+                <a:latin typeface="Arial"/>
               </a:rPr>
               <a:t>▸  Más ruido, pero detecta cambios deliberados de handle</a:t>
             </a:r>
@@ -6622,12 +6561,6 @@
           <a:lstStyle/>
           <a:p>
             <a:r>
-              <a:rPr sz="2400" b="1">
-                <a:solidFill>
-                  <a:srgbClr val="1A1A2E"/>
-                </a:solidFill>
-                <a:latin typeface="Calibri"/>
-              </a:rPr>
               <a:t>Limpieza — el filtro epoch-0</a:t>
             </a:r>
           </a:p>
@@ -6643,78 +6576,38 @@
             <p:ph type="body" idx="16" sz="quarter"/>
           </p:nvPr>
         </p:nvSpPr>
-        <p:spPr/>
+        <p:spPr>
+          <a:xfrm>
+            <a:off x="1073427" y="2077576"/>
+            <a:ext cx="10084904" cy="3507298"/>
+          </a:xfrm>
+        </p:spPr>
         <p:txBody>
           <a:bodyPr wrap="square"/>
           <a:lstStyle/>
           <a:p>
-            <a:pPr algn="l" marL="0" indent="-228600">
-              <a:buNone/>
-            </a:pPr>
-            <a:r>
-              <a:rPr sz="1900" b="0">
-                <a:solidFill>
-                  <a:srgbClr val="333844"/>
-                </a:solidFill>
-                <a:latin typeface="Calibri"/>
-              </a:rPr>
-              <a:t>▸  Problema: gráficas de actividad temporal arrancan en 1970</a:t>
-            </a:r>
-          </a:p>
-          <a:p>
-            <a:pPr algn="l" marL="0" indent="-228600">
-              <a:buNone/>
-            </a:pPr>
-            <a:r>
-              <a:rPr sz="1900" b="0">
-                <a:solidFill>
-                  <a:srgbClr val="333844"/>
-                </a:solidFill>
-                <a:latin typeface="Calibri"/>
-              </a:rPr>
-              <a:t>▸  Causa: dateline = 0 (Unix timestamp nulo) → pd.to_datetime lo interpreta como 1970-01-01</a:t>
-            </a:r>
-          </a:p>
-          <a:p>
-            <a:pPr algn="l" marL="0" indent="-228600">
-              <a:buNone/>
-            </a:pPr>
-            <a:r>
-              <a:rPr sz="1900" b="0">
-                <a:solidFill>
-                  <a:srgbClr val="333844"/>
-                </a:solidFill>
-                <a:latin typeface="Calibri"/>
-              </a:rPr>
-              <a:t>▸  Fix en notebook 01: filtrar posts con año &lt; 2000 antes de cualquier análisis temporal</a:t>
-            </a:r>
-          </a:p>
-          <a:p>
-            <a:pPr algn="l" marL="0" indent="-228600">
-              <a:buNone/>
-            </a:pPr>
-            <a:r>
-              <a:rPr sz="1900" b="0">
-                <a:solidFill>
-                  <a:srgbClr val="333844"/>
-                </a:solidFill>
-                <a:latin typeface="Calibri"/>
-              </a:rPr>
-              <a:t>▸  Impacto real: solo afecta a un pequeño % de registros con timestamp corrupto</a:t>
-            </a:r>
-          </a:p>
-          <a:p>
-            <a:pPr algn="l" marL="0" indent="-228600">
-              <a:buNone/>
-            </a:pPr>
-            <a:r>
-              <a:rPr sz="1900" b="0">
-                <a:solidFill>
-                  <a:srgbClr val="333844"/>
-                </a:solidFill>
-                <a:latin typeface="Calibri"/>
-              </a:rPr>
-              <a:t>▸  Regla general: validar siempre el rango de fechas antes de cualquier análisis temporal</a:t>
+            <a:r>
+              <a:t>Problema: gráficas de actividad temporal arrancan en 1970</a:t>
+            </a:r>
+          </a:p>
+          <a:p>
+            <a:r>
+              <a:t>Causa: dateline = 0 (Unix timestamp nulo) → pd.to_datetime lo interpreta como 1970-01-01</a:t>
+            </a:r>
+          </a:p>
+          <a:p>
+            <a:r>
+              <a:t>Fix en notebook 01: filtrar posts con año &lt; 2000 antes de cualquier análisis temporal</a:t>
+            </a:r>
+          </a:p>
+          <a:p>
+            <a:r>
+              <a:t>Impacto real: solo afecta a un pequeño % de registros con timestamp corrupto</a:t>
+            </a:r>
+          </a:p>
+          <a:p>
+            <a:r>
+              <a:t>Regla general: validar siempre el rango de fechas antes de cualquier análisis temporal</a:t>
             </a:r>
           </a:p>
         </p:txBody>
@@ -6752,34 +6645,31 @@
           <a:bodyPr wrap="square"/>
           <a:lstStyle/>
           <a:p>
+            <a:pPr algn="ctr"/>
             <a:r>
               <a:rPr sz="1300" b="1">
                 <a:solidFill>
-                  <a:srgbClr val="E32B3D"/>
-                </a:solidFill>
-                <a:latin typeface="Calibri"/>
+                  <a:srgbClr val="CD2D37"/>
+                </a:solidFill>
+                <a:latin typeface="Arial"/>
               </a:rPr>
               <a:t>SECCIÓN 4</a:t>
             </a:r>
           </a:p>
           <a:p>
-            <a:r>
-              <a:rPr sz="3000" b="1">
-                <a:solidFill>
-                  <a:srgbClr val="FFFFFF"/>
-                </a:solidFill>
-                <a:latin typeface="Calibri"/>
-              </a:rPr>
+            <a:pPr algn="ctr"/>
+            <a:r>
               <a:t>LLM local y embeddings cross-foro</a:t>
             </a:r>
           </a:p>
           <a:p>
+            <a:pPr algn="ctr"/>
             <a:r>
               <a:rPr sz="1600">
                 <a:solidFill>
                   <a:srgbClr val="D6DAE2"/>
                 </a:solidFill>
-                <a:latin typeface="Calibri"/>
+                <a:latin typeface="Arial"/>
               </a:rPr>
               <a:t>NER, BERTopic y perfilado multi-foro</a:t>
             </a:r>
@@ -6820,12 +6710,6 @@
           <a:lstStyle/>
           <a:p>
             <a:r>
-              <a:rPr sz="2400" b="1">
-                <a:solidFill>
-                  <a:srgbClr val="1A1A2E"/>
-                </a:solidFill>
-                <a:latin typeface="Calibri"/>
-              </a:rPr>
               <a:t>NER en dominio hacking — entidades especializadas</a:t>
             </a:r>
           </a:p>
@@ -6841,78 +6725,38 @@
             <p:ph type="body" idx="16" sz="quarter"/>
           </p:nvPr>
         </p:nvSpPr>
-        <p:spPr/>
+        <p:spPr>
+          <a:xfrm>
+            <a:off x="1073427" y="2077576"/>
+            <a:ext cx="10084904" cy="3507298"/>
+          </a:xfrm>
+        </p:spPr>
         <p:txBody>
           <a:bodyPr wrap="square"/>
           <a:lstStyle/>
           <a:p>
-            <a:pPr algn="l" marL="0" indent="-228600">
-              <a:buNone/>
-            </a:pPr>
-            <a:r>
-              <a:rPr sz="1900" b="0">
-                <a:solidFill>
-                  <a:srgbClr val="333844"/>
-                </a:solidFill>
-                <a:latin typeface="Calibri"/>
-              </a:rPr>
-              <a:t>▸  Tipos estándar (PERSON, ORG) no son suficientes para el dominio underground</a:t>
-            </a:r>
-          </a:p>
-          <a:p>
-            <a:pPr algn="l" marL="0" indent="-228600">
-              <a:buNone/>
-            </a:pPr>
-            <a:r>
-              <a:rPr sz="1900" b="0">
-                <a:solidFill>
-                  <a:srgbClr val="333844"/>
-                </a:solidFill>
-                <a:latin typeface="Calibri"/>
-              </a:rPr>
-              <a:t>▸  Tipos específicos definidos: ALIAS, TOOL, MALWARE, CVE, MARKETPLACE</a:t>
-            </a:r>
-          </a:p>
-          <a:p>
-            <a:pPr algn="l" marL="0" indent="-228600">
-              <a:buNone/>
-            </a:pPr>
-            <a:r>
-              <a:rPr sz="1900" b="0">
-                <a:solidFill>
-                  <a:srgbClr val="333844"/>
-                </a:solidFill>
-                <a:latin typeface="Calibri"/>
-              </a:rPr>
-              <a:t>▸  Estrategia: top-50 usuarios × top-50 posts más largos (solo foros en inglés)</a:t>
-            </a:r>
-          </a:p>
-          <a:p>
-            <a:pPr algn="l" marL="0" indent="-228600">
-              <a:buNone/>
-            </a:pPr>
-            <a:r>
-              <a:rPr sz="1900" b="0">
-                <a:solidFill>
-                  <a:srgbClr val="333844"/>
-                </a:solidFill>
-                <a:latin typeface="Calibri"/>
-              </a:rPr>
-              <a:t>▸  Checkpoint automático cada 10 usuarios → reanudable si falla el LLM</a:t>
-            </a:r>
-          </a:p>
-          <a:p>
-            <a:pPr algn="l" marL="0" indent="-228600">
-              <a:buNone/>
-            </a:pPr>
-            <a:r>
-              <a:rPr sz="1900" b="0">
-                <a:solidFill>
-                  <a:srgbClr val="333844"/>
-                </a:solidFill>
-                <a:latin typeface="Calibri"/>
-              </a:rPr>
-              <a:t>▸  Exploit.in excluido: usar DeepPavlov/rubert o spacy ru_core_news_lg para ruso</a:t>
+            <a:r>
+              <a:t>Tipos estándar (PERSON, ORG) no son suficientes para el dominio underground</a:t>
+            </a:r>
+          </a:p>
+          <a:p>
+            <a:r>
+              <a:t>Tipos específicos definidos: ALIAS, TOOL, MALWARE, CVE, MARKETPLACE</a:t>
+            </a:r>
+          </a:p>
+          <a:p>
+            <a:r>
+              <a:t>Estrategia: top-50 usuarios × top-50 posts más largos (solo foros en inglés)</a:t>
+            </a:r>
+          </a:p>
+          <a:p>
+            <a:r>
+              <a:t>Checkpoint automático cada 10 usuarios → reanudable si falla el LLM</a:t>
+            </a:r>
+          </a:p>
+          <a:p>
+            <a:r>
+              <a:t>Exploit.in excluido: usar DeepPavlov/rubert o spacy ru_core_news_lg para ruso</a:t>
             </a:r>
           </a:p>
         </p:txBody>
@@ -6951,12 +6795,6 @@
           <a:lstStyle/>
           <a:p>
             <a:r>
-              <a:rPr sz="2400" b="1">
-                <a:solidFill>
-                  <a:srgbClr val="1A1A2E"/>
-                </a:solidFill>
-                <a:latin typeface="Calibri"/>
-              </a:rPr>
               <a:t>Embeddings cross-foro — estrategia A vs C</a:t>
             </a:r>
           </a:p>
@@ -6972,92 +6810,43 @@
             <p:ph type="body" idx="16" sz="quarter"/>
           </p:nvPr>
         </p:nvSpPr>
-        <p:spPr/>
+        <p:spPr>
+          <a:xfrm>
+            <a:off x="1073427" y="2077576"/>
+            <a:ext cx="10084904" cy="3507298"/>
+          </a:xfrm>
+        </p:spPr>
         <p:txBody>
           <a:bodyPr wrap="square"/>
           <a:lstStyle/>
           <a:p>
-            <a:pPr algn="l" marL="0" indent="-228600">
-              <a:buNone/>
-            </a:pPr>
-            <a:r>
-              <a:rPr sz="1900" b="0">
-                <a:solidFill>
-                  <a:srgbClr val="333844"/>
-                </a:solidFill>
-                <a:latin typeface="Calibri"/>
-              </a:rPr>
-              <a:t>▸  Objetivo: representar a cada usuario con un vector para comparar entre foros</a:t>
-            </a:r>
-          </a:p>
-          <a:p>
-            <a:pPr algn="l" marL="0" indent="-228600">
-              <a:buNone/>
-            </a:pPr>
-            <a:r>
-              <a:rPr sz="1900" b="0">
-                <a:solidFill>
-                  <a:srgbClr val="333844"/>
-                </a:solidFill>
-                <a:latin typeface="Calibri"/>
-              </a:rPr>
-              <a:t>▸  A — embed_users: concatenar todos los posts → 1 vector/usuario (50K chars máx)</a:t>
-            </a:r>
-          </a:p>
-          <a:p>
-            <a:pPr algn="l" marL="0" indent="-228600">
-              <a:buNone/>
-            </a:pPr>
-            <a:r>
-              <a:rPr sz="1900" b="0">
-                <a:solidFill>
-                  <a:srgbClr val="333844"/>
-                </a:solidFill>
-                <a:latin typeface="Calibri"/>
-              </a:rPr>
-              <a:t>▸  C — centroids muestreados: top-50 posts más largos → 1 embedding/post, promedio</a:t>
-            </a:r>
-          </a:p>
-          <a:p>
-            <a:pPr algn="l" marL="0" indent="-228600">
-              <a:buNone/>
-            </a:pPr>
-            <a:r>
-              <a:rPr sz="1900" b="0">
-                <a:solidFill>
-                  <a:srgbClr val="333844"/>
-                </a:solidFill>
-                <a:latin typeface="Calibri"/>
-              </a:rPr>
-              <a:t>▸  Comparación Spearman: ρ(A vs C) indica si ambas estrategias preservan la misma estructura</a:t>
-            </a:r>
-          </a:p>
-          <a:p>
-            <a:pPr algn="l" marL="0" indent="-228600">
-              <a:buNone/>
-            </a:pPr>
-            <a:r>
-              <a:rPr sz="1900" b="0">
-                <a:solidFill>
-                  <a:srgbClr val="333844"/>
-                </a:solidFill>
-                <a:latin typeface="Calibri"/>
-              </a:rPr>
-              <a:t>▸  Con ~21K usuarios en A y ~11K en C, la comparativa valida la estrategia de muestreo</a:t>
-            </a:r>
-          </a:p>
-          <a:p>
-            <a:pPr algn="l" marL="0" indent="-228600">
-              <a:buNone/>
-            </a:pPr>
-            <a:r>
-              <a:rPr sz="1900" b="0">
-                <a:solidFill>
-                  <a:srgbClr val="333844"/>
-                </a:solidFill>
-                <a:latin typeface="Calibri"/>
-              </a:rPr>
-              <a:t>▸  qwen3-embedding (4096D) es multilingual → válido para Exploit.in en ruso</a:t>
+            <a:r>
+              <a:t>Objetivo: representar a cada usuario con un vector para comparar entre foros</a:t>
+            </a:r>
+          </a:p>
+          <a:p>
+            <a:r>
+              <a:t>A — embed_users: concatenar todos los posts → 1 vector/usuario (50K chars máx)</a:t>
+            </a:r>
+          </a:p>
+          <a:p>
+            <a:r>
+              <a:t>C — centroids muestreados: top-50 posts más largos → 1 embedding/post, promedio</a:t>
+            </a:r>
+          </a:p>
+          <a:p>
+            <a:r>
+              <a:t>Comparación Spearman: ρ(A vs C) indica si ambas estrategias preservan la misma estructura</a:t>
+            </a:r>
+          </a:p>
+          <a:p>
+            <a:r>
+              <a:t>Con ~21K usuarios en A y ~11K en C, la comparativa valida la estrategia de muestreo</a:t>
+            </a:r>
+          </a:p>
+          <a:p>
+            <a:r>
+              <a:t>qwen3-embedding (4096D) es multilingual → válido para Exploit.in en ruso</a:t>
             </a:r>
           </a:p>
         </p:txBody>
@@ -7096,12 +6885,6 @@
           <a:lstStyle/>
           <a:p>
             <a:r>
-              <a:rPr sz="2400" b="1">
-                <a:solidFill>
-                  <a:srgbClr val="1A1A2E"/>
-                </a:solidFill>
-                <a:latin typeface="Calibri"/>
-              </a:rPr>
               <a:t>Señal combinada de atribución cross-foro</a:t>
             </a:r>
           </a:p>
@@ -7117,92 +6900,43 @@
             <p:ph type="body" idx="16" sz="quarter"/>
           </p:nvPr>
         </p:nvSpPr>
-        <p:spPr/>
+        <p:spPr>
+          <a:xfrm>
+            <a:off x="1073427" y="2077576"/>
+            <a:ext cx="10084904" cy="3507298"/>
+          </a:xfrm>
+        </p:spPr>
         <p:txBody>
           <a:bodyPr wrap="square"/>
           <a:lstStyle/>
           <a:p>
-            <a:pPr algn="l" marL="0" indent="-228600">
-              <a:buNone/>
-            </a:pPr>
-            <a:r>
-              <a:rPr sz="1900" b="0">
-                <a:solidFill>
-                  <a:srgbClr val="333844"/>
-                </a:solidFill>
-                <a:latin typeface="Calibri"/>
-              </a:rPr>
-              <a:t>▸  Ninguna señal sola es suficiente para afirmar que dos usuarios son la misma persona</a:t>
-            </a:r>
-          </a:p>
-          <a:p>
-            <a:pPr algn="l" marL="0" indent="-228600">
-              <a:buNone/>
-            </a:pPr>
-            <a:r>
-              <a:rPr sz="1900" b="0">
-                <a:solidFill>
-                  <a:srgbClr val="333844"/>
-                </a:solidFill>
-                <a:latin typeface="Calibri"/>
-              </a:rPr>
-              <a:t>▸  Handle exacto o fuzzy: señal fuerte pero eludible (cambiar nombre es trivial)</a:t>
-            </a:r>
-          </a:p>
-          <a:p>
-            <a:pPr algn="l" marL="0" indent="-228600">
-              <a:buNone/>
-            </a:pPr>
-            <a:r>
-              <a:rPr sz="1900" b="0">
-                <a:solidFill>
-                  <a:srgbClr val="333844"/>
-                </a:solidFill>
-                <a:latin typeface="Calibri"/>
-              </a:rPr>
-              <a:t>▸  Similitud coseno de embeddings: captura estilo aunque el handle cambie</a:t>
-            </a:r>
-          </a:p>
-          <a:p>
-            <a:pPr algn="l" marL="0" indent="-228600">
-              <a:buNone/>
-            </a:pPr>
-            <a:r>
-              <a:rPr sz="1900" b="0">
-                <a:solidFill>
-                  <a:srgbClr val="333844"/>
-                </a:solidFill>
-                <a:latin typeface="Calibri"/>
-              </a:rPr>
-              <a:t>▸  Burrows' Delta cross-foro: misma distribución de palabras función → mismo autor</a:t>
-            </a:r>
-          </a:p>
-          <a:p>
-            <a:pPr algn="l" marL="0" indent="-228600">
-              <a:buNone/>
-            </a:pPr>
-            <a:r>
-              <a:rPr sz="1900" b="0">
-                <a:solidFill>
-                  <a:srgbClr val="333844"/>
-                </a:solidFill>
-                <a:latin typeface="Calibri"/>
-              </a:rPr>
-              <a:t>▸  Combinación: score = (handle_sim + 1 - delta_norm + embedding_sim) / 3</a:t>
-            </a:r>
-          </a:p>
-          <a:p>
-            <a:pPr algn="l" marL="0" indent="-228600">
-              <a:buNone/>
-            </a:pPr>
-            <a:r>
-              <a:rPr sz="1900" b="0">
-                <a:solidFill>
-                  <a:srgbClr val="333844"/>
-                </a:solidFill>
-                <a:latin typeface="Calibri"/>
-              </a:rPr>
-              <a:t>▸  Threshold práctico: score &gt; 0.7 con ≥2 señales → candidato de alta prioridad</a:t>
+            <a:r>
+              <a:t>Ninguna señal sola es suficiente para afirmar que dos usuarios son la misma persona</a:t>
+            </a:r>
+          </a:p>
+          <a:p>
+            <a:r>
+              <a:t>Handle exacto o fuzzy: señal fuerte pero eludible (cambiar nombre es trivial)</a:t>
+            </a:r>
+          </a:p>
+          <a:p>
+            <a:r>
+              <a:t>Similitud coseno de embeddings: captura estilo aunque el handle cambie</a:t>
+            </a:r>
+          </a:p>
+          <a:p>
+            <a:r>
+              <a:t>Burrows' Delta cross-foro: misma distribución de palabras función → mismo autor</a:t>
+            </a:r>
+          </a:p>
+          <a:p>
+            <a:r>
+              <a:t>Combinación: score = (handle_sim + 1 - delta_norm + embedding_sim) / 3</a:t>
+            </a:r>
+          </a:p>
+          <a:p>
+            <a:r>
+              <a:t>Threshold práctico: score &gt; 0.7 con ≥2 señales → candidato de alta prioridad</a:t>
             </a:r>
           </a:p>
         </p:txBody>
@@ -7240,34 +6974,31 @@
           <a:bodyPr wrap="square"/>
           <a:lstStyle/>
           <a:p>
+            <a:pPr algn="ctr"/>
             <a:r>
               <a:rPr sz="1300" b="1">
                 <a:solidFill>
-                  <a:srgbClr val="E32B3D"/>
-                </a:solidFill>
-                <a:latin typeface="Calibri"/>
+                  <a:srgbClr val="CD2D37"/>
+                </a:solidFill>
+                <a:latin typeface="Arial"/>
               </a:rPr>
               <a:t>DEMO EN VIVO</a:t>
             </a:r>
           </a:p>
           <a:p>
-            <a:r>
-              <a:rPr sz="2600" b="1">
-                <a:solidFill>
-                  <a:srgbClr val="FFFFFF"/>
-                </a:solidFill>
-                <a:latin typeface="Calibri"/>
-              </a:rPr>
+            <a:pPr algn="ctr"/>
+            <a:r>
               <a:t>Demo — matching cross-foro</a:t>
             </a:r>
           </a:p>
           <a:p>
+            <a:pPr algn="ctr"/>
             <a:r>
               <a:rPr sz="1400">
                 <a:solidFill>
                   <a:srgbClr val="9AA3B5"/>
                 </a:solidFill>
-                <a:latin typeface="Calibri"/>
+                <a:latin typeface="Arial"/>
               </a:rPr>
               <a:t>HackingForums/03_embeddings_profiling.ipynb</a:t>
             </a:r>
@@ -7301,7 +7032,7 @@
                 <a:solidFill>
                   <a:srgbClr val="D6DAE2"/>
                 </a:solidFill>
-                <a:latin typeface="Calibri"/>
+                <a:latin typeface="Arial"/>
               </a:rPr>
               <a:t>1.  Abrir notebook 03_embeddings_profiling</a:t>
             </a:r>
@@ -7312,7 +7043,7 @@
                 <a:solidFill>
                   <a:srgbClr val="D6DAE2"/>
                 </a:solidFill>
-                <a:latin typeface="Calibri"/>
+                <a:latin typeface="Arial"/>
               </a:rPr>
               <a:t>2.  Sección 3: tabla de handles exactos compartidos entre foros</a:t>
             </a:r>
@@ -7323,7 +7054,7 @@
                 <a:solidFill>
                   <a:srgbClr val="D6DAE2"/>
                 </a:solidFill>
-                <a:latin typeface="Calibri"/>
+                <a:latin typeface="Arial"/>
               </a:rPr>
               <a:t>3.  Sección 3: fuzzy matching — ver handles similares (no idénticos)</a:t>
             </a:r>
@@ -7334,7 +7065,7 @@
                 <a:solidFill>
                   <a:srgbClr val="D6DAE2"/>
                 </a:solidFill>
-                <a:latin typeface="Calibri"/>
+                <a:latin typeface="Arial"/>
               </a:rPr>
               <a:t>4.  Sección 5: score combinado → top candidatos a identidad compartida</a:t>
             </a:r>
@@ -7374,34 +7105,31 @@
           <a:bodyPr wrap="square"/>
           <a:lstStyle/>
           <a:p>
+            <a:pPr algn="ctr"/>
             <a:r>
               <a:rPr sz="1300" b="1">
                 <a:solidFill>
-                  <a:srgbClr val="E32B3D"/>
-                </a:solidFill>
-                <a:latin typeface="Calibri"/>
+                  <a:srgbClr val="CD2D37"/>
+                </a:solidFill>
+                <a:latin typeface="Arial"/>
               </a:rPr>
               <a:t>SECCIÓN 5</a:t>
             </a:r>
           </a:p>
           <a:p>
-            <a:r>
-              <a:rPr sz="3000" b="1">
-                <a:solidFill>
-                  <a:srgbClr val="FFFFFF"/>
-                </a:solidFill>
-                <a:latin typeface="Calibri"/>
-              </a:rPr>
+            <a:pPr algn="ctr"/>
+            <a:r>
               <a:t>Conclusiones y aprendizajes</a:t>
             </a:r>
           </a:p>
           <a:p>
+            <a:pPr algn="ctr"/>
             <a:r>
               <a:rPr sz="1600">
                 <a:solidFill>
                   <a:srgbClr val="D6DAE2"/>
                 </a:solidFill>
-                <a:latin typeface="Calibri"/>
+                <a:latin typeface="Arial"/>
               </a:rPr>
               <a:t>Qué nos enseña el caso HackingForums</a:t>
             </a:r>
@@ -7441,34 +7169,31 @@
           <a:bodyPr wrap="square"/>
           <a:lstStyle/>
           <a:p>
+            <a:pPr algn="ctr"/>
             <a:r>
               <a:rPr sz="1300" b="1">
                 <a:solidFill>
-                  <a:srgbClr val="E32B3D"/>
-                </a:solidFill>
-                <a:latin typeface="Calibri"/>
+                  <a:srgbClr val="CD2D37"/>
+                </a:solidFill>
+                <a:latin typeface="Arial"/>
               </a:rPr>
               <a:t>SECCIÓN 1</a:t>
             </a:r>
           </a:p>
           <a:p>
-            <a:r>
-              <a:rPr sz="3000" b="1">
-                <a:solidFill>
-                  <a:srgbClr val="FFFFFF"/>
-                </a:solidFill>
-                <a:latin typeface="Calibri"/>
-              </a:rPr>
+            <a:pPr algn="ctr"/>
+            <a:r>
               <a:t>Datasets y clasificación por tiers</a:t>
             </a:r>
           </a:p>
           <a:p>
+            <a:pPr algn="ctr"/>
             <a:r>
               <a:rPr sz="1600">
                 <a:solidFill>
                   <a:srgbClr val="D6DAE2"/>
                 </a:solidFill>
-                <a:latin typeface="Calibri"/>
+                <a:latin typeface="Arial"/>
               </a:rPr>
               <a:t>Qué tenemos, qué sirve y por qué</a:t>
             </a:r>
@@ -7509,12 +7234,6 @@
           <a:lstStyle/>
           <a:p>
             <a:r>
-              <a:rPr sz="2400" b="1">
-                <a:solidFill>
-                  <a:srgbClr val="1A1A2E"/>
-                </a:solidFill>
-                <a:latin typeface="Calibri"/>
-              </a:rPr>
               <a:t>Resumen ejecutivo</a:t>
             </a:r>
           </a:p>
@@ -7563,9 +7282,9 @@
             <a:r>
               <a:rPr sz="1600" b="1">
                 <a:solidFill>
-                  <a:srgbClr val="E32B3D"/>
-                </a:solidFill>
-                <a:latin typeface="Calibri"/>
+                  <a:srgbClr val="CD2D37"/>
+                </a:solidFill>
+                <a:latin typeface="Arial"/>
               </a:rPr>
               <a:t>Hallazgos técnicos</a:t>
             </a:r>
@@ -7597,9 +7316,9 @@
             <a:r>
               <a:rPr sz="1600">
                 <a:solidFill>
-                  <a:srgbClr val="333844"/>
-                </a:solidFill>
-                <a:latin typeface="Calibri"/>
+                  <a:srgbClr val="465461"/>
+                </a:solidFill>
+                <a:latin typeface="Arial"/>
               </a:rPr>
               <a:t>▸  Bug real: IPS 3.x sin prefijo → falso positivo MyBB (3.2M posts perdidos)</a:t>
             </a:r>
@@ -7608,9 +7327,9 @@
             <a:r>
               <a:rPr sz="1600">
                 <a:solidFill>
-                  <a:srgbClr val="333844"/>
-                </a:solidFill>
-                <a:latin typeface="Calibri"/>
+                  <a:srgbClr val="465461"/>
+                </a:solidFill>
+                <a:latin typeface="Arial"/>
               </a:rPr>
               <a:t>▸  Idioma mixto: Exploit.in ruso requiere pipeline separado en cada capa</a:t>
             </a:r>
@@ -7619,9 +7338,9 @@
             <a:r>
               <a:rPr sz="1600">
                 <a:solidFill>
-                  <a:srgbClr val="333844"/>
-                </a:solidFill>
-                <a:latin typeface="Calibri"/>
+                  <a:srgbClr val="465461"/>
+                </a:solidFill>
+                <a:latin typeface="Arial"/>
               </a:rPr>
               <a:t>▸  Epoch-0: timestamps nulos distorsionan todo el análisis temporal</a:t>
             </a:r>
@@ -7630,9 +7349,9 @@
             <a:r>
               <a:rPr sz="1600">
                 <a:solidFill>
-                  <a:srgbClr val="333844"/>
-                </a:solidFill>
-                <a:latin typeface="Calibri"/>
+                  <a:srgbClr val="465461"/>
+                </a:solidFill>
+                <a:latin typeface="Arial"/>
               </a:rPr>
               <a:t>▸  Cross-foro: handles exactos + fuzzy + embeddings = señal robusta de identidad</a:t>
             </a:r>
@@ -7641,9 +7360,9 @@
             <a:r>
               <a:rPr sz="1600">
                 <a:solidFill>
-                  <a:srgbClr val="333844"/>
-                </a:solidFill>
-                <a:latin typeface="Calibri"/>
+                  <a:srgbClr val="465461"/>
+                </a:solidFill>
+                <a:latin typeface="Arial"/>
               </a:rPr>
               <a:t>▸  qwen3-embedding multilingual: un solo modelo para 5 foros en 2 idiomas</a:t>
             </a:r>
@@ -7676,9 +7395,9 @@
             <a:r>
               <a:rPr sz="1600" b="1">
                 <a:solidFill>
-                  <a:srgbClr val="E32B3D"/>
-                </a:solidFill>
-                <a:latin typeface="Calibri"/>
+                  <a:srgbClr val="CD2D37"/>
+                </a:solidFill>
+                <a:latin typeface="Arial"/>
               </a:rPr>
               <a:t>Aprendizajes metodológicos</a:t>
             </a:r>
@@ -7710,9 +7429,9 @@
             <a:r>
               <a:rPr sz="1600">
                 <a:solidFill>
-                  <a:srgbClr val="333844"/>
-                </a:solidFill>
-                <a:latin typeface="Calibri"/>
+                  <a:srgbClr val="465461"/>
+                </a:solidFill>
+                <a:latin typeface="Arial"/>
               </a:rPr>
               <a:t>▸  Detectar idioma ANTES de cualquier modelo NLP</a:t>
             </a:r>
@@ -7721,9 +7440,9 @@
             <a:r>
               <a:rPr sz="1600">
                 <a:solidFill>
-                  <a:srgbClr val="333844"/>
-                </a:solidFill>
-                <a:latin typeface="Calibri"/>
+                  <a:srgbClr val="465461"/>
+                </a:solidFill>
+                <a:latin typeface="Arial"/>
               </a:rPr>
               <a:t>▸  Testear parsers con dumps reales — los schemas reales divergen del estándar</a:t>
             </a:r>
@@ -7732,9 +7451,9 @@
             <a:r>
               <a:rPr sz="1600">
                 <a:solidFill>
-                  <a:srgbClr val="333844"/>
-                </a:solidFill>
-                <a:latin typeface="Calibri"/>
+                  <a:srgbClr val="465461"/>
+                </a:solidFill>
+                <a:latin typeface="Arial"/>
               </a:rPr>
               <a:t>▸  Validar rango de fechas antes de cualquier análisis temporal</a:t>
             </a:r>
@@ -7743,9 +7462,9 @@
             <a:r>
               <a:rPr sz="1600">
                 <a:solidFill>
-                  <a:srgbClr val="333844"/>
-                </a:solidFill>
-                <a:latin typeface="Calibri"/>
+                  <a:srgbClr val="465461"/>
+                </a:solidFill>
+                <a:latin typeface="Arial"/>
               </a:rPr>
               <a:t>▸  La convergencia de señales supera a cualquier métrica aislada</a:t>
             </a:r>
@@ -7754,9 +7473,9 @@
             <a:r>
               <a:rPr sz="1600">
                 <a:solidFill>
-                  <a:srgbClr val="333844"/>
-                </a:solidFill>
-                <a:latin typeface="Calibri"/>
+                  <a:srgbClr val="465461"/>
+                </a:solidFill>
+                <a:latin typeface="Arial"/>
               </a:rPr>
               <a:t>▸  El muestreo por longitud (top-N posts más largos) preserva señal estilométrica</a:t>
             </a:r>
@@ -7797,12 +7516,6 @@
           <a:lstStyle/>
           <a:p>
             <a:r>
-              <a:rPr sz="2400" b="1">
-                <a:solidFill>
-                  <a:srgbClr val="1A1A2E"/>
-                </a:solidFill>
-                <a:latin typeface="Calibri"/>
-              </a:rPr>
               <a:t>¿Por qué este caso importa?</a:t>
             </a:r>
           </a:p>
@@ -7818,78 +7531,38 @@
             <p:ph type="body" idx="16" sz="quarter"/>
           </p:nvPr>
         </p:nvSpPr>
-        <p:spPr/>
+        <p:spPr>
+          <a:xfrm>
+            <a:off x="1073427" y="2077576"/>
+            <a:ext cx="10084904" cy="3507298"/>
+          </a:xfrm>
+        </p:spPr>
         <p:txBody>
           <a:bodyPr wrap="square"/>
           <a:lstStyle/>
           <a:p>
-            <a:pPr algn="l" marL="0" indent="-228600">
-              <a:buNone/>
-            </a:pPr>
-            <a:r>
-              <a:rPr sz="1900" b="0">
-                <a:solidFill>
-                  <a:srgbClr val="333844"/>
-                </a:solidFill>
-                <a:latin typeface="Calibri"/>
-              </a:rPr>
-              <a:t>▸  Los foros underground no operan en silos — los usuarios se mueven entre plataformas</a:t>
-            </a:r>
-          </a:p>
-          <a:p>
-            <a:pPr algn="l" marL="0" indent="-228600">
-              <a:buNone/>
-            </a:pPr>
-            <a:r>
-              <a:rPr sz="1900" b="0">
-                <a:solidFill>
-                  <a:srgbClr val="333844"/>
-                </a:solidFill>
-                <a:latin typeface="Calibri"/>
-              </a:rPr>
-              <a:t>▸  El pivoting de handles es la técnica central de atribución en threat intelligence</a:t>
-            </a:r>
-          </a:p>
-          <a:p>
-            <a:pPr algn="l" marL="0" indent="-228600">
-              <a:buNone/>
-            </a:pPr>
-            <a:r>
-              <a:rPr sz="1900" b="0">
-                <a:solidFill>
-                  <a:srgbClr val="333844"/>
-                </a:solidFill>
-                <a:latin typeface="Calibri"/>
-              </a:rPr>
-              <a:t>▸  Un solo bug de parser puede dejar fuera millones de posts — la ingeniería importa</a:t>
-            </a:r>
-          </a:p>
-          <a:p>
-            <a:pPr algn="l" marL="0" indent="-228600">
-              <a:buNone/>
-            </a:pPr>
-            <a:r>
-              <a:rPr sz="1900" b="0">
-                <a:solidFill>
-                  <a:srgbClr val="333844"/>
-                </a:solidFill>
-                <a:latin typeface="Calibri"/>
-              </a:rPr>
-              <a:t>▸  El idioma original es siempre mejor para estilometría, aunque dificulte el análisis</a:t>
-            </a:r>
-          </a:p>
-          <a:p>
-            <a:pPr algn="l" marL="0" indent="-228600">
-              <a:buNone/>
-            </a:pPr>
-            <a:r>
-              <a:rPr sz="1900" b="0">
-                <a:solidFill>
-                  <a:srgbClr val="333844"/>
-                </a:solidFill>
-                <a:latin typeface="Calibri"/>
-              </a:rPr>
-              <a:t>▸  Con 5 foros y 5 años de datos, este caso captura la evolución del ecosistema hacking</a:t>
+            <a:r>
+              <a:t>Los foros underground no operan en silos — los usuarios se mueven entre plataformas</a:t>
+            </a:r>
+          </a:p>
+          <a:p>
+            <a:r>
+              <a:t>El pivoting de handles es la técnica central de atribución en threat intelligence</a:t>
+            </a:r>
+          </a:p>
+          <a:p>
+            <a:r>
+              <a:t>Un solo bug de parser puede dejar fuera millones de posts — la ingeniería importa</a:t>
+            </a:r>
+          </a:p>
+          <a:p>
+            <a:r>
+              <a:t>El idioma original es siempre mejor para estilometría, aunque dificulte el análisis</a:t>
+            </a:r>
+          </a:p>
+          <a:p>
+            <a:r>
+              <a:t>Con 5 foros y 5 años de datos, este caso captura la evolución del ecosistema hacking</a:t>
             </a:r>
           </a:p>
         </p:txBody>
@@ -7928,12 +7601,6 @@
           <a:lstStyle/>
           <a:p>
             <a:r>
-              <a:rPr sz="2400" b="1">
-                <a:solidFill>
-                  <a:srgbClr val="1A1A2E"/>
-                </a:solidFill>
-                <a:latin typeface="Calibri"/>
-              </a:rPr>
               <a:t>Los 7 foros evaluados — tier list</a:t>
             </a:r>
           </a:p>
@@ -7964,14 +7631,14 @@
         </p:nvSpPr>
         <p:spPr>
           <a:xfrm>
-            <a:off x="1051560" y="1645920"/>
+            <a:off x="1051560" y="2148840"/>
             <a:ext cx="10058400" cy="365760"/>
           </a:xfrm>
           <a:prstGeom prst="rect">
             <a:avLst/>
           </a:prstGeom>
           <a:solidFill>
-            <a:srgbClr val="E32B3D"/>
+            <a:srgbClr val="CD2D37"/>
           </a:solidFill>
           <a:ln>
             <a:noFill/>
@@ -8007,7 +7674,7 @@
         </p:nvSpPr>
         <p:spPr>
           <a:xfrm>
-            <a:off x="1097280" y="1700920"/>
+            <a:off x="1097280" y="2203840"/>
             <a:ext cx="1584960" cy="365760"/>
           </a:xfrm>
           <a:prstGeom prst="rect">
@@ -8027,7 +7694,7 @@
                 <a:solidFill>
                   <a:srgbClr val="FFFFFF"/>
                 </a:solidFill>
-                <a:latin typeface="Calibri"/>
+                <a:latin typeface="Arial"/>
               </a:rPr>
               <a:t>Foro</a:t>
             </a:r>
@@ -8042,7 +7709,7 @@
         </p:nvSpPr>
         <p:spPr>
           <a:xfrm>
-            <a:off x="2773680" y="1700920"/>
+            <a:off x="2773680" y="2203840"/>
             <a:ext cx="1584960" cy="365760"/>
           </a:xfrm>
           <a:prstGeom prst="rect">
@@ -8062,7 +7729,7 @@
                 <a:solidFill>
                   <a:srgbClr val="FFFFFF"/>
                 </a:solidFill>
-                <a:latin typeface="Calibri"/>
+                <a:latin typeface="Arial"/>
               </a:rPr>
               <a:t>Archivo</a:t>
             </a:r>
@@ -8077,7 +7744,7 @@
         </p:nvSpPr>
         <p:spPr>
           <a:xfrm>
-            <a:off x="4450080" y="1700920"/>
+            <a:off x="4450080" y="2203840"/>
             <a:ext cx="1584960" cy="365760"/>
           </a:xfrm>
           <a:prstGeom prst="rect">
@@ -8097,7 +7764,7 @@
                 <a:solidFill>
                   <a:srgbClr val="FFFFFF"/>
                 </a:solidFill>
-                <a:latin typeface="Calibri"/>
+                <a:latin typeface="Arial"/>
               </a:rPr>
               <a:t>Parser</a:t>
             </a:r>
@@ -8112,7 +7779,7 @@
         </p:nvSpPr>
         <p:spPr>
           <a:xfrm>
-            <a:off x="6126480" y="1700920"/>
+            <a:off x="6126480" y="2203840"/>
             <a:ext cx="1584960" cy="365760"/>
           </a:xfrm>
           <a:prstGeom prst="rect">
@@ -8132,7 +7799,7 @@
                 <a:solidFill>
                   <a:srgbClr val="FFFFFF"/>
                 </a:solidFill>
-                <a:latin typeface="Calibri"/>
+                <a:latin typeface="Arial"/>
               </a:rPr>
               <a:t>Idioma</a:t>
             </a:r>
@@ -8147,7 +7814,7 @@
         </p:nvSpPr>
         <p:spPr>
           <a:xfrm>
-            <a:off x="7802880" y="1700920"/>
+            <a:off x="7802880" y="2203840"/>
             <a:ext cx="1584960" cy="365760"/>
           </a:xfrm>
           <a:prstGeom prst="rect">
@@ -8167,7 +7834,7 @@
                 <a:solidFill>
                   <a:srgbClr val="FFFFFF"/>
                 </a:solidFill>
-                <a:latin typeface="Calibri"/>
+                <a:latin typeface="Arial"/>
               </a:rPr>
               <a:t>Tier</a:t>
             </a:r>
@@ -8182,7 +7849,7 @@
         </p:nvSpPr>
         <p:spPr>
           <a:xfrm>
-            <a:off x="9479280" y="1700920"/>
+            <a:off x="9479280" y="2203840"/>
             <a:ext cx="1584960" cy="365760"/>
           </a:xfrm>
           <a:prstGeom prst="rect">
@@ -8202,7 +7869,7 @@
                 <a:solidFill>
                   <a:srgbClr val="FFFFFF"/>
                 </a:solidFill>
-                <a:latin typeface="Calibri"/>
+                <a:latin typeface="Arial"/>
               </a:rPr>
               <a:t>Uso</a:t>
             </a:r>
@@ -8217,7 +7884,7 @@
         </p:nvSpPr>
         <p:spPr>
           <a:xfrm>
-            <a:off x="1051560" y="2011680"/>
+            <a:off x="1051560" y="2514600"/>
             <a:ext cx="10058400" cy="440689"/>
           </a:xfrm>
           <a:prstGeom prst="rect">
@@ -8260,7 +7927,7 @@
         </p:nvSpPr>
         <p:spPr>
           <a:xfrm>
-            <a:off x="1097280" y="2051680"/>
+            <a:off x="1097280" y="2554600"/>
             <a:ext cx="1584960" cy="440689"/>
           </a:xfrm>
           <a:prstGeom prst="rect">
@@ -8278,9 +7945,9 @@
             <a:r>
               <a:rPr sz="1100" b="0">
                 <a:solidFill>
-                  <a:srgbClr val="333844"/>
-                </a:solidFill>
-                <a:latin typeface="Calibri"/>
+                  <a:srgbClr val="465461"/>
+                </a:solidFill>
+                <a:latin typeface="Arial"/>
               </a:rPr>
               <a:t>OGUsers</a:t>
             </a:r>
@@ -8295,7 +7962,7 @@
         </p:nvSpPr>
         <p:spPr>
           <a:xfrm>
-            <a:off x="2773680" y="2051680"/>
+            <a:off x="2773680" y="2554600"/>
             <a:ext cx="1584960" cy="440689"/>
           </a:xfrm>
           <a:prstGeom prst="rect">
@@ -8313,9 +7980,9 @@
             <a:r>
               <a:rPr sz="1100" b="0">
                 <a:solidFill>
-                  <a:srgbClr val="333844"/>
-                </a:solidFill>
-                <a:latin typeface="Calibri"/>
+                  <a:srgbClr val="465461"/>
+                </a:solidFill>
+                <a:latin typeface="Arial"/>
               </a:rPr>
               <a:t>OGUsers_2019.zip</a:t>
             </a:r>
@@ -8330,7 +7997,7 @@
         </p:nvSpPr>
         <p:spPr>
           <a:xfrm>
-            <a:off x="4450080" y="2051680"/>
+            <a:off x="4450080" y="2554600"/>
             <a:ext cx="1584960" cy="440689"/>
           </a:xfrm>
           <a:prstGeom prst="rect">
@@ -8348,9 +8015,9 @@
             <a:r>
               <a:rPr sz="1100" b="0">
                 <a:solidFill>
-                  <a:srgbClr val="333844"/>
-                </a:solidFill>
-                <a:latin typeface="Calibri"/>
+                  <a:srgbClr val="465461"/>
+                </a:solidFill>
+                <a:latin typeface="Arial"/>
               </a:rPr>
               <a:t>MyBB (prefijo no estándar)</a:t>
             </a:r>
@@ -8365,7 +8032,7 @@
         </p:nvSpPr>
         <p:spPr>
           <a:xfrm>
-            <a:off x="6126480" y="2051680"/>
+            <a:off x="6126480" y="2554600"/>
             <a:ext cx="1584960" cy="440689"/>
           </a:xfrm>
           <a:prstGeom prst="rect">
@@ -8383,9 +8050,9 @@
             <a:r>
               <a:rPr sz="1100" b="0">
                 <a:solidFill>
-                  <a:srgbClr val="333844"/>
-                </a:solidFill>
-                <a:latin typeface="Calibri"/>
+                  <a:srgbClr val="465461"/>
+                </a:solidFill>
+                <a:latin typeface="Arial"/>
               </a:rPr>
               <a:t>Inglés</a:t>
             </a:r>
@@ -8400,7 +8067,7 @@
         </p:nvSpPr>
         <p:spPr>
           <a:xfrm>
-            <a:off x="7802880" y="2051680"/>
+            <a:off x="7802880" y="2554600"/>
             <a:ext cx="1584960" cy="440689"/>
           </a:xfrm>
           <a:prstGeom prst="rect">
@@ -8418,9 +8085,9 @@
             <a:r>
               <a:rPr sz="1100" b="0">
                 <a:solidFill>
-                  <a:srgbClr val="333844"/>
-                </a:solidFill>
-                <a:latin typeface="Calibri"/>
+                  <a:srgbClr val="465461"/>
+                </a:solidFill>
+                <a:latin typeface="Arial"/>
               </a:rPr>
               <a:t>A</a:t>
             </a:r>
@@ -8435,7 +8102,7 @@
         </p:nvSpPr>
         <p:spPr>
           <a:xfrm>
-            <a:off x="9479280" y="2051680"/>
+            <a:off x="9479280" y="2554600"/>
             <a:ext cx="1584960" cy="440689"/>
           </a:xfrm>
           <a:prstGeom prst="rect">
@@ -8453,9 +8120,9 @@
             <a:r>
               <a:rPr sz="1100" b="0">
                 <a:solidFill>
-                  <a:srgbClr val="333844"/>
-                </a:solidFill>
-                <a:latin typeface="Calibri"/>
+                  <a:srgbClr val="465461"/>
+                </a:solidFill>
+                <a:latin typeface="Arial"/>
               </a:rPr>
               <a:t>Red social, pivoting</a:t>
             </a:r>
@@ -8470,7 +8137,7 @@
         </p:nvSpPr>
         <p:spPr>
           <a:xfrm>
-            <a:off x="1051560" y="2452370"/>
+            <a:off x="1051560" y="2955290"/>
             <a:ext cx="10058400" cy="440689"/>
           </a:xfrm>
           <a:prstGeom prst="rect">
@@ -8513,7 +8180,7 @@
         </p:nvSpPr>
         <p:spPr>
           <a:xfrm>
-            <a:off x="1097280" y="2492370"/>
+            <a:off x="1097280" y="2995290"/>
             <a:ext cx="1584960" cy="440689"/>
           </a:xfrm>
           <a:prstGeom prst="rect">
@@ -8531,9 +8198,9 @@
             <a:r>
               <a:rPr sz="1100" b="0">
                 <a:solidFill>
-                  <a:srgbClr val="333844"/>
-                </a:solidFill>
-                <a:latin typeface="Calibri"/>
+                  <a:srgbClr val="465461"/>
+                </a:solidFill>
+                <a:latin typeface="Arial"/>
               </a:rPr>
               <a:t>Exploit.in</a:t>
             </a:r>
@@ -8548,7 +8215,7 @@
         </p:nvSpPr>
         <p:spPr>
           <a:xfrm>
-            <a:off x="2773680" y="2492370"/>
+            <a:off x="2773680" y="2995290"/>
             <a:ext cx="1584960" cy="440689"/>
           </a:xfrm>
           <a:prstGeom prst="rect">
@@ -8566,9 +8233,9 @@
             <a:r>
               <a:rPr sz="1100" b="0">
                 <a:solidFill>
-                  <a:srgbClr val="333844"/>
-                </a:solidFill>
-                <a:latin typeface="Calibri"/>
+                  <a:srgbClr val="465461"/>
+                </a:solidFill>
+                <a:latin typeface="Arial"/>
               </a:rPr>
               <a:t>Exploit.in_2013.12.13.zip</a:t>
             </a:r>
@@ -8583,7 +8250,7 @@
         </p:nvSpPr>
         <p:spPr>
           <a:xfrm>
-            <a:off x="4450080" y="2492370"/>
+            <a:off x="4450080" y="2995290"/>
             <a:ext cx="1584960" cy="440689"/>
           </a:xfrm>
           <a:prstGeom prst="rect">
@@ -8601,9 +8268,9 @@
             <a:r>
               <a:rPr sz="1100" b="0">
                 <a:solidFill>
-                  <a:srgbClr val="333844"/>
-                </a:solidFill>
-                <a:latin typeface="Calibri"/>
+                  <a:srgbClr val="465461"/>
+                </a:solidFill>
+                <a:latin typeface="Arial"/>
               </a:rPr>
               <a:t>IPS 3.x (ibf_)</a:t>
             </a:r>
@@ -8618,7 +8285,7 @@
         </p:nvSpPr>
         <p:spPr>
           <a:xfrm>
-            <a:off x="6126480" y="2492370"/>
+            <a:off x="6126480" y="2995290"/>
             <a:ext cx="1584960" cy="440689"/>
           </a:xfrm>
           <a:prstGeom prst="rect">
@@ -8636,9 +8303,9 @@
             <a:r>
               <a:rPr sz="1100" b="0">
                 <a:solidFill>
-                  <a:srgbClr val="333844"/>
-                </a:solidFill>
-                <a:latin typeface="Calibri"/>
+                  <a:srgbClr val="465461"/>
+                </a:solidFill>
+                <a:latin typeface="Arial"/>
               </a:rPr>
               <a:t>Ruso</a:t>
             </a:r>
@@ -8653,7 +8320,7 @@
         </p:nvSpPr>
         <p:spPr>
           <a:xfrm>
-            <a:off x="7802880" y="2492370"/>
+            <a:off x="7802880" y="2995290"/>
             <a:ext cx="1584960" cy="440689"/>
           </a:xfrm>
           <a:prstGeom prst="rect">
@@ -8671,9 +8338,9 @@
             <a:r>
               <a:rPr sz="1100" b="0">
                 <a:solidFill>
-                  <a:srgbClr val="333844"/>
-                </a:solidFill>
-                <a:latin typeface="Calibri"/>
+                  <a:srgbClr val="465461"/>
+                </a:solidFill>
+                <a:latin typeface="Arial"/>
               </a:rPr>
               <a:t>A</a:t>
             </a:r>
@@ -8688,7 +8355,7 @@
         </p:nvSpPr>
         <p:spPr>
           <a:xfrm>
-            <a:off x="9479280" y="2492370"/>
+            <a:off x="9479280" y="2995290"/>
             <a:ext cx="1584960" cy="440689"/>
           </a:xfrm>
           <a:prstGeom prst="rect">
@@ -8706,9 +8373,9 @@
             <a:r>
               <a:rPr sz="1100" b="0">
                 <a:solidFill>
-                  <a:srgbClr val="333844"/>
-                </a:solidFill>
-                <a:latin typeface="Calibri"/>
+                  <a:srgbClr val="465461"/>
+                </a:solidFill>
+                <a:latin typeface="Arial"/>
               </a:rPr>
               <a:t>Pivoting cross-foro</a:t>
             </a:r>
@@ -8723,7 +8390,7 @@
         </p:nvSpPr>
         <p:spPr>
           <a:xfrm>
-            <a:off x="1051560" y="2893060"/>
+            <a:off x="1051560" y="3395979"/>
             <a:ext cx="10058400" cy="440689"/>
           </a:xfrm>
           <a:prstGeom prst="rect">
@@ -8766,7 +8433,7 @@
         </p:nvSpPr>
         <p:spPr>
           <a:xfrm>
-            <a:off x="1097280" y="2933060"/>
+            <a:off x="1097280" y="3435979"/>
             <a:ext cx="1584960" cy="440689"/>
           </a:xfrm>
           <a:prstGeom prst="rect">
@@ -8784,9 +8451,9 @@
             <a:r>
               <a:rPr sz="1100" b="0">
                 <a:solidFill>
-                  <a:srgbClr val="333844"/>
-                </a:solidFill>
-                <a:latin typeface="Calibri"/>
+                  <a:srgbClr val="465461"/>
+                </a:solidFill>
+                <a:latin typeface="Arial"/>
               </a:rPr>
               <a:t>Cracked.to</a:t>
             </a:r>
@@ -8801,7 +8468,7 @@
         </p:nvSpPr>
         <p:spPr>
           <a:xfrm>
-            <a:off x="2773680" y="2933060"/>
+            <a:off x="2773680" y="3435979"/>
             <a:ext cx="1584960" cy="440689"/>
           </a:xfrm>
           <a:prstGeom prst="rect">
@@ -8819,9 +8486,9 @@
             <a:r>
               <a:rPr sz="1100" b="0">
                 <a:solidFill>
-                  <a:srgbClr val="333844"/>
-                </a:solidFill>
-                <a:latin typeface="Calibri"/>
+                  <a:srgbClr val="465461"/>
+                </a:solidFill>
+                <a:latin typeface="Arial"/>
               </a:rPr>
               <a:t>Cracked.to_2019.01.zip</a:t>
             </a:r>
@@ -8836,7 +8503,7 @@
         </p:nvSpPr>
         <p:spPr>
           <a:xfrm>
-            <a:off x="4450080" y="2933060"/>
+            <a:off x="4450080" y="3435979"/>
             <a:ext cx="1584960" cy="440689"/>
           </a:xfrm>
           <a:prstGeom prst="rect">
@@ -8854,9 +8521,9 @@
             <a:r>
               <a:rPr sz="1100" b="0">
                 <a:solidFill>
-                  <a:srgbClr val="333844"/>
-                </a:solidFill>
-                <a:latin typeface="Calibri"/>
+                  <a:srgbClr val="465461"/>
+                </a:solidFill>
+                <a:latin typeface="Arial"/>
               </a:rPr>
               <a:t>MyBB</a:t>
             </a:r>
@@ -8871,7 +8538,7 @@
         </p:nvSpPr>
         <p:spPr>
           <a:xfrm>
-            <a:off x="6126480" y="2933060"/>
+            <a:off x="6126480" y="3435979"/>
             <a:ext cx="1584960" cy="440689"/>
           </a:xfrm>
           <a:prstGeom prst="rect">
@@ -8889,9 +8556,9 @@
             <a:r>
               <a:rPr sz="1100" b="0">
                 <a:solidFill>
-                  <a:srgbClr val="333844"/>
-                </a:solidFill>
-                <a:latin typeface="Calibri"/>
+                  <a:srgbClr val="465461"/>
+                </a:solidFill>
+                <a:latin typeface="Arial"/>
               </a:rPr>
               <a:t>Inglés</a:t>
             </a:r>
@@ -8906,7 +8573,7 @@
         </p:nvSpPr>
         <p:spPr>
           <a:xfrm>
-            <a:off x="7802880" y="2933060"/>
+            <a:off x="7802880" y="3435979"/>
             <a:ext cx="1584960" cy="440689"/>
           </a:xfrm>
           <a:prstGeom prst="rect">
@@ -8924,9 +8591,9 @@
             <a:r>
               <a:rPr sz="1100" b="0">
                 <a:solidFill>
-                  <a:srgbClr val="333844"/>
-                </a:solidFill>
-                <a:latin typeface="Calibri"/>
+                  <a:srgbClr val="465461"/>
+                </a:solidFill>
+                <a:latin typeface="Arial"/>
               </a:rPr>
               <a:t>A</a:t>
             </a:r>
@@ -8941,7 +8608,7 @@
         </p:nvSpPr>
         <p:spPr>
           <a:xfrm>
-            <a:off x="9479280" y="2933060"/>
+            <a:off x="9479280" y="3435979"/>
             <a:ext cx="1584960" cy="440689"/>
           </a:xfrm>
           <a:prstGeom prst="rect">
@@ -8959,9 +8626,9 @@
             <a:r>
               <a:rPr sz="1100" b="0">
                 <a:solidFill>
-                  <a:srgbClr val="333844"/>
-                </a:solidFill>
-                <a:latin typeface="Calibri"/>
+                  <a:srgbClr val="465461"/>
+                </a:solidFill>
+                <a:latin typeface="Arial"/>
               </a:rPr>
               <a:t>Pivoting + contenido</a:t>
             </a:r>
@@ -8976,7 +8643,7 @@
         </p:nvSpPr>
         <p:spPr>
           <a:xfrm>
-            <a:off x="1051560" y="3333749"/>
+            <a:off x="1051560" y="3836669"/>
             <a:ext cx="10058400" cy="440689"/>
           </a:xfrm>
           <a:prstGeom prst="rect">
@@ -9019,7 +8686,7 @@
         </p:nvSpPr>
         <p:spPr>
           <a:xfrm>
-            <a:off x="1097280" y="3373749"/>
+            <a:off x="1097280" y="3876669"/>
             <a:ext cx="1584960" cy="440689"/>
           </a:xfrm>
           <a:prstGeom prst="rect">
@@ -9037,9 +8704,9 @@
             <a:r>
               <a:rPr sz="1100" b="0">
                 <a:solidFill>
-                  <a:srgbClr val="333844"/>
-                </a:solidFill>
-                <a:latin typeface="Calibri"/>
+                  <a:srgbClr val="465461"/>
+                </a:solidFill>
+                <a:latin typeface="Arial"/>
               </a:rPr>
               <a:t>Nulled.io</a:t>
             </a:r>
@@ -9054,7 +8721,7 @@
         </p:nvSpPr>
         <p:spPr>
           <a:xfrm>
-            <a:off x="2773680" y="3373749"/>
+            <a:off x="2773680" y="3876669"/>
             <a:ext cx="1584960" cy="440689"/>
           </a:xfrm>
           <a:prstGeom prst="rect">
@@ -9072,9 +8739,9 @@
             <a:r>
               <a:rPr sz="1100" b="0">
                 <a:solidFill>
-                  <a:srgbClr val="333844"/>
-                </a:solidFill>
-                <a:latin typeface="Calibri"/>
+                  <a:srgbClr val="465461"/>
+                </a:solidFill>
+                <a:latin typeface="Arial"/>
               </a:rPr>
               <a:t>Nulled.io_2016.05.zip</a:t>
             </a:r>
@@ -9089,7 +8756,7 @@
         </p:nvSpPr>
         <p:spPr>
           <a:xfrm>
-            <a:off x="4450080" y="3373749"/>
+            <a:off x="4450080" y="3876669"/>
             <a:ext cx="1584960" cy="440689"/>
           </a:xfrm>
           <a:prstGeom prst="rect">
@@ -9107,9 +8774,9 @@
             <a:r>
               <a:rPr sz="1100" b="0">
                 <a:solidFill>
-                  <a:srgbClr val="333844"/>
-                </a:solidFill>
-                <a:latin typeface="Calibri"/>
+                  <a:srgbClr val="465461"/>
+                </a:solidFill>
+                <a:latin typeface="Arial"/>
               </a:rPr>
               <a:t>IPS 3.x (sin prefijo)</a:t>
             </a:r>
@@ -9124,7 +8791,7 @@
         </p:nvSpPr>
         <p:spPr>
           <a:xfrm>
-            <a:off x="6126480" y="3373749"/>
+            <a:off x="6126480" y="3876669"/>
             <a:ext cx="1584960" cy="440689"/>
           </a:xfrm>
           <a:prstGeom prst="rect">
@@ -9142,9 +8809,9 @@
             <a:r>
               <a:rPr sz="1100" b="0">
                 <a:solidFill>
-                  <a:srgbClr val="333844"/>
-                </a:solidFill>
-                <a:latin typeface="Calibri"/>
+                  <a:srgbClr val="465461"/>
+                </a:solidFill>
+                <a:latin typeface="Arial"/>
               </a:rPr>
               <a:t>Inglés</a:t>
             </a:r>
@@ -9159,7 +8826,7 @@
         </p:nvSpPr>
         <p:spPr>
           <a:xfrm>
-            <a:off x="7802880" y="3373749"/>
+            <a:off x="7802880" y="3876669"/>
             <a:ext cx="1584960" cy="440689"/>
           </a:xfrm>
           <a:prstGeom prst="rect">
@@ -9177,9 +8844,9 @@
             <a:r>
               <a:rPr sz="1100" b="0">
                 <a:solidFill>
-                  <a:srgbClr val="333844"/>
-                </a:solidFill>
-                <a:latin typeface="Calibri"/>
+                  <a:srgbClr val="465461"/>
+                </a:solidFill>
+                <a:latin typeface="Arial"/>
               </a:rPr>
               <a:t>A</a:t>
             </a:r>
@@ -9194,7 +8861,7 @@
         </p:nvSpPr>
         <p:spPr>
           <a:xfrm>
-            <a:off x="9479280" y="3373749"/>
+            <a:off x="9479280" y="3876669"/>
             <a:ext cx="1584960" cy="440689"/>
           </a:xfrm>
           <a:prstGeom prst="rect">
@@ -9212,9 +8879,9 @@
             <a:r>
               <a:rPr sz="1100" b="0">
                 <a:solidFill>
-                  <a:srgbClr val="333844"/>
-                </a:solidFill>
-                <a:latin typeface="Calibri"/>
+                  <a:srgbClr val="465461"/>
+                </a:solidFill>
+                <a:latin typeface="Arial"/>
               </a:rPr>
               <a:t>Contexto histórico</a:t>
             </a:r>
@@ -9229,7 +8896,7 @@
         </p:nvSpPr>
         <p:spPr>
           <a:xfrm>
-            <a:off x="1051560" y="3774439"/>
+            <a:off x="1051560" y="4277359"/>
             <a:ext cx="10058400" cy="440689"/>
           </a:xfrm>
           <a:prstGeom prst="rect">
@@ -9272,7 +8939,7 @@
         </p:nvSpPr>
         <p:spPr>
           <a:xfrm>
-            <a:off x="1097280" y="3814439"/>
+            <a:off x="1097280" y="4317359"/>
             <a:ext cx="1584960" cy="440689"/>
           </a:xfrm>
           <a:prstGeom prst="rect">
@@ -9290,9 +8957,9 @@
             <a:r>
               <a:rPr sz="1100" b="0">
                 <a:solidFill>
-                  <a:srgbClr val="333844"/>
-                </a:solidFill>
-                <a:latin typeface="Calibri"/>
+                  <a:srgbClr val="465461"/>
+                </a:solidFill>
+                <a:latin typeface="Arial"/>
               </a:rPr>
               <a:t>RaidForums</a:t>
             </a:r>
@@ -9307,7 +8974,7 @@
         </p:nvSpPr>
         <p:spPr>
           <a:xfrm>
-            <a:off x="2773680" y="3814439"/>
+            <a:off x="2773680" y="4317359"/>
             <a:ext cx="1584960" cy="440689"/>
           </a:xfrm>
           <a:prstGeom prst="rect">
@@ -9325,9 +8992,9 @@
             <a:r>
               <a:rPr sz="1100" b="0">
                 <a:solidFill>
-                  <a:srgbClr val="333844"/>
-                </a:solidFill>
-                <a:latin typeface="Calibri"/>
+                  <a:srgbClr val="465461"/>
+                </a:solidFill>
+                <a:latin typeface="Arial"/>
               </a:rPr>
               <a:t>RaidForums_2021.zip</a:t>
             </a:r>
@@ -9342,7 +9009,7 @@
         </p:nvSpPr>
         <p:spPr>
           <a:xfrm>
-            <a:off x="4450080" y="3814439"/>
+            <a:off x="4450080" y="4317359"/>
             <a:ext cx="1584960" cy="440689"/>
           </a:xfrm>
           <a:prstGeom prst="rect">
@@ -9360,9 +9027,9 @@
             <a:r>
               <a:rPr sz="1100" b="0">
                 <a:solidFill>
-                  <a:srgbClr val="333844"/>
-                </a:solidFill>
-                <a:latin typeface="Calibri"/>
+                  <a:srgbClr val="465461"/>
+                </a:solidFill>
+                <a:latin typeface="Arial"/>
               </a:rPr>
               <a:t>MyBB</a:t>
             </a:r>
@@ -9377,7 +9044,7 @@
         </p:nvSpPr>
         <p:spPr>
           <a:xfrm>
-            <a:off x="6126480" y="3814439"/>
+            <a:off x="6126480" y="4317359"/>
             <a:ext cx="1584960" cy="440689"/>
           </a:xfrm>
           <a:prstGeom prst="rect">
@@ -9395,9 +9062,9 @@
             <a:r>
               <a:rPr sz="1100" b="0">
                 <a:solidFill>
-                  <a:srgbClr val="333844"/>
-                </a:solidFill>
-                <a:latin typeface="Calibri"/>
+                  <a:srgbClr val="465461"/>
+                </a:solidFill>
+                <a:latin typeface="Arial"/>
               </a:rPr>
               <a:t>Inglés</a:t>
             </a:r>
@@ -9412,7 +9079,7 @@
         </p:nvSpPr>
         <p:spPr>
           <a:xfrm>
-            <a:off x="7802880" y="3814439"/>
+            <a:off x="7802880" y="4317359"/>
             <a:ext cx="1584960" cy="440689"/>
           </a:xfrm>
           <a:prstGeom prst="rect">
@@ -9430,9 +9097,9 @@
             <a:r>
               <a:rPr sz="1100" b="0">
                 <a:solidFill>
-                  <a:srgbClr val="333844"/>
-                </a:solidFill>
-                <a:latin typeface="Calibri"/>
+                  <a:srgbClr val="465461"/>
+                </a:solidFill>
+                <a:latin typeface="Arial"/>
               </a:rPr>
               <a:t>A</a:t>
             </a:r>
@@ -9447,7 +9114,7 @@
         </p:nvSpPr>
         <p:spPr>
           <a:xfrm>
-            <a:off x="9479280" y="3814439"/>
+            <a:off x="9479280" y="4317359"/>
             <a:ext cx="1584960" cy="440689"/>
           </a:xfrm>
           <a:prstGeom prst="rect">
@@ -9465,9 +9132,9 @@
             <a:r>
               <a:rPr sz="1100" b="0">
                 <a:solidFill>
-                  <a:srgbClr val="333844"/>
-                </a:solidFill>
-                <a:latin typeface="Calibri"/>
+                  <a:srgbClr val="465461"/>
+                </a:solidFill>
+                <a:latin typeface="Arial"/>
               </a:rPr>
               <a:t>Pivoting cross-foro</a:t>
             </a:r>
@@ -9482,7 +9149,7 @@
         </p:nvSpPr>
         <p:spPr>
           <a:xfrm>
-            <a:off x="1051560" y="4215129"/>
+            <a:off x="1051560" y="4718049"/>
             <a:ext cx="10058400" cy="440689"/>
           </a:xfrm>
           <a:prstGeom prst="rect">
@@ -9525,7 +9192,7 @@
         </p:nvSpPr>
         <p:spPr>
           <a:xfrm>
-            <a:off x="1097280" y="4255129"/>
+            <a:off x="1097280" y="4758049"/>
             <a:ext cx="1584960" cy="440689"/>
           </a:xfrm>
           <a:prstGeom prst="rect">
@@ -9543,9 +9210,9 @@
             <a:r>
               <a:rPr sz="1100" b="0">
                 <a:solidFill>
-                  <a:srgbClr val="333844"/>
-                </a:solidFill>
-                <a:latin typeface="Calibri"/>
+                  <a:srgbClr val="465461"/>
+                </a:solidFill>
+                <a:latin typeface="Arial"/>
               </a:rPr>
               <a:t>Hackforums.net</a:t>
             </a:r>
@@ -9560,7 +9227,7 @@
         </p:nvSpPr>
         <p:spPr>
           <a:xfrm>
-            <a:off x="2773680" y="4255129"/>
+            <a:off x="2773680" y="4758049"/>
             <a:ext cx="1584960" cy="440689"/>
           </a:xfrm>
           <a:prstGeom prst="rect">
@@ -9578,9 +9245,9 @@
             <a:r>
               <a:rPr sz="1100" b="0">
                 <a:solidFill>
-                  <a:srgbClr val="333844"/>
-                </a:solidFill>
-                <a:latin typeface="Calibri"/>
+                  <a:srgbClr val="465461"/>
+                </a:solidFill>
+                <a:latin typeface="Arial"/>
               </a:rPr>
               <a:t>Hackforums.net_2015.zip</a:t>
             </a:r>
@@ -9595,7 +9262,7 @@
         </p:nvSpPr>
         <p:spPr>
           <a:xfrm>
-            <a:off x="4450080" y="4255129"/>
+            <a:off x="4450080" y="4758049"/>
             <a:ext cx="1584960" cy="440689"/>
           </a:xfrm>
           <a:prstGeom prst="rect">
@@ -9613,9 +9280,9 @@
             <a:r>
               <a:rPr sz="1100" b="0">
                 <a:solidFill>
-                  <a:srgbClr val="333844"/>
-                </a:solidFill>
-                <a:latin typeface="Calibri"/>
+                  <a:srgbClr val="465461"/>
+                </a:solidFill>
+                <a:latin typeface="Arial"/>
               </a:rPr>
               <a:t>MyBB (solo usuarios)</a:t>
             </a:r>
@@ -9630,7 +9297,7 @@
         </p:nvSpPr>
         <p:spPr>
           <a:xfrm>
-            <a:off x="6126480" y="4255129"/>
+            <a:off x="6126480" y="4758049"/>
             <a:ext cx="1584960" cy="440689"/>
           </a:xfrm>
           <a:prstGeom prst="rect">
@@ -9648,9 +9315,9 @@
             <a:r>
               <a:rPr sz="1100" b="0">
                 <a:solidFill>
-                  <a:srgbClr val="333844"/>
-                </a:solidFill>
-                <a:latin typeface="Calibri"/>
+                  <a:srgbClr val="465461"/>
+                </a:solidFill>
+                <a:latin typeface="Arial"/>
               </a:rPr>
               <a:t>—</a:t>
             </a:r>
@@ -9665,7 +9332,7 @@
         </p:nvSpPr>
         <p:spPr>
           <a:xfrm>
-            <a:off x="7802880" y="4255129"/>
+            <a:off x="7802880" y="4758049"/>
             <a:ext cx="1584960" cy="440689"/>
           </a:xfrm>
           <a:prstGeom prst="rect">
@@ -9683,9 +9350,9 @@
             <a:r>
               <a:rPr sz="1100" b="0">
                 <a:solidFill>
-                  <a:srgbClr val="333844"/>
-                </a:solidFill>
-                <a:latin typeface="Calibri"/>
+                  <a:srgbClr val="465461"/>
+                </a:solidFill>
+                <a:latin typeface="Arial"/>
               </a:rPr>
               <a:t>A↓</a:t>
             </a:r>
@@ -9700,7 +9367,7 @@
         </p:nvSpPr>
         <p:spPr>
           <a:xfrm>
-            <a:off x="9479280" y="4255129"/>
+            <a:off x="9479280" y="4758049"/>
             <a:ext cx="1584960" cy="440689"/>
           </a:xfrm>
           <a:prstGeom prst="rect">
@@ -9718,9 +9385,9 @@
             <a:r>
               <a:rPr sz="1100" b="0">
                 <a:solidFill>
-                  <a:srgbClr val="333844"/>
-                </a:solidFill>
-                <a:latin typeface="Calibri"/>
+                  <a:srgbClr val="465461"/>
+                </a:solidFill>
+                <a:latin typeface="Arial"/>
               </a:rPr>
               <a:t>Solo handles</a:t>
             </a:r>
@@ -9735,7 +9402,7 @@
         </p:nvSpPr>
         <p:spPr>
           <a:xfrm>
-            <a:off x="1051560" y="4655819"/>
+            <a:off x="1051560" y="5158739"/>
             <a:ext cx="10058400" cy="440689"/>
           </a:xfrm>
           <a:prstGeom prst="rect">
@@ -9778,7 +9445,7 @@
         </p:nvSpPr>
         <p:spPr>
           <a:xfrm>
-            <a:off x="1097280" y="4695819"/>
+            <a:off x="1097280" y="5198739"/>
             <a:ext cx="1584960" cy="440689"/>
           </a:xfrm>
           <a:prstGeom prst="rect">
@@ -9796,9 +9463,9 @@
             <a:r>
               <a:rPr sz="1100" b="0">
                 <a:solidFill>
-                  <a:srgbClr val="333844"/>
-                </a:solidFill>
-                <a:latin typeface="Calibri"/>
+                  <a:srgbClr val="465461"/>
+                </a:solidFill>
+                <a:latin typeface="Arial"/>
               </a:rPr>
               <a:t>Void.to</a:t>
             </a:r>
@@ -9813,7 +9480,7 @@
         </p:nvSpPr>
         <p:spPr>
           <a:xfrm>
-            <a:off x="2773680" y="4695819"/>
+            <a:off x="2773680" y="5198739"/>
             <a:ext cx="1584960" cy="440689"/>
           </a:xfrm>
           <a:prstGeom prst="rect">
@@ -9831,9 +9498,9 @@
             <a:r>
               <a:rPr sz="1100" b="0">
                 <a:solidFill>
-                  <a:srgbClr val="333844"/>
-                </a:solidFill>
-                <a:latin typeface="Calibri"/>
+                  <a:srgbClr val="465461"/>
+                </a:solidFill>
+                <a:latin typeface="Arial"/>
               </a:rPr>
               <a:t>Void.to.zip</a:t>
             </a:r>
@@ -9848,7 +9515,7 @@
         </p:nvSpPr>
         <p:spPr>
           <a:xfrm>
-            <a:off x="4450080" y="4695819"/>
+            <a:off x="4450080" y="5198739"/>
             <a:ext cx="1584960" cy="440689"/>
           </a:xfrm>
           <a:prstGeom prst="rect">
@@ -9866,9 +9533,9 @@
             <a:r>
               <a:rPr sz="1100" b="0">
                 <a:solidFill>
-                  <a:srgbClr val="333844"/>
-                </a:solidFill>
-                <a:latin typeface="Calibri"/>
+                  <a:srgbClr val="465461"/>
+                </a:solidFill>
+                <a:latin typeface="Arial"/>
               </a:rPr>
               <a:t>MyBB</a:t>
             </a:r>
@@ -9883,7 +9550,7 @@
         </p:nvSpPr>
         <p:spPr>
           <a:xfrm>
-            <a:off x="6126480" y="4695819"/>
+            <a:off x="6126480" y="5198739"/>
             <a:ext cx="1584960" cy="440689"/>
           </a:xfrm>
           <a:prstGeom prst="rect">
@@ -9901,9 +9568,9 @@
             <a:r>
               <a:rPr sz="1100" b="0">
                 <a:solidFill>
-                  <a:srgbClr val="333844"/>
-                </a:solidFill>
-                <a:latin typeface="Calibri"/>
+                  <a:srgbClr val="465461"/>
+                </a:solidFill>
+                <a:latin typeface="Arial"/>
               </a:rPr>
               <a:t>—</a:t>
             </a:r>
@@ -9918,7 +9585,7 @@
         </p:nvSpPr>
         <p:spPr>
           <a:xfrm>
-            <a:off x="7802880" y="4695819"/>
+            <a:off x="7802880" y="5198739"/>
             <a:ext cx="1584960" cy="440689"/>
           </a:xfrm>
           <a:prstGeom prst="rect">
@@ -9936,9 +9603,9 @@
             <a:r>
               <a:rPr sz="1100" b="0">
                 <a:solidFill>
-                  <a:srgbClr val="333844"/>
-                </a:solidFill>
-                <a:latin typeface="Calibri"/>
+                  <a:srgbClr val="465461"/>
+                </a:solidFill>
+                <a:latin typeface="Arial"/>
               </a:rPr>
               <a:t>—</a:t>
             </a:r>
@@ -9953,7 +9620,7 @@
         </p:nvSpPr>
         <p:spPr>
           <a:xfrm>
-            <a:off x="9479280" y="4695819"/>
+            <a:off x="9479280" y="5198739"/>
             <a:ext cx="1584960" cy="440689"/>
           </a:xfrm>
           <a:prstGeom prst="rect">
@@ -9971,9 +9638,9 @@
             <a:r>
               <a:rPr sz="1100" b="0">
                 <a:solidFill>
-                  <a:srgbClr val="333844"/>
-                </a:solidFill>
-                <a:latin typeface="Calibri"/>
+                  <a:srgbClr val="465461"/>
+                </a:solidFill>
+                <a:latin typeface="Arial"/>
               </a:rPr>
               <a:t>Descartado (schema-only)</a:t>
             </a:r>
@@ -10008,7 +9675,7 @@
                 <a:solidFill>
                   <a:srgbClr val="707888"/>
                 </a:solidFill>
-                <a:latin typeface="Calibri"/>
+                <a:latin typeface="Arial"/>
               </a:rPr>
               <a:t>ℹ  Tier A = dump SQL completo. Tier A↓ = sin posts. Tier — = sin datos.</a:t>
             </a:r>
@@ -10049,12 +9716,6 @@
           <a:lstStyle/>
           <a:p>
             <a:r>
-              <a:rPr sz="2400" b="1">
-                <a:solidFill>
-                  <a:srgbClr val="1A1A2E"/>
-                </a:solidFill>
-                <a:latin typeface="Calibri"/>
-              </a:rPr>
               <a:t>El bug que no esperabas — IPS 3.x sin prefijo</a:t>
             </a:r>
           </a:p>
@@ -10070,90 +9731,50 @@
             <p:ph type="body" idx="16" sz="quarter"/>
           </p:nvPr>
         </p:nvSpPr>
-        <p:spPr/>
+        <p:spPr>
+          <a:xfrm>
+            <a:off x="1073427" y="2077576"/>
+            <a:ext cx="10084904" cy="3507298"/>
+          </a:xfrm>
+        </p:spPr>
         <p:txBody>
           <a:bodyPr wrap="square"/>
           <a:lstStyle/>
           <a:p>
-            <a:pPr algn="l" marL="0" indent="-228600">
+            <a:r>
+              <a:t>Problema: load_forum() devuelve {} para Nulled.io → 0 posts cargados</a:t>
+            </a:r>
+          </a:p>
+          <a:p>
+            <a:r>
+              <a:t>Diagnóstico: is_mybb() devuelve True porque _TABLE_MAP tiene clave 'posts'</a:t>
+            </a:r>
+          </a:p>
+          <a:p>
+            <a:r>
+              <a:t>IPS 3.x sin prefijo tiene exactamente una tabla llamada 'posts' → falso positivo</a:t>
+            </a:r>
+          </a:p>
+          <a:p>
+            <a:r>
+              <a:t>Fix: ejecutar _detect_version() (IPS-específico, comprueba columna member_id) ANTES de is_mybb()</a:t>
+            </a:r>
+          </a:p>
+          <a:p>
+            <a:r>
+              <a:t>Lección: los parsers genéricos fallan en variantes de schema — siempre testear con dumps reales</a:t>
+            </a:r>
+          </a:p>
+          <a:p>
+            <a:pPr lvl="1" marL="274320" indent="-228600">
               <a:buNone/>
             </a:pPr>
             <a:r>
-              <a:rPr sz="1900" b="0">
-                <a:solidFill>
-                  <a:srgbClr val="333844"/>
-                </a:solidFill>
-                <a:latin typeface="Calibri"/>
-              </a:rPr>
-              <a:t>▸  Problema: load_forum() devuelve {} para Nulled.io → 0 posts cargados</a:t>
-            </a:r>
-          </a:p>
-          <a:p>
-            <a:pPr algn="l" marL="0" indent="-228600">
-              <a:buNone/>
-            </a:pPr>
-            <a:r>
-              <a:rPr sz="1900" b="0">
-                <a:solidFill>
-                  <a:srgbClr val="333844"/>
-                </a:solidFill>
-                <a:latin typeface="Calibri"/>
-              </a:rPr>
-              <a:t>▸  Diagnóstico: is_mybb() devuelve True porque _TABLE_MAP tiene clave 'posts'</a:t>
-            </a:r>
-          </a:p>
-          <a:p>
-            <a:pPr algn="l" marL="0" indent="-228600">
-              <a:buNone/>
-            </a:pPr>
-            <a:r>
-              <a:rPr sz="1900" b="0">
-                <a:solidFill>
-                  <a:srgbClr val="333844"/>
-                </a:solidFill>
-                <a:latin typeface="Calibri"/>
-              </a:rPr>
-              <a:t>▸  IPS 3.x sin prefijo tiene exactamente una tabla llamada 'posts' → falso positivo</a:t>
-            </a:r>
-          </a:p>
-          <a:p>
-            <a:pPr algn="l" marL="0" indent="-228600">
-              <a:buNone/>
-            </a:pPr>
-            <a:r>
-              <a:rPr sz="1900" b="0">
-                <a:solidFill>
-                  <a:srgbClr val="333844"/>
-                </a:solidFill>
-                <a:latin typeface="Calibri"/>
-              </a:rPr>
-              <a:t>▸  Fix: ejecutar _detect_version() (IPS-específico, comprueba columna member_id) ANTES de is_mybb()</a:t>
-            </a:r>
-          </a:p>
-          <a:p>
-            <a:pPr algn="l" marL="0" indent="-228600">
-              <a:buNone/>
-            </a:pPr>
-            <a:r>
-              <a:rPr sz="1900" b="0">
-                <a:solidFill>
-                  <a:srgbClr val="333844"/>
-                </a:solidFill>
-                <a:latin typeface="Calibri"/>
-              </a:rPr>
-              <a:t>▸  Lección: los parsers genéricos fallan en variantes de schema — siempre testear con dumps reales</a:t>
-            </a:r>
-          </a:p>
-          <a:p>
-            <a:pPr lvl="1" algn="l" marL="274320" indent="-228600">
-              <a:buNone/>
-            </a:pPr>
-            <a:r>
-              <a:rPr sz="1600" b="0">
+              <a:rPr sz="1500" b="0">
                 <a:solidFill>
                   <a:srgbClr val="707888"/>
                 </a:solidFill>
-                <a:latin typeface="Calibri"/>
+                <a:latin typeface="Arial"/>
               </a:rPr>
               <a:t>·  3,200,000 posts de Nulled.io perdidos hasta encontrar el bug</a:t>
             </a:r>
@@ -10193,34 +9814,31 @@
           <a:bodyPr wrap="square"/>
           <a:lstStyle/>
           <a:p>
+            <a:pPr algn="ctr"/>
             <a:r>
               <a:rPr sz="1300" b="1">
                 <a:solidFill>
-                  <a:srgbClr val="E32B3D"/>
-                </a:solidFill>
-                <a:latin typeface="Calibri"/>
+                  <a:srgbClr val="CD2D37"/>
+                </a:solidFill>
+                <a:latin typeface="Arial"/>
               </a:rPr>
               <a:t>SECCIÓN 2</a:t>
             </a:r>
           </a:p>
           <a:p>
-            <a:r>
-              <a:rPr sz="3000" b="1">
-                <a:solidFill>
-                  <a:srgbClr val="FFFFFF"/>
-                </a:solidFill>
-                <a:latin typeface="Calibri"/>
-              </a:rPr>
+            <a:pPr algn="ctr"/>
+            <a:r>
               <a:t>EDA y detección de idioma</a:t>
             </a:r>
           </a:p>
           <a:p>
+            <a:pPr algn="ctr"/>
             <a:r>
               <a:rPr sz="1600">
                 <a:solidFill>
                   <a:srgbClr val="D6DAE2"/>
                 </a:solidFill>
-                <a:latin typeface="Calibri"/>
+                <a:latin typeface="Arial"/>
               </a:rPr>
               <a:t>Notebook 00 — entender el dato antes del modelo</a:t>
             </a:r>
@@ -10261,12 +9879,6 @@
           <a:lstStyle/>
           <a:p>
             <a:r>
-              <a:rPr sz="2400" b="1">
-                <a:solidFill>
-                  <a:srgbClr val="1A1A2E"/>
-                </a:solidFill>
-                <a:latin typeface="Calibri"/>
-              </a:rPr>
               <a:t>EDA comparativo — cinco foros muy distintos</a:t>
             </a:r>
           </a:p>
@@ -10282,78 +9894,38 @@
             <p:ph type="body" idx="16" sz="quarter"/>
           </p:nvPr>
         </p:nvSpPr>
-        <p:spPr/>
+        <p:spPr>
+          <a:xfrm>
+            <a:off x="1073427" y="2077576"/>
+            <a:ext cx="10084904" cy="3507298"/>
+          </a:xfrm>
+        </p:spPr>
         <p:txBody>
           <a:bodyPr wrap="square"/>
           <a:lstStyle/>
           <a:p>
-            <a:pPr algn="l" marL="0" indent="-228600">
-              <a:buNone/>
-            </a:pPr>
-            <a:r>
-              <a:rPr sz="1900" b="0">
-                <a:solidFill>
-                  <a:srgbClr val="333844"/>
-                </a:solidFill>
-                <a:latin typeface="Calibri"/>
-              </a:rPr>
-              <a:t>▸  Escala: OGUsers (4.9M posts) vs. Exploit.in (80K posts) → ×60 diferencia de volumen</a:t>
-            </a:r>
-          </a:p>
-          <a:p>
-            <a:pPr algn="l" marL="0" indent="-228600">
-              <a:buNone/>
-            </a:pPr>
-            <a:r>
-              <a:rPr sz="1900" b="0">
-                <a:solidFill>
-                  <a:srgbClr val="333844"/>
-                </a:solidFill>
-                <a:latin typeface="Calibri"/>
-              </a:rPr>
-              <a:t>▸  Épocas distintas: Exploit.in 2013, OGUsers 2019, RaidForums 2021 → evolución del ecosistema</a:t>
-            </a:r>
-          </a:p>
-          <a:p>
-            <a:pPr algn="l" marL="0" indent="-228600">
-              <a:buNone/>
-            </a:pPr>
-            <a:r>
-              <a:rPr sz="1900" b="0">
-                <a:solidFill>
-                  <a:srgbClr val="333844"/>
-                </a:solidFill>
-                <a:latin typeface="Calibri"/>
-              </a:rPr>
-              <a:t>▸  Actividad temporal: cada foro tiene su propio ciclo de vida y eventos de pico</a:t>
-            </a:r>
-          </a:p>
-          <a:p>
-            <a:pPr algn="l" marL="0" indent="-228600">
-              <a:buNone/>
-            </a:pPr>
-            <a:r>
-              <a:rPr sz="1900" b="0">
-                <a:solidFill>
-                  <a:srgbClr val="333844"/>
-                </a:solidFill>
-                <a:latin typeface="Calibri"/>
-              </a:rPr>
-              <a:t>▸  Longitud de posts: foros de hacking tienden a posts más cortos y técnicos que los ideológicos</a:t>
-            </a:r>
-          </a:p>
-          <a:p>
-            <a:pPr algn="l" marL="0" indent="-228600">
-              <a:buNone/>
-            </a:pPr>
-            <a:r>
-              <a:rPr sz="1900" b="0">
-                <a:solidFill>
-                  <a:srgbClr val="333844"/>
-                </a:solidFill>
-                <a:latin typeface="Calibri"/>
-              </a:rPr>
-              <a:t>▸  El EDA ya revela la especialización: OGUsers = acceso, Exploit.in = técnica, RaidForums = filtraciones</a:t>
+            <a:r>
+              <a:t>Escala: OGUsers (4.9M posts) vs. Exploit.in (80K posts) → ×60 diferencia de volumen</a:t>
+            </a:r>
+          </a:p>
+          <a:p>
+            <a:r>
+              <a:t>Épocas distintas: Exploit.in 2013, OGUsers 2019, RaidForums 2021 → evolución del ecosistema</a:t>
+            </a:r>
+          </a:p>
+          <a:p>
+            <a:r>
+              <a:t>Actividad temporal: cada foro tiene su propio ciclo de vida y eventos de pico</a:t>
+            </a:r>
+          </a:p>
+          <a:p>
+            <a:r>
+              <a:t>Longitud de posts: foros de hacking tienden a posts más cortos y técnicos que los ideológicos</a:t>
+            </a:r>
+          </a:p>
+          <a:p>
+            <a:r>
+              <a:t>El EDA ya revela la especialización: OGUsers = acceso, Exploit.in = técnica, RaidForums = filtraciones</a:t>
             </a:r>
           </a:p>
         </p:txBody>
@@ -10392,12 +9964,6 @@
           <a:lstStyle/>
           <a:p>
             <a:r>
-              <a:rPr sz="2400" b="1">
-                <a:solidFill>
-                  <a:srgbClr val="1A1A2E"/>
-                </a:solidFill>
-                <a:latin typeface="Calibri"/>
-              </a:rPr>
               <a:t>Detección de idioma — la decisión de pipeline</a:t>
             </a:r>
           </a:p>
@@ -10413,104 +9979,73 @@
             <p:ph type="body" idx="16" sz="quarter"/>
           </p:nvPr>
         </p:nvSpPr>
-        <p:spPr/>
+        <p:spPr>
+          <a:xfrm>
+            <a:off x="1073427" y="2077576"/>
+            <a:ext cx="10084904" cy="3507298"/>
+          </a:xfrm>
+        </p:spPr>
         <p:txBody>
           <a:bodyPr wrap="square"/>
           <a:lstStyle/>
           <a:p>
-            <a:pPr algn="l" marL="0" indent="-228600">
+            <a:r>
+              <a:t>Paso obligatorio: Burrows' Delta, NER y BERTopic son idioma-específicos</a:t>
+            </a:r>
+          </a:p>
+          <a:p>
+            <a:r>
+              <a:t>Método: sample de 500 posts por foro con langdetect, truncado a 2000 chars</a:t>
+            </a:r>
+          </a:p>
+          <a:p>
+            <a:r>
+              <a:t>OGUsers / Cracked.to / Nulled.io / RaidForums: &gt;85% inglés → pipeline estándar</a:t>
+            </a:r>
+          </a:p>
+          <a:p>
+            <a:r>
+              <a:t>Exploit.in: ~80%+ ruso → pipeline separado</a:t>
+            </a:r>
+          </a:p>
+          <a:p>
+            <a:pPr lvl="1" marL="274320" indent="-228600">
               <a:buNone/>
             </a:pPr>
             <a:r>
-              <a:rPr sz="1900" b="0">
-                <a:solidFill>
-                  <a:srgbClr val="333844"/>
-                </a:solidFill>
-                <a:latin typeface="Calibri"/>
-              </a:rPr>
-              <a:t>▸  Paso obligatorio: Burrows' Delta, NER y BERTopic son idioma-específicos</a:t>
-            </a:r>
-          </a:p>
-          <a:p>
-            <a:pPr algn="l" marL="0" indent="-228600">
+              <a:rPr sz="1500" b="0">
+                <a:solidFill>
+                  <a:srgbClr val="707888"/>
+                </a:solidFill>
+                <a:latin typeface="Arial"/>
+              </a:rPr>
+              <a:t>·  BERTopic: modelo multilingüe paraphrase-multilingual-mpnet-base-v2</a:t>
+            </a:r>
+          </a:p>
+          <a:p>
+            <a:pPr lvl="1" marL="274320" indent="-228600">
               <a:buNone/>
             </a:pPr>
             <a:r>
-              <a:rPr sz="1900" b="0">
-                <a:solidFill>
-                  <a:srgbClr val="333844"/>
-                </a:solidFill>
-                <a:latin typeface="Calibri"/>
-              </a:rPr>
-              <a:t>▸  Método: sample de 500 posts por foro con langdetect, truncado a 2000 chars</a:t>
-            </a:r>
-          </a:p>
-          <a:p>
-            <a:pPr algn="l" marL="0" indent="-228600">
+              <a:rPr sz="1500" b="0">
+                <a:solidFill>
+                  <a:srgbClr val="707888"/>
+                </a:solidFill>
+                <a:latin typeface="Arial"/>
+              </a:rPr>
+              <a:t>·  NER: excluir de qwen2.5:14b (rendimiento inferior en ruso)</a:t>
+            </a:r>
+          </a:p>
+          <a:p>
+            <a:pPr lvl="1" marL="274320" indent="-228600">
               <a:buNone/>
             </a:pPr>
             <a:r>
-              <a:rPr sz="1900" b="0">
-                <a:solidFill>
-                  <a:srgbClr val="333844"/>
-                </a:solidFill>
-                <a:latin typeface="Calibri"/>
-              </a:rPr>
-              <a:t>▸  OGUsers / Cracked.to / Nulled.io / RaidForums: &gt;85% inglés → pipeline estándar</a:t>
-            </a:r>
-          </a:p>
-          <a:p>
-            <a:pPr algn="l" marL="0" indent="-228600">
-              <a:buNone/>
-            </a:pPr>
-            <a:r>
-              <a:rPr sz="1900" b="0">
-                <a:solidFill>
-                  <a:srgbClr val="333844"/>
-                </a:solidFill>
-                <a:latin typeface="Calibri"/>
-              </a:rPr>
-              <a:t>▸  Exploit.in: ~80%+ ruso → pipeline separado</a:t>
-            </a:r>
-          </a:p>
-          <a:p>
-            <a:pPr lvl="1" algn="l" marL="274320" indent="-228600">
-              <a:buNone/>
-            </a:pPr>
-            <a:r>
-              <a:rPr sz="1600" b="0">
+              <a:rPr sz="1500" b="0">
                 <a:solidFill>
                   <a:srgbClr val="707888"/>
                 </a:solidFill>
-                <a:latin typeface="Calibri"/>
-              </a:rPr>
-              <a:t>·  BERTopic: modelo multilingüe paraphrase-multilingual-mpnet-base-v2</a:t>
-            </a:r>
-          </a:p>
-          <a:p>
-            <a:pPr lvl="1" algn="l" marL="274320" indent="-228600">
-              <a:buNone/>
-            </a:pPr>
-            <a:r>
-              <a:rPr sz="1600" b="0">
-                <a:solidFill>
-                  <a:srgbClr val="707888"/>
-                </a:solidFill>
-                <a:latin typeface="Calibri"/>
-              </a:rPr>
-              <a:t>·  NER: excluir de qwen2.5:14b (rendimiento inferior en ruso)</a:t>
-            </a:r>
-          </a:p>
-          <a:p>
-            <a:pPr lvl="1" algn="l" marL="274320" indent="-228600">
-              <a:buNone/>
-            </a:pPr>
-            <a:r>
-              <a:rPr sz="1600" b="0">
-                <a:solidFill>
-                  <a:srgbClr val="707888"/>
-                </a:solidFill>
-                <a:latin typeface="Calibri"/>
+                <a:latin typeface="Arial"/>
               </a:rPr>
               <a:t>·  Embeddings: qwen3-embedding es multilingual → válido para todos</a:t>
             </a:r>
@@ -10551,12 +10086,6 @@
           <a:lstStyle/>
           <a:p>
             <a:r>
-              <a:rPr sz="2400" b="1">
-                <a:solidFill>
-                  <a:srgbClr val="1A1A2E"/>
-                </a:solidFill>
-                <a:latin typeface="Calibri"/>
-              </a:rPr>
               <a:t>Decisión de pipeline por foro y técnica</a:t>
             </a:r>
           </a:p>
@@ -10587,14 +10116,14 @@
         </p:nvSpPr>
         <p:spPr>
           <a:xfrm>
-            <a:off x="1051560" y="1645920"/>
+            <a:off x="1051560" y="2148840"/>
             <a:ext cx="10058400" cy="365760"/>
           </a:xfrm>
           <a:prstGeom prst="rect">
             <a:avLst/>
           </a:prstGeom>
           <a:solidFill>
-            <a:srgbClr val="E32B3D"/>
+            <a:srgbClr val="CD2D37"/>
           </a:solidFill>
           <a:ln>
             <a:noFill/>
@@ -10630,7 +10159,7 @@
         </p:nvSpPr>
         <p:spPr>
           <a:xfrm>
-            <a:off x="1097280" y="1700920"/>
+            <a:off x="1097280" y="2203840"/>
             <a:ext cx="1584960" cy="365760"/>
           </a:xfrm>
           <a:prstGeom prst="rect">
@@ -10650,7 +10179,7 @@
                 <a:solidFill>
                   <a:srgbClr val="FFFFFF"/>
                 </a:solidFill>
-                <a:latin typeface="Calibri"/>
+                <a:latin typeface="Arial"/>
               </a:rPr>
               <a:t>Técnica</a:t>
             </a:r>
@@ -10665,7 +10194,7 @@
         </p:nvSpPr>
         <p:spPr>
           <a:xfrm>
-            <a:off x="2773680" y="1700920"/>
+            <a:off x="2773680" y="2203840"/>
             <a:ext cx="1584960" cy="365760"/>
           </a:xfrm>
           <a:prstGeom prst="rect">
@@ -10685,7 +10214,7 @@
                 <a:solidFill>
                   <a:srgbClr val="FFFFFF"/>
                 </a:solidFill>
-                <a:latin typeface="Calibri"/>
+                <a:latin typeface="Arial"/>
               </a:rPr>
               <a:t>OGUsers</a:t>
             </a:r>
@@ -10700,7 +10229,7 @@
         </p:nvSpPr>
         <p:spPr>
           <a:xfrm>
-            <a:off x="4450080" y="1700920"/>
+            <a:off x="4450080" y="2203840"/>
             <a:ext cx="1584960" cy="365760"/>
           </a:xfrm>
           <a:prstGeom prst="rect">
@@ -10720,7 +10249,7 @@
                 <a:solidFill>
                   <a:srgbClr val="FFFFFF"/>
                 </a:solidFill>
-                <a:latin typeface="Calibri"/>
+                <a:latin typeface="Arial"/>
               </a:rPr>
               <a:t>Exploit.in</a:t>
             </a:r>
@@ -10735,7 +10264,7 @@
         </p:nvSpPr>
         <p:spPr>
           <a:xfrm>
-            <a:off x="6126480" y="1700920"/>
+            <a:off x="6126480" y="2203840"/>
             <a:ext cx="1584960" cy="365760"/>
           </a:xfrm>
           <a:prstGeom prst="rect">
@@ -10755,7 +10284,7 @@
                 <a:solidFill>
                   <a:srgbClr val="FFFFFF"/>
                 </a:solidFill>
-                <a:latin typeface="Calibri"/>
+                <a:latin typeface="Arial"/>
               </a:rPr>
               <a:t>Cracked.to</a:t>
             </a:r>
@@ -10770,7 +10299,7 @@
         </p:nvSpPr>
         <p:spPr>
           <a:xfrm>
-            <a:off x="7802880" y="1700920"/>
+            <a:off x="7802880" y="2203840"/>
             <a:ext cx="1584960" cy="365760"/>
           </a:xfrm>
           <a:prstGeom prst="rect">
@@ -10790,7 +10319,7 @@
                 <a:solidFill>
                   <a:srgbClr val="FFFFFF"/>
                 </a:solidFill>
-                <a:latin typeface="Calibri"/>
+                <a:latin typeface="Arial"/>
               </a:rPr>
               <a:t>Nulled.io</a:t>
             </a:r>
@@ -10805,7 +10334,7 @@
         </p:nvSpPr>
         <p:spPr>
           <a:xfrm>
-            <a:off x="9479280" y="1700920"/>
+            <a:off x="9479280" y="2203840"/>
             <a:ext cx="1584960" cy="365760"/>
           </a:xfrm>
           <a:prstGeom prst="rect">
@@ -10825,7 +10354,7 @@
                 <a:solidFill>
                   <a:srgbClr val="FFFFFF"/>
                 </a:solidFill>
-                <a:latin typeface="Calibri"/>
+                <a:latin typeface="Arial"/>
               </a:rPr>
               <a:t>RaidForums</a:t>
             </a:r>
@@ -10840,7 +10369,7 @@
         </p:nvSpPr>
         <p:spPr>
           <a:xfrm>
-            <a:off x="1051560" y="2011680"/>
+            <a:off x="1051560" y="2514600"/>
             <a:ext cx="10058400" cy="310896"/>
           </a:xfrm>
           <a:prstGeom prst="rect">
@@ -10883,7 +10412,7 @@
         </p:nvSpPr>
         <p:spPr>
           <a:xfrm>
-            <a:off x="1097280" y="2051680"/>
+            <a:off x="1097280" y="2554600"/>
             <a:ext cx="1584960" cy="310896"/>
           </a:xfrm>
           <a:prstGeom prst="rect">
@@ -10901,9 +10430,9 @@
             <a:r>
               <a:rPr sz="1100" b="0">
                 <a:solidFill>
-                  <a:srgbClr val="333844"/>
-                </a:solidFill>
-                <a:latin typeface="Calibri"/>
+                  <a:srgbClr val="465461"/>
+                </a:solidFill>
+                <a:latin typeface="Arial"/>
               </a:rPr>
               <a:t>BERTopic (en)</a:t>
             </a:r>
@@ -10918,7 +10447,7 @@
         </p:nvSpPr>
         <p:spPr>
           <a:xfrm>
-            <a:off x="2773680" y="2051680"/>
+            <a:off x="2773680" y="2554600"/>
             <a:ext cx="1584960" cy="310896"/>
           </a:xfrm>
           <a:prstGeom prst="rect">
@@ -10936,9 +10465,9 @@
             <a:r>
               <a:rPr sz="1100" b="0">
                 <a:solidFill>
-                  <a:srgbClr val="333844"/>
-                </a:solidFill>
-                <a:latin typeface="Calibri"/>
+                  <a:srgbClr val="465461"/>
+                </a:solidFill>
+                <a:latin typeface="Arial"/>
               </a:rPr>
               <a:t>✓</a:t>
             </a:r>
@@ -10953,7 +10482,7 @@
         </p:nvSpPr>
         <p:spPr>
           <a:xfrm>
-            <a:off x="4450080" y="2051680"/>
+            <a:off x="4450080" y="2554600"/>
             <a:ext cx="1584960" cy="310896"/>
           </a:xfrm>
           <a:prstGeom prst="rect">
@@ -10971,9 +10500,9 @@
             <a:r>
               <a:rPr sz="1100" b="0">
                 <a:solidFill>
-                  <a:srgbClr val="333844"/>
-                </a:solidFill>
-                <a:latin typeface="Calibri"/>
+                  <a:srgbClr val="465461"/>
+                </a:solidFill>
+                <a:latin typeface="Arial"/>
               </a:rPr>
               <a:t>—</a:t>
             </a:r>
@@ -10988,7 +10517,7 @@
         </p:nvSpPr>
         <p:spPr>
           <a:xfrm>
-            <a:off x="6126480" y="2051680"/>
+            <a:off x="6126480" y="2554600"/>
             <a:ext cx="1584960" cy="310896"/>
           </a:xfrm>
           <a:prstGeom prst="rect">
@@ -11006,9 +10535,9 @@
             <a:r>
               <a:rPr sz="1100" b="0">
                 <a:solidFill>
-                  <a:srgbClr val="333844"/>
-                </a:solidFill>
-                <a:latin typeface="Calibri"/>
+                  <a:srgbClr val="465461"/>
+                </a:solidFill>
+                <a:latin typeface="Arial"/>
               </a:rPr>
               <a:t>✓</a:t>
             </a:r>
@@ -11023,7 +10552,7 @@
         </p:nvSpPr>
         <p:spPr>
           <a:xfrm>
-            <a:off x="7802880" y="2051680"/>
+            <a:off x="7802880" y="2554600"/>
             <a:ext cx="1584960" cy="310896"/>
           </a:xfrm>
           <a:prstGeom prst="rect">
@@ -11041,9 +10570,9 @@
             <a:r>
               <a:rPr sz="1100" b="0">
                 <a:solidFill>
-                  <a:srgbClr val="333844"/>
-                </a:solidFill>
-                <a:latin typeface="Calibri"/>
+                  <a:srgbClr val="465461"/>
+                </a:solidFill>
+                <a:latin typeface="Arial"/>
               </a:rPr>
               <a:t>✓</a:t>
             </a:r>
@@ -11058,7 +10587,7 @@
         </p:nvSpPr>
         <p:spPr>
           <a:xfrm>
-            <a:off x="9479280" y="2051680"/>
+            <a:off x="9479280" y="2554600"/>
             <a:ext cx="1584960" cy="310896"/>
           </a:xfrm>
           <a:prstGeom prst="rect">
@@ -11076,9 +10605,9 @@
             <a:r>
               <a:rPr sz="1100" b="0">
                 <a:solidFill>
-                  <a:srgbClr val="333844"/>
-                </a:solidFill>
-                <a:latin typeface="Calibri"/>
+                  <a:srgbClr val="465461"/>
+                </a:solidFill>
+                <a:latin typeface="Arial"/>
               </a:rPr>
               <a:t>✓</a:t>
             </a:r>
@@ -11093,7 +10622,7 @@
         </p:nvSpPr>
         <p:spPr>
           <a:xfrm>
-            <a:off x="1051560" y="2322576"/>
+            <a:off x="1051560" y="2825496"/>
             <a:ext cx="10058400" cy="440689"/>
           </a:xfrm>
           <a:prstGeom prst="rect">
@@ -11136,7 +10665,7 @@
         </p:nvSpPr>
         <p:spPr>
           <a:xfrm>
-            <a:off x="1097280" y="2362576"/>
+            <a:off x="1097280" y="2865496"/>
             <a:ext cx="1584960" cy="440689"/>
           </a:xfrm>
           <a:prstGeom prst="rect">
@@ -11154,9 +10683,9 @@
             <a:r>
               <a:rPr sz="1100" b="0">
                 <a:solidFill>
-                  <a:srgbClr val="333844"/>
-                </a:solidFill>
-                <a:latin typeface="Calibri"/>
+                  <a:srgbClr val="465461"/>
+                </a:solidFill>
+                <a:latin typeface="Arial"/>
               </a:rPr>
               <a:t>BERTopic (multilingual)</a:t>
             </a:r>
@@ -11171,7 +10700,7 @@
         </p:nvSpPr>
         <p:spPr>
           <a:xfrm>
-            <a:off x="2773680" y="2362576"/>
+            <a:off x="2773680" y="2865496"/>
             <a:ext cx="1584960" cy="440689"/>
           </a:xfrm>
           <a:prstGeom prst="rect">
@@ -11189,9 +10718,9 @@
             <a:r>
               <a:rPr sz="1100" b="0">
                 <a:solidFill>
-                  <a:srgbClr val="333844"/>
-                </a:solidFill>
-                <a:latin typeface="Calibri"/>
+                  <a:srgbClr val="465461"/>
+                </a:solidFill>
+                <a:latin typeface="Arial"/>
               </a:rPr>
               <a:t>—</a:t>
             </a:r>
@@ -11206,7 +10735,7 @@
         </p:nvSpPr>
         <p:spPr>
           <a:xfrm>
-            <a:off x="4450080" y="2362576"/>
+            <a:off x="4450080" y="2865496"/>
             <a:ext cx="1584960" cy="440689"/>
           </a:xfrm>
           <a:prstGeom prst="rect">
@@ -11224,9 +10753,9 @@
             <a:r>
               <a:rPr sz="1100" b="0">
                 <a:solidFill>
-                  <a:srgbClr val="333844"/>
-                </a:solidFill>
-                <a:latin typeface="Calibri"/>
+                  <a:srgbClr val="465461"/>
+                </a:solidFill>
+                <a:latin typeface="Arial"/>
               </a:rPr>
               <a:t>✓</a:t>
             </a:r>
@@ -11241,7 +10770,7 @@
         </p:nvSpPr>
         <p:spPr>
           <a:xfrm>
-            <a:off x="6126480" y="2362576"/>
+            <a:off x="6126480" y="2865496"/>
             <a:ext cx="1584960" cy="440689"/>
           </a:xfrm>
           <a:prstGeom prst="rect">
@@ -11259,9 +10788,9 @@
             <a:r>
               <a:rPr sz="1100" b="0">
                 <a:solidFill>
-                  <a:srgbClr val="333844"/>
-                </a:solidFill>
-                <a:latin typeface="Calibri"/>
+                  <a:srgbClr val="465461"/>
+                </a:solidFill>
+                <a:latin typeface="Arial"/>
               </a:rPr>
               <a:t>—</a:t>
             </a:r>
@@ -11276,7 +10805,7 @@
         </p:nvSpPr>
         <p:spPr>
           <a:xfrm>
-            <a:off x="7802880" y="2362576"/>
+            <a:off x="7802880" y="2865496"/>
             <a:ext cx="1584960" cy="440689"/>
           </a:xfrm>
           <a:prstGeom prst="rect">
@@ -11294,9 +10823,9 @@
             <a:r>
               <a:rPr sz="1100" b="0">
                 <a:solidFill>
-                  <a:srgbClr val="333844"/>
-                </a:solidFill>
-                <a:latin typeface="Calibri"/>
+                  <a:srgbClr val="465461"/>
+                </a:solidFill>
+                <a:latin typeface="Arial"/>
               </a:rPr>
               <a:t>—</a:t>
             </a:r>
@@ -11311,7 +10840,7 @@
         </p:nvSpPr>
         <p:spPr>
           <a:xfrm>
-            <a:off x="9479280" y="2362576"/>
+            <a:off x="9479280" y="2865496"/>
             <a:ext cx="1584960" cy="440689"/>
           </a:xfrm>
           <a:prstGeom prst="rect">
@@ -11329,9 +10858,9 @@
             <a:r>
               <a:rPr sz="1100" b="0">
                 <a:solidFill>
-                  <a:srgbClr val="333844"/>
-                </a:solidFill>
-                <a:latin typeface="Calibri"/>
+                  <a:srgbClr val="465461"/>
+                </a:solidFill>
+                <a:latin typeface="Arial"/>
               </a:rPr>
               <a:t>—</a:t>
             </a:r>
@@ -11346,7 +10875,7 @@
         </p:nvSpPr>
         <p:spPr>
           <a:xfrm>
-            <a:off x="1051560" y="2763266"/>
+            <a:off x="1051560" y="3266185"/>
             <a:ext cx="10058400" cy="310896"/>
           </a:xfrm>
           <a:prstGeom prst="rect">
@@ -11389,7 +10918,7 @@
         </p:nvSpPr>
         <p:spPr>
           <a:xfrm>
-            <a:off x="1097280" y="2803266"/>
+            <a:off x="1097280" y="3306185"/>
             <a:ext cx="1584960" cy="310896"/>
           </a:xfrm>
           <a:prstGeom prst="rect">
@@ -11407,9 +10936,9 @@
             <a:r>
               <a:rPr sz="1100" b="0">
                 <a:solidFill>
-                  <a:srgbClr val="333844"/>
-                </a:solidFill>
-                <a:latin typeface="Calibri"/>
+                  <a:srgbClr val="465461"/>
+                </a:solidFill>
+                <a:latin typeface="Arial"/>
               </a:rPr>
               <a:t>NER qwen2.5:14b</a:t>
             </a:r>
@@ -11424,7 +10953,7 @@
         </p:nvSpPr>
         <p:spPr>
           <a:xfrm>
-            <a:off x="2773680" y="2803266"/>
+            <a:off x="2773680" y="3306185"/>
             <a:ext cx="1584960" cy="310896"/>
           </a:xfrm>
           <a:prstGeom prst="rect">
@@ -11442,9 +10971,9 @@
             <a:r>
               <a:rPr sz="1100" b="0">
                 <a:solidFill>
-                  <a:srgbClr val="333844"/>
-                </a:solidFill>
-                <a:latin typeface="Calibri"/>
+                  <a:srgbClr val="465461"/>
+                </a:solidFill>
+                <a:latin typeface="Arial"/>
               </a:rPr>
               <a:t>✓</a:t>
             </a:r>
@@ -11459,7 +10988,7 @@
         </p:nvSpPr>
         <p:spPr>
           <a:xfrm>
-            <a:off x="4450080" y="2803266"/>
+            <a:off x="4450080" y="3306185"/>
             <a:ext cx="1584960" cy="310896"/>
           </a:xfrm>
           <a:prstGeom prst="rect">
@@ -11477,9 +11006,9 @@
             <a:r>
               <a:rPr sz="1100" b="0">
                 <a:solidFill>
-                  <a:srgbClr val="333844"/>
-                </a:solidFill>
-                <a:latin typeface="Calibri"/>
+                  <a:srgbClr val="465461"/>
+                </a:solidFill>
+                <a:latin typeface="Arial"/>
               </a:rPr>
               <a:t>—</a:t>
             </a:r>
@@ -11494,7 +11023,7 @@
         </p:nvSpPr>
         <p:spPr>
           <a:xfrm>
-            <a:off x="6126480" y="2803266"/>
+            <a:off x="6126480" y="3306185"/>
             <a:ext cx="1584960" cy="310896"/>
           </a:xfrm>
           <a:prstGeom prst="rect">
@@ -11512,9 +11041,9 @@
             <a:r>
               <a:rPr sz="1100" b="0">
                 <a:solidFill>
-                  <a:srgbClr val="333844"/>
-                </a:solidFill>
-                <a:latin typeface="Calibri"/>
+                  <a:srgbClr val="465461"/>
+                </a:solidFill>
+                <a:latin typeface="Arial"/>
               </a:rPr>
               <a:t>✓</a:t>
             </a:r>
@@ -11529,7 +11058,7 @@
         </p:nvSpPr>
         <p:spPr>
           <a:xfrm>
-            <a:off x="7802880" y="2803266"/>
+            <a:off x="7802880" y="3306185"/>
             <a:ext cx="1584960" cy="310896"/>
           </a:xfrm>
           <a:prstGeom prst="rect">
@@ -11547,9 +11076,9 @@
             <a:r>
               <a:rPr sz="1100" b="0">
                 <a:solidFill>
-                  <a:srgbClr val="333844"/>
-                </a:solidFill>
-                <a:latin typeface="Calibri"/>
+                  <a:srgbClr val="465461"/>
+                </a:solidFill>
+                <a:latin typeface="Arial"/>
               </a:rPr>
               <a:t>✓</a:t>
             </a:r>
@@ -11564,7 +11093,7 @@
         </p:nvSpPr>
         <p:spPr>
           <a:xfrm>
-            <a:off x="9479280" y="2803266"/>
+            <a:off x="9479280" y="3306185"/>
             <a:ext cx="1584960" cy="310896"/>
           </a:xfrm>
           <a:prstGeom prst="rect">
@@ -11582,9 +11111,9 @@
             <a:r>
               <a:rPr sz="1100" b="0">
                 <a:solidFill>
-                  <a:srgbClr val="333844"/>
-                </a:solidFill>
-                <a:latin typeface="Calibri"/>
+                  <a:srgbClr val="465461"/>
+                </a:solidFill>
+                <a:latin typeface="Arial"/>
               </a:rPr>
               <a:t>✓</a:t>
             </a:r>
@@ -11599,7 +11128,7 @@
         </p:nvSpPr>
         <p:spPr>
           <a:xfrm>
-            <a:off x="1051560" y="3074161"/>
+            <a:off x="1051560" y="3577081"/>
             <a:ext cx="10058400" cy="310896"/>
           </a:xfrm>
           <a:prstGeom prst="rect">
@@ -11642,7 +11171,7 @@
         </p:nvSpPr>
         <p:spPr>
           <a:xfrm>
-            <a:off x="1097280" y="3114161"/>
+            <a:off x="1097280" y="3617081"/>
             <a:ext cx="1584960" cy="310896"/>
           </a:xfrm>
           <a:prstGeom prst="rect">
@@ -11660,9 +11189,9 @@
             <a:r>
               <a:rPr sz="1100" b="0">
                 <a:solidFill>
-                  <a:srgbClr val="333844"/>
-                </a:solidFill>
-                <a:latin typeface="Calibri"/>
+                  <a:srgbClr val="465461"/>
+                </a:solidFill>
+                <a:latin typeface="Arial"/>
               </a:rPr>
               <a:t>Burrows' Delta</a:t>
             </a:r>
@@ -11677,7 +11206,7 @@
         </p:nvSpPr>
         <p:spPr>
           <a:xfrm>
-            <a:off x="2773680" y="3114161"/>
+            <a:off x="2773680" y="3617081"/>
             <a:ext cx="1584960" cy="310896"/>
           </a:xfrm>
           <a:prstGeom prst="rect">
@@ -11695,9 +11224,9 @@
             <a:r>
               <a:rPr sz="1100" b="0">
                 <a:solidFill>
-                  <a:srgbClr val="333844"/>
-                </a:solidFill>
-                <a:latin typeface="Calibri"/>
+                  <a:srgbClr val="465461"/>
+                </a:solidFill>
+                <a:latin typeface="Arial"/>
               </a:rPr>
               <a:t>✓</a:t>
             </a:r>
@@ -11712,7 +11241,7 @@
         </p:nvSpPr>
         <p:spPr>
           <a:xfrm>
-            <a:off x="4450080" y="3114161"/>
+            <a:off x="4450080" y="3617081"/>
             <a:ext cx="1584960" cy="310896"/>
           </a:xfrm>
           <a:prstGeom prst="rect">
@@ -11730,9 +11259,9 @@
             <a:r>
               <a:rPr sz="1100" b="0">
                 <a:solidFill>
-                  <a:srgbClr val="333844"/>
-                </a:solidFill>
-                <a:latin typeface="Calibri"/>
+                  <a:srgbClr val="465461"/>
+                </a:solidFill>
+                <a:latin typeface="Arial"/>
               </a:rPr>
               <a:t>—</a:t>
             </a:r>
@@ -11747,7 +11276,7 @@
         </p:nvSpPr>
         <p:spPr>
           <a:xfrm>
-            <a:off x="6126480" y="3114161"/>
+            <a:off x="6126480" y="3617081"/>
             <a:ext cx="1584960" cy="310896"/>
           </a:xfrm>
           <a:prstGeom prst="rect">
@@ -11765,9 +11294,9 @@
             <a:r>
               <a:rPr sz="1100" b="0">
                 <a:solidFill>
-                  <a:srgbClr val="333844"/>
-                </a:solidFill>
-                <a:latin typeface="Calibri"/>
+                  <a:srgbClr val="465461"/>
+                </a:solidFill>
+                <a:latin typeface="Arial"/>
               </a:rPr>
               <a:t>✓</a:t>
             </a:r>
@@ -11782,7 +11311,7 @@
         </p:nvSpPr>
         <p:spPr>
           <a:xfrm>
-            <a:off x="7802880" y="3114161"/>
+            <a:off x="7802880" y="3617081"/>
             <a:ext cx="1584960" cy="310896"/>
           </a:xfrm>
           <a:prstGeom prst="rect">
@@ -11800,9 +11329,9 @@
             <a:r>
               <a:rPr sz="1100" b="0">
                 <a:solidFill>
-                  <a:srgbClr val="333844"/>
-                </a:solidFill>
-                <a:latin typeface="Calibri"/>
+                  <a:srgbClr val="465461"/>
+                </a:solidFill>
+                <a:latin typeface="Arial"/>
               </a:rPr>
               <a:t>✓</a:t>
             </a:r>
@@ -11817,7 +11346,7 @@
         </p:nvSpPr>
         <p:spPr>
           <a:xfrm>
-            <a:off x="9479280" y="3114161"/>
+            <a:off x="9479280" y="3617081"/>
             <a:ext cx="1584960" cy="310896"/>
           </a:xfrm>
           <a:prstGeom prst="rect">
@@ -11835,9 +11364,9 @@
             <a:r>
               <a:rPr sz="1100" b="0">
                 <a:solidFill>
-                  <a:srgbClr val="333844"/>
-                </a:solidFill>
-                <a:latin typeface="Calibri"/>
+                  <a:srgbClr val="465461"/>
+                </a:solidFill>
+                <a:latin typeface="Arial"/>
               </a:rPr>
               <a:t>✓</a:t>
             </a:r>
@@ -11852,7 +11381,7 @@
         </p:nvSpPr>
         <p:spPr>
           <a:xfrm>
-            <a:off x="1051560" y="3385057"/>
+            <a:off x="1051560" y="3887977"/>
             <a:ext cx="10058400" cy="310896"/>
           </a:xfrm>
           <a:prstGeom prst="rect">
@@ -11895,7 +11424,7 @@
         </p:nvSpPr>
         <p:spPr>
           <a:xfrm>
-            <a:off x="1097280" y="3425057"/>
+            <a:off x="1097280" y="3927977"/>
             <a:ext cx="1584960" cy="310896"/>
           </a:xfrm>
           <a:prstGeom prst="rect">
@@ -11913,9 +11442,9 @@
             <a:r>
               <a:rPr sz="1100" b="0">
                 <a:solidFill>
-                  <a:srgbClr val="333844"/>
-                </a:solidFill>
-                <a:latin typeface="Calibri"/>
+                  <a:srgbClr val="465461"/>
+                </a:solidFill>
+                <a:latin typeface="Arial"/>
               </a:rPr>
               <a:t>qwen3-embedding</a:t>
             </a:r>
@@ -11930,7 +11459,7 @@
         </p:nvSpPr>
         <p:spPr>
           <a:xfrm>
-            <a:off x="2773680" y="3425057"/>
+            <a:off x="2773680" y="3927977"/>
             <a:ext cx="1584960" cy="310896"/>
           </a:xfrm>
           <a:prstGeom prst="rect">
@@ -11948,9 +11477,9 @@
             <a:r>
               <a:rPr sz="1100" b="0">
                 <a:solidFill>
-                  <a:srgbClr val="333844"/>
-                </a:solidFill>
-                <a:latin typeface="Calibri"/>
+                  <a:srgbClr val="465461"/>
+                </a:solidFill>
+                <a:latin typeface="Arial"/>
               </a:rPr>
               <a:t>✓</a:t>
             </a:r>
@@ -11965,7 +11494,7 @@
         </p:nvSpPr>
         <p:spPr>
           <a:xfrm>
-            <a:off x="4450080" y="3425057"/>
+            <a:off x="4450080" y="3927977"/>
             <a:ext cx="1584960" cy="310896"/>
           </a:xfrm>
           <a:prstGeom prst="rect">
@@ -11983,9 +11512,9 @@
             <a:r>
               <a:rPr sz="1100" b="0">
                 <a:solidFill>
-                  <a:srgbClr val="333844"/>
-                </a:solidFill>
-                <a:latin typeface="Calibri"/>
+                  <a:srgbClr val="465461"/>
+                </a:solidFill>
+                <a:latin typeface="Arial"/>
               </a:rPr>
               <a:t>✓</a:t>
             </a:r>
@@ -12000,7 +11529,7 @@
         </p:nvSpPr>
         <p:spPr>
           <a:xfrm>
-            <a:off x="6126480" y="3425057"/>
+            <a:off x="6126480" y="3927977"/>
             <a:ext cx="1584960" cy="310896"/>
           </a:xfrm>
           <a:prstGeom prst="rect">
@@ -12018,9 +11547,9 @@
             <a:r>
               <a:rPr sz="1100" b="0">
                 <a:solidFill>
-                  <a:srgbClr val="333844"/>
-                </a:solidFill>
-                <a:latin typeface="Calibri"/>
+                  <a:srgbClr val="465461"/>
+                </a:solidFill>
+                <a:latin typeface="Arial"/>
               </a:rPr>
               <a:t>✓</a:t>
             </a:r>
@@ -12035,7 +11564,7 @@
         </p:nvSpPr>
         <p:spPr>
           <a:xfrm>
-            <a:off x="7802880" y="3425057"/>
+            <a:off x="7802880" y="3927977"/>
             <a:ext cx="1584960" cy="310896"/>
           </a:xfrm>
           <a:prstGeom prst="rect">
@@ -12053,9 +11582,9 @@
             <a:r>
               <a:rPr sz="1100" b="0">
                 <a:solidFill>
-                  <a:srgbClr val="333844"/>
-                </a:solidFill>
-                <a:latin typeface="Calibri"/>
+                  <a:srgbClr val="465461"/>
+                </a:solidFill>
+                <a:latin typeface="Arial"/>
               </a:rPr>
               <a:t>✓</a:t>
             </a:r>
@@ -12070,7 +11599,7 @@
         </p:nvSpPr>
         <p:spPr>
           <a:xfrm>
-            <a:off x="9479280" y="3425057"/>
+            <a:off x="9479280" y="3927977"/>
             <a:ext cx="1584960" cy="310896"/>
           </a:xfrm>
           <a:prstGeom prst="rect">
@@ -12088,9 +11617,9 @@
             <a:r>
               <a:rPr sz="1100" b="0">
                 <a:solidFill>
-                  <a:srgbClr val="333844"/>
-                </a:solidFill>
-                <a:latin typeface="Calibri"/>
+                  <a:srgbClr val="465461"/>
+                </a:solidFill>
+                <a:latin typeface="Arial"/>
               </a:rPr>
               <a:t>✓</a:t>
             </a:r>
@@ -12130,34 +11659,31 @@
           <a:bodyPr wrap="square"/>
           <a:lstStyle/>
           <a:p>
+            <a:pPr algn="ctr"/>
             <a:r>
               <a:rPr sz="1300" b="1">
                 <a:solidFill>
-                  <a:srgbClr val="E32B3D"/>
-                </a:solidFill>
-                <a:latin typeface="Calibri"/>
+                  <a:srgbClr val="CD2D37"/>
+                </a:solidFill>
+                <a:latin typeface="Arial"/>
               </a:rPr>
               <a:t>DEMO EN VIVO</a:t>
             </a:r>
           </a:p>
           <a:p>
-            <a:r>
-              <a:rPr sz="2600" b="1">
-                <a:solidFill>
-                  <a:srgbClr val="FFFFFF"/>
-                </a:solidFill>
-                <a:latin typeface="Calibri"/>
-              </a:rPr>
+            <a:pPr algn="ctr"/>
+            <a:r>
               <a:t>Demo — EDA y detección de idioma</a:t>
             </a:r>
           </a:p>
           <a:p>
+            <a:pPr algn="ctr"/>
             <a:r>
               <a:rPr sz="1400">
                 <a:solidFill>
                   <a:srgbClr val="9AA3B5"/>
                 </a:solidFill>
-                <a:latin typeface="Calibri"/>
+                <a:latin typeface="Arial"/>
               </a:rPr>
               <a:t>HackingForums/00_extract_and_explore.ipynb</a:t>
             </a:r>
@@ -12191,7 +11717,7 @@
                 <a:solidFill>
                   <a:srgbClr val="D6DAE2"/>
                 </a:solidFill>
-                <a:latin typeface="Calibri"/>
+                <a:latin typeface="Arial"/>
               </a:rPr>
               <a:t>1.  Abrir notebook 00_extract_and_explore</a:t>
             </a:r>
@@ -12202,7 +11728,7 @@
                 <a:solidFill>
                   <a:srgbClr val="D6DAE2"/>
                 </a:solidFill>
-                <a:latin typeface="Calibri"/>
+                <a:latin typeface="Arial"/>
               </a:rPr>
               <a:t>2.  Sección 2: tabla comparativa de los 5 foros (usuarios, posts, rango de fechas)</a:t>
             </a:r>
@@ -12213,7 +11739,7 @@
                 <a:solidFill>
                   <a:srgbClr val="D6DAE2"/>
                 </a:solidFill>
-                <a:latin typeface="Calibri"/>
+                <a:latin typeface="Arial"/>
               </a:rPr>
               <a:t>3.  Sección 5: gráfica de distribución de idioma por foro</a:t>
             </a:r>
@@ -12224,7 +11750,7 @@
                 <a:solidFill>
                   <a:srgbClr val="D6DAE2"/>
                 </a:solidFill>
-                <a:latin typeface="Calibri"/>
+                <a:latin typeface="Arial"/>
               </a:rPr>
               <a:t>4.  Observar: Exploit.in claramente separado del resto</a:t>
             </a:r>

--- a/HackingForums/csbc26_caso_hackingforums.pptx
+++ b/HackingForums/csbc26_caso_hackingforums.pptx
@@ -7623,2033 +7623,1111 @@
           <a:p/>
         </p:txBody>
       </p:sp>
-      <p:sp>
-        <p:nvSpPr>
-          <p:cNvPr id="4" name="Rectangle 3"/>
-          <p:cNvSpPr/>
+      <p:graphicFrame>
+        <p:nvGraphicFramePr>
+          <p:cNvPr id="4" name="Table 3"/>
+          <p:cNvGraphicFramePr>
+            <a:graphicFrameLocks noGrp="1"/>
+          </p:cNvGraphicFramePr>
           <p:nvPr/>
-        </p:nvSpPr>
-        <p:spPr>
-          <a:xfrm>
-            <a:off x="1051560" y="2148840"/>
-            <a:ext cx="10058400" cy="365760"/>
-          </a:xfrm>
-          <a:prstGeom prst="rect">
-            <a:avLst/>
-          </a:prstGeom>
-          <a:solidFill>
-            <a:srgbClr val="CD2D37"/>
-          </a:solidFill>
-          <a:ln>
-            <a:noFill/>
-          </a:ln>
-        </p:spPr>
-        <p:style>
-          <a:lnRef idx="1">
-            <a:schemeClr val="accent1"/>
-          </a:lnRef>
-          <a:fillRef idx="3">
-            <a:schemeClr val="accent1"/>
-          </a:fillRef>
-          <a:effectRef idx="2">
-            <a:schemeClr val="accent1"/>
-          </a:effectRef>
-          <a:fontRef idx="minor">
-            <a:schemeClr val="lt1"/>
-          </a:fontRef>
-        </p:style>
-        <p:txBody>
-          <a:bodyPr rtlCol="0" anchor="ctr"/>
-          <a:lstStyle/>
-          <a:p>
-            <a:pPr algn="ctr"/>
-          </a:p>
-        </p:txBody>
-      </p:sp>
+        </p:nvGraphicFramePr>
+        <p:xfrm>
+          <a:off x="1051560" y="2148840"/>
+          <a:ext cx="10058400" cy="2926080"/>
+        </p:xfrm>
+        <a:graphic>
+          <a:graphicData uri="http://schemas.openxmlformats.org/drawingml/2006/table">
+            <a:tbl>
+              <a:tblPr>
+                <a:tableStyleId>{5C22544A-7EE6-4342-B048-85BDC9FD1C3A}</a:tableStyleId>
+              </a:tblPr>
+              <a:tblGrid>
+                <a:gridCol w="1676400"/>
+                <a:gridCol w="1676400"/>
+                <a:gridCol w="1676400"/>
+                <a:gridCol w="1676400"/>
+                <a:gridCol w="1676400"/>
+                <a:gridCol w="1676400"/>
+              </a:tblGrid>
+              <a:tr h="365760">
+                <a:tc>
+                  <a:txBody>
+                    <a:bodyPr/>
+                    <a:lstStyle/>
+                    <a:p>
+                      <a:r>
+                        <a:rPr sz="1200" b="1">
+                          <a:solidFill>
+                            <a:srgbClr val="FFFFFF"/>
+                          </a:solidFill>
+                          <a:latin typeface="Arial"/>
+                        </a:rPr>
+                        <a:t>Foro</a:t>
+                      </a:r>
+                    </a:p>
+                  </a:txBody>
+                  <a:tcPr marL="45000" marR="45000" marT="25000" marB="25000" anchor="ctr">
+                    <a:solidFill>
+                      <a:srgbClr val="CD2D37"/>
+                    </a:solidFill>
+                  </a:tcPr>
+                </a:tc>
+                <a:tc>
+                  <a:txBody>
+                    <a:bodyPr/>
+                    <a:lstStyle/>
+                    <a:p>
+                      <a:r>
+                        <a:rPr sz="1200" b="1">
+                          <a:solidFill>
+                            <a:srgbClr val="FFFFFF"/>
+                          </a:solidFill>
+                          <a:latin typeface="Arial"/>
+                        </a:rPr>
+                        <a:t>Archivo</a:t>
+                      </a:r>
+                    </a:p>
+                  </a:txBody>
+                  <a:tcPr marL="45000" marR="45000" marT="25000" marB="25000" anchor="ctr">
+                    <a:solidFill>
+                      <a:srgbClr val="CD2D37"/>
+                    </a:solidFill>
+                  </a:tcPr>
+                </a:tc>
+                <a:tc>
+                  <a:txBody>
+                    <a:bodyPr/>
+                    <a:lstStyle/>
+                    <a:p>
+                      <a:r>
+                        <a:rPr sz="1200" b="1">
+                          <a:solidFill>
+                            <a:srgbClr val="FFFFFF"/>
+                          </a:solidFill>
+                          <a:latin typeface="Arial"/>
+                        </a:rPr>
+                        <a:t>Parser</a:t>
+                      </a:r>
+                    </a:p>
+                  </a:txBody>
+                  <a:tcPr marL="45000" marR="45000" marT="25000" marB="25000" anchor="ctr">
+                    <a:solidFill>
+                      <a:srgbClr val="CD2D37"/>
+                    </a:solidFill>
+                  </a:tcPr>
+                </a:tc>
+                <a:tc>
+                  <a:txBody>
+                    <a:bodyPr/>
+                    <a:lstStyle/>
+                    <a:p>
+                      <a:r>
+                        <a:rPr sz="1200" b="1">
+                          <a:solidFill>
+                            <a:srgbClr val="FFFFFF"/>
+                          </a:solidFill>
+                          <a:latin typeface="Arial"/>
+                        </a:rPr>
+                        <a:t>Idioma</a:t>
+                      </a:r>
+                    </a:p>
+                  </a:txBody>
+                  <a:tcPr marL="45000" marR="45000" marT="25000" marB="25000" anchor="ctr">
+                    <a:solidFill>
+                      <a:srgbClr val="CD2D37"/>
+                    </a:solidFill>
+                  </a:tcPr>
+                </a:tc>
+                <a:tc>
+                  <a:txBody>
+                    <a:bodyPr/>
+                    <a:lstStyle/>
+                    <a:p>
+                      <a:r>
+                        <a:rPr sz="1200" b="1">
+                          <a:solidFill>
+                            <a:srgbClr val="FFFFFF"/>
+                          </a:solidFill>
+                          <a:latin typeface="Arial"/>
+                        </a:rPr>
+                        <a:t>Tier</a:t>
+                      </a:r>
+                    </a:p>
+                  </a:txBody>
+                  <a:tcPr marL="45000" marR="45000" marT="25000" marB="25000" anchor="ctr">
+                    <a:solidFill>
+                      <a:srgbClr val="CD2D37"/>
+                    </a:solidFill>
+                  </a:tcPr>
+                </a:tc>
+                <a:tc>
+                  <a:txBody>
+                    <a:bodyPr/>
+                    <a:lstStyle/>
+                    <a:p>
+                      <a:r>
+                        <a:rPr sz="1200" b="1">
+                          <a:solidFill>
+                            <a:srgbClr val="FFFFFF"/>
+                          </a:solidFill>
+                          <a:latin typeface="Arial"/>
+                        </a:rPr>
+                        <a:t>Uso</a:t>
+                      </a:r>
+                    </a:p>
+                  </a:txBody>
+                  <a:tcPr marL="45000" marR="45000" marT="25000" marB="25000" anchor="ctr">
+                    <a:solidFill>
+                      <a:srgbClr val="CD2D37"/>
+                    </a:solidFill>
+                  </a:tcPr>
+                </a:tc>
+              </a:tr>
+              <a:tr h="365760">
+                <a:tc>
+                  <a:txBody>
+                    <a:bodyPr/>
+                    <a:lstStyle/>
+                    <a:p>
+                      <a:r>
+                        <a:rPr sz="1100" b="0">
+                          <a:solidFill>
+                            <a:srgbClr val="465461"/>
+                          </a:solidFill>
+                          <a:latin typeface="Arial"/>
+                        </a:rPr>
+                        <a:t>OGUsers</a:t>
+                      </a:r>
+                    </a:p>
+                  </a:txBody>
+                  <a:tcPr marL="45000" marR="45000" marT="25000" marB="25000" anchor="ctr">
+                    <a:solidFill>
+                      <a:srgbClr val="F1F2F6"/>
+                    </a:solidFill>
+                  </a:tcPr>
+                </a:tc>
+                <a:tc>
+                  <a:txBody>
+                    <a:bodyPr/>
+                    <a:lstStyle/>
+                    <a:p>
+                      <a:r>
+                        <a:rPr sz="1100" b="0">
+                          <a:solidFill>
+                            <a:srgbClr val="465461"/>
+                          </a:solidFill>
+                          <a:latin typeface="Arial"/>
+                        </a:rPr>
+                        <a:t>OGUsers_2019.zip</a:t>
+                      </a:r>
+                    </a:p>
+                  </a:txBody>
+                  <a:tcPr marL="45000" marR="45000" marT="25000" marB="25000" anchor="ctr">
+                    <a:solidFill>
+                      <a:srgbClr val="F1F2F6"/>
+                    </a:solidFill>
+                  </a:tcPr>
+                </a:tc>
+                <a:tc>
+                  <a:txBody>
+                    <a:bodyPr/>
+                    <a:lstStyle/>
+                    <a:p>
+                      <a:r>
+                        <a:rPr sz="1100" b="0">
+                          <a:solidFill>
+                            <a:srgbClr val="465461"/>
+                          </a:solidFill>
+                          <a:latin typeface="Arial"/>
+                        </a:rPr>
+                        <a:t>MyBB (prefijo no estándar)</a:t>
+                      </a:r>
+                    </a:p>
+                  </a:txBody>
+                  <a:tcPr marL="45000" marR="45000" marT="25000" marB="25000" anchor="ctr">
+                    <a:solidFill>
+                      <a:srgbClr val="F1F2F6"/>
+                    </a:solidFill>
+                  </a:tcPr>
+                </a:tc>
+                <a:tc>
+                  <a:txBody>
+                    <a:bodyPr/>
+                    <a:lstStyle/>
+                    <a:p>
+                      <a:r>
+                        <a:rPr sz="1100" b="0">
+                          <a:solidFill>
+                            <a:srgbClr val="465461"/>
+                          </a:solidFill>
+                          <a:latin typeface="Arial"/>
+                        </a:rPr>
+                        <a:t>Inglés</a:t>
+                      </a:r>
+                    </a:p>
+                  </a:txBody>
+                  <a:tcPr marL="45000" marR="45000" marT="25000" marB="25000" anchor="ctr">
+                    <a:solidFill>
+                      <a:srgbClr val="F1F2F6"/>
+                    </a:solidFill>
+                  </a:tcPr>
+                </a:tc>
+                <a:tc>
+                  <a:txBody>
+                    <a:bodyPr/>
+                    <a:lstStyle/>
+                    <a:p>
+                      <a:r>
+                        <a:rPr sz="1100" b="0">
+                          <a:solidFill>
+                            <a:srgbClr val="465461"/>
+                          </a:solidFill>
+                          <a:latin typeface="Arial"/>
+                        </a:rPr>
+                        <a:t>A</a:t>
+                      </a:r>
+                    </a:p>
+                  </a:txBody>
+                  <a:tcPr marL="45000" marR="45000" marT="25000" marB="25000" anchor="ctr">
+                    <a:solidFill>
+                      <a:srgbClr val="F1F2F6"/>
+                    </a:solidFill>
+                  </a:tcPr>
+                </a:tc>
+                <a:tc>
+                  <a:txBody>
+                    <a:bodyPr/>
+                    <a:lstStyle/>
+                    <a:p>
+                      <a:r>
+                        <a:rPr sz="1100" b="0">
+                          <a:solidFill>
+                            <a:srgbClr val="465461"/>
+                          </a:solidFill>
+                          <a:latin typeface="Arial"/>
+                        </a:rPr>
+                        <a:t>Red social, pivoting</a:t>
+                      </a:r>
+                    </a:p>
+                  </a:txBody>
+                  <a:tcPr marL="45000" marR="45000" marT="25000" marB="25000" anchor="ctr">
+                    <a:solidFill>
+                      <a:srgbClr val="F1F2F6"/>
+                    </a:solidFill>
+                  </a:tcPr>
+                </a:tc>
+              </a:tr>
+              <a:tr h="365760">
+                <a:tc>
+                  <a:txBody>
+                    <a:bodyPr/>
+                    <a:lstStyle/>
+                    <a:p>
+                      <a:r>
+                        <a:rPr sz="1100" b="0">
+                          <a:solidFill>
+                            <a:srgbClr val="465461"/>
+                          </a:solidFill>
+                          <a:latin typeface="Arial"/>
+                        </a:rPr>
+                        <a:t>Exploit.in</a:t>
+                      </a:r>
+                    </a:p>
+                  </a:txBody>
+                  <a:tcPr marL="45000" marR="45000" marT="25000" marB="25000" anchor="ctr">
+                    <a:solidFill>
+                      <a:srgbClr val="FFFFFF"/>
+                    </a:solidFill>
+                  </a:tcPr>
+                </a:tc>
+                <a:tc>
+                  <a:txBody>
+                    <a:bodyPr/>
+                    <a:lstStyle/>
+                    <a:p>
+                      <a:r>
+                        <a:rPr sz="1100" b="0">
+                          <a:solidFill>
+                            <a:srgbClr val="465461"/>
+                          </a:solidFill>
+                          <a:latin typeface="Arial"/>
+                        </a:rPr>
+                        <a:t>Exploit.in_2013.12.13.zip</a:t>
+                      </a:r>
+                    </a:p>
+                  </a:txBody>
+                  <a:tcPr marL="45000" marR="45000" marT="25000" marB="25000" anchor="ctr">
+                    <a:solidFill>
+                      <a:srgbClr val="FFFFFF"/>
+                    </a:solidFill>
+                  </a:tcPr>
+                </a:tc>
+                <a:tc>
+                  <a:txBody>
+                    <a:bodyPr/>
+                    <a:lstStyle/>
+                    <a:p>
+                      <a:r>
+                        <a:rPr sz="1100" b="0">
+                          <a:solidFill>
+                            <a:srgbClr val="465461"/>
+                          </a:solidFill>
+                          <a:latin typeface="Arial"/>
+                        </a:rPr>
+                        <a:t>IPS 3.x (ibf_)</a:t>
+                      </a:r>
+                    </a:p>
+                  </a:txBody>
+                  <a:tcPr marL="45000" marR="45000" marT="25000" marB="25000" anchor="ctr">
+                    <a:solidFill>
+                      <a:srgbClr val="FFFFFF"/>
+                    </a:solidFill>
+                  </a:tcPr>
+                </a:tc>
+                <a:tc>
+                  <a:txBody>
+                    <a:bodyPr/>
+                    <a:lstStyle/>
+                    <a:p>
+                      <a:r>
+                        <a:rPr sz="1100" b="0">
+                          <a:solidFill>
+                            <a:srgbClr val="465461"/>
+                          </a:solidFill>
+                          <a:latin typeface="Arial"/>
+                        </a:rPr>
+                        <a:t>Ruso</a:t>
+                      </a:r>
+                    </a:p>
+                  </a:txBody>
+                  <a:tcPr marL="45000" marR="45000" marT="25000" marB="25000" anchor="ctr">
+                    <a:solidFill>
+                      <a:srgbClr val="FFFFFF"/>
+                    </a:solidFill>
+                  </a:tcPr>
+                </a:tc>
+                <a:tc>
+                  <a:txBody>
+                    <a:bodyPr/>
+                    <a:lstStyle/>
+                    <a:p>
+                      <a:r>
+                        <a:rPr sz="1100" b="0">
+                          <a:solidFill>
+                            <a:srgbClr val="465461"/>
+                          </a:solidFill>
+                          <a:latin typeface="Arial"/>
+                        </a:rPr>
+                        <a:t>A</a:t>
+                      </a:r>
+                    </a:p>
+                  </a:txBody>
+                  <a:tcPr marL="45000" marR="45000" marT="25000" marB="25000" anchor="ctr">
+                    <a:solidFill>
+                      <a:srgbClr val="FFFFFF"/>
+                    </a:solidFill>
+                  </a:tcPr>
+                </a:tc>
+                <a:tc>
+                  <a:txBody>
+                    <a:bodyPr/>
+                    <a:lstStyle/>
+                    <a:p>
+                      <a:r>
+                        <a:rPr sz="1100" b="0">
+                          <a:solidFill>
+                            <a:srgbClr val="465461"/>
+                          </a:solidFill>
+                          <a:latin typeface="Arial"/>
+                        </a:rPr>
+                        <a:t>Pivoting cross-foro</a:t>
+                      </a:r>
+                    </a:p>
+                  </a:txBody>
+                  <a:tcPr marL="45000" marR="45000" marT="25000" marB="25000" anchor="ctr">
+                    <a:solidFill>
+                      <a:srgbClr val="FFFFFF"/>
+                    </a:solidFill>
+                  </a:tcPr>
+                </a:tc>
+              </a:tr>
+              <a:tr h="365760">
+                <a:tc>
+                  <a:txBody>
+                    <a:bodyPr/>
+                    <a:lstStyle/>
+                    <a:p>
+                      <a:r>
+                        <a:rPr sz="1100" b="0">
+                          <a:solidFill>
+                            <a:srgbClr val="465461"/>
+                          </a:solidFill>
+                          <a:latin typeface="Arial"/>
+                        </a:rPr>
+                        <a:t>Cracked.to</a:t>
+                      </a:r>
+                    </a:p>
+                  </a:txBody>
+                  <a:tcPr marL="45000" marR="45000" marT="25000" marB="25000" anchor="ctr">
+                    <a:solidFill>
+                      <a:srgbClr val="F1F2F6"/>
+                    </a:solidFill>
+                  </a:tcPr>
+                </a:tc>
+                <a:tc>
+                  <a:txBody>
+                    <a:bodyPr/>
+                    <a:lstStyle/>
+                    <a:p>
+                      <a:r>
+                        <a:rPr sz="1100" b="0">
+                          <a:solidFill>
+                            <a:srgbClr val="465461"/>
+                          </a:solidFill>
+                          <a:latin typeface="Arial"/>
+                        </a:rPr>
+                        <a:t>Cracked.to_2019.01.zip</a:t>
+                      </a:r>
+                    </a:p>
+                  </a:txBody>
+                  <a:tcPr marL="45000" marR="45000" marT="25000" marB="25000" anchor="ctr">
+                    <a:solidFill>
+                      <a:srgbClr val="F1F2F6"/>
+                    </a:solidFill>
+                  </a:tcPr>
+                </a:tc>
+                <a:tc>
+                  <a:txBody>
+                    <a:bodyPr/>
+                    <a:lstStyle/>
+                    <a:p>
+                      <a:r>
+                        <a:rPr sz="1100" b="0">
+                          <a:solidFill>
+                            <a:srgbClr val="465461"/>
+                          </a:solidFill>
+                          <a:latin typeface="Arial"/>
+                        </a:rPr>
+                        <a:t>MyBB</a:t>
+                      </a:r>
+                    </a:p>
+                  </a:txBody>
+                  <a:tcPr marL="45000" marR="45000" marT="25000" marB="25000" anchor="ctr">
+                    <a:solidFill>
+                      <a:srgbClr val="F1F2F6"/>
+                    </a:solidFill>
+                  </a:tcPr>
+                </a:tc>
+                <a:tc>
+                  <a:txBody>
+                    <a:bodyPr/>
+                    <a:lstStyle/>
+                    <a:p>
+                      <a:r>
+                        <a:rPr sz="1100" b="0">
+                          <a:solidFill>
+                            <a:srgbClr val="465461"/>
+                          </a:solidFill>
+                          <a:latin typeface="Arial"/>
+                        </a:rPr>
+                        <a:t>Inglés</a:t>
+                      </a:r>
+                    </a:p>
+                  </a:txBody>
+                  <a:tcPr marL="45000" marR="45000" marT="25000" marB="25000" anchor="ctr">
+                    <a:solidFill>
+                      <a:srgbClr val="F1F2F6"/>
+                    </a:solidFill>
+                  </a:tcPr>
+                </a:tc>
+                <a:tc>
+                  <a:txBody>
+                    <a:bodyPr/>
+                    <a:lstStyle/>
+                    <a:p>
+                      <a:r>
+                        <a:rPr sz="1100" b="0">
+                          <a:solidFill>
+                            <a:srgbClr val="465461"/>
+                          </a:solidFill>
+                          <a:latin typeface="Arial"/>
+                        </a:rPr>
+                        <a:t>A</a:t>
+                      </a:r>
+                    </a:p>
+                  </a:txBody>
+                  <a:tcPr marL="45000" marR="45000" marT="25000" marB="25000" anchor="ctr">
+                    <a:solidFill>
+                      <a:srgbClr val="F1F2F6"/>
+                    </a:solidFill>
+                  </a:tcPr>
+                </a:tc>
+                <a:tc>
+                  <a:txBody>
+                    <a:bodyPr/>
+                    <a:lstStyle/>
+                    <a:p>
+                      <a:r>
+                        <a:rPr sz="1100" b="0">
+                          <a:solidFill>
+                            <a:srgbClr val="465461"/>
+                          </a:solidFill>
+                          <a:latin typeface="Arial"/>
+                        </a:rPr>
+                        <a:t>Pivoting + contenido</a:t>
+                      </a:r>
+                    </a:p>
+                  </a:txBody>
+                  <a:tcPr marL="45000" marR="45000" marT="25000" marB="25000" anchor="ctr">
+                    <a:solidFill>
+                      <a:srgbClr val="F1F2F6"/>
+                    </a:solidFill>
+                  </a:tcPr>
+                </a:tc>
+              </a:tr>
+              <a:tr h="365760">
+                <a:tc>
+                  <a:txBody>
+                    <a:bodyPr/>
+                    <a:lstStyle/>
+                    <a:p>
+                      <a:r>
+                        <a:rPr sz="1100" b="0">
+                          <a:solidFill>
+                            <a:srgbClr val="465461"/>
+                          </a:solidFill>
+                          <a:latin typeface="Arial"/>
+                        </a:rPr>
+                        <a:t>Nulled.io</a:t>
+                      </a:r>
+                    </a:p>
+                  </a:txBody>
+                  <a:tcPr marL="45000" marR="45000" marT="25000" marB="25000" anchor="ctr">
+                    <a:solidFill>
+                      <a:srgbClr val="FFFFFF"/>
+                    </a:solidFill>
+                  </a:tcPr>
+                </a:tc>
+                <a:tc>
+                  <a:txBody>
+                    <a:bodyPr/>
+                    <a:lstStyle/>
+                    <a:p>
+                      <a:r>
+                        <a:rPr sz="1100" b="0">
+                          <a:solidFill>
+                            <a:srgbClr val="465461"/>
+                          </a:solidFill>
+                          <a:latin typeface="Arial"/>
+                        </a:rPr>
+                        <a:t>Nulled.io_2016.05.zip</a:t>
+                      </a:r>
+                    </a:p>
+                  </a:txBody>
+                  <a:tcPr marL="45000" marR="45000" marT="25000" marB="25000" anchor="ctr">
+                    <a:solidFill>
+                      <a:srgbClr val="FFFFFF"/>
+                    </a:solidFill>
+                  </a:tcPr>
+                </a:tc>
+                <a:tc>
+                  <a:txBody>
+                    <a:bodyPr/>
+                    <a:lstStyle/>
+                    <a:p>
+                      <a:r>
+                        <a:rPr sz="1100" b="0">
+                          <a:solidFill>
+                            <a:srgbClr val="465461"/>
+                          </a:solidFill>
+                          <a:latin typeface="Arial"/>
+                        </a:rPr>
+                        <a:t>IPS 3.x (sin prefijo)</a:t>
+                      </a:r>
+                    </a:p>
+                  </a:txBody>
+                  <a:tcPr marL="45000" marR="45000" marT="25000" marB="25000" anchor="ctr">
+                    <a:solidFill>
+                      <a:srgbClr val="FFFFFF"/>
+                    </a:solidFill>
+                  </a:tcPr>
+                </a:tc>
+                <a:tc>
+                  <a:txBody>
+                    <a:bodyPr/>
+                    <a:lstStyle/>
+                    <a:p>
+                      <a:r>
+                        <a:rPr sz="1100" b="0">
+                          <a:solidFill>
+                            <a:srgbClr val="465461"/>
+                          </a:solidFill>
+                          <a:latin typeface="Arial"/>
+                        </a:rPr>
+                        <a:t>Inglés</a:t>
+                      </a:r>
+                    </a:p>
+                  </a:txBody>
+                  <a:tcPr marL="45000" marR="45000" marT="25000" marB="25000" anchor="ctr">
+                    <a:solidFill>
+                      <a:srgbClr val="FFFFFF"/>
+                    </a:solidFill>
+                  </a:tcPr>
+                </a:tc>
+                <a:tc>
+                  <a:txBody>
+                    <a:bodyPr/>
+                    <a:lstStyle/>
+                    <a:p>
+                      <a:r>
+                        <a:rPr sz="1100" b="0">
+                          <a:solidFill>
+                            <a:srgbClr val="465461"/>
+                          </a:solidFill>
+                          <a:latin typeface="Arial"/>
+                        </a:rPr>
+                        <a:t>A</a:t>
+                      </a:r>
+                    </a:p>
+                  </a:txBody>
+                  <a:tcPr marL="45000" marR="45000" marT="25000" marB="25000" anchor="ctr">
+                    <a:solidFill>
+                      <a:srgbClr val="FFFFFF"/>
+                    </a:solidFill>
+                  </a:tcPr>
+                </a:tc>
+                <a:tc>
+                  <a:txBody>
+                    <a:bodyPr/>
+                    <a:lstStyle/>
+                    <a:p>
+                      <a:r>
+                        <a:rPr sz="1100" b="0">
+                          <a:solidFill>
+                            <a:srgbClr val="465461"/>
+                          </a:solidFill>
+                          <a:latin typeface="Arial"/>
+                        </a:rPr>
+                        <a:t>Contexto histórico</a:t>
+                      </a:r>
+                    </a:p>
+                  </a:txBody>
+                  <a:tcPr marL="45000" marR="45000" marT="25000" marB="25000" anchor="ctr">
+                    <a:solidFill>
+                      <a:srgbClr val="FFFFFF"/>
+                    </a:solidFill>
+                  </a:tcPr>
+                </a:tc>
+              </a:tr>
+              <a:tr h="365760">
+                <a:tc>
+                  <a:txBody>
+                    <a:bodyPr/>
+                    <a:lstStyle/>
+                    <a:p>
+                      <a:r>
+                        <a:rPr sz="1100" b="0">
+                          <a:solidFill>
+                            <a:srgbClr val="465461"/>
+                          </a:solidFill>
+                          <a:latin typeface="Arial"/>
+                        </a:rPr>
+                        <a:t>RaidForums</a:t>
+                      </a:r>
+                    </a:p>
+                  </a:txBody>
+                  <a:tcPr marL="45000" marR="45000" marT="25000" marB="25000" anchor="ctr">
+                    <a:solidFill>
+                      <a:srgbClr val="F1F2F6"/>
+                    </a:solidFill>
+                  </a:tcPr>
+                </a:tc>
+                <a:tc>
+                  <a:txBody>
+                    <a:bodyPr/>
+                    <a:lstStyle/>
+                    <a:p>
+                      <a:r>
+                        <a:rPr sz="1100" b="0">
+                          <a:solidFill>
+                            <a:srgbClr val="465461"/>
+                          </a:solidFill>
+                          <a:latin typeface="Arial"/>
+                        </a:rPr>
+                        <a:t>RaidForums_2021.zip</a:t>
+                      </a:r>
+                    </a:p>
+                  </a:txBody>
+                  <a:tcPr marL="45000" marR="45000" marT="25000" marB="25000" anchor="ctr">
+                    <a:solidFill>
+                      <a:srgbClr val="F1F2F6"/>
+                    </a:solidFill>
+                  </a:tcPr>
+                </a:tc>
+                <a:tc>
+                  <a:txBody>
+                    <a:bodyPr/>
+                    <a:lstStyle/>
+                    <a:p>
+                      <a:r>
+                        <a:rPr sz="1100" b="0">
+                          <a:solidFill>
+                            <a:srgbClr val="465461"/>
+                          </a:solidFill>
+                          <a:latin typeface="Arial"/>
+                        </a:rPr>
+                        <a:t>MyBB</a:t>
+                      </a:r>
+                    </a:p>
+                  </a:txBody>
+                  <a:tcPr marL="45000" marR="45000" marT="25000" marB="25000" anchor="ctr">
+                    <a:solidFill>
+                      <a:srgbClr val="F1F2F6"/>
+                    </a:solidFill>
+                  </a:tcPr>
+                </a:tc>
+                <a:tc>
+                  <a:txBody>
+                    <a:bodyPr/>
+                    <a:lstStyle/>
+                    <a:p>
+                      <a:r>
+                        <a:rPr sz="1100" b="0">
+                          <a:solidFill>
+                            <a:srgbClr val="465461"/>
+                          </a:solidFill>
+                          <a:latin typeface="Arial"/>
+                        </a:rPr>
+                        <a:t>Inglés</a:t>
+                      </a:r>
+                    </a:p>
+                  </a:txBody>
+                  <a:tcPr marL="45000" marR="45000" marT="25000" marB="25000" anchor="ctr">
+                    <a:solidFill>
+                      <a:srgbClr val="F1F2F6"/>
+                    </a:solidFill>
+                  </a:tcPr>
+                </a:tc>
+                <a:tc>
+                  <a:txBody>
+                    <a:bodyPr/>
+                    <a:lstStyle/>
+                    <a:p>
+                      <a:r>
+                        <a:rPr sz="1100" b="0">
+                          <a:solidFill>
+                            <a:srgbClr val="465461"/>
+                          </a:solidFill>
+                          <a:latin typeface="Arial"/>
+                        </a:rPr>
+                        <a:t>A</a:t>
+                      </a:r>
+                    </a:p>
+                  </a:txBody>
+                  <a:tcPr marL="45000" marR="45000" marT="25000" marB="25000" anchor="ctr">
+                    <a:solidFill>
+                      <a:srgbClr val="F1F2F6"/>
+                    </a:solidFill>
+                  </a:tcPr>
+                </a:tc>
+                <a:tc>
+                  <a:txBody>
+                    <a:bodyPr/>
+                    <a:lstStyle/>
+                    <a:p>
+                      <a:r>
+                        <a:rPr sz="1100" b="0">
+                          <a:solidFill>
+                            <a:srgbClr val="465461"/>
+                          </a:solidFill>
+                          <a:latin typeface="Arial"/>
+                        </a:rPr>
+                        <a:t>Pivoting cross-foro</a:t>
+                      </a:r>
+                    </a:p>
+                  </a:txBody>
+                  <a:tcPr marL="45000" marR="45000" marT="25000" marB="25000" anchor="ctr">
+                    <a:solidFill>
+                      <a:srgbClr val="F1F2F6"/>
+                    </a:solidFill>
+                  </a:tcPr>
+                </a:tc>
+              </a:tr>
+              <a:tr h="365760">
+                <a:tc>
+                  <a:txBody>
+                    <a:bodyPr/>
+                    <a:lstStyle/>
+                    <a:p>
+                      <a:r>
+                        <a:rPr sz="1100" b="0">
+                          <a:solidFill>
+                            <a:srgbClr val="465461"/>
+                          </a:solidFill>
+                          <a:latin typeface="Arial"/>
+                        </a:rPr>
+                        <a:t>Hackforums.net</a:t>
+                      </a:r>
+                    </a:p>
+                  </a:txBody>
+                  <a:tcPr marL="45000" marR="45000" marT="25000" marB="25000" anchor="ctr">
+                    <a:solidFill>
+                      <a:srgbClr val="FFFFFF"/>
+                    </a:solidFill>
+                  </a:tcPr>
+                </a:tc>
+                <a:tc>
+                  <a:txBody>
+                    <a:bodyPr/>
+                    <a:lstStyle/>
+                    <a:p>
+                      <a:r>
+                        <a:rPr sz="1100" b="0">
+                          <a:solidFill>
+                            <a:srgbClr val="465461"/>
+                          </a:solidFill>
+                          <a:latin typeface="Arial"/>
+                        </a:rPr>
+                        <a:t>Hackforums.net_2015.zip</a:t>
+                      </a:r>
+                    </a:p>
+                  </a:txBody>
+                  <a:tcPr marL="45000" marR="45000" marT="25000" marB="25000" anchor="ctr">
+                    <a:solidFill>
+                      <a:srgbClr val="FFFFFF"/>
+                    </a:solidFill>
+                  </a:tcPr>
+                </a:tc>
+                <a:tc>
+                  <a:txBody>
+                    <a:bodyPr/>
+                    <a:lstStyle/>
+                    <a:p>
+                      <a:r>
+                        <a:rPr sz="1100" b="0">
+                          <a:solidFill>
+                            <a:srgbClr val="465461"/>
+                          </a:solidFill>
+                          <a:latin typeface="Arial"/>
+                        </a:rPr>
+                        <a:t>MyBB (solo usuarios)</a:t>
+                      </a:r>
+                    </a:p>
+                  </a:txBody>
+                  <a:tcPr marL="45000" marR="45000" marT="25000" marB="25000" anchor="ctr">
+                    <a:solidFill>
+                      <a:srgbClr val="FFFFFF"/>
+                    </a:solidFill>
+                  </a:tcPr>
+                </a:tc>
+                <a:tc>
+                  <a:txBody>
+                    <a:bodyPr/>
+                    <a:lstStyle/>
+                    <a:p>
+                      <a:r>
+                        <a:rPr sz="1100" b="0">
+                          <a:solidFill>
+                            <a:srgbClr val="465461"/>
+                          </a:solidFill>
+                          <a:latin typeface="Arial"/>
+                        </a:rPr>
+                        <a:t>—</a:t>
+                      </a:r>
+                    </a:p>
+                  </a:txBody>
+                  <a:tcPr marL="45000" marR="45000" marT="25000" marB="25000" anchor="ctr">
+                    <a:solidFill>
+                      <a:srgbClr val="FFFFFF"/>
+                    </a:solidFill>
+                  </a:tcPr>
+                </a:tc>
+                <a:tc>
+                  <a:txBody>
+                    <a:bodyPr/>
+                    <a:lstStyle/>
+                    <a:p>
+                      <a:r>
+                        <a:rPr sz="1100" b="0">
+                          <a:solidFill>
+                            <a:srgbClr val="465461"/>
+                          </a:solidFill>
+                          <a:latin typeface="Arial"/>
+                        </a:rPr>
+                        <a:t>A↓</a:t>
+                      </a:r>
+                    </a:p>
+                  </a:txBody>
+                  <a:tcPr marL="45000" marR="45000" marT="25000" marB="25000" anchor="ctr">
+                    <a:solidFill>
+                      <a:srgbClr val="FFFFFF"/>
+                    </a:solidFill>
+                  </a:tcPr>
+                </a:tc>
+                <a:tc>
+                  <a:txBody>
+                    <a:bodyPr/>
+                    <a:lstStyle/>
+                    <a:p>
+                      <a:r>
+                        <a:rPr sz="1100" b="0">
+                          <a:solidFill>
+                            <a:srgbClr val="465461"/>
+                          </a:solidFill>
+                          <a:latin typeface="Arial"/>
+                        </a:rPr>
+                        <a:t>Solo handles</a:t>
+                      </a:r>
+                    </a:p>
+                  </a:txBody>
+                  <a:tcPr marL="45000" marR="45000" marT="25000" marB="25000" anchor="ctr">
+                    <a:solidFill>
+                      <a:srgbClr val="FFFFFF"/>
+                    </a:solidFill>
+                  </a:tcPr>
+                </a:tc>
+              </a:tr>
+              <a:tr h="365760">
+                <a:tc>
+                  <a:txBody>
+                    <a:bodyPr/>
+                    <a:lstStyle/>
+                    <a:p>
+                      <a:r>
+                        <a:rPr sz="1100" b="0">
+                          <a:solidFill>
+                            <a:srgbClr val="465461"/>
+                          </a:solidFill>
+                          <a:latin typeface="Arial"/>
+                        </a:rPr>
+                        <a:t>Void.to</a:t>
+                      </a:r>
+                    </a:p>
+                  </a:txBody>
+                  <a:tcPr marL="45000" marR="45000" marT="25000" marB="25000" anchor="ctr">
+                    <a:solidFill>
+                      <a:srgbClr val="F1F2F6"/>
+                    </a:solidFill>
+                  </a:tcPr>
+                </a:tc>
+                <a:tc>
+                  <a:txBody>
+                    <a:bodyPr/>
+                    <a:lstStyle/>
+                    <a:p>
+                      <a:r>
+                        <a:rPr sz="1100" b="0">
+                          <a:solidFill>
+                            <a:srgbClr val="465461"/>
+                          </a:solidFill>
+                          <a:latin typeface="Arial"/>
+                        </a:rPr>
+                        <a:t>Void.to.zip</a:t>
+                      </a:r>
+                    </a:p>
+                  </a:txBody>
+                  <a:tcPr marL="45000" marR="45000" marT="25000" marB="25000" anchor="ctr">
+                    <a:solidFill>
+                      <a:srgbClr val="F1F2F6"/>
+                    </a:solidFill>
+                  </a:tcPr>
+                </a:tc>
+                <a:tc>
+                  <a:txBody>
+                    <a:bodyPr/>
+                    <a:lstStyle/>
+                    <a:p>
+                      <a:r>
+                        <a:rPr sz="1100" b="0">
+                          <a:solidFill>
+                            <a:srgbClr val="465461"/>
+                          </a:solidFill>
+                          <a:latin typeface="Arial"/>
+                        </a:rPr>
+                        <a:t>MyBB</a:t>
+                      </a:r>
+                    </a:p>
+                  </a:txBody>
+                  <a:tcPr marL="45000" marR="45000" marT="25000" marB="25000" anchor="ctr">
+                    <a:solidFill>
+                      <a:srgbClr val="F1F2F6"/>
+                    </a:solidFill>
+                  </a:tcPr>
+                </a:tc>
+                <a:tc>
+                  <a:txBody>
+                    <a:bodyPr/>
+                    <a:lstStyle/>
+                    <a:p>
+                      <a:r>
+                        <a:rPr sz="1100" b="0">
+                          <a:solidFill>
+                            <a:srgbClr val="465461"/>
+                          </a:solidFill>
+                          <a:latin typeface="Arial"/>
+                        </a:rPr>
+                        <a:t>—</a:t>
+                      </a:r>
+                    </a:p>
+                  </a:txBody>
+                  <a:tcPr marL="45000" marR="45000" marT="25000" marB="25000" anchor="ctr">
+                    <a:solidFill>
+                      <a:srgbClr val="F1F2F6"/>
+                    </a:solidFill>
+                  </a:tcPr>
+                </a:tc>
+                <a:tc>
+                  <a:txBody>
+                    <a:bodyPr/>
+                    <a:lstStyle/>
+                    <a:p>
+                      <a:r>
+                        <a:rPr sz="1100" b="0">
+                          <a:solidFill>
+                            <a:srgbClr val="465461"/>
+                          </a:solidFill>
+                          <a:latin typeface="Arial"/>
+                        </a:rPr>
+                        <a:t>—</a:t>
+                      </a:r>
+                    </a:p>
+                  </a:txBody>
+                  <a:tcPr marL="45000" marR="45000" marT="25000" marB="25000" anchor="ctr">
+                    <a:solidFill>
+                      <a:srgbClr val="F1F2F6"/>
+                    </a:solidFill>
+                  </a:tcPr>
+                </a:tc>
+                <a:tc>
+                  <a:txBody>
+                    <a:bodyPr/>
+                    <a:lstStyle/>
+                    <a:p>
+                      <a:r>
+                        <a:rPr sz="1100" b="0">
+                          <a:solidFill>
+                            <a:srgbClr val="465461"/>
+                          </a:solidFill>
+                          <a:latin typeface="Arial"/>
+                        </a:rPr>
+                        <a:t>Descartado (schema-only)</a:t>
+                      </a:r>
+                    </a:p>
+                  </a:txBody>
+                  <a:tcPr marL="45000" marR="45000" marT="25000" marB="25000" anchor="ctr">
+                    <a:solidFill>
+                      <a:srgbClr val="F1F2F6"/>
+                    </a:solidFill>
+                  </a:tcPr>
+                </a:tc>
+              </a:tr>
+            </a:tbl>
+          </a:graphicData>
+        </a:graphic>
+      </p:graphicFrame>
       <p:sp>
         <p:nvSpPr>
           <p:cNvPr id="5" name="TextBox 4"/>
-          <p:cNvSpPr txBox="1"/>
-          <p:nvPr/>
-        </p:nvSpPr>
-        <p:spPr>
-          <a:xfrm>
-            <a:off x="1097280" y="2203840"/>
-            <a:ext cx="1584960" cy="365760"/>
-          </a:xfrm>
-          <a:prstGeom prst="rect">
-            <a:avLst/>
-          </a:prstGeom>
-          <a:noFill/>
-        </p:spPr>
-        <p:txBody>
-          <a:bodyPr wrap="square">
-            <a:spAutoFit/>
-          </a:bodyPr>
-          <a:lstStyle/>
-          <a:p>
-            <a:pPr algn="l"/>
-            <a:r>
-              <a:rPr sz="1200" b="1">
-                <a:solidFill>
-                  <a:srgbClr val="FFFFFF"/>
-                </a:solidFill>
-                <a:latin typeface="Arial"/>
-              </a:rPr>
-              <a:t>Foro</a:t>
-            </a:r>
-          </a:p>
-        </p:txBody>
-      </p:sp>
-      <p:sp>
-        <p:nvSpPr>
-          <p:cNvPr id="6" name="TextBox 5"/>
-          <p:cNvSpPr txBox="1"/>
-          <p:nvPr/>
-        </p:nvSpPr>
-        <p:spPr>
-          <a:xfrm>
-            <a:off x="2773680" y="2203840"/>
-            <a:ext cx="1584960" cy="365760"/>
-          </a:xfrm>
-          <a:prstGeom prst="rect">
-            <a:avLst/>
-          </a:prstGeom>
-          <a:noFill/>
-        </p:spPr>
-        <p:txBody>
-          <a:bodyPr wrap="square">
-            <a:spAutoFit/>
-          </a:bodyPr>
-          <a:lstStyle/>
-          <a:p>
-            <a:pPr algn="l"/>
-            <a:r>
-              <a:rPr sz="1200" b="1">
-                <a:solidFill>
-                  <a:srgbClr val="FFFFFF"/>
-                </a:solidFill>
-                <a:latin typeface="Arial"/>
-              </a:rPr>
-              <a:t>Archivo</a:t>
-            </a:r>
-          </a:p>
-        </p:txBody>
-      </p:sp>
-      <p:sp>
-        <p:nvSpPr>
-          <p:cNvPr id="7" name="TextBox 6"/>
-          <p:cNvSpPr txBox="1"/>
-          <p:nvPr/>
-        </p:nvSpPr>
-        <p:spPr>
-          <a:xfrm>
-            <a:off x="4450080" y="2203840"/>
-            <a:ext cx="1584960" cy="365760"/>
-          </a:xfrm>
-          <a:prstGeom prst="rect">
-            <a:avLst/>
-          </a:prstGeom>
-          <a:noFill/>
-        </p:spPr>
-        <p:txBody>
-          <a:bodyPr wrap="square">
-            <a:spAutoFit/>
-          </a:bodyPr>
-          <a:lstStyle/>
-          <a:p>
-            <a:pPr algn="l"/>
-            <a:r>
-              <a:rPr sz="1200" b="1">
-                <a:solidFill>
-                  <a:srgbClr val="FFFFFF"/>
-                </a:solidFill>
-                <a:latin typeface="Arial"/>
-              </a:rPr>
-              <a:t>Parser</a:t>
-            </a:r>
-          </a:p>
-        </p:txBody>
-      </p:sp>
-      <p:sp>
-        <p:nvSpPr>
-          <p:cNvPr id="8" name="TextBox 7"/>
-          <p:cNvSpPr txBox="1"/>
-          <p:nvPr/>
-        </p:nvSpPr>
-        <p:spPr>
-          <a:xfrm>
-            <a:off x="6126480" y="2203840"/>
-            <a:ext cx="1584960" cy="365760"/>
-          </a:xfrm>
-          <a:prstGeom prst="rect">
-            <a:avLst/>
-          </a:prstGeom>
-          <a:noFill/>
-        </p:spPr>
-        <p:txBody>
-          <a:bodyPr wrap="square">
-            <a:spAutoFit/>
-          </a:bodyPr>
-          <a:lstStyle/>
-          <a:p>
-            <a:pPr algn="l"/>
-            <a:r>
-              <a:rPr sz="1200" b="1">
-                <a:solidFill>
-                  <a:srgbClr val="FFFFFF"/>
-                </a:solidFill>
-                <a:latin typeface="Arial"/>
-              </a:rPr>
-              <a:t>Idioma</a:t>
-            </a:r>
-          </a:p>
-        </p:txBody>
-      </p:sp>
-      <p:sp>
-        <p:nvSpPr>
-          <p:cNvPr id="9" name="TextBox 8"/>
-          <p:cNvSpPr txBox="1"/>
-          <p:nvPr/>
-        </p:nvSpPr>
-        <p:spPr>
-          <a:xfrm>
-            <a:off x="7802880" y="2203840"/>
-            <a:ext cx="1584960" cy="365760"/>
-          </a:xfrm>
-          <a:prstGeom prst="rect">
-            <a:avLst/>
-          </a:prstGeom>
-          <a:noFill/>
-        </p:spPr>
-        <p:txBody>
-          <a:bodyPr wrap="square">
-            <a:spAutoFit/>
-          </a:bodyPr>
-          <a:lstStyle/>
-          <a:p>
-            <a:pPr algn="l"/>
-            <a:r>
-              <a:rPr sz="1200" b="1">
-                <a:solidFill>
-                  <a:srgbClr val="FFFFFF"/>
-                </a:solidFill>
-                <a:latin typeface="Arial"/>
-              </a:rPr>
-              <a:t>Tier</a:t>
-            </a:r>
-          </a:p>
-        </p:txBody>
-      </p:sp>
-      <p:sp>
-        <p:nvSpPr>
-          <p:cNvPr id="10" name="TextBox 9"/>
-          <p:cNvSpPr txBox="1"/>
-          <p:nvPr/>
-        </p:nvSpPr>
-        <p:spPr>
-          <a:xfrm>
-            <a:off x="9479280" y="2203840"/>
-            <a:ext cx="1584960" cy="365760"/>
-          </a:xfrm>
-          <a:prstGeom prst="rect">
-            <a:avLst/>
-          </a:prstGeom>
-          <a:noFill/>
-        </p:spPr>
-        <p:txBody>
-          <a:bodyPr wrap="square">
-            <a:spAutoFit/>
-          </a:bodyPr>
-          <a:lstStyle/>
-          <a:p>
-            <a:pPr algn="l"/>
-            <a:r>
-              <a:rPr sz="1200" b="1">
-                <a:solidFill>
-                  <a:srgbClr val="FFFFFF"/>
-                </a:solidFill>
-                <a:latin typeface="Arial"/>
-              </a:rPr>
-              <a:t>Uso</a:t>
-            </a:r>
-          </a:p>
-        </p:txBody>
-      </p:sp>
-      <p:sp>
-        <p:nvSpPr>
-          <p:cNvPr id="11" name="Rectangle 10"/>
-          <p:cNvSpPr/>
-          <p:nvPr/>
-        </p:nvSpPr>
-        <p:spPr>
-          <a:xfrm>
-            <a:off x="1051560" y="2514600"/>
-            <a:ext cx="10058400" cy="440689"/>
-          </a:xfrm>
-          <a:prstGeom prst="rect">
-            <a:avLst/>
-          </a:prstGeom>
-          <a:solidFill>
-            <a:srgbClr val="F1F2F6"/>
-          </a:solidFill>
-          <a:ln>
-            <a:noFill/>
-          </a:ln>
-        </p:spPr>
-        <p:style>
-          <a:lnRef idx="1">
-            <a:schemeClr val="accent1"/>
-          </a:lnRef>
-          <a:fillRef idx="3">
-            <a:schemeClr val="accent1"/>
-          </a:fillRef>
-          <a:effectRef idx="2">
-            <a:schemeClr val="accent1"/>
-          </a:effectRef>
-          <a:fontRef idx="minor">
-            <a:schemeClr val="lt1"/>
-          </a:fontRef>
-        </p:style>
-        <p:txBody>
-          <a:bodyPr rtlCol="0" anchor="ctr"/>
-          <a:lstStyle/>
-          <a:p>
-            <a:pPr algn="ctr"/>
-          </a:p>
-        </p:txBody>
-      </p:sp>
-      <p:sp>
-        <p:nvSpPr>
-          <p:cNvPr id="12" name="TextBox 11"/>
-          <p:cNvSpPr txBox="1"/>
-          <p:nvPr/>
-        </p:nvSpPr>
-        <p:spPr>
-          <a:xfrm>
-            <a:off x="1097280" y="2554600"/>
-            <a:ext cx="1584960" cy="440689"/>
-          </a:xfrm>
-          <a:prstGeom prst="rect">
-            <a:avLst/>
-          </a:prstGeom>
-          <a:noFill/>
-        </p:spPr>
-        <p:txBody>
-          <a:bodyPr wrap="square">
-            <a:spAutoFit/>
-          </a:bodyPr>
-          <a:lstStyle/>
-          <a:p>
-            <a:pPr algn="l"/>
-            <a:r>
-              <a:rPr sz="1100" b="0">
-                <a:solidFill>
-                  <a:srgbClr val="465461"/>
-                </a:solidFill>
-                <a:latin typeface="Arial"/>
-              </a:rPr>
-              <a:t>OGUsers</a:t>
-            </a:r>
-          </a:p>
-        </p:txBody>
-      </p:sp>
-      <p:sp>
-        <p:nvSpPr>
-          <p:cNvPr id="13" name="TextBox 12"/>
-          <p:cNvSpPr txBox="1"/>
-          <p:nvPr/>
-        </p:nvSpPr>
-        <p:spPr>
-          <a:xfrm>
-            <a:off x="2773680" y="2554600"/>
-            <a:ext cx="1584960" cy="440689"/>
-          </a:xfrm>
-          <a:prstGeom prst="rect">
-            <a:avLst/>
-          </a:prstGeom>
-          <a:noFill/>
-        </p:spPr>
-        <p:txBody>
-          <a:bodyPr wrap="square">
-            <a:spAutoFit/>
-          </a:bodyPr>
-          <a:lstStyle/>
-          <a:p>
-            <a:pPr algn="l"/>
-            <a:r>
-              <a:rPr sz="1100" b="0">
-                <a:solidFill>
-                  <a:srgbClr val="465461"/>
-                </a:solidFill>
-                <a:latin typeface="Arial"/>
-              </a:rPr>
-              <a:t>OGUsers_2019.zip</a:t>
-            </a:r>
-          </a:p>
-        </p:txBody>
-      </p:sp>
-      <p:sp>
-        <p:nvSpPr>
-          <p:cNvPr id="14" name="TextBox 13"/>
-          <p:cNvSpPr txBox="1"/>
-          <p:nvPr/>
-        </p:nvSpPr>
-        <p:spPr>
-          <a:xfrm>
-            <a:off x="4450080" y="2554600"/>
-            <a:ext cx="1584960" cy="440689"/>
-          </a:xfrm>
-          <a:prstGeom prst="rect">
-            <a:avLst/>
-          </a:prstGeom>
-          <a:noFill/>
-        </p:spPr>
-        <p:txBody>
-          <a:bodyPr wrap="square">
-            <a:spAutoFit/>
-          </a:bodyPr>
-          <a:lstStyle/>
-          <a:p>
-            <a:pPr algn="l"/>
-            <a:r>
-              <a:rPr sz="1100" b="0">
-                <a:solidFill>
-                  <a:srgbClr val="465461"/>
-                </a:solidFill>
-                <a:latin typeface="Arial"/>
-              </a:rPr>
-              <a:t>MyBB (prefijo no estándar)</a:t>
-            </a:r>
-          </a:p>
-        </p:txBody>
-      </p:sp>
-      <p:sp>
-        <p:nvSpPr>
-          <p:cNvPr id="15" name="TextBox 14"/>
-          <p:cNvSpPr txBox="1"/>
-          <p:nvPr/>
-        </p:nvSpPr>
-        <p:spPr>
-          <a:xfrm>
-            <a:off x="6126480" y="2554600"/>
-            <a:ext cx="1584960" cy="440689"/>
-          </a:xfrm>
-          <a:prstGeom prst="rect">
-            <a:avLst/>
-          </a:prstGeom>
-          <a:noFill/>
-        </p:spPr>
-        <p:txBody>
-          <a:bodyPr wrap="square">
-            <a:spAutoFit/>
-          </a:bodyPr>
-          <a:lstStyle/>
-          <a:p>
-            <a:pPr algn="l"/>
-            <a:r>
-              <a:rPr sz="1100" b="0">
-                <a:solidFill>
-                  <a:srgbClr val="465461"/>
-                </a:solidFill>
-                <a:latin typeface="Arial"/>
-              </a:rPr>
-              <a:t>Inglés</a:t>
-            </a:r>
-          </a:p>
-        </p:txBody>
-      </p:sp>
-      <p:sp>
-        <p:nvSpPr>
-          <p:cNvPr id="16" name="TextBox 15"/>
-          <p:cNvSpPr txBox="1"/>
-          <p:nvPr/>
-        </p:nvSpPr>
-        <p:spPr>
-          <a:xfrm>
-            <a:off x="7802880" y="2554600"/>
-            <a:ext cx="1584960" cy="440689"/>
-          </a:xfrm>
-          <a:prstGeom prst="rect">
-            <a:avLst/>
-          </a:prstGeom>
-          <a:noFill/>
-        </p:spPr>
-        <p:txBody>
-          <a:bodyPr wrap="square">
-            <a:spAutoFit/>
-          </a:bodyPr>
-          <a:lstStyle/>
-          <a:p>
-            <a:pPr algn="l"/>
-            <a:r>
-              <a:rPr sz="1100" b="0">
-                <a:solidFill>
-                  <a:srgbClr val="465461"/>
-                </a:solidFill>
-                <a:latin typeface="Arial"/>
-              </a:rPr>
-              <a:t>A</a:t>
-            </a:r>
-          </a:p>
-        </p:txBody>
-      </p:sp>
-      <p:sp>
-        <p:nvSpPr>
-          <p:cNvPr id="17" name="TextBox 16"/>
-          <p:cNvSpPr txBox="1"/>
-          <p:nvPr/>
-        </p:nvSpPr>
-        <p:spPr>
-          <a:xfrm>
-            <a:off x="9479280" y="2554600"/>
-            <a:ext cx="1584960" cy="440689"/>
-          </a:xfrm>
-          <a:prstGeom prst="rect">
-            <a:avLst/>
-          </a:prstGeom>
-          <a:noFill/>
-        </p:spPr>
-        <p:txBody>
-          <a:bodyPr wrap="square">
-            <a:spAutoFit/>
-          </a:bodyPr>
-          <a:lstStyle/>
-          <a:p>
-            <a:pPr algn="l"/>
-            <a:r>
-              <a:rPr sz="1100" b="0">
-                <a:solidFill>
-                  <a:srgbClr val="465461"/>
-                </a:solidFill>
-                <a:latin typeface="Arial"/>
-              </a:rPr>
-              <a:t>Red social, pivoting</a:t>
-            </a:r>
-          </a:p>
-        </p:txBody>
-      </p:sp>
-      <p:sp>
-        <p:nvSpPr>
-          <p:cNvPr id="18" name="Rectangle 17"/>
-          <p:cNvSpPr/>
-          <p:nvPr/>
-        </p:nvSpPr>
-        <p:spPr>
-          <a:xfrm>
-            <a:off x="1051560" y="2955290"/>
-            <a:ext cx="10058400" cy="440689"/>
-          </a:xfrm>
-          <a:prstGeom prst="rect">
-            <a:avLst/>
-          </a:prstGeom>
-          <a:solidFill>
-            <a:srgbClr val="FFFFFF"/>
-          </a:solidFill>
-          <a:ln>
-            <a:noFill/>
-          </a:ln>
-        </p:spPr>
-        <p:style>
-          <a:lnRef idx="1">
-            <a:schemeClr val="accent1"/>
-          </a:lnRef>
-          <a:fillRef idx="3">
-            <a:schemeClr val="accent1"/>
-          </a:fillRef>
-          <a:effectRef idx="2">
-            <a:schemeClr val="accent1"/>
-          </a:effectRef>
-          <a:fontRef idx="minor">
-            <a:schemeClr val="lt1"/>
-          </a:fontRef>
-        </p:style>
-        <p:txBody>
-          <a:bodyPr rtlCol="0" anchor="ctr"/>
-          <a:lstStyle/>
-          <a:p>
-            <a:pPr algn="ctr"/>
-          </a:p>
-        </p:txBody>
-      </p:sp>
-      <p:sp>
-        <p:nvSpPr>
-          <p:cNvPr id="19" name="TextBox 18"/>
-          <p:cNvSpPr txBox="1"/>
-          <p:nvPr/>
-        </p:nvSpPr>
-        <p:spPr>
-          <a:xfrm>
-            <a:off x="1097280" y="2995290"/>
-            <a:ext cx="1584960" cy="440689"/>
-          </a:xfrm>
-          <a:prstGeom prst="rect">
-            <a:avLst/>
-          </a:prstGeom>
-          <a:noFill/>
-        </p:spPr>
-        <p:txBody>
-          <a:bodyPr wrap="square">
-            <a:spAutoFit/>
-          </a:bodyPr>
-          <a:lstStyle/>
-          <a:p>
-            <a:pPr algn="l"/>
-            <a:r>
-              <a:rPr sz="1100" b="0">
-                <a:solidFill>
-                  <a:srgbClr val="465461"/>
-                </a:solidFill>
-                <a:latin typeface="Arial"/>
-              </a:rPr>
-              <a:t>Exploit.in</a:t>
-            </a:r>
-          </a:p>
-        </p:txBody>
-      </p:sp>
-      <p:sp>
-        <p:nvSpPr>
-          <p:cNvPr id="20" name="TextBox 19"/>
-          <p:cNvSpPr txBox="1"/>
-          <p:nvPr/>
-        </p:nvSpPr>
-        <p:spPr>
-          <a:xfrm>
-            <a:off x="2773680" y="2995290"/>
-            <a:ext cx="1584960" cy="440689"/>
-          </a:xfrm>
-          <a:prstGeom prst="rect">
-            <a:avLst/>
-          </a:prstGeom>
-          <a:noFill/>
-        </p:spPr>
-        <p:txBody>
-          <a:bodyPr wrap="square">
-            <a:spAutoFit/>
-          </a:bodyPr>
-          <a:lstStyle/>
-          <a:p>
-            <a:pPr algn="l"/>
-            <a:r>
-              <a:rPr sz="1100" b="0">
-                <a:solidFill>
-                  <a:srgbClr val="465461"/>
-                </a:solidFill>
-                <a:latin typeface="Arial"/>
-              </a:rPr>
-              <a:t>Exploit.in_2013.12.13.zip</a:t>
-            </a:r>
-          </a:p>
-        </p:txBody>
-      </p:sp>
-      <p:sp>
-        <p:nvSpPr>
-          <p:cNvPr id="21" name="TextBox 20"/>
-          <p:cNvSpPr txBox="1"/>
-          <p:nvPr/>
-        </p:nvSpPr>
-        <p:spPr>
-          <a:xfrm>
-            <a:off x="4450080" y="2995290"/>
-            <a:ext cx="1584960" cy="440689"/>
-          </a:xfrm>
-          <a:prstGeom prst="rect">
-            <a:avLst/>
-          </a:prstGeom>
-          <a:noFill/>
-        </p:spPr>
-        <p:txBody>
-          <a:bodyPr wrap="square">
-            <a:spAutoFit/>
-          </a:bodyPr>
-          <a:lstStyle/>
-          <a:p>
-            <a:pPr algn="l"/>
-            <a:r>
-              <a:rPr sz="1100" b="0">
-                <a:solidFill>
-                  <a:srgbClr val="465461"/>
-                </a:solidFill>
-                <a:latin typeface="Arial"/>
-              </a:rPr>
-              <a:t>IPS 3.x (ibf_)</a:t>
-            </a:r>
-          </a:p>
-        </p:txBody>
-      </p:sp>
-      <p:sp>
-        <p:nvSpPr>
-          <p:cNvPr id="22" name="TextBox 21"/>
-          <p:cNvSpPr txBox="1"/>
-          <p:nvPr/>
-        </p:nvSpPr>
-        <p:spPr>
-          <a:xfrm>
-            <a:off x="6126480" y="2995290"/>
-            <a:ext cx="1584960" cy="440689"/>
-          </a:xfrm>
-          <a:prstGeom prst="rect">
-            <a:avLst/>
-          </a:prstGeom>
-          <a:noFill/>
-        </p:spPr>
-        <p:txBody>
-          <a:bodyPr wrap="square">
-            <a:spAutoFit/>
-          </a:bodyPr>
-          <a:lstStyle/>
-          <a:p>
-            <a:pPr algn="l"/>
-            <a:r>
-              <a:rPr sz="1100" b="0">
-                <a:solidFill>
-                  <a:srgbClr val="465461"/>
-                </a:solidFill>
-                <a:latin typeface="Arial"/>
-              </a:rPr>
-              <a:t>Ruso</a:t>
-            </a:r>
-          </a:p>
-        </p:txBody>
-      </p:sp>
-      <p:sp>
-        <p:nvSpPr>
-          <p:cNvPr id="23" name="TextBox 22"/>
-          <p:cNvSpPr txBox="1"/>
-          <p:nvPr/>
-        </p:nvSpPr>
-        <p:spPr>
-          <a:xfrm>
-            <a:off x="7802880" y="2995290"/>
-            <a:ext cx="1584960" cy="440689"/>
-          </a:xfrm>
-          <a:prstGeom prst="rect">
-            <a:avLst/>
-          </a:prstGeom>
-          <a:noFill/>
-        </p:spPr>
-        <p:txBody>
-          <a:bodyPr wrap="square">
-            <a:spAutoFit/>
-          </a:bodyPr>
-          <a:lstStyle/>
-          <a:p>
-            <a:pPr algn="l"/>
-            <a:r>
-              <a:rPr sz="1100" b="0">
-                <a:solidFill>
-                  <a:srgbClr val="465461"/>
-                </a:solidFill>
-                <a:latin typeface="Arial"/>
-              </a:rPr>
-              <a:t>A</a:t>
-            </a:r>
-          </a:p>
-        </p:txBody>
-      </p:sp>
-      <p:sp>
-        <p:nvSpPr>
-          <p:cNvPr id="24" name="TextBox 23"/>
-          <p:cNvSpPr txBox="1"/>
-          <p:nvPr/>
-        </p:nvSpPr>
-        <p:spPr>
-          <a:xfrm>
-            <a:off x="9479280" y="2995290"/>
-            <a:ext cx="1584960" cy="440689"/>
-          </a:xfrm>
-          <a:prstGeom prst="rect">
-            <a:avLst/>
-          </a:prstGeom>
-          <a:noFill/>
-        </p:spPr>
-        <p:txBody>
-          <a:bodyPr wrap="square">
-            <a:spAutoFit/>
-          </a:bodyPr>
-          <a:lstStyle/>
-          <a:p>
-            <a:pPr algn="l"/>
-            <a:r>
-              <a:rPr sz="1100" b="0">
-                <a:solidFill>
-                  <a:srgbClr val="465461"/>
-                </a:solidFill>
-                <a:latin typeface="Arial"/>
-              </a:rPr>
-              <a:t>Pivoting cross-foro</a:t>
-            </a:r>
-          </a:p>
-        </p:txBody>
-      </p:sp>
-      <p:sp>
-        <p:nvSpPr>
-          <p:cNvPr id="25" name="Rectangle 24"/>
-          <p:cNvSpPr/>
-          <p:nvPr/>
-        </p:nvSpPr>
-        <p:spPr>
-          <a:xfrm>
-            <a:off x="1051560" y="3395979"/>
-            <a:ext cx="10058400" cy="440689"/>
-          </a:xfrm>
-          <a:prstGeom prst="rect">
-            <a:avLst/>
-          </a:prstGeom>
-          <a:solidFill>
-            <a:srgbClr val="F1F2F6"/>
-          </a:solidFill>
-          <a:ln>
-            <a:noFill/>
-          </a:ln>
-        </p:spPr>
-        <p:style>
-          <a:lnRef idx="1">
-            <a:schemeClr val="accent1"/>
-          </a:lnRef>
-          <a:fillRef idx="3">
-            <a:schemeClr val="accent1"/>
-          </a:fillRef>
-          <a:effectRef idx="2">
-            <a:schemeClr val="accent1"/>
-          </a:effectRef>
-          <a:fontRef idx="minor">
-            <a:schemeClr val="lt1"/>
-          </a:fontRef>
-        </p:style>
-        <p:txBody>
-          <a:bodyPr rtlCol="0" anchor="ctr"/>
-          <a:lstStyle/>
-          <a:p>
-            <a:pPr algn="ctr"/>
-          </a:p>
-        </p:txBody>
-      </p:sp>
-      <p:sp>
-        <p:nvSpPr>
-          <p:cNvPr id="26" name="TextBox 25"/>
-          <p:cNvSpPr txBox="1"/>
-          <p:nvPr/>
-        </p:nvSpPr>
-        <p:spPr>
-          <a:xfrm>
-            <a:off x="1097280" y="3435979"/>
-            <a:ext cx="1584960" cy="440689"/>
-          </a:xfrm>
-          <a:prstGeom prst="rect">
-            <a:avLst/>
-          </a:prstGeom>
-          <a:noFill/>
-        </p:spPr>
-        <p:txBody>
-          <a:bodyPr wrap="square">
-            <a:spAutoFit/>
-          </a:bodyPr>
-          <a:lstStyle/>
-          <a:p>
-            <a:pPr algn="l"/>
-            <a:r>
-              <a:rPr sz="1100" b="0">
-                <a:solidFill>
-                  <a:srgbClr val="465461"/>
-                </a:solidFill>
-                <a:latin typeface="Arial"/>
-              </a:rPr>
-              <a:t>Cracked.to</a:t>
-            </a:r>
-          </a:p>
-        </p:txBody>
-      </p:sp>
-      <p:sp>
-        <p:nvSpPr>
-          <p:cNvPr id="27" name="TextBox 26"/>
-          <p:cNvSpPr txBox="1"/>
-          <p:nvPr/>
-        </p:nvSpPr>
-        <p:spPr>
-          <a:xfrm>
-            <a:off x="2773680" y="3435979"/>
-            <a:ext cx="1584960" cy="440689"/>
-          </a:xfrm>
-          <a:prstGeom prst="rect">
-            <a:avLst/>
-          </a:prstGeom>
-          <a:noFill/>
-        </p:spPr>
-        <p:txBody>
-          <a:bodyPr wrap="square">
-            <a:spAutoFit/>
-          </a:bodyPr>
-          <a:lstStyle/>
-          <a:p>
-            <a:pPr algn="l"/>
-            <a:r>
-              <a:rPr sz="1100" b="0">
-                <a:solidFill>
-                  <a:srgbClr val="465461"/>
-                </a:solidFill>
-                <a:latin typeface="Arial"/>
-              </a:rPr>
-              <a:t>Cracked.to_2019.01.zip</a:t>
-            </a:r>
-          </a:p>
-        </p:txBody>
-      </p:sp>
-      <p:sp>
-        <p:nvSpPr>
-          <p:cNvPr id="28" name="TextBox 27"/>
-          <p:cNvSpPr txBox="1"/>
-          <p:nvPr/>
-        </p:nvSpPr>
-        <p:spPr>
-          <a:xfrm>
-            <a:off x="4450080" y="3435979"/>
-            <a:ext cx="1584960" cy="440689"/>
-          </a:xfrm>
-          <a:prstGeom prst="rect">
-            <a:avLst/>
-          </a:prstGeom>
-          <a:noFill/>
-        </p:spPr>
-        <p:txBody>
-          <a:bodyPr wrap="square">
-            <a:spAutoFit/>
-          </a:bodyPr>
-          <a:lstStyle/>
-          <a:p>
-            <a:pPr algn="l"/>
-            <a:r>
-              <a:rPr sz="1100" b="0">
-                <a:solidFill>
-                  <a:srgbClr val="465461"/>
-                </a:solidFill>
-                <a:latin typeface="Arial"/>
-              </a:rPr>
-              <a:t>MyBB</a:t>
-            </a:r>
-          </a:p>
-        </p:txBody>
-      </p:sp>
-      <p:sp>
-        <p:nvSpPr>
-          <p:cNvPr id="29" name="TextBox 28"/>
-          <p:cNvSpPr txBox="1"/>
-          <p:nvPr/>
-        </p:nvSpPr>
-        <p:spPr>
-          <a:xfrm>
-            <a:off x="6126480" y="3435979"/>
-            <a:ext cx="1584960" cy="440689"/>
-          </a:xfrm>
-          <a:prstGeom prst="rect">
-            <a:avLst/>
-          </a:prstGeom>
-          <a:noFill/>
-        </p:spPr>
-        <p:txBody>
-          <a:bodyPr wrap="square">
-            <a:spAutoFit/>
-          </a:bodyPr>
-          <a:lstStyle/>
-          <a:p>
-            <a:pPr algn="l"/>
-            <a:r>
-              <a:rPr sz="1100" b="0">
-                <a:solidFill>
-                  <a:srgbClr val="465461"/>
-                </a:solidFill>
-                <a:latin typeface="Arial"/>
-              </a:rPr>
-              <a:t>Inglés</a:t>
-            </a:r>
-          </a:p>
-        </p:txBody>
-      </p:sp>
-      <p:sp>
-        <p:nvSpPr>
-          <p:cNvPr id="30" name="TextBox 29"/>
-          <p:cNvSpPr txBox="1"/>
-          <p:nvPr/>
-        </p:nvSpPr>
-        <p:spPr>
-          <a:xfrm>
-            <a:off x="7802880" y="3435979"/>
-            <a:ext cx="1584960" cy="440689"/>
-          </a:xfrm>
-          <a:prstGeom prst="rect">
-            <a:avLst/>
-          </a:prstGeom>
-          <a:noFill/>
-        </p:spPr>
-        <p:txBody>
-          <a:bodyPr wrap="square">
-            <a:spAutoFit/>
-          </a:bodyPr>
-          <a:lstStyle/>
-          <a:p>
-            <a:pPr algn="l"/>
-            <a:r>
-              <a:rPr sz="1100" b="0">
-                <a:solidFill>
-                  <a:srgbClr val="465461"/>
-                </a:solidFill>
-                <a:latin typeface="Arial"/>
-              </a:rPr>
-              <a:t>A</a:t>
-            </a:r>
-          </a:p>
-        </p:txBody>
-      </p:sp>
-      <p:sp>
-        <p:nvSpPr>
-          <p:cNvPr id="31" name="TextBox 30"/>
-          <p:cNvSpPr txBox="1"/>
-          <p:nvPr/>
-        </p:nvSpPr>
-        <p:spPr>
-          <a:xfrm>
-            <a:off x="9479280" y="3435979"/>
-            <a:ext cx="1584960" cy="440689"/>
-          </a:xfrm>
-          <a:prstGeom prst="rect">
-            <a:avLst/>
-          </a:prstGeom>
-          <a:noFill/>
-        </p:spPr>
-        <p:txBody>
-          <a:bodyPr wrap="square">
-            <a:spAutoFit/>
-          </a:bodyPr>
-          <a:lstStyle/>
-          <a:p>
-            <a:pPr algn="l"/>
-            <a:r>
-              <a:rPr sz="1100" b="0">
-                <a:solidFill>
-                  <a:srgbClr val="465461"/>
-                </a:solidFill>
-                <a:latin typeface="Arial"/>
-              </a:rPr>
-              <a:t>Pivoting + contenido</a:t>
-            </a:r>
-          </a:p>
-        </p:txBody>
-      </p:sp>
-      <p:sp>
-        <p:nvSpPr>
-          <p:cNvPr id="32" name="Rectangle 31"/>
-          <p:cNvSpPr/>
-          <p:nvPr/>
-        </p:nvSpPr>
-        <p:spPr>
-          <a:xfrm>
-            <a:off x="1051560" y="3836669"/>
-            <a:ext cx="10058400" cy="440689"/>
-          </a:xfrm>
-          <a:prstGeom prst="rect">
-            <a:avLst/>
-          </a:prstGeom>
-          <a:solidFill>
-            <a:srgbClr val="FFFFFF"/>
-          </a:solidFill>
-          <a:ln>
-            <a:noFill/>
-          </a:ln>
-        </p:spPr>
-        <p:style>
-          <a:lnRef idx="1">
-            <a:schemeClr val="accent1"/>
-          </a:lnRef>
-          <a:fillRef idx="3">
-            <a:schemeClr val="accent1"/>
-          </a:fillRef>
-          <a:effectRef idx="2">
-            <a:schemeClr val="accent1"/>
-          </a:effectRef>
-          <a:fontRef idx="minor">
-            <a:schemeClr val="lt1"/>
-          </a:fontRef>
-        </p:style>
-        <p:txBody>
-          <a:bodyPr rtlCol="0" anchor="ctr"/>
-          <a:lstStyle/>
-          <a:p>
-            <a:pPr algn="ctr"/>
-          </a:p>
-        </p:txBody>
-      </p:sp>
-      <p:sp>
-        <p:nvSpPr>
-          <p:cNvPr id="33" name="TextBox 32"/>
-          <p:cNvSpPr txBox="1"/>
-          <p:nvPr/>
-        </p:nvSpPr>
-        <p:spPr>
-          <a:xfrm>
-            <a:off x="1097280" y="3876669"/>
-            <a:ext cx="1584960" cy="440689"/>
-          </a:xfrm>
-          <a:prstGeom prst="rect">
-            <a:avLst/>
-          </a:prstGeom>
-          <a:noFill/>
-        </p:spPr>
-        <p:txBody>
-          <a:bodyPr wrap="square">
-            <a:spAutoFit/>
-          </a:bodyPr>
-          <a:lstStyle/>
-          <a:p>
-            <a:pPr algn="l"/>
-            <a:r>
-              <a:rPr sz="1100" b="0">
-                <a:solidFill>
-                  <a:srgbClr val="465461"/>
-                </a:solidFill>
-                <a:latin typeface="Arial"/>
-              </a:rPr>
-              <a:t>Nulled.io</a:t>
-            </a:r>
-          </a:p>
-        </p:txBody>
-      </p:sp>
-      <p:sp>
-        <p:nvSpPr>
-          <p:cNvPr id="34" name="TextBox 33"/>
-          <p:cNvSpPr txBox="1"/>
-          <p:nvPr/>
-        </p:nvSpPr>
-        <p:spPr>
-          <a:xfrm>
-            <a:off x="2773680" y="3876669"/>
-            <a:ext cx="1584960" cy="440689"/>
-          </a:xfrm>
-          <a:prstGeom prst="rect">
-            <a:avLst/>
-          </a:prstGeom>
-          <a:noFill/>
-        </p:spPr>
-        <p:txBody>
-          <a:bodyPr wrap="square">
-            <a:spAutoFit/>
-          </a:bodyPr>
-          <a:lstStyle/>
-          <a:p>
-            <a:pPr algn="l"/>
-            <a:r>
-              <a:rPr sz="1100" b="0">
-                <a:solidFill>
-                  <a:srgbClr val="465461"/>
-                </a:solidFill>
-                <a:latin typeface="Arial"/>
-              </a:rPr>
-              <a:t>Nulled.io_2016.05.zip</a:t>
-            </a:r>
-          </a:p>
-        </p:txBody>
-      </p:sp>
-      <p:sp>
-        <p:nvSpPr>
-          <p:cNvPr id="35" name="TextBox 34"/>
-          <p:cNvSpPr txBox="1"/>
-          <p:nvPr/>
-        </p:nvSpPr>
-        <p:spPr>
-          <a:xfrm>
-            <a:off x="4450080" y="3876669"/>
-            <a:ext cx="1584960" cy="440689"/>
-          </a:xfrm>
-          <a:prstGeom prst="rect">
-            <a:avLst/>
-          </a:prstGeom>
-          <a:noFill/>
-        </p:spPr>
-        <p:txBody>
-          <a:bodyPr wrap="square">
-            <a:spAutoFit/>
-          </a:bodyPr>
-          <a:lstStyle/>
-          <a:p>
-            <a:pPr algn="l"/>
-            <a:r>
-              <a:rPr sz="1100" b="0">
-                <a:solidFill>
-                  <a:srgbClr val="465461"/>
-                </a:solidFill>
-                <a:latin typeface="Arial"/>
-              </a:rPr>
-              <a:t>IPS 3.x (sin prefijo)</a:t>
-            </a:r>
-          </a:p>
-        </p:txBody>
-      </p:sp>
-      <p:sp>
-        <p:nvSpPr>
-          <p:cNvPr id="36" name="TextBox 35"/>
-          <p:cNvSpPr txBox="1"/>
-          <p:nvPr/>
-        </p:nvSpPr>
-        <p:spPr>
-          <a:xfrm>
-            <a:off x="6126480" y="3876669"/>
-            <a:ext cx="1584960" cy="440689"/>
-          </a:xfrm>
-          <a:prstGeom prst="rect">
-            <a:avLst/>
-          </a:prstGeom>
-          <a:noFill/>
-        </p:spPr>
-        <p:txBody>
-          <a:bodyPr wrap="square">
-            <a:spAutoFit/>
-          </a:bodyPr>
-          <a:lstStyle/>
-          <a:p>
-            <a:pPr algn="l"/>
-            <a:r>
-              <a:rPr sz="1100" b="0">
-                <a:solidFill>
-                  <a:srgbClr val="465461"/>
-                </a:solidFill>
-                <a:latin typeface="Arial"/>
-              </a:rPr>
-              <a:t>Inglés</a:t>
-            </a:r>
-          </a:p>
-        </p:txBody>
-      </p:sp>
-      <p:sp>
-        <p:nvSpPr>
-          <p:cNvPr id="37" name="TextBox 36"/>
-          <p:cNvSpPr txBox="1"/>
-          <p:nvPr/>
-        </p:nvSpPr>
-        <p:spPr>
-          <a:xfrm>
-            <a:off x="7802880" y="3876669"/>
-            <a:ext cx="1584960" cy="440689"/>
-          </a:xfrm>
-          <a:prstGeom prst="rect">
-            <a:avLst/>
-          </a:prstGeom>
-          <a:noFill/>
-        </p:spPr>
-        <p:txBody>
-          <a:bodyPr wrap="square">
-            <a:spAutoFit/>
-          </a:bodyPr>
-          <a:lstStyle/>
-          <a:p>
-            <a:pPr algn="l"/>
-            <a:r>
-              <a:rPr sz="1100" b="0">
-                <a:solidFill>
-                  <a:srgbClr val="465461"/>
-                </a:solidFill>
-                <a:latin typeface="Arial"/>
-              </a:rPr>
-              <a:t>A</a:t>
-            </a:r>
-          </a:p>
-        </p:txBody>
-      </p:sp>
-      <p:sp>
-        <p:nvSpPr>
-          <p:cNvPr id="38" name="TextBox 37"/>
-          <p:cNvSpPr txBox="1"/>
-          <p:nvPr/>
-        </p:nvSpPr>
-        <p:spPr>
-          <a:xfrm>
-            <a:off x="9479280" y="3876669"/>
-            <a:ext cx="1584960" cy="440689"/>
-          </a:xfrm>
-          <a:prstGeom prst="rect">
-            <a:avLst/>
-          </a:prstGeom>
-          <a:noFill/>
-        </p:spPr>
-        <p:txBody>
-          <a:bodyPr wrap="square">
-            <a:spAutoFit/>
-          </a:bodyPr>
-          <a:lstStyle/>
-          <a:p>
-            <a:pPr algn="l"/>
-            <a:r>
-              <a:rPr sz="1100" b="0">
-                <a:solidFill>
-                  <a:srgbClr val="465461"/>
-                </a:solidFill>
-                <a:latin typeface="Arial"/>
-              </a:rPr>
-              <a:t>Contexto histórico</a:t>
-            </a:r>
-          </a:p>
-        </p:txBody>
-      </p:sp>
-      <p:sp>
-        <p:nvSpPr>
-          <p:cNvPr id="39" name="Rectangle 38"/>
-          <p:cNvSpPr/>
-          <p:nvPr/>
-        </p:nvSpPr>
-        <p:spPr>
-          <a:xfrm>
-            <a:off x="1051560" y="4277359"/>
-            <a:ext cx="10058400" cy="440689"/>
-          </a:xfrm>
-          <a:prstGeom prst="rect">
-            <a:avLst/>
-          </a:prstGeom>
-          <a:solidFill>
-            <a:srgbClr val="F1F2F6"/>
-          </a:solidFill>
-          <a:ln>
-            <a:noFill/>
-          </a:ln>
-        </p:spPr>
-        <p:style>
-          <a:lnRef idx="1">
-            <a:schemeClr val="accent1"/>
-          </a:lnRef>
-          <a:fillRef idx="3">
-            <a:schemeClr val="accent1"/>
-          </a:fillRef>
-          <a:effectRef idx="2">
-            <a:schemeClr val="accent1"/>
-          </a:effectRef>
-          <a:fontRef idx="minor">
-            <a:schemeClr val="lt1"/>
-          </a:fontRef>
-        </p:style>
-        <p:txBody>
-          <a:bodyPr rtlCol="0" anchor="ctr"/>
-          <a:lstStyle/>
-          <a:p>
-            <a:pPr algn="ctr"/>
-          </a:p>
-        </p:txBody>
-      </p:sp>
-      <p:sp>
-        <p:nvSpPr>
-          <p:cNvPr id="40" name="TextBox 39"/>
-          <p:cNvSpPr txBox="1"/>
-          <p:nvPr/>
-        </p:nvSpPr>
-        <p:spPr>
-          <a:xfrm>
-            <a:off x="1097280" y="4317359"/>
-            <a:ext cx="1584960" cy="440689"/>
-          </a:xfrm>
-          <a:prstGeom prst="rect">
-            <a:avLst/>
-          </a:prstGeom>
-          <a:noFill/>
-        </p:spPr>
-        <p:txBody>
-          <a:bodyPr wrap="square">
-            <a:spAutoFit/>
-          </a:bodyPr>
-          <a:lstStyle/>
-          <a:p>
-            <a:pPr algn="l"/>
-            <a:r>
-              <a:rPr sz="1100" b="0">
-                <a:solidFill>
-                  <a:srgbClr val="465461"/>
-                </a:solidFill>
-                <a:latin typeface="Arial"/>
-              </a:rPr>
-              <a:t>RaidForums</a:t>
-            </a:r>
-          </a:p>
-        </p:txBody>
-      </p:sp>
-      <p:sp>
-        <p:nvSpPr>
-          <p:cNvPr id="41" name="TextBox 40"/>
-          <p:cNvSpPr txBox="1"/>
-          <p:nvPr/>
-        </p:nvSpPr>
-        <p:spPr>
-          <a:xfrm>
-            <a:off x="2773680" y="4317359"/>
-            <a:ext cx="1584960" cy="440689"/>
-          </a:xfrm>
-          <a:prstGeom prst="rect">
-            <a:avLst/>
-          </a:prstGeom>
-          <a:noFill/>
-        </p:spPr>
-        <p:txBody>
-          <a:bodyPr wrap="square">
-            <a:spAutoFit/>
-          </a:bodyPr>
-          <a:lstStyle/>
-          <a:p>
-            <a:pPr algn="l"/>
-            <a:r>
-              <a:rPr sz="1100" b="0">
-                <a:solidFill>
-                  <a:srgbClr val="465461"/>
-                </a:solidFill>
-                <a:latin typeface="Arial"/>
-              </a:rPr>
-              <a:t>RaidForums_2021.zip</a:t>
-            </a:r>
-          </a:p>
-        </p:txBody>
-      </p:sp>
-      <p:sp>
-        <p:nvSpPr>
-          <p:cNvPr id="42" name="TextBox 41"/>
-          <p:cNvSpPr txBox="1"/>
-          <p:nvPr/>
-        </p:nvSpPr>
-        <p:spPr>
-          <a:xfrm>
-            <a:off x="4450080" y="4317359"/>
-            <a:ext cx="1584960" cy="440689"/>
-          </a:xfrm>
-          <a:prstGeom prst="rect">
-            <a:avLst/>
-          </a:prstGeom>
-          <a:noFill/>
-        </p:spPr>
-        <p:txBody>
-          <a:bodyPr wrap="square">
-            <a:spAutoFit/>
-          </a:bodyPr>
-          <a:lstStyle/>
-          <a:p>
-            <a:pPr algn="l"/>
-            <a:r>
-              <a:rPr sz="1100" b="0">
-                <a:solidFill>
-                  <a:srgbClr val="465461"/>
-                </a:solidFill>
-                <a:latin typeface="Arial"/>
-              </a:rPr>
-              <a:t>MyBB</a:t>
-            </a:r>
-          </a:p>
-        </p:txBody>
-      </p:sp>
-      <p:sp>
-        <p:nvSpPr>
-          <p:cNvPr id="43" name="TextBox 42"/>
-          <p:cNvSpPr txBox="1"/>
-          <p:nvPr/>
-        </p:nvSpPr>
-        <p:spPr>
-          <a:xfrm>
-            <a:off x="6126480" y="4317359"/>
-            <a:ext cx="1584960" cy="440689"/>
-          </a:xfrm>
-          <a:prstGeom prst="rect">
-            <a:avLst/>
-          </a:prstGeom>
-          <a:noFill/>
-        </p:spPr>
-        <p:txBody>
-          <a:bodyPr wrap="square">
-            <a:spAutoFit/>
-          </a:bodyPr>
-          <a:lstStyle/>
-          <a:p>
-            <a:pPr algn="l"/>
-            <a:r>
-              <a:rPr sz="1100" b="0">
-                <a:solidFill>
-                  <a:srgbClr val="465461"/>
-                </a:solidFill>
-                <a:latin typeface="Arial"/>
-              </a:rPr>
-              <a:t>Inglés</a:t>
-            </a:r>
-          </a:p>
-        </p:txBody>
-      </p:sp>
-      <p:sp>
-        <p:nvSpPr>
-          <p:cNvPr id="44" name="TextBox 43"/>
-          <p:cNvSpPr txBox="1"/>
-          <p:nvPr/>
-        </p:nvSpPr>
-        <p:spPr>
-          <a:xfrm>
-            <a:off x="7802880" y="4317359"/>
-            <a:ext cx="1584960" cy="440689"/>
-          </a:xfrm>
-          <a:prstGeom prst="rect">
-            <a:avLst/>
-          </a:prstGeom>
-          <a:noFill/>
-        </p:spPr>
-        <p:txBody>
-          <a:bodyPr wrap="square">
-            <a:spAutoFit/>
-          </a:bodyPr>
-          <a:lstStyle/>
-          <a:p>
-            <a:pPr algn="l"/>
-            <a:r>
-              <a:rPr sz="1100" b="0">
-                <a:solidFill>
-                  <a:srgbClr val="465461"/>
-                </a:solidFill>
-                <a:latin typeface="Arial"/>
-              </a:rPr>
-              <a:t>A</a:t>
-            </a:r>
-          </a:p>
-        </p:txBody>
-      </p:sp>
-      <p:sp>
-        <p:nvSpPr>
-          <p:cNvPr id="45" name="TextBox 44"/>
-          <p:cNvSpPr txBox="1"/>
-          <p:nvPr/>
-        </p:nvSpPr>
-        <p:spPr>
-          <a:xfrm>
-            <a:off x="9479280" y="4317359"/>
-            <a:ext cx="1584960" cy="440689"/>
-          </a:xfrm>
-          <a:prstGeom prst="rect">
-            <a:avLst/>
-          </a:prstGeom>
-          <a:noFill/>
-        </p:spPr>
-        <p:txBody>
-          <a:bodyPr wrap="square">
-            <a:spAutoFit/>
-          </a:bodyPr>
-          <a:lstStyle/>
-          <a:p>
-            <a:pPr algn="l"/>
-            <a:r>
-              <a:rPr sz="1100" b="0">
-                <a:solidFill>
-                  <a:srgbClr val="465461"/>
-                </a:solidFill>
-                <a:latin typeface="Arial"/>
-              </a:rPr>
-              <a:t>Pivoting cross-foro</a:t>
-            </a:r>
-          </a:p>
-        </p:txBody>
-      </p:sp>
-      <p:sp>
-        <p:nvSpPr>
-          <p:cNvPr id="46" name="Rectangle 45"/>
-          <p:cNvSpPr/>
-          <p:nvPr/>
-        </p:nvSpPr>
-        <p:spPr>
-          <a:xfrm>
-            <a:off x="1051560" y="4718049"/>
-            <a:ext cx="10058400" cy="440689"/>
-          </a:xfrm>
-          <a:prstGeom prst="rect">
-            <a:avLst/>
-          </a:prstGeom>
-          <a:solidFill>
-            <a:srgbClr val="FFFFFF"/>
-          </a:solidFill>
-          <a:ln>
-            <a:noFill/>
-          </a:ln>
-        </p:spPr>
-        <p:style>
-          <a:lnRef idx="1">
-            <a:schemeClr val="accent1"/>
-          </a:lnRef>
-          <a:fillRef idx="3">
-            <a:schemeClr val="accent1"/>
-          </a:fillRef>
-          <a:effectRef idx="2">
-            <a:schemeClr val="accent1"/>
-          </a:effectRef>
-          <a:fontRef idx="minor">
-            <a:schemeClr val="lt1"/>
-          </a:fontRef>
-        </p:style>
-        <p:txBody>
-          <a:bodyPr rtlCol="0" anchor="ctr"/>
-          <a:lstStyle/>
-          <a:p>
-            <a:pPr algn="ctr"/>
-          </a:p>
-        </p:txBody>
-      </p:sp>
-      <p:sp>
-        <p:nvSpPr>
-          <p:cNvPr id="47" name="TextBox 46"/>
-          <p:cNvSpPr txBox="1"/>
-          <p:nvPr/>
-        </p:nvSpPr>
-        <p:spPr>
-          <a:xfrm>
-            <a:off x="1097280" y="4758049"/>
-            <a:ext cx="1584960" cy="440689"/>
-          </a:xfrm>
-          <a:prstGeom prst="rect">
-            <a:avLst/>
-          </a:prstGeom>
-          <a:noFill/>
-        </p:spPr>
-        <p:txBody>
-          <a:bodyPr wrap="square">
-            <a:spAutoFit/>
-          </a:bodyPr>
-          <a:lstStyle/>
-          <a:p>
-            <a:pPr algn="l"/>
-            <a:r>
-              <a:rPr sz="1100" b="0">
-                <a:solidFill>
-                  <a:srgbClr val="465461"/>
-                </a:solidFill>
-                <a:latin typeface="Arial"/>
-              </a:rPr>
-              <a:t>Hackforums.net</a:t>
-            </a:r>
-          </a:p>
-        </p:txBody>
-      </p:sp>
-      <p:sp>
-        <p:nvSpPr>
-          <p:cNvPr id="48" name="TextBox 47"/>
-          <p:cNvSpPr txBox="1"/>
-          <p:nvPr/>
-        </p:nvSpPr>
-        <p:spPr>
-          <a:xfrm>
-            <a:off x="2773680" y="4758049"/>
-            <a:ext cx="1584960" cy="440689"/>
-          </a:xfrm>
-          <a:prstGeom prst="rect">
-            <a:avLst/>
-          </a:prstGeom>
-          <a:noFill/>
-        </p:spPr>
-        <p:txBody>
-          <a:bodyPr wrap="square">
-            <a:spAutoFit/>
-          </a:bodyPr>
-          <a:lstStyle/>
-          <a:p>
-            <a:pPr algn="l"/>
-            <a:r>
-              <a:rPr sz="1100" b="0">
-                <a:solidFill>
-                  <a:srgbClr val="465461"/>
-                </a:solidFill>
-                <a:latin typeface="Arial"/>
-              </a:rPr>
-              <a:t>Hackforums.net_2015.zip</a:t>
-            </a:r>
-          </a:p>
-        </p:txBody>
-      </p:sp>
-      <p:sp>
-        <p:nvSpPr>
-          <p:cNvPr id="49" name="TextBox 48"/>
-          <p:cNvSpPr txBox="1"/>
-          <p:nvPr/>
-        </p:nvSpPr>
-        <p:spPr>
-          <a:xfrm>
-            <a:off x="4450080" y="4758049"/>
-            <a:ext cx="1584960" cy="440689"/>
-          </a:xfrm>
-          <a:prstGeom prst="rect">
-            <a:avLst/>
-          </a:prstGeom>
-          <a:noFill/>
-        </p:spPr>
-        <p:txBody>
-          <a:bodyPr wrap="square">
-            <a:spAutoFit/>
-          </a:bodyPr>
-          <a:lstStyle/>
-          <a:p>
-            <a:pPr algn="l"/>
-            <a:r>
-              <a:rPr sz="1100" b="0">
-                <a:solidFill>
-                  <a:srgbClr val="465461"/>
-                </a:solidFill>
-                <a:latin typeface="Arial"/>
-              </a:rPr>
-              <a:t>MyBB (solo usuarios)</a:t>
-            </a:r>
-          </a:p>
-        </p:txBody>
-      </p:sp>
-      <p:sp>
-        <p:nvSpPr>
-          <p:cNvPr id="50" name="TextBox 49"/>
-          <p:cNvSpPr txBox="1"/>
-          <p:nvPr/>
-        </p:nvSpPr>
-        <p:spPr>
-          <a:xfrm>
-            <a:off x="6126480" y="4758049"/>
-            <a:ext cx="1584960" cy="440689"/>
-          </a:xfrm>
-          <a:prstGeom prst="rect">
-            <a:avLst/>
-          </a:prstGeom>
-          <a:noFill/>
-        </p:spPr>
-        <p:txBody>
-          <a:bodyPr wrap="square">
-            <a:spAutoFit/>
-          </a:bodyPr>
-          <a:lstStyle/>
-          <a:p>
-            <a:pPr algn="l"/>
-            <a:r>
-              <a:rPr sz="1100" b="0">
-                <a:solidFill>
-                  <a:srgbClr val="465461"/>
-                </a:solidFill>
-                <a:latin typeface="Arial"/>
-              </a:rPr>
-              <a:t>—</a:t>
-            </a:r>
-          </a:p>
-        </p:txBody>
-      </p:sp>
-      <p:sp>
-        <p:nvSpPr>
-          <p:cNvPr id="51" name="TextBox 50"/>
-          <p:cNvSpPr txBox="1"/>
-          <p:nvPr/>
-        </p:nvSpPr>
-        <p:spPr>
-          <a:xfrm>
-            <a:off x="7802880" y="4758049"/>
-            <a:ext cx="1584960" cy="440689"/>
-          </a:xfrm>
-          <a:prstGeom prst="rect">
-            <a:avLst/>
-          </a:prstGeom>
-          <a:noFill/>
-        </p:spPr>
-        <p:txBody>
-          <a:bodyPr wrap="square">
-            <a:spAutoFit/>
-          </a:bodyPr>
-          <a:lstStyle/>
-          <a:p>
-            <a:pPr algn="l"/>
-            <a:r>
-              <a:rPr sz="1100" b="0">
-                <a:solidFill>
-                  <a:srgbClr val="465461"/>
-                </a:solidFill>
-                <a:latin typeface="Arial"/>
-              </a:rPr>
-              <a:t>A↓</a:t>
-            </a:r>
-          </a:p>
-        </p:txBody>
-      </p:sp>
-      <p:sp>
-        <p:nvSpPr>
-          <p:cNvPr id="52" name="TextBox 51"/>
-          <p:cNvSpPr txBox="1"/>
-          <p:nvPr/>
-        </p:nvSpPr>
-        <p:spPr>
-          <a:xfrm>
-            <a:off x="9479280" y="4758049"/>
-            <a:ext cx="1584960" cy="440689"/>
-          </a:xfrm>
-          <a:prstGeom prst="rect">
-            <a:avLst/>
-          </a:prstGeom>
-          <a:noFill/>
-        </p:spPr>
-        <p:txBody>
-          <a:bodyPr wrap="square">
-            <a:spAutoFit/>
-          </a:bodyPr>
-          <a:lstStyle/>
-          <a:p>
-            <a:pPr algn="l"/>
-            <a:r>
-              <a:rPr sz="1100" b="0">
-                <a:solidFill>
-                  <a:srgbClr val="465461"/>
-                </a:solidFill>
-                <a:latin typeface="Arial"/>
-              </a:rPr>
-              <a:t>Solo handles</a:t>
-            </a:r>
-          </a:p>
-        </p:txBody>
-      </p:sp>
-      <p:sp>
-        <p:nvSpPr>
-          <p:cNvPr id="53" name="Rectangle 52"/>
-          <p:cNvSpPr/>
-          <p:nvPr/>
-        </p:nvSpPr>
-        <p:spPr>
-          <a:xfrm>
-            <a:off x="1051560" y="5158739"/>
-            <a:ext cx="10058400" cy="440689"/>
-          </a:xfrm>
-          <a:prstGeom prst="rect">
-            <a:avLst/>
-          </a:prstGeom>
-          <a:solidFill>
-            <a:srgbClr val="F1F2F6"/>
-          </a:solidFill>
-          <a:ln>
-            <a:noFill/>
-          </a:ln>
-        </p:spPr>
-        <p:style>
-          <a:lnRef idx="1">
-            <a:schemeClr val="accent1"/>
-          </a:lnRef>
-          <a:fillRef idx="3">
-            <a:schemeClr val="accent1"/>
-          </a:fillRef>
-          <a:effectRef idx="2">
-            <a:schemeClr val="accent1"/>
-          </a:effectRef>
-          <a:fontRef idx="minor">
-            <a:schemeClr val="lt1"/>
-          </a:fontRef>
-        </p:style>
-        <p:txBody>
-          <a:bodyPr rtlCol="0" anchor="ctr"/>
-          <a:lstStyle/>
-          <a:p>
-            <a:pPr algn="ctr"/>
-          </a:p>
-        </p:txBody>
-      </p:sp>
-      <p:sp>
-        <p:nvSpPr>
-          <p:cNvPr id="54" name="TextBox 53"/>
-          <p:cNvSpPr txBox="1"/>
-          <p:nvPr/>
-        </p:nvSpPr>
-        <p:spPr>
-          <a:xfrm>
-            <a:off x="1097280" y="5198739"/>
-            <a:ext cx="1584960" cy="440689"/>
-          </a:xfrm>
-          <a:prstGeom prst="rect">
-            <a:avLst/>
-          </a:prstGeom>
-          <a:noFill/>
-        </p:spPr>
-        <p:txBody>
-          <a:bodyPr wrap="square">
-            <a:spAutoFit/>
-          </a:bodyPr>
-          <a:lstStyle/>
-          <a:p>
-            <a:pPr algn="l"/>
-            <a:r>
-              <a:rPr sz="1100" b="0">
-                <a:solidFill>
-                  <a:srgbClr val="465461"/>
-                </a:solidFill>
-                <a:latin typeface="Arial"/>
-              </a:rPr>
-              <a:t>Void.to</a:t>
-            </a:r>
-          </a:p>
-        </p:txBody>
-      </p:sp>
-      <p:sp>
-        <p:nvSpPr>
-          <p:cNvPr id="55" name="TextBox 54"/>
-          <p:cNvSpPr txBox="1"/>
-          <p:nvPr/>
-        </p:nvSpPr>
-        <p:spPr>
-          <a:xfrm>
-            <a:off x="2773680" y="5198739"/>
-            <a:ext cx="1584960" cy="440689"/>
-          </a:xfrm>
-          <a:prstGeom prst="rect">
-            <a:avLst/>
-          </a:prstGeom>
-          <a:noFill/>
-        </p:spPr>
-        <p:txBody>
-          <a:bodyPr wrap="square">
-            <a:spAutoFit/>
-          </a:bodyPr>
-          <a:lstStyle/>
-          <a:p>
-            <a:pPr algn="l"/>
-            <a:r>
-              <a:rPr sz="1100" b="0">
-                <a:solidFill>
-                  <a:srgbClr val="465461"/>
-                </a:solidFill>
-                <a:latin typeface="Arial"/>
-              </a:rPr>
-              <a:t>Void.to.zip</a:t>
-            </a:r>
-          </a:p>
-        </p:txBody>
-      </p:sp>
-      <p:sp>
-        <p:nvSpPr>
-          <p:cNvPr id="56" name="TextBox 55"/>
-          <p:cNvSpPr txBox="1"/>
-          <p:nvPr/>
-        </p:nvSpPr>
-        <p:spPr>
-          <a:xfrm>
-            <a:off x="4450080" y="5198739"/>
-            <a:ext cx="1584960" cy="440689"/>
-          </a:xfrm>
-          <a:prstGeom prst="rect">
-            <a:avLst/>
-          </a:prstGeom>
-          <a:noFill/>
-        </p:spPr>
-        <p:txBody>
-          <a:bodyPr wrap="square">
-            <a:spAutoFit/>
-          </a:bodyPr>
-          <a:lstStyle/>
-          <a:p>
-            <a:pPr algn="l"/>
-            <a:r>
-              <a:rPr sz="1100" b="0">
-                <a:solidFill>
-                  <a:srgbClr val="465461"/>
-                </a:solidFill>
-                <a:latin typeface="Arial"/>
-              </a:rPr>
-              <a:t>MyBB</a:t>
-            </a:r>
-          </a:p>
-        </p:txBody>
-      </p:sp>
-      <p:sp>
-        <p:nvSpPr>
-          <p:cNvPr id="57" name="TextBox 56"/>
-          <p:cNvSpPr txBox="1"/>
-          <p:nvPr/>
-        </p:nvSpPr>
-        <p:spPr>
-          <a:xfrm>
-            <a:off x="6126480" y="5198739"/>
-            <a:ext cx="1584960" cy="440689"/>
-          </a:xfrm>
-          <a:prstGeom prst="rect">
-            <a:avLst/>
-          </a:prstGeom>
-          <a:noFill/>
-        </p:spPr>
-        <p:txBody>
-          <a:bodyPr wrap="square">
-            <a:spAutoFit/>
-          </a:bodyPr>
-          <a:lstStyle/>
-          <a:p>
-            <a:pPr algn="l"/>
-            <a:r>
-              <a:rPr sz="1100" b="0">
-                <a:solidFill>
-                  <a:srgbClr val="465461"/>
-                </a:solidFill>
-                <a:latin typeface="Arial"/>
-              </a:rPr>
-              <a:t>—</a:t>
-            </a:r>
-          </a:p>
-        </p:txBody>
-      </p:sp>
-      <p:sp>
-        <p:nvSpPr>
-          <p:cNvPr id="58" name="TextBox 57"/>
-          <p:cNvSpPr txBox="1"/>
-          <p:nvPr/>
-        </p:nvSpPr>
-        <p:spPr>
-          <a:xfrm>
-            <a:off x="7802880" y="5198739"/>
-            <a:ext cx="1584960" cy="440689"/>
-          </a:xfrm>
-          <a:prstGeom prst="rect">
-            <a:avLst/>
-          </a:prstGeom>
-          <a:noFill/>
-        </p:spPr>
-        <p:txBody>
-          <a:bodyPr wrap="square">
-            <a:spAutoFit/>
-          </a:bodyPr>
-          <a:lstStyle/>
-          <a:p>
-            <a:pPr algn="l"/>
-            <a:r>
-              <a:rPr sz="1100" b="0">
-                <a:solidFill>
-                  <a:srgbClr val="465461"/>
-                </a:solidFill>
-                <a:latin typeface="Arial"/>
-              </a:rPr>
-              <a:t>—</a:t>
-            </a:r>
-          </a:p>
-        </p:txBody>
-      </p:sp>
-      <p:sp>
-        <p:nvSpPr>
-          <p:cNvPr id="59" name="TextBox 58"/>
-          <p:cNvSpPr txBox="1"/>
-          <p:nvPr/>
-        </p:nvSpPr>
-        <p:spPr>
-          <a:xfrm>
-            <a:off x="9479280" y="5198739"/>
-            <a:ext cx="1584960" cy="440689"/>
-          </a:xfrm>
-          <a:prstGeom prst="rect">
-            <a:avLst/>
-          </a:prstGeom>
-          <a:noFill/>
-        </p:spPr>
-        <p:txBody>
-          <a:bodyPr wrap="square">
-            <a:spAutoFit/>
-          </a:bodyPr>
-          <a:lstStyle/>
-          <a:p>
-            <a:pPr algn="l"/>
-            <a:r>
-              <a:rPr sz="1100" b="0">
-                <a:solidFill>
-                  <a:srgbClr val="465461"/>
-                </a:solidFill>
-                <a:latin typeface="Arial"/>
-              </a:rPr>
-              <a:t>Descartado (schema-only)</a:t>
-            </a:r>
-          </a:p>
-        </p:txBody>
-      </p:sp>
-      <p:sp>
-        <p:nvSpPr>
-          <p:cNvPr id="60" name="TextBox 59"/>
           <p:cNvSpPr txBox="1"/>
           <p:nvPr/>
         </p:nvSpPr>
@@ -10108,1524 +9186,840 @@
           <a:p/>
         </p:txBody>
       </p:sp>
-      <p:sp>
-        <p:nvSpPr>
-          <p:cNvPr id="4" name="Rectangle 3"/>
-          <p:cNvSpPr/>
+      <p:graphicFrame>
+        <p:nvGraphicFramePr>
+          <p:cNvPr id="4" name="Table 3"/>
+          <p:cNvGraphicFramePr>
+            <a:graphicFrameLocks noGrp="1"/>
+          </p:cNvGraphicFramePr>
           <p:nvPr/>
-        </p:nvSpPr>
-        <p:spPr>
-          <a:xfrm>
-            <a:off x="1051560" y="2148840"/>
-            <a:ext cx="10058400" cy="365760"/>
-          </a:xfrm>
-          <a:prstGeom prst="rect">
-            <a:avLst/>
-          </a:prstGeom>
-          <a:solidFill>
-            <a:srgbClr val="CD2D37"/>
-          </a:solidFill>
-          <a:ln>
-            <a:noFill/>
-          </a:ln>
-        </p:spPr>
-        <p:style>
-          <a:lnRef idx="1">
-            <a:schemeClr val="accent1"/>
-          </a:lnRef>
-          <a:fillRef idx="3">
-            <a:schemeClr val="accent1"/>
-          </a:fillRef>
-          <a:effectRef idx="2">
-            <a:schemeClr val="accent1"/>
-          </a:effectRef>
-          <a:fontRef idx="minor">
-            <a:schemeClr val="lt1"/>
-          </a:fontRef>
-        </p:style>
-        <p:txBody>
-          <a:bodyPr rtlCol="0" anchor="ctr"/>
-          <a:lstStyle/>
-          <a:p>
-            <a:pPr algn="ctr"/>
-          </a:p>
-        </p:txBody>
-      </p:sp>
-      <p:sp>
-        <p:nvSpPr>
-          <p:cNvPr id="5" name="TextBox 4"/>
-          <p:cNvSpPr txBox="1"/>
-          <p:nvPr/>
-        </p:nvSpPr>
-        <p:spPr>
-          <a:xfrm>
-            <a:off x="1097280" y="2203840"/>
-            <a:ext cx="1584960" cy="365760"/>
-          </a:xfrm>
-          <a:prstGeom prst="rect">
-            <a:avLst/>
-          </a:prstGeom>
-          <a:noFill/>
-        </p:spPr>
-        <p:txBody>
-          <a:bodyPr wrap="square">
-            <a:spAutoFit/>
-          </a:bodyPr>
-          <a:lstStyle/>
-          <a:p>
-            <a:pPr algn="l"/>
-            <a:r>
-              <a:rPr sz="1200" b="1">
-                <a:solidFill>
-                  <a:srgbClr val="FFFFFF"/>
-                </a:solidFill>
-                <a:latin typeface="Arial"/>
-              </a:rPr>
-              <a:t>Técnica</a:t>
-            </a:r>
-          </a:p>
-        </p:txBody>
-      </p:sp>
-      <p:sp>
-        <p:nvSpPr>
-          <p:cNvPr id="6" name="TextBox 5"/>
-          <p:cNvSpPr txBox="1"/>
-          <p:nvPr/>
-        </p:nvSpPr>
-        <p:spPr>
-          <a:xfrm>
-            <a:off x="2773680" y="2203840"/>
-            <a:ext cx="1584960" cy="365760"/>
-          </a:xfrm>
-          <a:prstGeom prst="rect">
-            <a:avLst/>
-          </a:prstGeom>
-          <a:noFill/>
-        </p:spPr>
-        <p:txBody>
-          <a:bodyPr wrap="square">
-            <a:spAutoFit/>
-          </a:bodyPr>
-          <a:lstStyle/>
-          <a:p>
-            <a:pPr algn="l"/>
-            <a:r>
-              <a:rPr sz="1200" b="1">
-                <a:solidFill>
-                  <a:srgbClr val="FFFFFF"/>
-                </a:solidFill>
-                <a:latin typeface="Arial"/>
-              </a:rPr>
-              <a:t>OGUsers</a:t>
-            </a:r>
-          </a:p>
-        </p:txBody>
-      </p:sp>
-      <p:sp>
-        <p:nvSpPr>
-          <p:cNvPr id="7" name="TextBox 6"/>
-          <p:cNvSpPr txBox="1"/>
-          <p:nvPr/>
-        </p:nvSpPr>
-        <p:spPr>
-          <a:xfrm>
-            <a:off x="4450080" y="2203840"/>
-            <a:ext cx="1584960" cy="365760"/>
-          </a:xfrm>
-          <a:prstGeom prst="rect">
-            <a:avLst/>
-          </a:prstGeom>
-          <a:noFill/>
-        </p:spPr>
-        <p:txBody>
-          <a:bodyPr wrap="square">
-            <a:spAutoFit/>
-          </a:bodyPr>
-          <a:lstStyle/>
-          <a:p>
-            <a:pPr algn="l"/>
-            <a:r>
-              <a:rPr sz="1200" b="1">
-                <a:solidFill>
-                  <a:srgbClr val="FFFFFF"/>
-                </a:solidFill>
-                <a:latin typeface="Arial"/>
-              </a:rPr>
-              <a:t>Exploit.in</a:t>
-            </a:r>
-          </a:p>
-        </p:txBody>
-      </p:sp>
-      <p:sp>
-        <p:nvSpPr>
-          <p:cNvPr id="8" name="TextBox 7"/>
-          <p:cNvSpPr txBox="1"/>
-          <p:nvPr/>
-        </p:nvSpPr>
-        <p:spPr>
-          <a:xfrm>
-            <a:off x="6126480" y="2203840"/>
-            <a:ext cx="1584960" cy="365760"/>
-          </a:xfrm>
-          <a:prstGeom prst="rect">
-            <a:avLst/>
-          </a:prstGeom>
-          <a:noFill/>
-        </p:spPr>
-        <p:txBody>
-          <a:bodyPr wrap="square">
-            <a:spAutoFit/>
-          </a:bodyPr>
-          <a:lstStyle/>
-          <a:p>
-            <a:pPr algn="l"/>
-            <a:r>
-              <a:rPr sz="1200" b="1">
-                <a:solidFill>
-                  <a:srgbClr val="FFFFFF"/>
-                </a:solidFill>
-                <a:latin typeface="Arial"/>
-              </a:rPr>
-              <a:t>Cracked.to</a:t>
-            </a:r>
-          </a:p>
-        </p:txBody>
-      </p:sp>
-      <p:sp>
-        <p:nvSpPr>
-          <p:cNvPr id="9" name="TextBox 8"/>
-          <p:cNvSpPr txBox="1"/>
-          <p:nvPr/>
-        </p:nvSpPr>
-        <p:spPr>
-          <a:xfrm>
-            <a:off x="7802880" y="2203840"/>
-            <a:ext cx="1584960" cy="365760"/>
-          </a:xfrm>
-          <a:prstGeom prst="rect">
-            <a:avLst/>
-          </a:prstGeom>
-          <a:noFill/>
-        </p:spPr>
-        <p:txBody>
-          <a:bodyPr wrap="square">
-            <a:spAutoFit/>
-          </a:bodyPr>
-          <a:lstStyle/>
-          <a:p>
-            <a:pPr algn="l"/>
-            <a:r>
-              <a:rPr sz="1200" b="1">
-                <a:solidFill>
-                  <a:srgbClr val="FFFFFF"/>
-                </a:solidFill>
-                <a:latin typeface="Arial"/>
-              </a:rPr>
-              <a:t>Nulled.io</a:t>
-            </a:r>
-          </a:p>
-        </p:txBody>
-      </p:sp>
-      <p:sp>
-        <p:nvSpPr>
-          <p:cNvPr id="10" name="TextBox 9"/>
-          <p:cNvSpPr txBox="1"/>
-          <p:nvPr/>
-        </p:nvSpPr>
-        <p:spPr>
-          <a:xfrm>
-            <a:off x="9479280" y="2203840"/>
-            <a:ext cx="1584960" cy="365760"/>
-          </a:xfrm>
-          <a:prstGeom prst="rect">
-            <a:avLst/>
-          </a:prstGeom>
-          <a:noFill/>
-        </p:spPr>
-        <p:txBody>
-          <a:bodyPr wrap="square">
-            <a:spAutoFit/>
-          </a:bodyPr>
-          <a:lstStyle/>
-          <a:p>
-            <a:pPr algn="l"/>
-            <a:r>
-              <a:rPr sz="1200" b="1">
-                <a:solidFill>
-                  <a:srgbClr val="FFFFFF"/>
-                </a:solidFill>
-                <a:latin typeface="Arial"/>
-              </a:rPr>
-              <a:t>RaidForums</a:t>
-            </a:r>
-          </a:p>
-        </p:txBody>
-      </p:sp>
-      <p:sp>
-        <p:nvSpPr>
-          <p:cNvPr id="11" name="Rectangle 10"/>
-          <p:cNvSpPr/>
-          <p:nvPr/>
-        </p:nvSpPr>
-        <p:spPr>
-          <a:xfrm>
-            <a:off x="1051560" y="2514600"/>
-            <a:ext cx="10058400" cy="310896"/>
-          </a:xfrm>
-          <a:prstGeom prst="rect">
-            <a:avLst/>
-          </a:prstGeom>
-          <a:solidFill>
-            <a:srgbClr val="F1F2F6"/>
-          </a:solidFill>
-          <a:ln>
-            <a:noFill/>
-          </a:ln>
-        </p:spPr>
-        <p:style>
-          <a:lnRef idx="1">
-            <a:schemeClr val="accent1"/>
-          </a:lnRef>
-          <a:fillRef idx="3">
-            <a:schemeClr val="accent1"/>
-          </a:fillRef>
-          <a:effectRef idx="2">
-            <a:schemeClr val="accent1"/>
-          </a:effectRef>
-          <a:fontRef idx="minor">
-            <a:schemeClr val="lt1"/>
-          </a:fontRef>
-        </p:style>
-        <p:txBody>
-          <a:bodyPr rtlCol="0" anchor="ctr"/>
-          <a:lstStyle/>
-          <a:p>
-            <a:pPr algn="ctr"/>
-          </a:p>
-        </p:txBody>
-      </p:sp>
-      <p:sp>
-        <p:nvSpPr>
-          <p:cNvPr id="12" name="TextBox 11"/>
-          <p:cNvSpPr txBox="1"/>
-          <p:nvPr/>
-        </p:nvSpPr>
-        <p:spPr>
-          <a:xfrm>
-            <a:off x="1097280" y="2554600"/>
-            <a:ext cx="1584960" cy="310896"/>
-          </a:xfrm>
-          <a:prstGeom prst="rect">
-            <a:avLst/>
-          </a:prstGeom>
-          <a:noFill/>
-        </p:spPr>
-        <p:txBody>
-          <a:bodyPr wrap="square">
-            <a:spAutoFit/>
-          </a:bodyPr>
-          <a:lstStyle/>
-          <a:p>
-            <a:pPr algn="l"/>
-            <a:r>
-              <a:rPr sz="1100" b="0">
-                <a:solidFill>
-                  <a:srgbClr val="465461"/>
-                </a:solidFill>
-                <a:latin typeface="Arial"/>
-              </a:rPr>
-              <a:t>BERTopic (en)</a:t>
-            </a:r>
-          </a:p>
-        </p:txBody>
-      </p:sp>
-      <p:sp>
-        <p:nvSpPr>
-          <p:cNvPr id="13" name="TextBox 12"/>
-          <p:cNvSpPr txBox="1"/>
-          <p:nvPr/>
-        </p:nvSpPr>
-        <p:spPr>
-          <a:xfrm>
-            <a:off x="2773680" y="2554600"/>
-            <a:ext cx="1584960" cy="310896"/>
-          </a:xfrm>
-          <a:prstGeom prst="rect">
-            <a:avLst/>
-          </a:prstGeom>
-          <a:noFill/>
-        </p:spPr>
-        <p:txBody>
-          <a:bodyPr wrap="square">
-            <a:spAutoFit/>
-          </a:bodyPr>
-          <a:lstStyle/>
-          <a:p>
-            <a:pPr algn="l"/>
-            <a:r>
-              <a:rPr sz="1100" b="0">
-                <a:solidFill>
-                  <a:srgbClr val="465461"/>
-                </a:solidFill>
-                <a:latin typeface="Arial"/>
-              </a:rPr>
-              <a:t>✓</a:t>
-            </a:r>
-          </a:p>
-        </p:txBody>
-      </p:sp>
-      <p:sp>
-        <p:nvSpPr>
-          <p:cNvPr id="14" name="TextBox 13"/>
-          <p:cNvSpPr txBox="1"/>
-          <p:nvPr/>
-        </p:nvSpPr>
-        <p:spPr>
-          <a:xfrm>
-            <a:off x="4450080" y="2554600"/>
-            <a:ext cx="1584960" cy="310896"/>
-          </a:xfrm>
-          <a:prstGeom prst="rect">
-            <a:avLst/>
-          </a:prstGeom>
-          <a:noFill/>
-        </p:spPr>
-        <p:txBody>
-          <a:bodyPr wrap="square">
-            <a:spAutoFit/>
-          </a:bodyPr>
-          <a:lstStyle/>
-          <a:p>
-            <a:pPr algn="l"/>
-            <a:r>
-              <a:rPr sz="1100" b="0">
-                <a:solidFill>
-                  <a:srgbClr val="465461"/>
-                </a:solidFill>
-                <a:latin typeface="Arial"/>
-              </a:rPr>
-              <a:t>—</a:t>
-            </a:r>
-          </a:p>
-        </p:txBody>
-      </p:sp>
-      <p:sp>
-        <p:nvSpPr>
-          <p:cNvPr id="15" name="TextBox 14"/>
-          <p:cNvSpPr txBox="1"/>
-          <p:nvPr/>
-        </p:nvSpPr>
-        <p:spPr>
-          <a:xfrm>
-            <a:off x="6126480" y="2554600"/>
-            <a:ext cx="1584960" cy="310896"/>
-          </a:xfrm>
-          <a:prstGeom prst="rect">
-            <a:avLst/>
-          </a:prstGeom>
-          <a:noFill/>
-        </p:spPr>
-        <p:txBody>
-          <a:bodyPr wrap="square">
-            <a:spAutoFit/>
-          </a:bodyPr>
-          <a:lstStyle/>
-          <a:p>
-            <a:pPr algn="l"/>
-            <a:r>
-              <a:rPr sz="1100" b="0">
-                <a:solidFill>
-                  <a:srgbClr val="465461"/>
-                </a:solidFill>
-                <a:latin typeface="Arial"/>
-              </a:rPr>
-              <a:t>✓</a:t>
-            </a:r>
-          </a:p>
-        </p:txBody>
-      </p:sp>
-      <p:sp>
-        <p:nvSpPr>
-          <p:cNvPr id="16" name="TextBox 15"/>
-          <p:cNvSpPr txBox="1"/>
-          <p:nvPr/>
-        </p:nvSpPr>
-        <p:spPr>
-          <a:xfrm>
-            <a:off x="7802880" y="2554600"/>
-            <a:ext cx="1584960" cy="310896"/>
-          </a:xfrm>
-          <a:prstGeom prst="rect">
-            <a:avLst/>
-          </a:prstGeom>
-          <a:noFill/>
-        </p:spPr>
-        <p:txBody>
-          <a:bodyPr wrap="square">
-            <a:spAutoFit/>
-          </a:bodyPr>
-          <a:lstStyle/>
-          <a:p>
-            <a:pPr algn="l"/>
-            <a:r>
-              <a:rPr sz="1100" b="0">
-                <a:solidFill>
-                  <a:srgbClr val="465461"/>
-                </a:solidFill>
-                <a:latin typeface="Arial"/>
-              </a:rPr>
-              <a:t>✓</a:t>
-            </a:r>
-          </a:p>
-        </p:txBody>
-      </p:sp>
-      <p:sp>
-        <p:nvSpPr>
-          <p:cNvPr id="17" name="TextBox 16"/>
-          <p:cNvSpPr txBox="1"/>
-          <p:nvPr/>
-        </p:nvSpPr>
-        <p:spPr>
-          <a:xfrm>
-            <a:off x="9479280" y="2554600"/>
-            <a:ext cx="1584960" cy="310896"/>
-          </a:xfrm>
-          <a:prstGeom prst="rect">
-            <a:avLst/>
-          </a:prstGeom>
-          <a:noFill/>
-        </p:spPr>
-        <p:txBody>
-          <a:bodyPr wrap="square">
-            <a:spAutoFit/>
-          </a:bodyPr>
-          <a:lstStyle/>
-          <a:p>
-            <a:pPr algn="l"/>
-            <a:r>
-              <a:rPr sz="1100" b="0">
-                <a:solidFill>
-                  <a:srgbClr val="465461"/>
-                </a:solidFill>
-                <a:latin typeface="Arial"/>
-              </a:rPr>
-              <a:t>✓</a:t>
-            </a:r>
-          </a:p>
-        </p:txBody>
-      </p:sp>
-      <p:sp>
-        <p:nvSpPr>
-          <p:cNvPr id="18" name="Rectangle 17"/>
-          <p:cNvSpPr/>
-          <p:nvPr/>
-        </p:nvSpPr>
-        <p:spPr>
-          <a:xfrm>
-            <a:off x="1051560" y="2825496"/>
-            <a:ext cx="10058400" cy="440689"/>
-          </a:xfrm>
-          <a:prstGeom prst="rect">
-            <a:avLst/>
-          </a:prstGeom>
-          <a:solidFill>
-            <a:srgbClr val="FFFFFF"/>
-          </a:solidFill>
-          <a:ln>
-            <a:noFill/>
-          </a:ln>
-        </p:spPr>
-        <p:style>
-          <a:lnRef idx="1">
-            <a:schemeClr val="accent1"/>
-          </a:lnRef>
-          <a:fillRef idx="3">
-            <a:schemeClr val="accent1"/>
-          </a:fillRef>
-          <a:effectRef idx="2">
-            <a:schemeClr val="accent1"/>
-          </a:effectRef>
-          <a:fontRef idx="minor">
-            <a:schemeClr val="lt1"/>
-          </a:fontRef>
-        </p:style>
-        <p:txBody>
-          <a:bodyPr rtlCol="0" anchor="ctr"/>
-          <a:lstStyle/>
-          <a:p>
-            <a:pPr algn="ctr"/>
-          </a:p>
-        </p:txBody>
-      </p:sp>
-      <p:sp>
-        <p:nvSpPr>
-          <p:cNvPr id="19" name="TextBox 18"/>
-          <p:cNvSpPr txBox="1"/>
-          <p:nvPr/>
-        </p:nvSpPr>
-        <p:spPr>
-          <a:xfrm>
-            <a:off x="1097280" y="2865496"/>
-            <a:ext cx="1584960" cy="440689"/>
-          </a:xfrm>
-          <a:prstGeom prst="rect">
-            <a:avLst/>
-          </a:prstGeom>
-          <a:noFill/>
-        </p:spPr>
-        <p:txBody>
-          <a:bodyPr wrap="square">
-            <a:spAutoFit/>
-          </a:bodyPr>
-          <a:lstStyle/>
-          <a:p>
-            <a:pPr algn="l"/>
-            <a:r>
-              <a:rPr sz="1100" b="0">
-                <a:solidFill>
-                  <a:srgbClr val="465461"/>
-                </a:solidFill>
-                <a:latin typeface="Arial"/>
-              </a:rPr>
-              <a:t>BERTopic (multilingual)</a:t>
-            </a:r>
-          </a:p>
-        </p:txBody>
-      </p:sp>
-      <p:sp>
-        <p:nvSpPr>
-          <p:cNvPr id="20" name="TextBox 19"/>
-          <p:cNvSpPr txBox="1"/>
-          <p:nvPr/>
-        </p:nvSpPr>
-        <p:spPr>
-          <a:xfrm>
-            <a:off x="2773680" y="2865496"/>
-            <a:ext cx="1584960" cy="440689"/>
-          </a:xfrm>
-          <a:prstGeom prst="rect">
-            <a:avLst/>
-          </a:prstGeom>
-          <a:noFill/>
-        </p:spPr>
-        <p:txBody>
-          <a:bodyPr wrap="square">
-            <a:spAutoFit/>
-          </a:bodyPr>
-          <a:lstStyle/>
-          <a:p>
-            <a:pPr algn="l"/>
-            <a:r>
-              <a:rPr sz="1100" b="0">
-                <a:solidFill>
-                  <a:srgbClr val="465461"/>
-                </a:solidFill>
-                <a:latin typeface="Arial"/>
-              </a:rPr>
-              <a:t>—</a:t>
-            </a:r>
-          </a:p>
-        </p:txBody>
-      </p:sp>
-      <p:sp>
-        <p:nvSpPr>
-          <p:cNvPr id="21" name="TextBox 20"/>
-          <p:cNvSpPr txBox="1"/>
-          <p:nvPr/>
-        </p:nvSpPr>
-        <p:spPr>
-          <a:xfrm>
-            <a:off x="4450080" y="2865496"/>
-            <a:ext cx="1584960" cy="440689"/>
-          </a:xfrm>
-          <a:prstGeom prst="rect">
-            <a:avLst/>
-          </a:prstGeom>
-          <a:noFill/>
-        </p:spPr>
-        <p:txBody>
-          <a:bodyPr wrap="square">
-            <a:spAutoFit/>
-          </a:bodyPr>
-          <a:lstStyle/>
-          <a:p>
-            <a:pPr algn="l"/>
-            <a:r>
-              <a:rPr sz="1100" b="0">
-                <a:solidFill>
-                  <a:srgbClr val="465461"/>
-                </a:solidFill>
-                <a:latin typeface="Arial"/>
-              </a:rPr>
-              <a:t>✓</a:t>
-            </a:r>
-          </a:p>
-        </p:txBody>
-      </p:sp>
-      <p:sp>
-        <p:nvSpPr>
-          <p:cNvPr id="22" name="TextBox 21"/>
-          <p:cNvSpPr txBox="1"/>
-          <p:nvPr/>
-        </p:nvSpPr>
-        <p:spPr>
-          <a:xfrm>
-            <a:off x="6126480" y="2865496"/>
-            <a:ext cx="1584960" cy="440689"/>
-          </a:xfrm>
-          <a:prstGeom prst="rect">
-            <a:avLst/>
-          </a:prstGeom>
-          <a:noFill/>
-        </p:spPr>
-        <p:txBody>
-          <a:bodyPr wrap="square">
-            <a:spAutoFit/>
-          </a:bodyPr>
-          <a:lstStyle/>
-          <a:p>
-            <a:pPr algn="l"/>
-            <a:r>
-              <a:rPr sz="1100" b="0">
-                <a:solidFill>
-                  <a:srgbClr val="465461"/>
-                </a:solidFill>
-                <a:latin typeface="Arial"/>
-              </a:rPr>
-              <a:t>—</a:t>
-            </a:r>
-          </a:p>
-        </p:txBody>
-      </p:sp>
-      <p:sp>
-        <p:nvSpPr>
-          <p:cNvPr id="23" name="TextBox 22"/>
-          <p:cNvSpPr txBox="1"/>
-          <p:nvPr/>
-        </p:nvSpPr>
-        <p:spPr>
-          <a:xfrm>
-            <a:off x="7802880" y="2865496"/>
-            <a:ext cx="1584960" cy="440689"/>
-          </a:xfrm>
-          <a:prstGeom prst="rect">
-            <a:avLst/>
-          </a:prstGeom>
-          <a:noFill/>
-        </p:spPr>
-        <p:txBody>
-          <a:bodyPr wrap="square">
-            <a:spAutoFit/>
-          </a:bodyPr>
-          <a:lstStyle/>
-          <a:p>
-            <a:pPr algn="l"/>
-            <a:r>
-              <a:rPr sz="1100" b="0">
-                <a:solidFill>
-                  <a:srgbClr val="465461"/>
-                </a:solidFill>
-                <a:latin typeface="Arial"/>
-              </a:rPr>
-              <a:t>—</a:t>
-            </a:r>
-          </a:p>
-        </p:txBody>
-      </p:sp>
-      <p:sp>
-        <p:nvSpPr>
-          <p:cNvPr id="24" name="TextBox 23"/>
-          <p:cNvSpPr txBox="1"/>
-          <p:nvPr/>
-        </p:nvSpPr>
-        <p:spPr>
-          <a:xfrm>
-            <a:off x="9479280" y="2865496"/>
-            <a:ext cx="1584960" cy="440689"/>
-          </a:xfrm>
-          <a:prstGeom prst="rect">
-            <a:avLst/>
-          </a:prstGeom>
-          <a:noFill/>
-        </p:spPr>
-        <p:txBody>
-          <a:bodyPr wrap="square">
-            <a:spAutoFit/>
-          </a:bodyPr>
-          <a:lstStyle/>
-          <a:p>
-            <a:pPr algn="l"/>
-            <a:r>
-              <a:rPr sz="1100" b="0">
-                <a:solidFill>
-                  <a:srgbClr val="465461"/>
-                </a:solidFill>
-                <a:latin typeface="Arial"/>
-              </a:rPr>
-              <a:t>—</a:t>
-            </a:r>
-          </a:p>
-        </p:txBody>
-      </p:sp>
-      <p:sp>
-        <p:nvSpPr>
-          <p:cNvPr id="25" name="Rectangle 24"/>
-          <p:cNvSpPr/>
-          <p:nvPr/>
-        </p:nvSpPr>
-        <p:spPr>
-          <a:xfrm>
-            <a:off x="1051560" y="3266185"/>
-            <a:ext cx="10058400" cy="310896"/>
-          </a:xfrm>
-          <a:prstGeom prst="rect">
-            <a:avLst/>
-          </a:prstGeom>
-          <a:solidFill>
-            <a:srgbClr val="F1F2F6"/>
-          </a:solidFill>
-          <a:ln>
-            <a:noFill/>
-          </a:ln>
-        </p:spPr>
-        <p:style>
-          <a:lnRef idx="1">
-            <a:schemeClr val="accent1"/>
-          </a:lnRef>
-          <a:fillRef idx="3">
-            <a:schemeClr val="accent1"/>
-          </a:fillRef>
-          <a:effectRef idx="2">
-            <a:schemeClr val="accent1"/>
-          </a:effectRef>
-          <a:fontRef idx="minor">
-            <a:schemeClr val="lt1"/>
-          </a:fontRef>
-        </p:style>
-        <p:txBody>
-          <a:bodyPr rtlCol="0" anchor="ctr"/>
-          <a:lstStyle/>
-          <a:p>
-            <a:pPr algn="ctr"/>
-          </a:p>
-        </p:txBody>
-      </p:sp>
-      <p:sp>
-        <p:nvSpPr>
-          <p:cNvPr id="26" name="TextBox 25"/>
-          <p:cNvSpPr txBox="1"/>
-          <p:nvPr/>
-        </p:nvSpPr>
-        <p:spPr>
-          <a:xfrm>
-            <a:off x="1097280" y="3306185"/>
-            <a:ext cx="1584960" cy="310896"/>
-          </a:xfrm>
-          <a:prstGeom prst="rect">
-            <a:avLst/>
-          </a:prstGeom>
-          <a:noFill/>
-        </p:spPr>
-        <p:txBody>
-          <a:bodyPr wrap="square">
-            <a:spAutoFit/>
-          </a:bodyPr>
-          <a:lstStyle/>
-          <a:p>
-            <a:pPr algn="l"/>
-            <a:r>
-              <a:rPr sz="1100" b="0">
-                <a:solidFill>
-                  <a:srgbClr val="465461"/>
-                </a:solidFill>
-                <a:latin typeface="Arial"/>
-              </a:rPr>
-              <a:t>NER qwen2.5:14b</a:t>
-            </a:r>
-          </a:p>
-        </p:txBody>
-      </p:sp>
-      <p:sp>
-        <p:nvSpPr>
-          <p:cNvPr id="27" name="TextBox 26"/>
-          <p:cNvSpPr txBox="1"/>
-          <p:nvPr/>
-        </p:nvSpPr>
-        <p:spPr>
-          <a:xfrm>
-            <a:off x="2773680" y="3306185"/>
-            <a:ext cx="1584960" cy="310896"/>
-          </a:xfrm>
-          <a:prstGeom prst="rect">
-            <a:avLst/>
-          </a:prstGeom>
-          <a:noFill/>
-        </p:spPr>
-        <p:txBody>
-          <a:bodyPr wrap="square">
-            <a:spAutoFit/>
-          </a:bodyPr>
-          <a:lstStyle/>
-          <a:p>
-            <a:pPr algn="l"/>
-            <a:r>
-              <a:rPr sz="1100" b="0">
-                <a:solidFill>
-                  <a:srgbClr val="465461"/>
-                </a:solidFill>
-                <a:latin typeface="Arial"/>
-              </a:rPr>
-              <a:t>✓</a:t>
-            </a:r>
-          </a:p>
-        </p:txBody>
-      </p:sp>
-      <p:sp>
-        <p:nvSpPr>
-          <p:cNvPr id="28" name="TextBox 27"/>
-          <p:cNvSpPr txBox="1"/>
-          <p:nvPr/>
-        </p:nvSpPr>
-        <p:spPr>
-          <a:xfrm>
-            <a:off x="4450080" y="3306185"/>
-            <a:ext cx="1584960" cy="310896"/>
-          </a:xfrm>
-          <a:prstGeom prst="rect">
-            <a:avLst/>
-          </a:prstGeom>
-          <a:noFill/>
-        </p:spPr>
-        <p:txBody>
-          <a:bodyPr wrap="square">
-            <a:spAutoFit/>
-          </a:bodyPr>
-          <a:lstStyle/>
-          <a:p>
-            <a:pPr algn="l"/>
-            <a:r>
-              <a:rPr sz="1100" b="0">
-                <a:solidFill>
-                  <a:srgbClr val="465461"/>
-                </a:solidFill>
-                <a:latin typeface="Arial"/>
-              </a:rPr>
-              <a:t>—</a:t>
-            </a:r>
-          </a:p>
-        </p:txBody>
-      </p:sp>
-      <p:sp>
-        <p:nvSpPr>
-          <p:cNvPr id="29" name="TextBox 28"/>
-          <p:cNvSpPr txBox="1"/>
-          <p:nvPr/>
-        </p:nvSpPr>
-        <p:spPr>
-          <a:xfrm>
-            <a:off x="6126480" y="3306185"/>
-            <a:ext cx="1584960" cy="310896"/>
-          </a:xfrm>
-          <a:prstGeom prst="rect">
-            <a:avLst/>
-          </a:prstGeom>
-          <a:noFill/>
-        </p:spPr>
-        <p:txBody>
-          <a:bodyPr wrap="square">
-            <a:spAutoFit/>
-          </a:bodyPr>
-          <a:lstStyle/>
-          <a:p>
-            <a:pPr algn="l"/>
-            <a:r>
-              <a:rPr sz="1100" b="0">
-                <a:solidFill>
-                  <a:srgbClr val="465461"/>
-                </a:solidFill>
-                <a:latin typeface="Arial"/>
-              </a:rPr>
-              <a:t>✓</a:t>
-            </a:r>
-          </a:p>
-        </p:txBody>
-      </p:sp>
-      <p:sp>
-        <p:nvSpPr>
-          <p:cNvPr id="30" name="TextBox 29"/>
-          <p:cNvSpPr txBox="1"/>
-          <p:nvPr/>
-        </p:nvSpPr>
-        <p:spPr>
-          <a:xfrm>
-            <a:off x="7802880" y="3306185"/>
-            <a:ext cx="1584960" cy="310896"/>
-          </a:xfrm>
-          <a:prstGeom prst="rect">
-            <a:avLst/>
-          </a:prstGeom>
-          <a:noFill/>
-        </p:spPr>
-        <p:txBody>
-          <a:bodyPr wrap="square">
-            <a:spAutoFit/>
-          </a:bodyPr>
-          <a:lstStyle/>
-          <a:p>
-            <a:pPr algn="l"/>
-            <a:r>
-              <a:rPr sz="1100" b="0">
-                <a:solidFill>
-                  <a:srgbClr val="465461"/>
-                </a:solidFill>
-                <a:latin typeface="Arial"/>
-              </a:rPr>
-              <a:t>✓</a:t>
-            </a:r>
-          </a:p>
-        </p:txBody>
-      </p:sp>
-      <p:sp>
-        <p:nvSpPr>
-          <p:cNvPr id="31" name="TextBox 30"/>
-          <p:cNvSpPr txBox="1"/>
-          <p:nvPr/>
-        </p:nvSpPr>
-        <p:spPr>
-          <a:xfrm>
-            <a:off x="9479280" y="3306185"/>
-            <a:ext cx="1584960" cy="310896"/>
-          </a:xfrm>
-          <a:prstGeom prst="rect">
-            <a:avLst/>
-          </a:prstGeom>
-          <a:noFill/>
-        </p:spPr>
-        <p:txBody>
-          <a:bodyPr wrap="square">
-            <a:spAutoFit/>
-          </a:bodyPr>
-          <a:lstStyle/>
-          <a:p>
-            <a:pPr algn="l"/>
-            <a:r>
-              <a:rPr sz="1100" b="0">
-                <a:solidFill>
-                  <a:srgbClr val="465461"/>
-                </a:solidFill>
-                <a:latin typeface="Arial"/>
-              </a:rPr>
-              <a:t>✓</a:t>
-            </a:r>
-          </a:p>
-        </p:txBody>
-      </p:sp>
-      <p:sp>
-        <p:nvSpPr>
-          <p:cNvPr id="32" name="Rectangle 31"/>
-          <p:cNvSpPr/>
-          <p:nvPr/>
-        </p:nvSpPr>
-        <p:spPr>
-          <a:xfrm>
-            <a:off x="1051560" y="3577081"/>
-            <a:ext cx="10058400" cy="310896"/>
-          </a:xfrm>
-          <a:prstGeom prst="rect">
-            <a:avLst/>
-          </a:prstGeom>
-          <a:solidFill>
-            <a:srgbClr val="FFFFFF"/>
-          </a:solidFill>
-          <a:ln>
-            <a:noFill/>
-          </a:ln>
-        </p:spPr>
-        <p:style>
-          <a:lnRef idx="1">
-            <a:schemeClr val="accent1"/>
-          </a:lnRef>
-          <a:fillRef idx="3">
-            <a:schemeClr val="accent1"/>
-          </a:fillRef>
-          <a:effectRef idx="2">
-            <a:schemeClr val="accent1"/>
-          </a:effectRef>
-          <a:fontRef idx="minor">
-            <a:schemeClr val="lt1"/>
-          </a:fontRef>
-        </p:style>
-        <p:txBody>
-          <a:bodyPr rtlCol="0" anchor="ctr"/>
-          <a:lstStyle/>
-          <a:p>
-            <a:pPr algn="ctr"/>
-          </a:p>
-        </p:txBody>
-      </p:sp>
-      <p:sp>
-        <p:nvSpPr>
-          <p:cNvPr id="33" name="TextBox 32"/>
-          <p:cNvSpPr txBox="1"/>
-          <p:nvPr/>
-        </p:nvSpPr>
-        <p:spPr>
-          <a:xfrm>
-            <a:off x="1097280" y="3617081"/>
-            <a:ext cx="1584960" cy="310896"/>
-          </a:xfrm>
-          <a:prstGeom prst="rect">
-            <a:avLst/>
-          </a:prstGeom>
-          <a:noFill/>
-        </p:spPr>
-        <p:txBody>
-          <a:bodyPr wrap="square">
-            <a:spAutoFit/>
-          </a:bodyPr>
-          <a:lstStyle/>
-          <a:p>
-            <a:pPr algn="l"/>
-            <a:r>
-              <a:rPr sz="1100" b="0">
-                <a:solidFill>
-                  <a:srgbClr val="465461"/>
-                </a:solidFill>
-                <a:latin typeface="Arial"/>
-              </a:rPr>
-              <a:t>Burrows' Delta</a:t>
-            </a:r>
-          </a:p>
-        </p:txBody>
-      </p:sp>
-      <p:sp>
-        <p:nvSpPr>
-          <p:cNvPr id="34" name="TextBox 33"/>
-          <p:cNvSpPr txBox="1"/>
-          <p:nvPr/>
-        </p:nvSpPr>
-        <p:spPr>
-          <a:xfrm>
-            <a:off x="2773680" y="3617081"/>
-            <a:ext cx="1584960" cy="310896"/>
-          </a:xfrm>
-          <a:prstGeom prst="rect">
-            <a:avLst/>
-          </a:prstGeom>
-          <a:noFill/>
-        </p:spPr>
-        <p:txBody>
-          <a:bodyPr wrap="square">
-            <a:spAutoFit/>
-          </a:bodyPr>
-          <a:lstStyle/>
-          <a:p>
-            <a:pPr algn="l"/>
-            <a:r>
-              <a:rPr sz="1100" b="0">
-                <a:solidFill>
-                  <a:srgbClr val="465461"/>
-                </a:solidFill>
-                <a:latin typeface="Arial"/>
-              </a:rPr>
-              <a:t>✓</a:t>
-            </a:r>
-          </a:p>
-        </p:txBody>
-      </p:sp>
-      <p:sp>
-        <p:nvSpPr>
-          <p:cNvPr id="35" name="TextBox 34"/>
-          <p:cNvSpPr txBox="1"/>
-          <p:nvPr/>
-        </p:nvSpPr>
-        <p:spPr>
-          <a:xfrm>
-            <a:off x="4450080" y="3617081"/>
-            <a:ext cx="1584960" cy="310896"/>
-          </a:xfrm>
-          <a:prstGeom prst="rect">
-            <a:avLst/>
-          </a:prstGeom>
-          <a:noFill/>
-        </p:spPr>
-        <p:txBody>
-          <a:bodyPr wrap="square">
-            <a:spAutoFit/>
-          </a:bodyPr>
-          <a:lstStyle/>
-          <a:p>
-            <a:pPr algn="l"/>
-            <a:r>
-              <a:rPr sz="1100" b="0">
-                <a:solidFill>
-                  <a:srgbClr val="465461"/>
-                </a:solidFill>
-                <a:latin typeface="Arial"/>
-              </a:rPr>
-              <a:t>—</a:t>
-            </a:r>
-          </a:p>
-        </p:txBody>
-      </p:sp>
-      <p:sp>
-        <p:nvSpPr>
-          <p:cNvPr id="36" name="TextBox 35"/>
-          <p:cNvSpPr txBox="1"/>
-          <p:nvPr/>
-        </p:nvSpPr>
-        <p:spPr>
-          <a:xfrm>
-            <a:off x="6126480" y="3617081"/>
-            <a:ext cx="1584960" cy="310896"/>
-          </a:xfrm>
-          <a:prstGeom prst="rect">
-            <a:avLst/>
-          </a:prstGeom>
-          <a:noFill/>
-        </p:spPr>
-        <p:txBody>
-          <a:bodyPr wrap="square">
-            <a:spAutoFit/>
-          </a:bodyPr>
-          <a:lstStyle/>
-          <a:p>
-            <a:pPr algn="l"/>
-            <a:r>
-              <a:rPr sz="1100" b="0">
-                <a:solidFill>
-                  <a:srgbClr val="465461"/>
-                </a:solidFill>
-                <a:latin typeface="Arial"/>
-              </a:rPr>
-              <a:t>✓</a:t>
-            </a:r>
-          </a:p>
-        </p:txBody>
-      </p:sp>
-      <p:sp>
-        <p:nvSpPr>
-          <p:cNvPr id="37" name="TextBox 36"/>
-          <p:cNvSpPr txBox="1"/>
-          <p:nvPr/>
-        </p:nvSpPr>
-        <p:spPr>
-          <a:xfrm>
-            <a:off x="7802880" y="3617081"/>
-            <a:ext cx="1584960" cy="310896"/>
-          </a:xfrm>
-          <a:prstGeom prst="rect">
-            <a:avLst/>
-          </a:prstGeom>
-          <a:noFill/>
-        </p:spPr>
-        <p:txBody>
-          <a:bodyPr wrap="square">
-            <a:spAutoFit/>
-          </a:bodyPr>
-          <a:lstStyle/>
-          <a:p>
-            <a:pPr algn="l"/>
-            <a:r>
-              <a:rPr sz="1100" b="0">
-                <a:solidFill>
-                  <a:srgbClr val="465461"/>
-                </a:solidFill>
-                <a:latin typeface="Arial"/>
-              </a:rPr>
-              <a:t>✓</a:t>
-            </a:r>
-          </a:p>
-        </p:txBody>
-      </p:sp>
-      <p:sp>
-        <p:nvSpPr>
-          <p:cNvPr id="38" name="TextBox 37"/>
-          <p:cNvSpPr txBox="1"/>
-          <p:nvPr/>
-        </p:nvSpPr>
-        <p:spPr>
-          <a:xfrm>
-            <a:off x="9479280" y="3617081"/>
-            <a:ext cx="1584960" cy="310896"/>
-          </a:xfrm>
-          <a:prstGeom prst="rect">
-            <a:avLst/>
-          </a:prstGeom>
-          <a:noFill/>
-        </p:spPr>
-        <p:txBody>
-          <a:bodyPr wrap="square">
-            <a:spAutoFit/>
-          </a:bodyPr>
-          <a:lstStyle/>
-          <a:p>
-            <a:pPr algn="l"/>
-            <a:r>
-              <a:rPr sz="1100" b="0">
-                <a:solidFill>
-                  <a:srgbClr val="465461"/>
-                </a:solidFill>
-                <a:latin typeface="Arial"/>
-              </a:rPr>
-              <a:t>✓</a:t>
-            </a:r>
-          </a:p>
-        </p:txBody>
-      </p:sp>
-      <p:sp>
-        <p:nvSpPr>
-          <p:cNvPr id="39" name="Rectangle 38"/>
-          <p:cNvSpPr/>
-          <p:nvPr/>
-        </p:nvSpPr>
-        <p:spPr>
-          <a:xfrm>
-            <a:off x="1051560" y="3887977"/>
-            <a:ext cx="10058400" cy="310896"/>
-          </a:xfrm>
-          <a:prstGeom prst="rect">
-            <a:avLst/>
-          </a:prstGeom>
-          <a:solidFill>
-            <a:srgbClr val="F1F2F6"/>
-          </a:solidFill>
-          <a:ln>
-            <a:noFill/>
-          </a:ln>
-        </p:spPr>
-        <p:style>
-          <a:lnRef idx="1">
-            <a:schemeClr val="accent1"/>
-          </a:lnRef>
-          <a:fillRef idx="3">
-            <a:schemeClr val="accent1"/>
-          </a:fillRef>
-          <a:effectRef idx="2">
-            <a:schemeClr val="accent1"/>
-          </a:effectRef>
-          <a:fontRef idx="minor">
-            <a:schemeClr val="lt1"/>
-          </a:fontRef>
-        </p:style>
-        <p:txBody>
-          <a:bodyPr rtlCol="0" anchor="ctr"/>
-          <a:lstStyle/>
-          <a:p>
-            <a:pPr algn="ctr"/>
-          </a:p>
-        </p:txBody>
-      </p:sp>
-      <p:sp>
-        <p:nvSpPr>
-          <p:cNvPr id="40" name="TextBox 39"/>
-          <p:cNvSpPr txBox="1"/>
-          <p:nvPr/>
-        </p:nvSpPr>
-        <p:spPr>
-          <a:xfrm>
-            <a:off x="1097280" y="3927977"/>
-            <a:ext cx="1584960" cy="310896"/>
-          </a:xfrm>
-          <a:prstGeom prst="rect">
-            <a:avLst/>
-          </a:prstGeom>
-          <a:noFill/>
-        </p:spPr>
-        <p:txBody>
-          <a:bodyPr wrap="square">
-            <a:spAutoFit/>
-          </a:bodyPr>
-          <a:lstStyle/>
-          <a:p>
-            <a:pPr algn="l"/>
-            <a:r>
-              <a:rPr sz="1100" b="0">
-                <a:solidFill>
-                  <a:srgbClr val="465461"/>
-                </a:solidFill>
-                <a:latin typeface="Arial"/>
-              </a:rPr>
-              <a:t>qwen3-embedding</a:t>
-            </a:r>
-          </a:p>
-        </p:txBody>
-      </p:sp>
-      <p:sp>
-        <p:nvSpPr>
-          <p:cNvPr id="41" name="TextBox 40"/>
-          <p:cNvSpPr txBox="1"/>
-          <p:nvPr/>
-        </p:nvSpPr>
-        <p:spPr>
-          <a:xfrm>
-            <a:off x="2773680" y="3927977"/>
-            <a:ext cx="1584960" cy="310896"/>
-          </a:xfrm>
-          <a:prstGeom prst="rect">
-            <a:avLst/>
-          </a:prstGeom>
-          <a:noFill/>
-        </p:spPr>
-        <p:txBody>
-          <a:bodyPr wrap="square">
-            <a:spAutoFit/>
-          </a:bodyPr>
-          <a:lstStyle/>
-          <a:p>
-            <a:pPr algn="l"/>
-            <a:r>
-              <a:rPr sz="1100" b="0">
-                <a:solidFill>
-                  <a:srgbClr val="465461"/>
-                </a:solidFill>
-                <a:latin typeface="Arial"/>
-              </a:rPr>
-              <a:t>✓</a:t>
-            </a:r>
-          </a:p>
-        </p:txBody>
-      </p:sp>
-      <p:sp>
-        <p:nvSpPr>
-          <p:cNvPr id="42" name="TextBox 41"/>
-          <p:cNvSpPr txBox="1"/>
-          <p:nvPr/>
-        </p:nvSpPr>
-        <p:spPr>
-          <a:xfrm>
-            <a:off x="4450080" y="3927977"/>
-            <a:ext cx="1584960" cy="310896"/>
-          </a:xfrm>
-          <a:prstGeom prst="rect">
-            <a:avLst/>
-          </a:prstGeom>
-          <a:noFill/>
-        </p:spPr>
-        <p:txBody>
-          <a:bodyPr wrap="square">
-            <a:spAutoFit/>
-          </a:bodyPr>
-          <a:lstStyle/>
-          <a:p>
-            <a:pPr algn="l"/>
-            <a:r>
-              <a:rPr sz="1100" b="0">
-                <a:solidFill>
-                  <a:srgbClr val="465461"/>
-                </a:solidFill>
-                <a:latin typeface="Arial"/>
-              </a:rPr>
-              <a:t>✓</a:t>
-            </a:r>
-          </a:p>
-        </p:txBody>
-      </p:sp>
-      <p:sp>
-        <p:nvSpPr>
-          <p:cNvPr id="43" name="TextBox 42"/>
-          <p:cNvSpPr txBox="1"/>
-          <p:nvPr/>
-        </p:nvSpPr>
-        <p:spPr>
-          <a:xfrm>
-            <a:off x="6126480" y="3927977"/>
-            <a:ext cx="1584960" cy="310896"/>
-          </a:xfrm>
-          <a:prstGeom prst="rect">
-            <a:avLst/>
-          </a:prstGeom>
-          <a:noFill/>
-        </p:spPr>
-        <p:txBody>
-          <a:bodyPr wrap="square">
-            <a:spAutoFit/>
-          </a:bodyPr>
-          <a:lstStyle/>
-          <a:p>
-            <a:pPr algn="l"/>
-            <a:r>
-              <a:rPr sz="1100" b="0">
-                <a:solidFill>
-                  <a:srgbClr val="465461"/>
-                </a:solidFill>
-                <a:latin typeface="Arial"/>
-              </a:rPr>
-              <a:t>✓</a:t>
-            </a:r>
-          </a:p>
-        </p:txBody>
-      </p:sp>
-      <p:sp>
-        <p:nvSpPr>
-          <p:cNvPr id="44" name="TextBox 43"/>
-          <p:cNvSpPr txBox="1"/>
-          <p:nvPr/>
-        </p:nvSpPr>
-        <p:spPr>
-          <a:xfrm>
-            <a:off x="7802880" y="3927977"/>
-            <a:ext cx="1584960" cy="310896"/>
-          </a:xfrm>
-          <a:prstGeom prst="rect">
-            <a:avLst/>
-          </a:prstGeom>
-          <a:noFill/>
-        </p:spPr>
-        <p:txBody>
-          <a:bodyPr wrap="square">
-            <a:spAutoFit/>
-          </a:bodyPr>
-          <a:lstStyle/>
-          <a:p>
-            <a:pPr algn="l"/>
-            <a:r>
-              <a:rPr sz="1100" b="0">
-                <a:solidFill>
-                  <a:srgbClr val="465461"/>
-                </a:solidFill>
-                <a:latin typeface="Arial"/>
-              </a:rPr>
-              <a:t>✓</a:t>
-            </a:r>
-          </a:p>
-        </p:txBody>
-      </p:sp>
-      <p:sp>
-        <p:nvSpPr>
-          <p:cNvPr id="45" name="TextBox 44"/>
-          <p:cNvSpPr txBox="1"/>
-          <p:nvPr/>
-        </p:nvSpPr>
-        <p:spPr>
-          <a:xfrm>
-            <a:off x="9479280" y="3927977"/>
-            <a:ext cx="1584960" cy="310896"/>
-          </a:xfrm>
-          <a:prstGeom prst="rect">
-            <a:avLst/>
-          </a:prstGeom>
-          <a:noFill/>
-        </p:spPr>
-        <p:txBody>
-          <a:bodyPr wrap="square">
-            <a:spAutoFit/>
-          </a:bodyPr>
-          <a:lstStyle/>
-          <a:p>
-            <a:pPr algn="l"/>
-            <a:r>
-              <a:rPr sz="1100" b="0">
-                <a:solidFill>
-                  <a:srgbClr val="465461"/>
-                </a:solidFill>
-                <a:latin typeface="Arial"/>
-              </a:rPr>
-              <a:t>✓</a:t>
-            </a:r>
-          </a:p>
-        </p:txBody>
-      </p:sp>
+        </p:nvGraphicFramePr>
+        <p:xfrm>
+          <a:off x="1051560" y="2148840"/>
+          <a:ext cx="10058400" cy="2194560"/>
+        </p:xfrm>
+        <a:graphic>
+          <a:graphicData uri="http://schemas.openxmlformats.org/drawingml/2006/table">
+            <a:tbl>
+              <a:tblPr>
+                <a:tableStyleId>{5C22544A-7EE6-4342-B048-85BDC9FD1C3A}</a:tableStyleId>
+              </a:tblPr>
+              <a:tblGrid>
+                <a:gridCol w="1676400"/>
+                <a:gridCol w="1676400"/>
+                <a:gridCol w="1676400"/>
+                <a:gridCol w="1676400"/>
+                <a:gridCol w="1676400"/>
+                <a:gridCol w="1676400"/>
+              </a:tblGrid>
+              <a:tr h="365760">
+                <a:tc>
+                  <a:txBody>
+                    <a:bodyPr/>
+                    <a:lstStyle/>
+                    <a:p>
+                      <a:r>
+                        <a:rPr sz="1200" b="1">
+                          <a:solidFill>
+                            <a:srgbClr val="FFFFFF"/>
+                          </a:solidFill>
+                          <a:latin typeface="Arial"/>
+                        </a:rPr>
+                        <a:t>Técnica</a:t>
+                      </a:r>
+                    </a:p>
+                  </a:txBody>
+                  <a:tcPr marL="45000" marR="45000" marT="25000" marB="25000" anchor="ctr">
+                    <a:solidFill>
+                      <a:srgbClr val="CD2D37"/>
+                    </a:solidFill>
+                  </a:tcPr>
+                </a:tc>
+                <a:tc>
+                  <a:txBody>
+                    <a:bodyPr/>
+                    <a:lstStyle/>
+                    <a:p>
+                      <a:r>
+                        <a:rPr sz="1200" b="1">
+                          <a:solidFill>
+                            <a:srgbClr val="FFFFFF"/>
+                          </a:solidFill>
+                          <a:latin typeface="Arial"/>
+                        </a:rPr>
+                        <a:t>OGUsers</a:t>
+                      </a:r>
+                    </a:p>
+                  </a:txBody>
+                  <a:tcPr marL="45000" marR="45000" marT="25000" marB="25000" anchor="ctr">
+                    <a:solidFill>
+                      <a:srgbClr val="CD2D37"/>
+                    </a:solidFill>
+                  </a:tcPr>
+                </a:tc>
+                <a:tc>
+                  <a:txBody>
+                    <a:bodyPr/>
+                    <a:lstStyle/>
+                    <a:p>
+                      <a:r>
+                        <a:rPr sz="1200" b="1">
+                          <a:solidFill>
+                            <a:srgbClr val="FFFFFF"/>
+                          </a:solidFill>
+                          <a:latin typeface="Arial"/>
+                        </a:rPr>
+                        <a:t>Exploit.in</a:t>
+                      </a:r>
+                    </a:p>
+                  </a:txBody>
+                  <a:tcPr marL="45000" marR="45000" marT="25000" marB="25000" anchor="ctr">
+                    <a:solidFill>
+                      <a:srgbClr val="CD2D37"/>
+                    </a:solidFill>
+                  </a:tcPr>
+                </a:tc>
+                <a:tc>
+                  <a:txBody>
+                    <a:bodyPr/>
+                    <a:lstStyle/>
+                    <a:p>
+                      <a:r>
+                        <a:rPr sz="1200" b="1">
+                          <a:solidFill>
+                            <a:srgbClr val="FFFFFF"/>
+                          </a:solidFill>
+                          <a:latin typeface="Arial"/>
+                        </a:rPr>
+                        <a:t>Cracked.to</a:t>
+                      </a:r>
+                    </a:p>
+                  </a:txBody>
+                  <a:tcPr marL="45000" marR="45000" marT="25000" marB="25000" anchor="ctr">
+                    <a:solidFill>
+                      <a:srgbClr val="CD2D37"/>
+                    </a:solidFill>
+                  </a:tcPr>
+                </a:tc>
+                <a:tc>
+                  <a:txBody>
+                    <a:bodyPr/>
+                    <a:lstStyle/>
+                    <a:p>
+                      <a:r>
+                        <a:rPr sz="1200" b="1">
+                          <a:solidFill>
+                            <a:srgbClr val="FFFFFF"/>
+                          </a:solidFill>
+                          <a:latin typeface="Arial"/>
+                        </a:rPr>
+                        <a:t>Nulled.io</a:t>
+                      </a:r>
+                    </a:p>
+                  </a:txBody>
+                  <a:tcPr marL="45000" marR="45000" marT="25000" marB="25000" anchor="ctr">
+                    <a:solidFill>
+                      <a:srgbClr val="CD2D37"/>
+                    </a:solidFill>
+                  </a:tcPr>
+                </a:tc>
+                <a:tc>
+                  <a:txBody>
+                    <a:bodyPr/>
+                    <a:lstStyle/>
+                    <a:p>
+                      <a:r>
+                        <a:rPr sz="1200" b="1">
+                          <a:solidFill>
+                            <a:srgbClr val="FFFFFF"/>
+                          </a:solidFill>
+                          <a:latin typeface="Arial"/>
+                        </a:rPr>
+                        <a:t>RaidForums</a:t>
+                      </a:r>
+                    </a:p>
+                  </a:txBody>
+                  <a:tcPr marL="45000" marR="45000" marT="25000" marB="25000" anchor="ctr">
+                    <a:solidFill>
+                      <a:srgbClr val="CD2D37"/>
+                    </a:solidFill>
+                  </a:tcPr>
+                </a:tc>
+              </a:tr>
+              <a:tr h="365760">
+                <a:tc>
+                  <a:txBody>
+                    <a:bodyPr/>
+                    <a:lstStyle/>
+                    <a:p>
+                      <a:r>
+                        <a:rPr sz="1100" b="0">
+                          <a:solidFill>
+                            <a:srgbClr val="465461"/>
+                          </a:solidFill>
+                          <a:latin typeface="Arial"/>
+                        </a:rPr>
+                        <a:t>BERTopic (en)</a:t>
+                      </a:r>
+                    </a:p>
+                  </a:txBody>
+                  <a:tcPr marL="45000" marR="45000" marT="25000" marB="25000" anchor="ctr">
+                    <a:solidFill>
+                      <a:srgbClr val="F1F2F6"/>
+                    </a:solidFill>
+                  </a:tcPr>
+                </a:tc>
+                <a:tc>
+                  <a:txBody>
+                    <a:bodyPr/>
+                    <a:lstStyle/>
+                    <a:p>
+                      <a:r>
+                        <a:rPr sz="1100" b="0">
+                          <a:solidFill>
+                            <a:srgbClr val="465461"/>
+                          </a:solidFill>
+                          <a:latin typeface="Arial"/>
+                        </a:rPr>
+                        <a:t>✓</a:t>
+                      </a:r>
+                    </a:p>
+                  </a:txBody>
+                  <a:tcPr marL="45000" marR="45000" marT="25000" marB="25000" anchor="ctr">
+                    <a:solidFill>
+                      <a:srgbClr val="F1F2F6"/>
+                    </a:solidFill>
+                  </a:tcPr>
+                </a:tc>
+                <a:tc>
+                  <a:txBody>
+                    <a:bodyPr/>
+                    <a:lstStyle/>
+                    <a:p>
+                      <a:r>
+                        <a:rPr sz="1100" b="0">
+                          <a:solidFill>
+                            <a:srgbClr val="465461"/>
+                          </a:solidFill>
+                          <a:latin typeface="Arial"/>
+                        </a:rPr>
+                        <a:t>—</a:t>
+                      </a:r>
+                    </a:p>
+                  </a:txBody>
+                  <a:tcPr marL="45000" marR="45000" marT="25000" marB="25000" anchor="ctr">
+                    <a:solidFill>
+                      <a:srgbClr val="F1F2F6"/>
+                    </a:solidFill>
+                  </a:tcPr>
+                </a:tc>
+                <a:tc>
+                  <a:txBody>
+                    <a:bodyPr/>
+                    <a:lstStyle/>
+                    <a:p>
+                      <a:r>
+                        <a:rPr sz="1100" b="0">
+                          <a:solidFill>
+                            <a:srgbClr val="465461"/>
+                          </a:solidFill>
+                          <a:latin typeface="Arial"/>
+                        </a:rPr>
+                        <a:t>✓</a:t>
+                      </a:r>
+                    </a:p>
+                  </a:txBody>
+                  <a:tcPr marL="45000" marR="45000" marT="25000" marB="25000" anchor="ctr">
+                    <a:solidFill>
+                      <a:srgbClr val="F1F2F6"/>
+                    </a:solidFill>
+                  </a:tcPr>
+                </a:tc>
+                <a:tc>
+                  <a:txBody>
+                    <a:bodyPr/>
+                    <a:lstStyle/>
+                    <a:p>
+                      <a:r>
+                        <a:rPr sz="1100" b="0">
+                          <a:solidFill>
+                            <a:srgbClr val="465461"/>
+                          </a:solidFill>
+                          <a:latin typeface="Arial"/>
+                        </a:rPr>
+                        <a:t>✓</a:t>
+                      </a:r>
+                    </a:p>
+                  </a:txBody>
+                  <a:tcPr marL="45000" marR="45000" marT="25000" marB="25000" anchor="ctr">
+                    <a:solidFill>
+                      <a:srgbClr val="F1F2F6"/>
+                    </a:solidFill>
+                  </a:tcPr>
+                </a:tc>
+                <a:tc>
+                  <a:txBody>
+                    <a:bodyPr/>
+                    <a:lstStyle/>
+                    <a:p>
+                      <a:r>
+                        <a:rPr sz="1100" b="0">
+                          <a:solidFill>
+                            <a:srgbClr val="465461"/>
+                          </a:solidFill>
+                          <a:latin typeface="Arial"/>
+                        </a:rPr>
+                        <a:t>✓</a:t>
+                      </a:r>
+                    </a:p>
+                  </a:txBody>
+                  <a:tcPr marL="45000" marR="45000" marT="25000" marB="25000" anchor="ctr">
+                    <a:solidFill>
+                      <a:srgbClr val="F1F2F6"/>
+                    </a:solidFill>
+                  </a:tcPr>
+                </a:tc>
+              </a:tr>
+              <a:tr h="365760">
+                <a:tc>
+                  <a:txBody>
+                    <a:bodyPr/>
+                    <a:lstStyle/>
+                    <a:p>
+                      <a:r>
+                        <a:rPr sz="1100" b="0">
+                          <a:solidFill>
+                            <a:srgbClr val="465461"/>
+                          </a:solidFill>
+                          <a:latin typeface="Arial"/>
+                        </a:rPr>
+                        <a:t>BERTopic (multilingual)</a:t>
+                      </a:r>
+                    </a:p>
+                  </a:txBody>
+                  <a:tcPr marL="45000" marR="45000" marT="25000" marB="25000" anchor="ctr">
+                    <a:solidFill>
+                      <a:srgbClr val="FFFFFF"/>
+                    </a:solidFill>
+                  </a:tcPr>
+                </a:tc>
+                <a:tc>
+                  <a:txBody>
+                    <a:bodyPr/>
+                    <a:lstStyle/>
+                    <a:p>
+                      <a:r>
+                        <a:rPr sz="1100" b="0">
+                          <a:solidFill>
+                            <a:srgbClr val="465461"/>
+                          </a:solidFill>
+                          <a:latin typeface="Arial"/>
+                        </a:rPr>
+                        <a:t>—</a:t>
+                      </a:r>
+                    </a:p>
+                  </a:txBody>
+                  <a:tcPr marL="45000" marR="45000" marT="25000" marB="25000" anchor="ctr">
+                    <a:solidFill>
+                      <a:srgbClr val="FFFFFF"/>
+                    </a:solidFill>
+                  </a:tcPr>
+                </a:tc>
+                <a:tc>
+                  <a:txBody>
+                    <a:bodyPr/>
+                    <a:lstStyle/>
+                    <a:p>
+                      <a:r>
+                        <a:rPr sz="1100" b="0">
+                          <a:solidFill>
+                            <a:srgbClr val="465461"/>
+                          </a:solidFill>
+                          <a:latin typeface="Arial"/>
+                        </a:rPr>
+                        <a:t>✓</a:t>
+                      </a:r>
+                    </a:p>
+                  </a:txBody>
+                  <a:tcPr marL="45000" marR="45000" marT="25000" marB="25000" anchor="ctr">
+                    <a:solidFill>
+                      <a:srgbClr val="FFFFFF"/>
+                    </a:solidFill>
+                  </a:tcPr>
+                </a:tc>
+                <a:tc>
+                  <a:txBody>
+                    <a:bodyPr/>
+                    <a:lstStyle/>
+                    <a:p>
+                      <a:r>
+                        <a:rPr sz="1100" b="0">
+                          <a:solidFill>
+                            <a:srgbClr val="465461"/>
+                          </a:solidFill>
+                          <a:latin typeface="Arial"/>
+                        </a:rPr>
+                        <a:t>—</a:t>
+                      </a:r>
+                    </a:p>
+                  </a:txBody>
+                  <a:tcPr marL="45000" marR="45000" marT="25000" marB="25000" anchor="ctr">
+                    <a:solidFill>
+                      <a:srgbClr val="FFFFFF"/>
+                    </a:solidFill>
+                  </a:tcPr>
+                </a:tc>
+                <a:tc>
+                  <a:txBody>
+                    <a:bodyPr/>
+                    <a:lstStyle/>
+                    <a:p>
+                      <a:r>
+                        <a:rPr sz="1100" b="0">
+                          <a:solidFill>
+                            <a:srgbClr val="465461"/>
+                          </a:solidFill>
+                          <a:latin typeface="Arial"/>
+                        </a:rPr>
+                        <a:t>—</a:t>
+                      </a:r>
+                    </a:p>
+                  </a:txBody>
+                  <a:tcPr marL="45000" marR="45000" marT="25000" marB="25000" anchor="ctr">
+                    <a:solidFill>
+                      <a:srgbClr val="FFFFFF"/>
+                    </a:solidFill>
+                  </a:tcPr>
+                </a:tc>
+                <a:tc>
+                  <a:txBody>
+                    <a:bodyPr/>
+                    <a:lstStyle/>
+                    <a:p>
+                      <a:r>
+                        <a:rPr sz="1100" b="0">
+                          <a:solidFill>
+                            <a:srgbClr val="465461"/>
+                          </a:solidFill>
+                          <a:latin typeface="Arial"/>
+                        </a:rPr>
+                        <a:t>—</a:t>
+                      </a:r>
+                    </a:p>
+                  </a:txBody>
+                  <a:tcPr marL="45000" marR="45000" marT="25000" marB="25000" anchor="ctr">
+                    <a:solidFill>
+                      <a:srgbClr val="FFFFFF"/>
+                    </a:solidFill>
+                  </a:tcPr>
+                </a:tc>
+              </a:tr>
+              <a:tr h="365760">
+                <a:tc>
+                  <a:txBody>
+                    <a:bodyPr/>
+                    <a:lstStyle/>
+                    <a:p>
+                      <a:r>
+                        <a:rPr sz="1100" b="0">
+                          <a:solidFill>
+                            <a:srgbClr val="465461"/>
+                          </a:solidFill>
+                          <a:latin typeface="Arial"/>
+                        </a:rPr>
+                        <a:t>NER qwen2.5:14b</a:t>
+                      </a:r>
+                    </a:p>
+                  </a:txBody>
+                  <a:tcPr marL="45000" marR="45000" marT="25000" marB="25000" anchor="ctr">
+                    <a:solidFill>
+                      <a:srgbClr val="F1F2F6"/>
+                    </a:solidFill>
+                  </a:tcPr>
+                </a:tc>
+                <a:tc>
+                  <a:txBody>
+                    <a:bodyPr/>
+                    <a:lstStyle/>
+                    <a:p>
+                      <a:r>
+                        <a:rPr sz="1100" b="0">
+                          <a:solidFill>
+                            <a:srgbClr val="465461"/>
+                          </a:solidFill>
+                          <a:latin typeface="Arial"/>
+                        </a:rPr>
+                        <a:t>✓</a:t>
+                      </a:r>
+                    </a:p>
+                  </a:txBody>
+                  <a:tcPr marL="45000" marR="45000" marT="25000" marB="25000" anchor="ctr">
+                    <a:solidFill>
+                      <a:srgbClr val="F1F2F6"/>
+                    </a:solidFill>
+                  </a:tcPr>
+                </a:tc>
+                <a:tc>
+                  <a:txBody>
+                    <a:bodyPr/>
+                    <a:lstStyle/>
+                    <a:p>
+                      <a:r>
+                        <a:rPr sz="1100" b="0">
+                          <a:solidFill>
+                            <a:srgbClr val="465461"/>
+                          </a:solidFill>
+                          <a:latin typeface="Arial"/>
+                        </a:rPr>
+                        <a:t>—</a:t>
+                      </a:r>
+                    </a:p>
+                  </a:txBody>
+                  <a:tcPr marL="45000" marR="45000" marT="25000" marB="25000" anchor="ctr">
+                    <a:solidFill>
+                      <a:srgbClr val="F1F2F6"/>
+                    </a:solidFill>
+                  </a:tcPr>
+                </a:tc>
+                <a:tc>
+                  <a:txBody>
+                    <a:bodyPr/>
+                    <a:lstStyle/>
+                    <a:p>
+                      <a:r>
+                        <a:rPr sz="1100" b="0">
+                          <a:solidFill>
+                            <a:srgbClr val="465461"/>
+                          </a:solidFill>
+                          <a:latin typeface="Arial"/>
+                        </a:rPr>
+                        <a:t>✓</a:t>
+                      </a:r>
+                    </a:p>
+                  </a:txBody>
+                  <a:tcPr marL="45000" marR="45000" marT="25000" marB="25000" anchor="ctr">
+                    <a:solidFill>
+                      <a:srgbClr val="F1F2F6"/>
+                    </a:solidFill>
+                  </a:tcPr>
+                </a:tc>
+                <a:tc>
+                  <a:txBody>
+                    <a:bodyPr/>
+                    <a:lstStyle/>
+                    <a:p>
+                      <a:r>
+                        <a:rPr sz="1100" b="0">
+                          <a:solidFill>
+                            <a:srgbClr val="465461"/>
+                          </a:solidFill>
+                          <a:latin typeface="Arial"/>
+                        </a:rPr>
+                        <a:t>✓</a:t>
+                      </a:r>
+                    </a:p>
+                  </a:txBody>
+                  <a:tcPr marL="45000" marR="45000" marT="25000" marB="25000" anchor="ctr">
+                    <a:solidFill>
+                      <a:srgbClr val="F1F2F6"/>
+                    </a:solidFill>
+                  </a:tcPr>
+                </a:tc>
+                <a:tc>
+                  <a:txBody>
+                    <a:bodyPr/>
+                    <a:lstStyle/>
+                    <a:p>
+                      <a:r>
+                        <a:rPr sz="1100" b="0">
+                          <a:solidFill>
+                            <a:srgbClr val="465461"/>
+                          </a:solidFill>
+                          <a:latin typeface="Arial"/>
+                        </a:rPr>
+                        <a:t>✓</a:t>
+                      </a:r>
+                    </a:p>
+                  </a:txBody>
+                  <a:tcPr marL="45000" marR="45000" marT="25000" marB="25000" anchor="ctr">
+                    <a:solidFill>
+                      <a:srgbClr val="F1F2F6"/>
+                    </a:solidFill>
+                  </a:tcPr>
+                </a:tc>
+              </a:tr>
+              <a:tr h="365760">
+                <a:tc>
+                  <a:txBody>
+                    <a:bodyPr/>
+                    <a:lstStyle/>
+                    <a:p>
+                      <a:r>
+                        <a:rPr sz="1100" b="0">
+                          <a:solidFill>
+                            <a:srgbClr val="465461"/>
+                          </a:solidFill>
+                          <a:latin typeface="Arial"/>
+                        </a:rPr>
+                        <a:t>Burrows' Delta</a:t>
+                      </a:r>
+                    </a:p>
+                  </a:txBody>
+                  <a:tcPr marL="45000" marR="45000" marT="25000" marB="25000" anchor="ctr">
+                    <a:solidFill>
+                      <a:srgbClr val="FFFFFF"/>
+                    </a:solidFill>
+                  </a:tcPr>
+                </a:tc>
+                <a:tc>
+                  <a:txBody>
+                    <a:bodyPr/>
+                    <a:lstStyle/>
+                    <a:p>
+                      <a:r>
+                        <a:rPr sz="1100" b="0">
+                          <a:solidFill>
+                            <a:srgbClr val="465461"/>
+                          </a:solidFill>
+                          <a:latin typeface="Arial"/>
+                        </a:rPr>
+                        <a:t>✓</a:t>
+                      </a:r>
+                    </a:p>
+                  </a:txBody>
+                  <a:tcPr marL="45000" marR="45000" marT="25000" marB="25000" anchor="ctr">
+                    <a:solidFill>
+                      <a:srgbClr val="FFFFFF"/>
+                    </a:solidFill>
+                  </a:tcPr>
+                </a:tc>
+                <a:tc>
+                  <a:txBody>
+                    <a:bodyPr/>
+                    <a:lstStyle/>
+                    <a:p>
+                      <a:r>
+                        <a:rPr sz="1100" b="0">
+                          <a:solidFill>
+                            <a:srgbClr val="465461"/>
+                          </a:solidFill>
+                          <a:latin typeface="Arial"/>
+                        </a:rPr>
+                        <a:t>—</a:t>
+                      </a:r>
+                    </a:p>
+                  </a:txBody>
+                  <a:tcPr marL="45000" marR="45000" marT="25000" marB="25000" anchor="ctr">
+                    <a:solidFill>
+                      <a:srgbClr val="FFFFFF"/>
+                    </a:solidFill>
+                  </a:tcPr>
+                </a:tc>
+                <a:tc>
+                  <a:txBody>
+                    <a:bodyPr/>
+                    <a:lstStyle/>
+                    <a:p>
+                      <a:r>
+                        <a:rPr sz="1100" b="0">
+                          <a:solidFill>
+                            <a:srgbClr val="465461"/>
+                          </a:solidFill>
+                          <a:latin typeface="Arial"/>
+                        </a:rPr>
+                        <a:t>✓</a:t>
+                      </a:r>
+                    </a:p>
+                  </a:txBody>
+                  <a:tcPr marL="45000" marR="45000" marT="25000" marB="25000" anchor="ctr">
+                    <a:solidFill>
+                      <a:srgbClr val="FFFFFF"/>
+                    </a:solidFill>
+                  </a:tcPr>
+                </a:tc>
+                <a:tc>
+                  <a:txBody>
+                    <a:bodyPr/>
+                    <a:lstStyle/>
+                    <a:p>
+                      <a:r>
+                        <a:rPr sz="1100" b="0">
+                          <a:solidFill>
+                            <a:srgbClr val="465461"/>
+                          </a:solidFill>
+                          <a:latin typeface="Arial"/>
+                        </a:rPr>
+                        <a:t>✓</a:t>
+                      </a:r>
+                    </a:p>
+                  </a:txBody>
+                  <a:tcPr marL="45000" marR="45000" marT="25000" marB="25000" anchor="ctr">
+                    <a:solidFill>
+                      <a:srgbClr val="FFFFFF"/>
+                    </a:solidFill>
+                  </a:tcPr>
+                </a:tc>
+                <a:tc>
+                  <a:txBody>
+                    <a:bodyPr/>
+                    <a:lstStyle/>
+                    <a:p>
+                      <a:r>
+                        <a:rPr sz="1100" b="0">
+                          <a:solidFill>
+                            <a:srgbClr val="465461"/>
+                          </a:solidFill>
+                          <a:latin typeface="Arial"/>
+                        </a:rPr>
+                        <a:t>✓</a:t>
+                      </a:r>
+                    </a:p>
+                  </a:txBody>
+                  <a:tcPr marL="45000" marR="45000" marT="25000" marB="25000" anchor="ctr">
+                    <a:solidFill>
+                      <a:srgbClr val="FFFFFF"/>
+                    </a:solidFill>
+                  </a:tcPr>
+                </a:tc>
+              </a:tr>
+              <a:tr h="365760">
+                <a:tc>
+                  <a:txBody>
+                    <a:bodyPr/>
+                    <a:lstStyle/>
+                    <a:p>
+                      <a:r>
+                        <a:rPr sz="1100" b="0">
+                          <a:solidFill>
+                            <a:srgbClr val="465461"/>
+                          </a:solidFill>
+                          <a:latin typeface="Arial"/>
+                        </a:rPr>
+                        <a:t>qwen3-embedding</a:t>
+                      </a:r>
+                    </a:p>
+                  </a:txBody>
+                  <a:tcPr marL="45000" marR="45000" marT="25000" marB="25000" anchor="ctr">
+                    <a:solidFill>
+                      <a:srgbClr val="F1F2F6"/>
+                    </a:solidFill>
+                  </a:tcPr>
+                </a:tc>
+                <a:tc>
+                  <a:txBody>
+                    <a:bodyPr/>
+                    <a:lstStyle/>
+                    <a:p>
+                      <a:r>
+                        <a:rPr sz="1100" b="0">
+                          <a:solidFill>
+                            <a:srgbClr val="465461"/>
+                          </a:solidFill>
+                          <a:latin typeface="Arial"/>
+                        </a:rPr>
+                        <a:t>✓</a:t>
+                      </a:r>
+                    </a:p>
+                  </a:txBody>
+                  <a:tcPr marL="45000" marR="45000" marT="25000" marB="25000" anchor="ctr">
+                    <a:solidFill>
+                      <a:srgbClr val="F1F2F6"/>
+                    </a:solidFill>
+                  </a:tcPr>
+                </a:tc>
+                <a:tc>
+                  <a:txBody>
+                    <a:bodyPr/>
+                    <a:lstStyle/>
+                    <a:p>
+                      <a:r>
+                        <a:rPr sz="1100" b="0">
+                          <a:solidFill>
+                            <a:srgbClr val="465461"/>
+                          </a:solidFill>
+                          <a:latin typeface="Arial"/>
+                        </a:rPr>
+                        <a:t>✓</a:t>
+                      </a:r>
+                    </a:p>
+                  </a:txBody>
+                  <a:tcPr marL="45000" marR="45000" marT="25000" marB="25000" anchor="ctr">
+                    <a:solidFill>
+                      <a:srgbClr val="F1F2F6"/>
+                    </a:solidFill>
+                  </a:tcPr>
+                </a:tc>
+                <a:tc>
+                  <a:txBody>
+                    <a:bodyPr/>
+                    <a:lstStyle/>
+                    <a:p>
+                      <a:r>
+                        <a:rPr sz="1100" b="0">
+                          <a:solidFill>
+                            <a:srgbClr val="465461"/>
+                          </a:solidFill>
+                          <a:latin typeface="Arial"/>
+                        </a:rPr>
+                        <a:t>✓</a:t>
+                      </a:r>
+                    </a:p>
+                  </a:txBody>
+                  <a:tcPr marL="45000" marR="45000" marT="25000" marB="25000" anchor="ctr">
+                    <a:solidFill>
+                      <a:srgbClr val="F1F2F6"/>
+                    </a:solidFill>
+                  </a:tcPr>
+                </a:tc>
+                <a:tc>
+                  <a:txBody>
+                    <a:bodyPr/>
+                    <a:lstStyle/>
+                    <a:p>
+                      <a:r>
+                        <a:rPr sz="1100" b="0">
+                          <a:solidFill>
+                            <a:srgbClr val="465461"/>
+                          </a:solidFill>
+                          <a:latin typeface="Arial"/>
+                        </a:rPr>
+                        <a:t>✓</a:t>
+                      </a:r>
+                    </a:p>
+                  </a:txBody>
+                  <a:tcPr marL="45000" marR="45000" marT="25000" marB="25000" anchor="ctr">
+                    <a:solidFill>
+                      <a:srgbClr val="F1F2F6"/>
+                    </a:solidFill>
+                  </a:tcPr>
+                </a:tc>
+                <a:tc>
+                  <a:txBody>
+                    <a:bodyPr/>
+                    <a:lstStyle/>
+                    <a:p>
+                      <a:r>
+                        <a:rPr sz="1100" b="0">
+                          <a:solidFill>
+                            <a:srgbClr val="465461"/>
+                          </a:solidFill>
+                          <a:latin typeface="Arial"/>
+                        </a:rPr>
+                        <a:t>✓</a:t>
+                      </a:r>
+                    </a:p>
+                  </a:txBody>
+                  <a:tcPr marL="45000" marR="45000" marT="25000" marB="25000" anchor="ctr">
+                    <a:solidFill>
+                      <a:srgbClr val="F1F2F6"/>
+                    </a:solidFill>
+                  </a:tcPr>
+                </a:tc>
+              </a:tr>
+            </a:tbl>
+          </a:graphicData>
+        </a:graphic>
+      </p:graphicFrame>
     </p:spTree>
   </p:cSld>
   <p:clrMapOvr>

--- a/HackingForums/csbc26_caso_hackingforums.pptx
+++ b/HackingForums/csbc26_caso_hackingforums.pptx
@@ -29,6 +29,8 @@
     <p:sldId id="274" r:id="rId29"/>
     <p:sldId id="275" r:id="rId30"/>
     <p:sldId id="276" r:id="rId31"/>
+    <p:sldId id="277" r:id="rId32"/>
+    <p:sldId id="278" r:id="rId33"/>
   </p:sldIdLst>
   <p:sldSz cx="12192000" cy="6858000"/>
   <p:notesSz cx="6858000" cy="9144000"/>
@@ -982,27 +984,22 @@
           <a:lstStyle/>
           <a:p>
             <a:r>
-              <a:t>Trade-off clásico: precisión vs. cobertura</a:t>
-            </a:r>
-          </a:p>
-          <a:p>
-            <a:r>
-              <a:t>Exacto: conservador, casi sin falsos positivos</a:t>
-            </a:r>
-          </a:p>
-          <a:p>
-            <a:r>
-              <a:t>Fuzzy (rapidfuzz 85%): user_v2, user123, más ruido</a:t>
-            </a:r>
-          </a:p>
-          <a:p>
-            <a:r>
-              <a:t>Enriquecido con similitud coseno de embeddings</a:t>
-            </a:r>
-          </a:p>
-          <a:p>
-            <a:r>
-              <a:t>Pregunta al público: ¿y si el handle cambia del todo?</a:t>
+              <a:t>4 snapshots de la misma comunidad, no 4 foros distintos comparados una vez</a:t>
+            </a:r>
+          </a:p>
+          <a:p>
+            <a:r>
+              <a:t>Permite ver evolución de una identidad tras cada brecha, no una foto fija</a:t>
+            </a:r>
+          </a:p>
+          <a:p>
+            <a:r>
+              <a:t>111,621 persisten, 1,332 desaparecen, 418,253 son nuevos entre 2019 y 2022</a:t>
+            </a:r>
+          </a:p>
+          <a:p>
+            <a:r>
+              <a:t>La comunidad no se renueva tras una brecha — el actor que ya estaba, se queda</a:t>
             </a:r>
           </a:p>
         </p:txBody>
@@ -1072,27 +1069,27 @@
           <a:lstStyle/>
           <a:p>
             <a:r>
-              <a:t>Bug clásico de series temporales: gráfica arranca en 1970</a:t>
-            </a:r>
-          </a:p>
-          <a:p>
-            <a:r>
-              <a:t>Causa: dateline=0 → pandas lo lee como epoch Unix</a:t>
-            </a:r>
-          </a:p>
-          <a:p>
-            <a:r>
-              <a:t>Fix notebook 01: filtrar año &lt; 2000</a:t>
-            </a:r>
-          </a:p>
-          <a:p>
-            <a:r>
-              <a:t>Poco % de registros, pero distorsiona todo el gráfico</a:t>
-            </a:r>
-          </a:p>
-          <a:p>
-            <a:r>
-              <a:t>Regla general: validar siempre rango de fechas</a:t>
+              <a:t>Trade-off clásico de cualquier pivoting real de threat intel: precisión vs. cobertura</a:t>
+            </a:r>
+          </a:p>
+          <a:p>
+            <a:r>
+              <a:t>Exacto: 100% preciso si coincide, pero pierde a quien cambió una letra (cobertura baja)</a:t>
+            </a:r>
+          </a:p>
+          <a:p>
+            <a:r>
+              <a:t>Fuzzy (rapidfuzz 85%): sube cobertura (user_v2, user123) a costa de precisión</a:t>
+            </a:r>
+          </a:p>
+          <a:p>
+            <a:r>
+              <a:t>Ni uno solo basta — son insumos del score combinado, junto a embeddings y Burrows' Delta</a:t>
+            </a:r>
+          </a:p>
+          <a:p>
+            <a:r>
+              <a:t>Pregunta al público: ¿y si el handle cambia del todo?</a:t>
             </a:r>
           </a:p>
         </p:txBody>
@@ -1162,17 +1159,12 @@
           <a:lstStyle/>
           <a:p>
             <a:r>
-              <a:t>Base: red + pivoting de handles</a:t>
-            </a:r>
-          </a:p>
-          <a:p>
-            <a:r>
-              <a:t>Ahora suma: NER especializado, embeddings cross-foro</a:t>
-            </a:r>
-          </a:p>
-          <a:p>
-            <a:r>
-              <a:t>→ sigue: score de atribución combinado</a:t>
+              <a:t>Ya vimos este patrón de limpieza en CardingForums — no lo repetimos</a:t>
+            </a:r>
+          </a:p>
+          <a:p>
+            <a:r>
+              <a:t>Foco de este caso: identidad y persistencia temporal, no ingeniería de datos</a:t>
             </a:r>
           </a:p>
         </p:txBody>
@@ -1242,27 +1234,17 @@
           <a:lstStyle/>
           <a:p>
             <a:r>
-              <a:t>PERSON/ORG no alcanzan → tipos propios: ALIAS, TOOL, MALWARE, CVE</a:t>
-            </a:r>
-          </a:p>
-          <a:p>
-            <a:r>
-              <a:t>Muestreo: top-50 usuarios × top-50 posts largos</a:t>
-            </a:r>
-          </a:p>
-          <a:p>
-            <a:r>
-              <a:t>Solo foros en inglés</a:t>
-            </a:r>
-          </a:p>
-          <a:p>
-            <a:r>
-              <a:t>Checkpoint cada 10 usuarios → reanudable si falla</a:t>
-            </a:r>
-          </a:p>
-          <a:p>
-            <a:r>
-              <a:t>Exploit.in fuera: qwen2.5 rinde peor en ruso</a:t>
+              <a:t>Base: red + pivoting de handles</a:t>
+            </a:r>
+          </a:p>
+          <a:p>
+            <a:r>
+              <a:t>Ahora suma: NER especializado, embeddings cross-foro</a:t>
+            </a:r>
+          </a:p>
+          <a:p>
+            <a:r>
+              <a:t>→ sigue: score de atribución combinado</a:t>
             </a:r>
           </a:p>
         </p:txBody>
@@ -1332,27 +1314,27 @@
           <a:lstStyle/>
           <a:p>
             <a:r>
-              <a:t>Objetivo: un vector por usuario, comparable entre foros</a:t>
-            </a:r>
-          </a:p>
-          <a:p>
-            <a:r>
-              <a:t>A: concatenar posts (50K chars) → 1 vector</a:t>
-            </a:r>
-          </a:p>
-          <a:p>
-            <a:r>
-              <a:t>C: top-50 posts largos → embeddings promediados</a:t>
-            </a:r>
-          </a:p>
-          <a:p>
-            <a:r>
-              <a:t>Spearman A vs C: valida si el muestreo funciona</a:t>
-            </a:r>
-          </a:p>
-          <a:p>
-            <a:r>
-              <a:t>qwen3-embedding (4096D) multilingüe → incluye ruso</a:t>
+              <a:t>PERSON/ORG no alcanzan → tipos propios: ALIAS, TOOL, MALWARE, CVE</a:t>
+            </a:r>
+          </a:p>
+          <a:p>
+            <a:r>
+              <a:t>Muestreo: top-50 usuarios × top-50 posts largos</a:t>
+            </a:r>
+          </a:p>
+          <a:p>
+            <a:r>
+              <a:t>Solo foros en inglés</a:t>
+            </a:r>
+          </a:p>
+          <a:p>
+            <a:r>
+              <a:t>Checkpoint cada 10 usuarios → reanudable si falla</a:t>
+            </a:r>
+          </a:p>
+          <a:p>
+            <a:r>
+              <a:t>Exploit.in fuera: qwen2.5 rinde peor en ruso</a:t>
             </a:r>
           </a:p>
         </p:txBody>
@@ -1422,27 +1404,27 @@
           <a:lstStyle/>
           <a:p>
             <a:r>
-              <a:t>Ninguna señal sola confirma identidad — cuidado al interpretar</a:t>
-            </a:r>
-          </a:p>
-          <a:p>
-            <a:r>
-              <a:t>Handle: fuerte pero trivial de eludir</a:t>
-            </a:r>
-          </a:p>
-          <a:p>
-            <a:r>
-              <a:t>Embeddings: captura estilo aunque cambie el handle</a:t>
-            </a:r>
-          </a:p>
-          <a:p>
-            <a:r>
-              <a:t>Burrows' Delta: palabras función, difícil de falsear</a:t>
-            </a:r>
-          </a:p>
-          <a:p>
-            <a:r>
-              <a:t>Score &gt;0.7 con ≥2 señales → candidato alta prioridad</a:t>
+              <a:t>Objetivo: un vector por usuario, comparable entre foros</a:t>
+            </a:r>
+          </a:p>
+          <a:p>
+            <a:r>
+              <a:t>A: concatenar posts (50K chars) → 1 vector</a:t>
+            </a:r>
+          </a:p>
+          <a:p>
+            <a:r>
+              <a:t>C: top-50 posts largos → embeddings promediados</a:t>
+            </a:r>
+          </a:p>
+          <a:p>
+            <a:r>
+              <a:t>Spearman A vs C: valida si el muestreo funciona</a:t>
+            </a:r>
+          </a:p>
+          <a:p>
+            <a:r>
+              <a:t>qwen3-embedding (4096D) multilingüe → incluye ruso</a:t>
             </a:r>
           </a:p>
         </p:txBody>
@@ -1512,22 +1494,22 @@
           <a:lstStyle/>
           <a:p>
             <a:r>
-              <a:t>Demo en vivo: notebook 03</a:t>
-            </a:r>
-          </a:p>
-          <a:p>
-            <a:r>
-              <a:t>Sección 3: handles exactos compartidos entre foros</a:t>
-            </a:r>
-          </a:p>
-          <a:p>
-            <a:r>
-              <a:t>Sección 3: fuzzy matching, handles similares</a:t>
-            </a:r>
-          </a:p>
-          <a:p>
-            <a:r>
-              <a:t>Sección 5: score combinado, ranking final</a:t>
+              <a:t>Estilometría: mide estilo, no contenido — palabras función (the, and, of)</a:t>
+            </a:r>
+          </a:p>
+          <a:p>
+            <a:r>
+              <a:t>Fórmula: promedio de diferencia de z-scores sobre palabras función</a:t>
+            </a:r>
+          </a:p>
+          <a:p>
+            <a:r>
+              <a:t>Resistente a cambio de tema/plataforma, a diferencia de TF-IDF o BERTopic</a:t>
+            </a:r>
+          </a:p>
+          <a:p>
+            <a:r>
+              <a:t>Heatmap ya precomputado sobre OGUsers — no se recalcula en vivo</a:t>
             </a:r>
           </a:p>
         </p:txBody>
@@ -1597,17 +1579,27 @@
           <a:lstStyle/>
           <a:p>
             <a:r>
-              <a:t>Cierre del caso</a:t>
-            </a:r>
-          </a:p>
-          <a:p>
-            <a:r>
-              <a:t>Aprendizajes técnicos y metodológicos</a:t>
-            </a:r>
-          </a:p>
-          <a:p>
-            <a:r>
-              <a:t>Aplicables a cualquier caso de leaks underground</a:t>
+              <a:t>Ninguna señal sola confirma identidad — cuidado al interpretar</a:t>
+            </a:r>
+          </a:p>
+          <a:p>
+            <a:r>
+              <a:t>Handle: fuerte pero trivial de eludir</a:t>
+            </a:r>
+          </a:p>
+          <a:p>
+            <a:r>
+              <a:t>Embeddings: captura estilo aunque cambie el handle</a:t>
+            </a:r>
+          </a:p>
+          <a:p>
+            <a:r>
+              <a:t>Burrows' Delta: palabras función, difícil de falsear</a:t>
+            </a:r>
+          </a:p>
+          <a:p>
+            <a:r>
+              <a:t>Score &gt;0.7 con ≥2 señales → candidato alta prioridad</a:t>
             </a:r>
           </a:p>
         </p:txBody>
@@ -1757,27 +1749,22 @@
           <a:lstStyle/>
           <a:p>
             <a:r>
-              <a:t>Izquierda: hallazgos técnicos del caso</a:t>
-            </a:r>
-          </a:p>
-          <a:p>
-            <a:r>
-              <a:t>Bug IPS 3.x, pipeline ruso, epoch-0, señal cross-foro</a:t>
-            </a:r>
-          </a:p>
-          <a:p>
-            <a:r>
-              <a:t>Derecha: aprendizajes generalizables a otros casos</a:t>
-            </a:r>
-          </a:p>
-          <a:p>
-            <a:r>
-              <a:t>Idioma antes de NLP, testear parsers, validar fechas</a:t>
-            </a:r>
-          </a:p>
-          <a:p>
-            <a:r>
-              <a:t>Idea central: convergencia de señales &gt; métrica aislada</a:t>
+              <a:t>Demo en vivo: notebook 03</a:t>
+            </a:r>
+          </a:p>
+          <a:p>
+            <a:r>
+              <a:t>Sección 7: similitud coseno sobre candidatos de pivoting</a:t>
+            </a:r>
+          </a:p>
+          <a:p>
+            <a:r>
+              <a:t>Sección 8: heatmap Burrows' Delta y score combinado</a:t>
+            </a:r>
+          </a:p>
+          <a:p>
+            <a:r>
+              <a:t>Revisar los top candidatos de atribución cross-foro</a:t>
             </a:r>
           </a:p>
         </p:txBody>
@@ -1847,6 +1834,176 @@
           <a:lstStyle/>
           <a:p>
             <a:r>
+              <a:t>Cierre del caso</a:t>
+            </a:r>
+          </a:p>
+          <a:p>
+            <a:r>
+              <a:t>Aprendizajes técnicos y metodológicos</a:t>
+            </a:r>
+          </a:p>
+          <a:p>
+            <a:r>
+              <a:t>Aplicables a cualquier caso de leaks underground</a:t>
+            </a:r>
+          </a:p>
+        </p:txBody>
+      </p:sp>
+      <p:sp>
+        <p:nvSpPr>
+          <p:cNvPr id="4" name="Slide Number Placeholder 3"/>
+          <p:cNvSpPr>
+            <a:spLocks noGrp="1"/>
+          </p:cNvSpPr>
+          <p:nvPr>
+            <p:ph type="sldNum" idx="5" sz="quarter"/>
+          </p:nvPr>
+        </p:nvSpPr>
+        <p:spPr/>
+      </p:sp>
+    </p:spTree>
+  </p:cSld>
+  <p:clrMapOvr>
+    <a:masterClrMapping/>
+  </p:clrMapOvr>
+</p:notes>
+</file>
+
+<file path=ppt/notesSlides/notesSlide22.xml><?xml version="1.0" encoding="utf-8"?>
+<p:notes xmlns:a="http://schemas.openxmlformats.org/drawingml/2006/main" xmlns:p="http://schemas.openxmlformats.org/presentationml/2006/main" xmlns:r="http://schemas.openxmlformats.org/officeDocument/2006/relationships">
+  <p:cSld>
+    <p:spTree>
+      <p:nvGrpSpPr>
+        <p:cNvPr id="1" name=""/>
+        <p:cNvGrpSpPr/>
+        <p:nvPr/>
+      </p:nvGrpSpPr>
+      <p:grpSpPr>
+        <a:xfrm>
+          <a:off x="0" y="0"/>
+          <a:ext cx="0" cy="0"/>
+          <a:chOff x="0" y="0"/>
+          <a:chExt cx="0" cy="0"/>
+        </a:xfrm>
+      </p:grpSpPr>
+      <p:sp>
+        <p:nvSpPr>
+          <p:cNvPr id="2" name="Slide Image Placeholder 1"/>
+          <p:cNvSpPr>
+            <a:spLocks noGrp="1"/>
+          </p:cNvSpPr>
+          <p:nvPr>
+            <p:ph type="sldImg" idx="2"/>
+          </p:nvPr>
+        </p:nvSpPr>
+        <p:spPr/>
+      </p:sp>
+      <p:sp>
+        <p:nvSpPr>
+          <p:cNvPr id="3" name="Notes Placeholder 2"/>
+          <p:cNvSpPr>
+            <a:spLocks noGrp="1"/>
+          </p:cNvSpPr>
+          <p:nvPr>
+            <p:ph type="body" idx="3" sz="quarter"/>
+          </p:nvPr>
+        </p:nvSpPr>
+        <p:spPr/>
+        <p:txBody>
+          <a:bodyPr/>
+          <a:lstStyle/>
+          <a:p>
+            <a:r>
+              <a:t>Izquierda: hallazgos técnicos del caso</a:t>
+            </a:r>
+          </a:p>
+          <a:p>
+            <a:r>
+              <a:t>Bug IPS 3.x, pipeline ruso, epoch-0, señal cross-foro</a:t>
+            </a:r>
+          </a:p>
+          <a:p>
+            <a:r>
+              <a:t>Derecha: aprendizajes generalizables a otros casos</a:t>
+            </a:r>
+          </a:p>
+          <a:p>
+            <a:r>
+              <a:t>Idioma antes de NLP, testear parsers, validar fechas</a:t>
+            </a:r>
+          </a:p>
+          <a:p>
+            <a:r>
+              <a:t>Idea central: convergencia de señales &gt; métrica aislada</a:t>
+            </a:r>
+          </a:p>
+        </p:txBody>
+      </p:sp>
+      <p:sp>
+        <p:nvSpPr>
+          <p:cNvPr id="4" name="Slide Number Placeholder 3"/>
+          <p:cNvSpPr>
+            <a:spLocks noGrp="1"/>
+          </p:cNvSpPr>
+          <p:nvPr>
+            <p:ph type="sldNum" idx="5" sz="quarter"/>
+          </p:nvPr>
+        </p:nvSpPr>
+        <p:spPr/>
+      </p:sp>
+    </p:spTree>
+  </p:cSld>
+  <p:clrMapOvr>
+    <a:masterClrMapping/>
+  </p:clrMapOvr>
+</p:notes>
+</file>
+
+<file path=ppt/notesSlides/notesSlide23.xml><?xml version="1.0" encoding="utf-8"?>
+<p:notes xmlns:a="http://schemas.openxmlformats.org/drawingml/2006/main" xmlns:p="http://schemas.openxmlformats.org/presentationml/2006/main" xmlns:r="http://schemas.openxmlformats.org/officeDocument/2006/relationships">
+  <p:cSld>
+    <p:spTree>
+      <p:nvGrpSpPr>
+        <p:cNvPr id="1" name=""/>
+        <p:cNvGrpSpPr/>
+        <p:nvPr/>
+      </p:nvGrpSpPr>
+      <p:grpSpPr>
+        <a:xfrm>
+          <a:off x="0" y="0"/>
+          <a:ext cx="0" cy="0"/>
+          <a:chOff x="0" y="0"/>
+          <a:chExt cx="0" cy="0"/>
+        </a:xfrm>
+      </p:grpSpPr>
+      <p:sp>
+        <p:nvSpPr>
+          <p:cNvPr id="2" name="Slide Image Placeholder 1"/>
+          <p:cNvSpPr>
+            <a:spLocks noGrp="1"/>
+          </p:cNvSpPr>
+          <p:nvPr>
+            <p:ph type="sldImg" idx="2"/>
+          </p:nvPr>
+        </p:nvSpPr>
+        <p:spPr/>
+      </p:sp>
+      <p:sp>
+        <p:nvSpPr>
+          <p:cNvPr id="3" name="Notes Placeholder 2"/>
+          <p:cNvSpPr>
+            <a:spLocks noGrp="1"/>
+          </p:cNvSpPr>
+          <p:nvPr>
+            <p:ph type="body" idx="3" sz="quarter"/>
+          </p:nvPr>
+        </p:nvSpPr>
+        <p:spPr/>
+        <p:txBody>
+          <a:bodyPr/>
+          <a:lstStyle/>
+          <a:p>
+            <a:r>
               <a:t>Idea central: foros no son silos, usuarios migran</a:t>
             </a:r>
           </a:p>
@@ -2197,27 +2354,17 @@
           <a:lstStyle/>
           <a:p>
             <a:r>
-              <a:t>OGUsers 4.9M vs. Exploit.in 80K posts → ×60</a:t>
-            </a:r>
-          </a:p>
-          <a:p>
-            <a:r>
-              <a:t>Afecta robustez estadística por foro</a:t>
-            </a:r>
-          </a:p>
-          <a:p>
-            <a:r>
-              <a:t>3 épocas: 2013, 2019, 2021 → evolución del ecosistema</a:t>
-            </a:r>
-          </a:p>
-          <a:p>
-            <a:r>
-              <a:t>Posts más cortos/técnicos que foros ideológicos</a:t>
-            </a:r>
-          </a:p>
-          <a:p>
-            <a:r>
-              <a:t>Especialización: acceso / técnica / filtraciones</a:t>
+              <a:t>Foto rápida de tamaño: OGUsers 4.9M vs. Exploit.in 80K posts → ×60</a:t>
+            </a:r>
+          </a:p>
+          <a:p>
+            <a:r>
+              <a:t>3 épocas distintas: 2013, 2019, 2021</a:t>
+            </a:r>
+          </a:p>
+          <a:p>
+            <a:r>
+              <a:t>No profundizamos más — el foco del caso es identidad y tiempo</a:t>
             </a:r>
           </a:p>
         </p:txBody>
@@ -2287,27 +2434,27 @@
           <a:lstStyle/>
           <a:p>
             <a:r>
-              <a:t>Detección de idioma: paso obligatorio, no opcional</a:t>
-            </a:r>
-          </a:p>
-          <a:p>
-            <a:r>
-              <a:t>Método: langdetect, 500 posts/foro, 2000 chars</a:t>
-            </a:r>
-          </a:p>
-          <a:p>
-            <a:r>
-              <a:t>4 foros &gt;85% inglés → pipeline estándar</a:t>
-            </a:r>
-          </a:p>
-          <a:p>
-            <a:r>
-              <a:t>Exploit.in ~80% ruso → pipeline separado</a:t>
-            </a:r>
-          </a:p>
-          <a:p>
-            <a:r>
-              <a:t>Única pieza común: embedding qwen3 (multilingüe)</a:t>
+              <a:t>Esta es LA referencia del taller para esta técnica — los otros casos solo la mencionan de pasada</a:t>
+            </a:r>
+          </a:p>
+          <a:p>
+            <a:r>
+              <a:t>Método: langdetect, muestreo de 500 posts/foro, truncado a 2000 chars</a:t>
+            </a:r>
+          </a:p>
+          <a:p>
+            <a:r>
+              <a:t>La decisión se toma por foro completo, no post a post</a:t>
+            </a:r>
+          </a:p>
+          <a:p>
+            <a:r>
+              <a:t>4 foros &gt;85% inglés → pipeline estándar; Exploit.in ~80% ruso → pipeline separado</a:t>
+            </a:r>
+          </a:p>
+          <a:p>
+            <a:r>
+              <a:t>Matiz importante: bg/mk se confunden con ru en langdetect por cercanía lingüística</a:t>
             </a:r>
           </a:p>
         </p:txBody>
@@ -2462,7 +2609,7 @@
           </a:p>
           <a:p>
             <a:r>
-              <a:t>Fijarse en sección 5: distribución de idioma</a:t>
+              <a:t>Fijarse en la distribución de idioma por foro</a:t>
             </a:r>
           </a:p>
           <a:p>
@@ -6153,7 +6300,7 @@
           <a:p>
             <a:pPr algn="ctr"/>
             <a:r>
-              <a:rPr sz="1300" b="1">
+              <a:rPr sz="1700" b="1">
                 <a:solidFill>
                   <a:srgbClr val="CD2D37"/>
                 </a:solidFill>
@@ -6233,8 +6380,8 @@
         </p:nvSpPr>
         <p:spPr>
           <a:xfrm>
-            <a:off x="1073427" y="2580496"/>
-            <a:ext cx="10084904" cy="3004378"/>
+            <a:off x="1073427" y="2717656"/>
+            <a:ext cx="10084904" cy="2867218"/>
           </a:xfrm>
         </p:spPr>
         <p:txBody>
@@ -6301,7 +6448,7 @@
           <a:lstStyle/>
           <a:p>
             <a:r>
-              <a:t>Pivoting de handles — dos niveles de señal</a:t>
+              <a:t>OGUsers a través de 4 brechas — por qué no una sola foto</a:t>
             </a:r>
           </a:p>
         </p:txBody>
@@ -6315,214 +6462,39 @@
           <p:nvPr>
             <p:ph type="body" idx="16" sz="quarter"/>
           </p:nvPr>
-        </p:nvSpPr>
-        <p:spPr/>
-        <p:txBody>
-          <a:bodyPr/>
-          <a:lstStyle/>
-          <a:p/>
-        </p:txBody>
-      </p:sp>
-      <p:sp>
-        <p:nvSpPr>
-          <p:cNvPr id="4" name="TextBox 3"/>
-          <p:cNvSpPr txBox="1"/>
-          <p:nvPr/>
         </p:nvSpPr>
         <p:spPr>
           <a:xfrm>
-            <a:off x="1051560" y="2194560"/>
-            <a:ext cx="4846320" cy="411480"/>
+            <a:off x="1073427" y="2717656"/>
+            <a:ext cx="10084904" cy="2867218"/>
           </a:xfrm>
-          <a:prstGeom prst="rect">
-            <a:avLst/>
-          </a:prstGeom>
-          <a:noFill/>
         </p:spPr>
         <p:txBody>
-          <a:bodyPr wrap="square">
-            <a:spAutoFit/>
-          </a:bodyPr>
+          <a:bodyPr wrap="square"/>
           <a:lstStyle/>
           <a:p>
-            <a:pPr algn="l"/>
-            <a:r>
-              <a:rPr sz="1600" b="1">
-                <a:solidFill>
-                  <a:srgbClr val="CD2D37"/>
-                </a:solidFill>
-                <a:latin typeface="Arial"/>
-              </a:rPr>
-              <a:t>Matching exacto (alta precisión)</a:t>
-            </a:r>
-          </a:p>
-        </p:txBody>
-      </p:sp>
-      <p:sp>
-        <p:nvSpPr>
-          <p:cNvPr id="5" name="TextBox 4"/>
-          <p:cNvSpPr txBox="1"/>
-          <p:nvPr/>
-        </p:nvSpPr>
-        <p:spPr>
-          <a:xfrm>
-            <a:off x="1051560" y="2651760"/>
-            <a:ext cx="4846320" cy="3337560"/>
-          </a:xfrm>
-          <a:prstGeom prst="rect">
-            <a:avLst/>
-          </a:prstGeom>
-          <a:noFill/>
-        </p:spPr>
-        <p:txBody>
-          <a:bodyPr wrap="square">
-            <a:spAutoFit/>
-          </a:bodyPr>
-          <a:lstStyle/>
-          <a:p>
-            <a:r>
-              <a:rPr sz="1600">
-                <a:solidFill>
-                  <a:srgbClr val="465461"/>
-                </a:solidFill>
-                <a:latin typeface="Arial"/>
-              </a:rPr>
-              <a:t>▸  Normalización: lowercase + strip</a:t>
-            </a:r>
-          </a:p>
-          <a:p>
-            <a:r>
-              <a:rPr sz="1600">
-                <a:solidFill>
-                  <a:srgbClr val="465461"/>
-                </a:solidFill>
-                <a:latin typeface="Arial"/>
-              </a:rPr>
-              <a:t>▸  Coincidencia case-insensitive entre los 5 foros</a:t>
-            </a:r>
-          </a:p>
-          <a:p>
-            <a:r>
-              <a:rPr sz="1600">
-                <a:solidFill>
-                  <a:srgbClr val="465461"/>
-                </a:solidFill>
-                <a:latin typeface="Arial"/>
-              </a:rPr>
-              <a:t>▸  Resultado: handles en ≥2 foros → candidatos a misma persona</a:t>
-            </a:r>
-          </a:p>
-          <a:p>
-            <a:r>
-              <a:rPr sz="1600">
-                <a:solidFill>
-                  <a:srgbClr val="465461"/>
-                </a:solidFill>
-                <a:latin typeface="Arial"/>
-              </a:rPr>
-              <a:t>▸  Conservador pero sin falsos positivos</a:t>
-            </a:r>
-          </a:p>
-        </p:txBody>
-      </p:sp>
-      <p:sp>
-        <p:nvSpPr>
-          <p:cNvPr id="6" name="TextBox 5"/>
-          <p:cNvSpPr txBox="1"/>
-          <p:nvPr/>
-        </p:nvSpPr>
-        <p:spPr>
-          <a:xfrm>
-            <a:off x="6217920" y="2194560"/>
-            <a:ext cx="4846320" cy="411480"/>
-          </a:xfrm>
-          <a:prstGeom prst="rect">
-            <a:avLst/>
-          </a:prstGeom>
-          <a:noFill/>
-        </p:spPr>
-        <p:txBody>
-          <a:bodyPr wrap="square">
-            <a:spAutoFit/>
-          </a:bodyPr>
-          <a:lstStyle/>
-          <a:p>
-            <a:pPr algn="l"/>
-            <a:r>
-              <a:rPr sz="1600" b="1">
-                <a:solidFill>
-                  <a:srgbClr val="CD2D37"/>
-                </a:solidFill>
-                <a:latin typeface="Arial"/>
-              </a:rPr>
-              <a:t>Fuzzy matching (mayor cobertura)</a:t>
-            </a:r>
-          </a:p>
-        </p:txBody>
-      </p:sp>
-      <p:sp>
-        <p:nvSpPr>
-          <p:cNvPr id="7" name="TextBox 6"/>
-          <p:cNvSpPr txBox="1"/>
-          <p:nvPr/>
-        </p:nvSpPr>
-        <p:spPr>
-          <a:xfrm>
-            <a:off x="6217920" y="2651760"/>
-            <a:ext cx="4846320" cy="3337560"/>
-          </a:xfrm>
-          <a:prstGeom prst="rect">
-            <a:avLst/>
-          </a:prstGeom>
-          <a:noFill/>
-        </p:spPr>
-        <p:txBody>
-          <a:bodyPr wrap="square">
-            <a:spAutoFit/>
-          </a:bodyPr>
-          <a:lstStyle/>
-          <a:p>
-            <a:r>
-              <a:rPr sz="1600">
-                <a:solidFill>
-                  <a:srgbClr val="465461"/>
-                </a:solidFill>
-                <a:latin typeface="Arial"/>
-              </a:rPr>
-              <a:t>▸  rapidfuzz con threshold ≥85%</a:t>
-            </a:r>
-          </a:p>
-          <a:p>
-            <a:r>
-              <a:rPr sz="1600">
-                <a:solidFill>
-                  <a:srgbClr val="465461"/>
-                </a:solidFill>
-                <a:latin typeface="Arial"/>
-              </a:rPr>
-              <a:t>▸  Captura variaciones: user_v2, user_, user123</a:t>
-            </a:r>
-          </a:p>
-          <a:p>
-            <a:r>
-              <a:rPr sz="1600">
-                <a:solidFill>
-                  <a:srgbClr val="465461"/>
-                </a:solidFill>
-                <a:latin typeface="Arial"/>
-              </a:rPr>
-              <a:t>▸  Enriquecido con similitud coseno de embeddings</a:t>
-            </a:r>
-          </a:p>
-          <a:p>
-            <a:r>
-              <a:rPr sz="1600">
-                <a:solidFill>
-                  <a:srgbClr val="465461"/>
-                </a:solidFill>
-                <a:latin typeface="Arial"/>
-              </a:rPr>
-              <a:t>▸  Más ruido, pero detecta cambios deliberados de handle</a:t>
+            <a:r>
+              <a:t>OGUsers fue filtrado 4 veces: 2019, 2020, 2021, 2022 — misma comunidad, 4 momentos distintos</a:t>
+            </a:r>
+          </a:p>
+          <a:p>
+            <a:r>
+              <a:t>Comparar dos foros distintos una vez dice si dos comunidades se parecen</a:t>
+            </a:r>
+          </a:p>
+          <a:p>
+            <a:r>
+              <a:t>Comparar la misma comunidad en 4 snapshots dice cómo evoluciona una identidad tras cada brecha</a:t>
+            </a:r>
+          </a:p>
+          <a:p>
+            <a:r>
+              <a:t>Hallazgo: de ~111,621 handles de 2019, prácticamente todos siguen en 2022 (solo 1,332 desaparecen)</a:t>
+            </a:r>
+          </a:p>
+          <a:p>
+            <a:r>
+              <a:t>El crecimiento (418,253 cuentas) es casi todo usuarios nuevos, no reemplazo de los viejos</a:t>
             </a:r>
           </a:p>
         </p:txBody>
@@ -6561,7 +6533,7 @@
           <a:lstStyle/>
           <a:p>
             <a:r>
-              <a:t>Limpieza — el filtro epoch-0</a:t>
+              <a:t>Pivoting de handles — dos niveles de señal</a:t>
             </a:r>
           </a:p>
         </p:txBody>
@@ -6575,39 +6547,286 @@
           <p:nvPr>
             <p:ph type="body" idx="16" sz="quarter"/>
           </p:nvPr>
+        </p:nvSpPr>
+        <p:spPr/>
+        <p:txBody>
+          <a:bodyPr/>
+          <a:lstStyle/>
+          <a:p/>
+        </p:txBody>
+      </p:sp>
+      <p:sp>
+        <p:nvSpPr>
+          <p:cNvPr id="4" name="TextBox 3"/>
+          <p:cNvSpPr txBox="1"/>
+          <p:nvPr/>
         </p:nvSpPr>
         <p:spPr>
           <a:xfrm>
-            <a:off x="1073427" y="2077576"/>
-            <a:ext cx="10084904" cy="3507298"/>
+            <a:off x="1051560" y="2331720"/>
+            <a:ext cx="4846320" cy="411480"/>
           </a:xfrm>
+          <a:prstGeom prst="rect">
+            <a:avLst/>
+          </a:prstGeom>
+          <a:noFill/>
         </p:spPr>
         <p:txBody>
-          <a:bodyPr wrap="square"/>
+          <a:bodyPr wrap="square">
+            <a:spAutoFit/>
+          </a:bodyPr>
           <a:lstStyle/>
           <a:p>
-            <a:r>
-              <a:t>Problema: gráficas de actividad temporal arrancan en 1970</a:t>
-            </a:r>
-          </a:p>
-          <a:p>
-            <a:r>
-              <a:t>Causa: dateline = 0 (Unix timestamp nulo) → pd.to_datetime lo interpreta como 1970-01-01</a:t>
-            </a:r>
-          </a:p>
-          <a:p>
-            <a:r>
-              <a:t>Fix en notebook 01: filtrar posts con año &lt; 2000 antes de cualquier análisis temporal</a:t>
-            </a:r>
-          </a:p>
-          <a:p>
-            <a:r>
-              <a:t>Impacto real: solo afecta a un pequeño % de registros con timestamp corrupto</a:t>
-            </a:r>
-          </a:p>
-          <a:p>
-            <a:r>
-              <a:t>Regla general: validar siempre el rango de fechas antes de cualquier análisis temporal</a:t>
+            <a:pPr algn="l"/>
+            <a:r>
+              <a:rPr sz="1600" b="1">
+                <a:solidFill>
+                  <a:srgbClr val="CD2D37"/>
+                </a:solidFill>
+                <a:latin typeface="Arial"/>
+              </a:rPr>
+              <a:t>Matching exacto (alta precisión)</a:t>
+            </a:r>
+          </a:p>
+        </p:txBody>
+      </p:sp>
+      <p:sp>
+        <p:nvSpPr>
+          <p:cNvPr id="5" name="TextBox 4"/>
+          <p:cNvSpPr txBox="1"/>
+          <p:nvPr/>
+        </p:nvSpPr>
+        <p:spPr>
+          <a:xfrm>
+            <a:off x="1051560" y="2788920"/>
+            <a:ext cx="4846320" cy="3200400"/>
+          </a:xfrm>
+          <a:prstGeom prst="rect">
+            <a:avLst/>
+          </a:prstGeom>
+          <a:noFill/>
+        </p:spPr>
+        <p:txBody>
+          <a:bodyPr wrap="square">
+            <a:spAutoFit/>
+          </a:bodyPr>
+          <a:lstStyle/>
+          <a:p>
+            <a:r>
+              <a:rPr sz="1600">
+                <a:solidFill>
+                  <a:srgbClr val="CD2D37"/>
+                </a:solidFill>
+                <a:latin typeface="Arial"/>
+              </a:rPr>
+              <a:t>▸  </a:t>
+            </a:r>
+            <a:r>
+              <a:rPr sz="1600">
+                <a:solidFill>
+                  <a:srgbClr val="465461"/>
+                </a:solidFill>
+                <a:latin typeface="Arial"/>
+              </a:rPr>
+              <a:t>Normalización: lowercase + strip</a:t>
+            </a:r>
+          </a:p>
+          <a:p>
+            <a:r>
+              <a:rPr sz="1600">
+                <a:solidFill>
+                  <a:srgbClr val="CD2D37"/>
+                </a:solidFill>
+                <a:latin typeface="Arial"/>
+              </a:rPr>
+              <a:t>▸  </a:t>
+            </a:r>
+            <a:r>
+              <a:rPr sz="1600">
+                <a:solidFill>
+                  <a:srgbClr val="465461"/>
+                </a:solidFill>
+                <a:latin typeface="Arial"/>
+              </a:rPr>
+              <a:t>Coincidencia case-insensitive entre los 5 foros</a:t>
+            </a:r>
+          </a:p>
+          <a:p>
+            <a:r>
+              <a:rPr sz="1600">
+                <a:solidFill>
+                  <a:srgbClr val="CD2D37"/>
+                </a:solidFill>
+                <a:latin typeface="Arial"/>
+              </a:rPr>
+              <a:t>▸  </a:t>
+            </a:r>
+            <a:r>
+              <a:rPr sz="1600">
+                <a:solidFill>
+                  <a:srgbClr val="465461"/>
+                </a:solidFill>
+                <a:latin typeface="Arial"/>
+              </a:rPr>
+              <a:t>Resultado: handles en ≥2 foros → candidatos a misma persona</a:t>
+            </a:r>
+          </a:p>
+          <a:p>
+            <a:r>
+              <a:rPr sz="1600">
+                <a:solidFill>
+                  <a:srgbClr val="CD2D37"/>
+                </a:solidFill>
+                <a:latin typeface="Arial"/>
+              </a:rPr>
+              <a:t>▸  </a:t>
+            </a:r>
+            <a:r>
+              <a:rPr sz="1600">
+                <a:solidFill>
+                  <a:srgbClr val="465461"/>
+                </a:solidFill>
+                <a:latin typeface="Arial"/>
+              </a:rPr>
+              <a:t>Conservador pero sin falsos positivos</a:t>
+            </a:r>
+          </a:p>
+        </p:txBody>
+      </p:sp>
+      <p:sp>
+        <p:nvSpPr>
+          <p:cNvPr id="6" name="TextBox 5"/>
+          <p:cNvSpPr txBox="1"/>
+          <p:nvPr/>
+        </p:nvSpPr>
+        <p:spPr>
+          <a:xfrm>
+            <a:off x="6217920" y="2331720"/>
+            <a:ext cx="4846320" cy="411480"/>
+          </a:xfrm>
+          <a:prstGeom prst="rect">
+            <a:avLst/>
+          </a:prstGeom>
+          <a:noFill/>
+        </p:spPr>
+        <p:txBody>
+          <a:bodyPr wrap="square">
+            <a:spAutoFit/>
+          </a:bodyPr>
+          <a:lstStyle/>
+          <a:p>
+            <a:pPr algn="l"/>
+            <a:r>
+              <a:rPr sz="1600" b="1">
+                <a:solidFill>
+                  <a:srgbClr val="CD2D37"/>
+                </a:solidFill>
+                <a:latin typeface="Arial"/>
+              </a:rPr>
+              <a:t>Fuzzy matching (mayor cobertura)</a:t>
+            </a:r>
+          </a:p>
+        </p:txBody>
+      </p:sp>
+      <p:sp>
+        <p:nvSpPr>
+          <p:cNvPr id="7" name="TextBox 6"/>
+          <p:cNvSpPr txBox="1"/>
+          <p:nvPr/>
+        </p:nvSpPr>
+        <p:spPr>
+          <a:xfrm>
+            <a:off x="6217920" y="2788920"/>
+            <a:ext cx="4846320" cy="3200400"/>
+          </a:xfrm>
+          <a:prstGeom prst="rect">
+            <a:avLst/>
+          </a:prstGeom>
+          <a:noFill/>
+        </p:spPr>
+        <p:txBody>
+          <a:bodyPr wrap="square">
+            <a:spAutoFit/>
+          </a:bodyPr>
+          <a:lstStyle/>
+          <a:p>
+            <a:r>
+              <a:rPr sz="1600">
+                <a:solidFill>
+                  <a:srgbClr val="CD2D37"/>
+                </a:solidFill>
+                <a:latin typeface="Arial"/>
+              </a:rPr>
+              <a:t>▸  </a:t>
+            </a:r>
+            <a:r>
+              <a:rPr sz="1600">
+                <a:solidFill>
+                  <a:srgbClr val="465461"/>
+                </a:solidFill>
+                <a:latin typeface="Arial"/>
+              </a:rPr>
+              <a:t>rapidfuzz con threshold ≥85%</a:t>
+            </a:r>
+          </a:p>
+          <a:p>
+            <a:r>
+              <a:rPr sz="1600">
+                <a:solidFill>
+                  <a:srgbClr val="CD2D37"/>
+                </a:solidFill>
+                <a:latin typeface="Arial"/>
+              </a:rPr>
+              <a:t>▸  </a:t>
+            </a:r>
+            <a:r>
+              <a:rPr sz="1600">
+                <a:solidFill>
+                  <a:srgbClr val="465461"/>
+                </a:solidFill>
+                <a:latin typeface="Arial"/>
+              </a:rPr>
+              <a:t>Captura variaciones: user_v2, user_, user123</a:t>
+            </a:r>
+          </a:p>
+          <a:p>
+            <a:r>
+              <a:rPr sz="1600">
+                <a:solidFill>
+                  <a:srgbClr val="CD2D37"/>
+                </a:solidFill>
+                <a:latin typeface="Arial"/>
+              </a:rPr>
+              <a:t>▸  </a:t>
+            </a:r>
+            <a:r>
+              <a:rPr sz="1600">
+                <a:solidFill>
+                  <a:srgbClr val="465461"/>
+                </a:solidFill>
+                <a:latin typeface="Arial"/>
+              </a:rPr>
+              <a:t>Enriquecido con similitud coseno de embeddings</a:t>
+            </a:r>
+          </a:p>
+          <a:p>
+            <a:r>
+              <a:rPr sz="1600">
+                <a:solidFill>
+                  <a:srgbClr val="CD2D37"/>
+                </a:solidFill>
+                <a:latin typeface="Arial"/>
+              </a:rPr>
+              <a:t>▸  </a:t>
+            </a:r>
+            <a:r>
+              <a:rPr sz="1600">
+                <a:solidFill>
+                  <a:srgbClr val="465461"/>
+                </a:solidFill>
+                <a:latin typeface="Arial"/>
+              </a:rPr>
+              <a:t>Más ruido, pero detecta cambios deliberados de handle</a:t>
             </a:r>
           </a:p>
         </p:txBody>
@@ -6637,7 +6856,7 @@
             <a:spLocks noGrp="1"/>
           </p:cNvSpPr>
           <p:nvPr>
-            <p:ph type="body" idx="10" sz="quarter"/>
+            <p:ph type="body" idx="13" sz="quarter"/>
           </p:nvPr>
         </p:nvSpPr>
         <p:spPr/>
@@ -6645,33 +6864,39 @@
           <a:bodyPr wrap="square"/>
           <a:lstStyle/>
           <a:p>
-            <a:pPr algn="ctr"/>
-            <a:r>
-              <a:rPr sz="1300" b="1">
-                <a:solidFill>
-                  <a:srgbClr val="CD2D37"/>
-                </a:solidFill>
-                <a:latin typeface="Arial"/>
-              </a:rPr>
-              <a:t>SECCIÓN 4</a:t>
-            </a:r>
-          </a:p>
-          <a:p>
-            <a:pPr algn="ctr"/>
-            <a:r>
-              <a:t>LLM local y embeddings cross-foro</a:t>
-            </a:r>
-          </a:p>
-          <a:p>
-            <a:pPr algn="ctr"/>
-            <a:r>
-              <a:rPr sz="1600">
-                <a:solidFill>
-                  <a:srgbClr val="D6DAE2"/>
-                </a:solidFill>
-                <a:latin typeface="Arial"/>
-              </a:rPr>
-              <a:t>NER, BERTopic y perfilado multi-foro</a:t>
+            <a:r>
+              <a:t>Limpieza — el filtro epoch-0</a:t>
+            </a:r>
+          </a:p>
+        </p:txBody>
+      </p:sp>
+      <p:sp>
+        <p:nvSpPr>
+          <p:cNvPr id="3" name="Text Placeholder 2"/>
+          <p:cNvSpPr>
+            <a:spLocks noGrp="1"/>
+          </p:cNvSpPr>
+          <p:nvPr>
+            <p:ph type="body" idx="16" sz="quarter"/>
+          </p:nvPr>
+        </p:nvSpPr>
+        <p:spPr>
+          <a:xfrm>
+            <a:off x="1073427" y="2214736"/>
+            <a:ext cx="10084904" cy="3370138"/>
+          </a:xfrm>
+        </p:spPr>
+        <p:txBody>
+          <a:bodyPr wrap="square"/>
+          <a:lstStyle/>
+          <a:p>
+            <a:r>
+              <a:t>Mismo patrón de limpieza que ya vimos en CardingForums (texto vacío, duplicados, epoch-0, texto corto)</a:t>
+            </a:r>
+          </a:p>
+          <a:p>
+            <a:r>
+              <a:t>No lo repetimos en detalle — el foco de este caso es identidad y persistencia, no ingeniería de datos</a:t>
             </a:r>
           </a:p>
         </p:txBody>
@@ -6701,7 +6926,7 @@
             <a:spLocks noGrp="1"/>
           </p:cNvSpPr>
           <p:nvPr>
-            <p:ph type="body" idx="13" sz="quarter"/>
+            <p:ph type="body" idx="10" sz="quarter"/>
           </p:nvPr>
         </p:nvSpPr>
         <p:spPr/>
@@ -6709,54 +6934,33 @@
           <a:bodyPr wrap="square"/>
           <a:lstStyle/>
           <a:p>
-            <a:r>
-              <a:t>NER en dominio hacking — entidades especializadas</a:t>
-            </a:r>
-          </a:p>
-        </p:txBody>
-      </p:sp>
-      <p:sp>
-        <p:nvSpPr>
-          <p:cNvPr id="3" name="Text Placeholder 2"/>
-          <p:cNvSpPr>
-            <a:spLocks noGrp="1"/>
-          </p:cNvSpPr>
-          <p:nvPr>
-            <p:ph type="body" idx="16" sz="quarter"/>
-          </p:nvPr>
-        </p:nvSpPr>
-        <p:spPr>
-          <a:xfrm>
-            <a:off x="1073427" y="2077576"/>
-            <a:ext cx="10084904" cy="3507298"/>
-          </a:xfrm>
-        </p:spPr>
-        <p:txBody>
-          <a:bodyPr wrap="square"/>
-          <a:lstStyle/>
-          <a:p>
-            <a:r>
-              <a:t>Tipos estándar (PERSON, ORG) no son suficientes para el dominio underground</a:t>
-            </a:r>
-          </a:p>
-          <a:p>
-            <a:r>
-              <a:t>Tipos específicos definidos: ALIAS, TOOL, MALWARE, CVE, MARKETPLACE</a:t>
-            </a:r>
-          </a:p>
-          <a:p>
-            <a:r>
-              <a:t>Estrategia: top-50 usuarios × top-50 posts más largos (solo foros en inglés)</a:t>
-            </a:r>
-          </a:p>
-          <a:p>
-            <a:r>
-              <a:t>Checkpoint automático cada 10 usuarios → reanudable si falla el LLM</a:t>
-            </a:r>
-          </a:p>
-          <a:p>
-            <a:r>
-              <a:t>Exploit.in excluido: usar DeepPavlov/rubert o spacy ru_core_news_lg para ruso</a:t>
+            <a:pPr algn="ctr"/>
+            <a:r>
+              <a:rPr sz="1700" b="1">
+                <a:solidFill>
+                  <a:srgbClr val="CD2D37"/>
+                </a:solidFill>
+                <a:latin typeface="Arial"/>
+              </a:rPr>
+              <a:t>SECCIÓN 4</a:t>
+            </a:r>
+          </a:p>
+          <a:p>
+            <a:pPr algn="ctr"/>
+            <a:r>
+              <a:t>LLM local y embeddings cross-foro</a:t>
+            </a:r>
+          </a:p>
+          <a:p>
+            <a:pPr algn="ctr"/>
+            <a:r>
+              <a:rPr sz="1600">
+                <a:solidFill>
+                  <a:srgbClr val="D6DAE2"/>
+                </a:solidFill>
+                <a:latin typeface="Arial"/>
+              </a:rPr>
+              <a:t>NER, BERTopic y perfilado multi-foro</a:t>
             </a:r>
           </a:p>
         </p:txBody>
@@ -6795,7 +6999,7 @@
           <a:lstStyle/>
           <a:p>
             <a:r>
-              <a:t>Embeddings cross-foro — estrategia A vs C</a:t>
+              <a:t>NER en dominio hacking — entidades especializadas</a:t>
             </a:r>
           </a:p>
         </p:txBody>
@@ -6812,8 +7016,8 @@
         </p:nvSpPr>
         <p:spPr>
           <a:xfrm>
-            <a:off x="1073427" y="2077576"/>
-            <a:ext cx="10084904" cy="3507298"/>
+            <a:off x="1073427" y="2214736"/>
+            <a:ext cx="10084904" cy="3370138"/>
           </a:xfrm>
         </p:spPr>
         <p:txBody>
@@ -6821,32 +7025,27 @@
           <a:lstStyle/>
           <a:p>
             <a:r>
-              <a:t>Objetivo: representar a cada usuario con un vector para comparar entre foros</a:t>
-            </a:r>
-          </a:p>
-          <a:p>
-            <a:r>
-              <a:t>A — embed_users: concatenar todos los posts → 1 vector/usuario (50K chars máx)</a:t>
-            </a:r>
-          </a:p>
-          <a:p>
-            <a:r>
-              <a:t>C — centroids muestreados: top-50 posts más largos → 1 embedding/post, promedio</a:t>
-            </a:r>
-          </a:p>
-          <a:p>
-            <a:r>
-              <a:t>Comparación Spearman: ρ(A vs C) indica si ambas estrategias preservan la misma estructura</a:t>
-            </a:r>
-          </a:p>
-          <a:p>
-            <a:r>
-              <a:t>Con ~21K usuarios en A y ~11K en C, la comparativa valida la estrategia de muestreo</a:t>
-            </a:r>
-          </a:p>
-          <a:p>
-            <a:r>
-              <a:t>qwen3-embedding (4096D) es multilingual → válido para Exploit.in en ruso</a:t>
+              <a:t>Tipos estándar (PERSON, ORG) no son suficientes para el dominio underground</a:t>
+            </a:r>
+          </a:p>
+          <a:p>
+            <a:r>
+              <a:t>Tipos específicos definidos: ALIAS, TOOL, MALWARE, CVE, MARKETPLACE</a:t>
+            </a:r>
+          </a:p>
+          <a:p>
+            <a:r>
+              <a:t>Estrategia: top-50 usuarios × top-50 posts más largos (solo foros en inglés)</a:t>
+            </a:r>
+          </a:p>
+          <a:p>
+            <a:r>
+              <a:t>Checkpoint automático cada 10 usuarios → reanudable si falla el LLM</a:t>
+            </a:r>
+          </a:p>
+          <a:p>
+            <a:r>
+              <a:t>Exploit.in excluido: usar DeepPavlov/rubert o spacy ru_core_news_lg para ruso</a:t>
             </a:r>
           </a:p>
         </p:txBody>
@@ -6885,7 +7084,7 @@
           <a:lstStyle/>
           <a:p>
             <a:r>
-              <a:t>Señal combinada de atribución cross-foro</a:t>
+              <a:t>Embeddings cross-foro — estrategia A vs C</a:t>
             </a:r>
           </a:p>
         </p:txBody>
@@ -6902,8 +7101,8 @@
         </p:nvSpPr>
         <p:spPr>
           <a:xfrm>
-            <a:off x="1073427" y="2077576"/>
-            <a:ext cx="10084904" cy="3507298"/>
+            <a:off x="1073427" y="2214736"/>
+            <a:ext cx="10084904" cy="3370138"/>
           </a:xfrm>
         </p:spPr>
         <p:txBody>
@@ -6911,32 +7110,32 @@
           <a:lstStyle/>
           <a:p>
             <a:r>
-              <a:t>Ninguna señal sola es suficiente para afirmar que dos usuarios son la misma persona</a:t>
-            </a:r>
-          </a:p>
-          <a:p>
-            <a:r>
-              <a:t>Handle exacto o fuzzy: señal fuerte pero eludible (cambiar nombre es trivial)</a:t>
-            </a:r>
-          </a:p>
-          <a:p>
-            <a:r>
-              <a:t>Similitud coseno de embeddings: captura estilo aunque el handle cambie</a:t>
-            </a:r>
-          </a:p>
-          <a:p>
-            <a:r>
-              <a:t>Burrows' Delta cross-foro: misma distribución de palabras función → mismo autor</a:t>
-            </a:r>
-          </a:p>
-          <a:p>
-            <a:r>
-              <a:t>Combinación: score = (handle_sim + 1 - delta_norm + embedding_sim) / 3</a:t>
-            </a:r>
-          </a:p>
-          <a:p>
-            <a:r>
-              <a:t>Threshold práctico: score &gt; 0.7 con ≥2 señales → candidato de alta prioridad</a:t>
+              <a:t>Objetivo: representar a cada usuario con un vector para comparar entre foros</a:t>
+            </a:r>
+          </a:p>
+          <a:p>
+            <a:r>
+              <a:t>A — embed_users: concatenar todos los posts → 1 vector/usuario (50K chars máx)</a:t>
+            </a:r>
+          </a:p>
+          <a:p>
+            <a:r>
+              <a:t>C — centroids muestreados: top-50 posts más largos → 1 embedding/post, promedio</a:t>
+            </a:r>
+          </a:p>
+          <a:p>
+            <a:r>
+              <a:t>Comparación Spearman: ρ(A vs C) indica si ambas estrategias preservan la misma estructura</a:t>
+            </a:r>
+          </a:p>
+          <a:p>
+            <a:r>
+              <a:t>Con ~21K usuarios en A y ~11K en C, la comparativa valida la estrategia de muestreo</a:t>
+            </a:r>
+          </a:p>
+          <a:p>
+            <a:r>
+              <a:t>qwen3-embedding (4096D) es multilingual → válido para Exploit.in en ruso</a:t>
             </a:r>
           </a:p>
         </p:txBody>
@@ -6966,7 +7165,7 @@
             <a:spLocks noGrp="1"/>
           </p:cNvSpPr>
           <p:nvPr>
-            <p:ph type="body" idx="10" sz="quarter"/>
+            <p:ph type="body" idx="13" sz="quarter"/>
           </p:nvPr>
         </p:nvSpPr>
         <p:spPr/>
@@ -6974,100 +7173,54 @@
           <a:bodyPr wrap="square"/>
           <a:lstStyle/>
           <a:p>
-            <a:pPr algn="ctr"/>
-            <a:r>
-              <a:rPr sz="1300" b="1">
-                <a:solidFill>
-                  <a:srgbClr val="CD2D37"/>
-                </a:solidFill>
-                <a:latin typeface="Arial"/>
-              </a:rPr>
-              <a:t>DEMO EN VIVO</a:t>
-            </a:r>
-          </a:p>
-          <a:p>
-            <a:pPr algn="ctr"/>
-            <a:r>
-              <a:t>Demo — matching cross-foro</a:t>
-            </a:r>
-          </a:p>
-          <a:p>
-            <a:pPr algn="ctr"/>
-            <a:r>
-              <a:rPr sz="1400">
-                <a:solidFill>
-                  <a:srgbClr val="9AA3B5"/>
-                </a:solidFill>
-                <a:latin typeface="Arial"/>
-              </a:rPr>
-              <a:t>HackingForums/03_embeddings_profiling.ipynb</a:t>
-            </a:r>
-          </a:p>
-        </p:txBody>
-      </p:sp>
-      <p:sp>
-        <p:nvSpPr>
-          <p:cNvPr id="3" name="TextBox 2"/>
-          <p:cNvSpPr txBox="1"/>
-          <p:nvPr/>
+            <a:r>
+              <a:t>Burrows' Delta — por qué palabras función</a:t>
+            </a:r>
+          </a:p>
+        </p:txBody>
+      </p:sp>
+      <p:sp>
+        <p:nvSpPr>
+          <p:cNvPr id="3" name="Text Placeholder 2"/>
+          <p:cNvSpPr>
+            <a:spLocks noGrp="1"/>
+          </p:cNvSpPr>
+          <p:nvPr>
+            <p:ph type="body" idx="16" sz="quarter"/>
+          </p:nvPr>
         </p:nvSpPr>
         <p:spPr>
           <a:xfrm>
-            <a:off x="2505456" y="3657600"/>
-            <a:ext cx="7168896" cy="2560320"/>
+            <a:off x="1073427" y="2214736"/>
+            <a:ext cx="10084904" cy="3370138"/>
           </a:xfrm>
-          <a:prstGeom prst="rect">
-            <a:avLst/>
-          </a:prstGeom>
-          <a:noFill/>
         </p:spPr>
         <p:txBody>
-          <a:bodyPr wrap="square">
-            <a:spAutoFit/>
-          </a:bodyPr>
+          <a:bodyPr wrap="square"/>
           <a:lstStyle/>
           <a:p>
             <a:r>
-              <a:rPr sz="1600">
-                <a:solidFill>
-                  <a:srgbClr val="D6DAE2"/>
-                </a:solidFill>
-                <a:latin typeface="Arial"/>
-              </a:rPr>
-              <a:t>1.  Abrir notebook 03_embeddings_profiling</a:t>
-            </a:r>
-          </a:p>
-          <a:p>
-            <a:r>
-              <a:rPr sz="1600">
-                <a:solidFill>
-                  <a:srgbClr val="D6DAE2"/>
-                </a:solidFill>
-                <a:latin typeface="Arial"/>
-              </a:rPr>
-              <a:t>2.  Sección 3: tabla de handles exactos compartidos entre foros</a:t>
-            </a:r>
-          </a:p>
-          <a:p>
-            <a:r>
-              <a:rPr sz="1600">
-                <a:solidFill>
-                  <a:srgbClr val="D6DAE2"/>
-                </a:solidFill>
-                <a:latin typeface="Arial"/>
-              </a:rPr>
-              <a:t>3.  Sección 3: fuzzy matching — ver handles similares (no idénticos)</a:t>
-            </a:r>
-          </a:p>
-          <a:p>
-            <a:r>
-              <a:rPr sz="1600">
-                <a:solidFill>
-                  <a:srgbClr val="D6DAE2"/>
-                </a:solidFill>
-                <a:latin typeface="Arial"/>
-              </a:rPr>
-              <a:t>4.  Sección 5: score combinado → top candidatos a identidad compartida</a:t>
+              <a:t>Estilometría clásica: mide distancia de estilo con las palabras función más frecuentes</a:t>
+            </a:r>
+          </a:p>
+          <a:p>
+            <a:r>
+              <a:t>Palabras función (the, and, of...) — no vocabulario de contenido, que cambia con el tema</a:t>
+            </a:r>
+          </a:p>
+          <a:p>
+            <a:r>
+              <a:t>Δ(A,B) = promedio de |z-score(A) − z-score(B)| sobre esas palabras función</a:t>
+            </a:r>
+          </a:p>
+          <a:p>
+            <a:r>
+              <a:t>Resistente a que el autor cambie de tema o de plataforma — a diferencia de TF-IDF/BERTopic</a:t>
+            </a:r>
+          </a:p>
+          <a:p>
+            <a:r>
+              <a:t>Precomputado sobre OGUsers (sin recalcular): heatmap Delta entre los usuarios más activos</a:t>
             </a:r>
           </a:p>
         </p:txBody>
@@ -7097,7 +7250,7 @@
             <a:spLocks noGrp="1"/>
           </p:cNvSpPr>
           <p:nvPr>
-            <p:ph type="body" idx="10" sz="quarter"/>
+            <p:ph type="body" idx="13" sz="quarter"/>
           </p:nvPr>
         </p:nvSpPr>
         <p:spPr/>
@@ -7105,33 +7258,59 @@
           <a:bodyPr wrap="square"/>
           <a:lstStyle/>
           <a:p>
-            <a:pPr algn="ctr"/>
-            <a:r>
-              <a:rPr sz="1300" b="1">
-                <a:solidFill>
-                  <a:srgbClr val="CD2D37"/>
-                </a:solidFill>
-                <a:latin typeface="Arial"/>
-              </a:rPr>
-              <a:t>SECCIÓN 5</a:t>
-            </a:r>
-          </a:p>
-          <a:p>
-            <a:pPr algn="ctr"/>
-            <a:r>
-              <a:t>Conclusiones y aprendizajes</a:t>
-            </a:r>
-          </a:p>
-          <a:p>
-            <a:pPr algn="ctr"/>
-            <a:r>
-              <a:rPr sz="1600">
-                <a:solidFill>
-                  <a:srgbClr val="D6DAE2"/>
-                </a:solidFill>
-                <a:latin typeface="Arial"/>
-              </a:rPr>
-              <a:t>Qué nos enseña el caso HackingForums</a:t>
+            <a:r>
+              <a:t>Señal combinada de atribución cross-foro</a:t>
+            </a:r>
+          </a:p>
+        </p:txBody>
+      </p:sp>
+      <p:sp>
+        <p:nvSpPr>
+          <p:cNvPr id="3" name="Text Placeholder 2"/>
+          <p:cNvSpPr>
+            <a:spLocks noGrp="1"/>
+          </p:cNvSpPr>
+          <p:nvPr>
+            <p:ph type="body" idx="16" sz="quarter"/>
+          </p:nvPr>
+        </p:nvSpPr>
+        <p:spPr>
+          <a:xfrm>
+            <a:off x="1073427" y="2214736"/>
+            <a:ext cx="10084904" cy="3370138"/>
+          </a:xfrm>
+        </p:spPr>
+        <p:txBody>
+          <a:bodyPr wrap="square"/>
+          <a:lstStyle/>
+          <a:p>
+            <a:r>
+              <a:t>Ninguna señal sola basta para afirmar que dos usuarios son la misma persona</a:t>
+            </a:r>
+          </a:p>
+          <a:p>
+            <a:r>
+              <a:t>Handle exacto o fuzzy: señal fuerte pero eludible (cambiar nombre es trivial)</a:t>
+            </a:r>
+          </a:p>
+          <a:p>
+            <a:r>
+              <a:t>Similitud coseno de embeddings: captura estilo aunque el handle cambie</a:t>
+            </a:r>
+          </a:p>
+          <a:p>
+            <a:r>
+              <a:t>Burrows' Delta cross-foro: misma distribución de palabras función → mismo autor</a:t>
+            </a:r>
+          </a:p>
+          <a:p>
+            <a:r>
+              <a:t>Combinación: score = (handle_sim + 1 - delta_norm + embedding_sim) / 3</a:t>
+            </a:r>
+          </a:p>
+          <a:p>
+            <a:r>
+              <a:t>Threshold práctico: score &gt; 0.7 con ≥2 señales → candidato de alta prioridad</a:t>
             </a:r>
           </a:p>
         </p:txBody>
@@ -7171,7 +7350,7 @@
           <a:p>
             <a:pPr algn="ctr"/>
             <a:r>
-              <a:rPr sz="1300" b="1">
+              <a:rPr sz="1700" b="1">
                 <a:solidFill>
                   <a:srgbClr val="CD2D37"/>
                 </a:solidFill>
@@ -7225,7 +7404,7 @@
             <a:spLocks noGrp="1"/>
           </p:cNvSpPr>
           <p:nvPr>
-            <p:ph type="body" idx="13" sz="quarter"/>
+            <p:ph type="body" idx="10" sz="quarter"/>
           </p:nvPr>
         </p:nvSpPr>
         <p:spPr/>
@@ -7233,39 +7412,47 @@
           <a:bodyPr wrap="square"/>
           <a:lstStyle/>
           <a:p>
-            <a:r>
-              <a:t>Resumen ejecutivo</a:t>
-            </a:r>
-          </a:p>
-        </p:txBody>
-      </p:sp>
-      <p:sp>
-        <p:nvSpPr>
-          <p:cNvPr id="3" name="Text Placeholder 2"/>
-          <p:cNvSpPr>
-            <a:spLocks noGrp="1"/>
-          </p:cNvSpPr>
-          <p:nvPr>
-            <p:ph type="body" idx="16" sz="quarter"/>
-          </p:nvPr>
-        </p:nvSpPr>
-        <p:spPr/>
-        <p:txBody>
-          <a:bodyPr/>
-          <a:lstStyle/>
-          <a:p/>
-        </p:txBody>
-      </p:sp>
-      <p:sp>
-        <p:nvSpPr>
-          <p:cNvPr id="4" name="TextBox 3"/>
+            <a:pPr algn="ctr"/>
+            <a:r>
+              <a:rPr sz="1700" b="1">
+                <a:solidFill>
+                  <a:srgbClr val="CD2D37"/>
+                </a:solidFill>
+                <a:latin typeface="Arial"/>
+              </a:rPr>
+              <a:t>DEMO EN VIVO</a:t>
+            </a:r>
+          </a:p>
+          <a:p>
+            <a:pPr algn="ctr"/>
+            <a:r>
+              <a:t>Demo — matching cross-foro</a:t>
+            </a:r>
+          </a:p>
+          <a:p>
+            <a:pPr algn="ctr"/>
+            <a:r>
+              <a:rPr sz="1400">
+                <a:solidFill>
+                  <a:srgbClr val="9AA3B5"/>
+                </a:solidFill>
+                <a:latin typeface="Arial"/>
+              </a:rPr>
+              <a:t>HackingForums/03_analisis_semantico.ipynb</a:t>
+            </a:r>
+          </a:p>
+        </p:txBody>
+      </p:sp>
+      <p:sp>
+        <p:nvSpPr>
+          <p:cNvPr id="3" name="TextBox 2"/>
           <p:cNvSpPr txBox="1"/>
           <p:nvPr/>
         </p:nvSpPr>
         <p:spPr>
           <a:xfrm>
-            <a:off x="1051560" y="1691640"/>
-            <a:ext cx="4846320" cy="411480"/>
+            <a:off x="2505456" y="3657600"/>
+            <a:ext cx="7168896" cy="2560320"/>
           </a:xfrm>
           <a:prstGeom prst="rect">
             <a:avLst/>
@@ -7278,206 +7465,47 @@
           </a:bodyPr>
           <a:lstStyle/>
           <a:p>
-            <a:pPr algn="l"/>
-            <a:r>
-              <a:rPr sz="1600" b="1">
+            <a:r>
+              <a:rPr sz="1600">
                 <a:solidFill>
-                  <a:srgbClr val="CD2D37"/>
+                  <a:srgbClr val="D6DAE2"/>
                 </a:solidFill>
                 <a:latin typeface="Arial"/>
               </a:rPr>
-              <a:t>Hallazgos técnicos</a:t>
-            </a:r>
-          </a:p>
-        </p:txBody>
-      </p:sp>
-      <p:sp>
-        <p:nvSpPr>
-          <p:cNvPr id="5" name="TextBox 4"/>
-          <p:cNvSpPr txBox="1"/>
-          <p:nvPr/>
-        </p:nvSpPr>
-        <p:spPr>
-          <a:xfrm>
-            <a:off x="1051560" y="2148840"/>
-            <a:ext cx="4846320" cy="3840480"/>
-          </a:xfrm>
-          <a:prstGeom prst="rect">
-            <a:avLst/>
-          </a:prstGeom>
-          <a:noFill/>
-        </p:spPr>
-        <p:txBody>
-          <a:bodyPr wrap="square">
-            <a:spAutoFit/>
-          </a:bodyPr>
-          <a:lstStyle/>
+              <a:t>1.  Abrir notebook 03_analisis_semantico</a:t>
+            </a:r>
+          </a:p>
           <a:p>
             <a:r>
               <a:rPr sz="1600">
                 <a:solidFill>
-                  <a:srgbClr val="465461"/>
+                  <a:srgbClr val="D6DAE2"/>
                 </a:solidFill>
                 <a:latin typeface="Arial"/>
               </a:rPr>
-              <a:t>▸  Bug real: IPS 3.x sin prefijo → falso positivo MyBB (3.2M posts perdidos)</a:t>
+              <a:t>2.  Sección 7: similitud coseno cross-foro sobre los candidatos de pivoting</a:t>
             </a:r>
           </a:p>
           <a:p>
             <a:r>
               <a:rPr sz="1600">
                 <a:solidFill>
-                  <a:srgbClr val="465461"/>
+                  <a:srgbClr val="D6DAE2"/>
                 </a:solidFill>
                 <a:latin typeface="Arial"/>
               </a:rPr>
-              <a:t>▸  Idioma mixto: Exploit.in ruso requiere pipeline separado en cada capa</a:t>
+              <a:t>3.  Sección 8: heatmap de Burrows' Delta (OGUsers) y score combinado</a:t>
             </a:r>
           </a:p>
           <a:p>
             <a:r>
               <a:rPr sz="1600">
                 <a:solidFill>
-                  <a:srgbClr val="465461"/>
+                  <a:srgbClr val="D6DAE2"/>
                 </a:solidFill>
                 <a:latin typeface="Arial"/>
               </a:rPr>
-              <a:t>▸  Epoch-0: timestamps nulos distorsionan todo el análisis temporal</a:t>
-            </a:r>
-          </a:p>
-          <a:p>
-            <a:r>
-              <a:rPr sz="1600">
-                <a:solidFill>
-                  <a:srgbClr val="465461"/>
-                </a:solidFill>
-                <a:latin typeface="Arial"/>
-              </a:rPr>
-              <a:t>▸  Cross-foro: handles exactos + fuzzy + embeddings = señal robusta de identidad</a:t>
-            </a:r>
-          </a:p>
-          <a:p>
-            <a:r>
-              <a:rPr sz="1600">
-                <a:solidFill>
-                  <a:srgbClr val="465461"/>
-                </a:solidFill>
-                <a:latin typeface="Arial"/>
-              </a:rPr>
-              <a:t>▸  qwen3-embedding multilingual: un solo modelo para 5 foros en 2 idiomas</a:t>
-            </a:r>
-          </a:p>
-        </p:txBody>
-      </p:sp>
-      <p:sp>
-        <p:nvSpPr>
-          <p:cNvPr id="6" name="TextBox 5"/>
-          <p:cNvSpPr txBox="1"/>
-          <p:nvPr/>
-        </p:nvSpPr>
-        <p:spPr>
-          <a:xfrm>
-            <a:off x="6217920" y="1691640"/>
-            <a:ext cx="4846320" cy="411480"/>
-          </a:xfrm>
-          <a:prstGeom prst="rect">
-            <a:avLst/>
-          </a:prstGeom>
-          <a:noFill/>
-        </p:spPr>
-        <p:txBody>
-          <a:bodyPr wrap="square">
-            <a:spAutoFit/>
-          </a:bodyPr>
-          <a:lstStyle/>
-          <a:p>
-            <a:pPr algn="l"/>
-            <a:r>
-              <a:rPr sz="1600" b="1">
-                <a:solidFill>
-                  <a:srgbClr val="CD2D37"/>
-                </a:solidFill>
-                <a:latin typeface="Arial"/>
-              </a:rPr>
-              <a:t>Aprendizajes metodológicos</a:t>
-            </a:r>
-          </a:p>
-        </p:txBody>
-      </p:sp>
-      <p:sp>
-        <p:nvSpPr>
-          <p:cNvPr id="7" name="TextBox 6"/>
-          <p:cNvSpPr txBox="1"/>
-          <p:nvPr/>
-        </p:nvSpPr>
-        <p:spPr>
-          <a:xfrm>
-            <a:off x="6217920" y="2148840"/>
-            <a:ext cx="4846320" cy="3840480"/>
-          </a:xfrm>
-          <a:prstGeom prst="rect">
-            <a:avLst/>
-          </a:prstGeom>
-          <a:noFill/>
-        </p:spPr>
-        <p:txBody>
-          <a:bodyPr wrap="square">
-            <a:spAutoFit/>
-          </a:bodyPr>
-          <a:lstStyle/>
-          <a:p>
-            <a:r>
-              <a:rPr sz="1600">
-                <a:solidFill>
-                  <a:srgbClr val="465461"/>
-                </a:solidFill>
-                <a:latin typeface="Arial"/>
-              </a:rPr>
-              <a:t>▸  Detectar idioma ANTES de cualquier modelo NLP</a:t>
-            </a:r>
-          </a:p>
-          <a:p>
-            <a:r>
-              <a:rPr sz="1600">
-                <a:solidFill>
-                  <a:srgbClr val="465461"/>
-                </a:solidFill>
-                <a:latin typeface="Arial"/>
-              </a:rPr>
-              <a:t>▸  Testear parsers con dumps reales — los schemas reales divergen del estándar</a:t>
-            </a:r>
-          </a:p>
-          <a:p>
-            <a:r>
-              <a:rPr sz="1600">
-                <a:solidFill>
-                  <a:srgbClr val="465461"/>
-                </a:solidFill>
-                <a:latin typeface="Arial"/>
-              </a:rPr>
-              <a:t>▸  Validar rango de fechas antes de cualquier análisis temporal</a:t>
-            </a:r>
-          </a:p>
-          <a:p>
-            <a:r>
-              <a:rPr sz="1600">
-                <a:solidFill>
-                  <a:srgbClr val="465461"/>
-                </a:solidFill>
-                <a:latin typeface="Arial"/>
-              </a:rPr>
-              <a:t>▸  La convergencia de señales supera a cualquier métrica aislada</a:t>
-            </a:r>
-          </a:p>
-          <a:p>
-            <a:r>
-              <a:rPr sz="1600">
-                <a:solidFill>
-                  <a:srgbClr val="465461"/>
-                </a:solidFill>
-                <a:latin typeface="Arial"/>
-              </a:rPr>
-              <a:t>▸  El muestreo por longitud (top-N posts más largos) preserva señal estilométrica</a:t>
+              <a:t>4.  Observar los top candidatos a identidad compartida</a:t>
             </a:r>
           </a:p>
         </p:txBody>
@@ -7507,7 +7535,7 @@
             <a:spLocks noGrp="1"/>
           </p:cNvSpPr>
           <p:nvPr>
-            <p:ph type="body" idx="13" sz="quarter"/>
+            <p:ph type="body" idx="10" sz="quarter"/>
           </p:nvPr>
         </p:nvSpPr>
         <p:spPr/>
@@ -7515,8 +7543,72 @@
           <a:bodyPr wrap="square"/>
           <a:lstStyle/>
           <a:p>
-            <a:r>
-              <a:t>¿Por qué este caso importa?</a:t>
+            <a:pPr algn="ctr"/>
+            <a:r>
+              <a:rPr sz="1700" b="1">
+                <a:solidFill>
+                  <a:srgbClr val="CD2D37"/>
+                </a:solidFill>
+                <a:latin typeface="Arial"/>
+              </a:rPr>
+              <a:t>SECCIÓN 5</a:t>
+            </a:r>
+          </a:p>
+          <a:p>
+            <a:pPr algn="ctr"/>
+            <a:r>
+              <a:t>Conclusiones y aprendizajes</a:t>
+            </a:r>
+          </a:p>
+          <a:p>
+            <a:pPr algn="ctr"/>
+            <a:r>
+              <a:rPr sz="1600">
+                <a:solidFill>
+                  <a:srgbClr val="D6DAE2"/>
+                </a:solidFill>
+                <a:latin typeface="Arial"/>
+              </a:rPr>
+              <a:t>Qué nos enseña el caso HackingForums</a:t>
+            </a:r>
+          </a:p>
+        </p:txBody>
+      </p:sp>
+    </p:spTree>
+  </p:cSld>
+  <p:clrMapOvr>
+    <a:masterClrMapping/>
+  </p:clrMapOvr>
+</p:sld>
+</file>
+
+<file path=ppt/slides/slide22.xml><?xml version="1.0" encoding="utf-8"?>
+<p:sld xmlns:a="http://schemas.openxmlformats.org/drawingml/2006/main" xmlns:p="http://schemas.openxmlformats.org/presentationml/2006/main" xmlns:r="http://schemas.openxmlformats.org/officeDocument/2006/relationships">
+  <p:cSld>
+    <p:spTree>
+      <p:nvGrpSpPr>
+        <p:cNvPr id="1" name=""/>
+        <p:cNvGrpSpPr/>
+        <p:nvPr/>
+      </p:nvGrpSpPr>
+      <p:grpSpPr/>
+      <p:sp>
+        <p:nvSpPr>
+          <p:cNvPr id="2" name="Text Placeholder 1"/>
+          <p:cNvSpPr>
+            <a:spLocks noGrp="1"/>
+          </p:cNvSpPr>
+          <p:nvPr>
+            <p:ph type="body" idx="13" sz="quarter"/>
+          </p:nvPr>
+        </p:nvSpPr>
+        <p:spPr/>
+        <p:txBody>
+          <a:bodyPr wrap="square"/>
+          <a:lstStyle/>
+          <a:p>
+            <a:r>
+              <a:t>Resumen ejecutivo</a:t>
             </a:r>
           </a:p>
         </p:txBody>
@@ -7530,11 +7622,383 @@
           <p:nvPr>
             <p:ph type="body" idx="16" sz="quarter"/>
           </p:nvPr>
+        </p:nvSpPr>
+        <p:spPr/>
+        <p:txBody>
+          <a:bodyPr/>
+          <a:lstStyle/>
+          <a:p/>
+        </p:txBody>
+      </p:sp>
+      <p:sp>
+        <p:nvSpPr>
+          <p:cNvPr id="4" name="TextBox 3"/>
+          <p:cNvSpPr txBox="1"/>
+          <p:nvPr/>
         </p:nvSpPr>
         <p:spPr>
           <a:xfrm>
-            <a:off x="1073427" y="2077576"/>
-            <a:ext cx="10084904" cy="3507298"/>
+            <a:off x="1051560" y="1828800"/>
+            <a:ext cx="4846320" cy="411480"/>
+          </a:xfrm>
+          <a:prstGeom prst="rect">
+            <a:avLst/>
+          </a:prstGeom>
+          <a:noFill/>
+        </p:spPr>
+        <p:txBody>
+          <a:bodyPr wrap="square">
+            <a:spAutoFit/>
+          </a:bodyPr>
+          <a:lstStyle/>
+          <a:p>
+            <a:pPr algn="l"/>
+            <a:r>
+              <a:rPr sz="1600" b="1">
+                <a:solidFill>
+                  <a:srgbClr val="CD2D37"/>
+                </a:solidFill>
+                <a:latin typeface="Arial"/>
+              </a:rPr>
+              <a:t>Hallazgos técnicos</a:t>
+            </a:r>
+          </a:p>
+        </p:txBody>
+      </p:sp>
+      <p:sp>
+        <p:nvSpPr>
+          <p:cNvPr id="5" name="TextBox 4"/>
+          <p:cNvSpPr txBox="1"/>
+          <p:nvPr/>
+        </p:nvSpPr>
+        <p:spPr>
+          <a:xfrm>
+            <a:off x="1051560" y="2286000"/>
+            <a:ext cx="4846320" cy="3703320"/>
+          </a:xfrm>
+          <a:prstGeom prst="rect">
+            <a:avLst/>
+          </a:prstGeom>
+          <a:noFill/>
+        </p:spPr>
+        <p:txBody>
+          <a:bodyPr wrap="square">
+            <a:spAutoFit/>
+          </a:bodyPr>
+          <a:lstStyle/>
+          <a:p>
+            <a:r>
+              <a:rPr sz="1600">
+                <a:solidFill>
+                  <a:srgbClr val="CD2D37"/>
+                </a:solidFill>
+                <a:latin typeface="Arial"/>
+              </a:rPr>
+              <a:t>▸  </a:t>
+            </a:r>
+            <a:r>
+              <a:rPr sz="1600">
+                <a:solidFill>
+                  <a:srgbClr val="465461"/>
+                </a:solidFill>
+                <a:latin typeface="Arial"/>
+              </a:rPr>
+              <a:t>Bug real: IPS 3.x sin prefijo → falso positivo MyBB (3.2M posts perdidos)</a:t>
+            </a:r>
+          </a:p>
+          <a:p>
+            <a:r>
+              <a:rPr sz="1600">
+                <a:solidFill>
+                  <a:srgbClr val="CD2D37"/>
+                </a:solidFill>
+                <a:latin typeface="Arial"/>
+              </a:rPr>
+              <a:t>▸  </a:t>
+            </a:r>
+            <a:r>
+              <a:rPr sz="1600">
+                <a:solidFill>
+                  <a:srgbClr val="465461"/>
+                </a:solidFill>
+                <a:latin typeface="Arial"/>
+              </a:rPr>
+              <a:t>Idioma mixto: Exploit.in ruso requiere pipeline separado en cada capa</a:t>
+            </a:r>
+          </a:p>
+          <a:p>
+            <a:r>
+              <a:rPr sz="1600">
+                <a:solidFill>
+                  <a:srgbClr val="CD2D37"/>
+                </a:solidFill>
+                <a:latin typeface="Arial"/>
+              </a:rPr>
+              <a:t>▸  </a:t>
+            </a:r>
+            <a:r>
+              <a:rPr sz="1600">
+                <a:solidFill>
+                  <a:srgbClr val="465461"/>
+                </a:solidFill>
+                <a:latin typeface="Arial"/>
+              </a:rPr>
+              <a:t>Epoch-0: timestamps nulos distorsionan todo el análisis temporal</a:t>
+            </a:r>
+          </a:p>
+          <a:p>
+            <a:r>
+              <a:rPr sz="1600">
+                <a:solidFill>
+                  <a:srgbClr val="CD2D37"/>
+                </a:solidFill>
+                <a:latin typeface="Arial"/>
+              </a:rPr>
+              <a:t>▸  </a:t>
+            </a:r>
+            <a:r>
+              <a:rPr sz="1600">
+                <a:solidFill>
+                  <a:srgbClr val="465461"/>
+                </a:solidFill>
+                <a:latin typeface="Arial"/>
+              </a:rPr>
+              <a:t>Cross-foro: handles exactos + fuzzy + embeddings = señal robusta de identidad</a:t>
+            </a:r>
+          </a:p>
+          <a:p>
+            <a:r>
+              <a:rPr sz="1600">
+                <a:solidFill>
+                  <a:srgbClr val="CD2D37"/>
+                </a:solidFill>
+                <a:latin typeface="Arial"/>
+              </a:rPr>
+              <a:t>▸  </a:t>
+            </a:r>
+            <a:r>
+              <a:rPr sz="1600">
+                <a:solidFill>
+                  <a:srgbClr val="465461"/>
+                </a:solidFill>
+                <a:latin typeface="Arial"/>
+              </a:rPr>
+              <a:t>qwen3-embedding multilingual: un solo modelo para 5 foros en 2 idiomas</a:t>
+            </a:r>
+          </a:p>
+        </p:txBody>
+      </p:sp>
+      <p:sp>
+        <p:nvSpPr>
+          <p:cNvPr id="6" name="TextBox 5"/>
+          <p:cNvSpPr txBox="1"/>
+          <p:nvPr/>
+        </p:nvSpPr>
+        <p:spPr>
+          <a:xfrm>
+            <a:off x="6217920" y="1828800"/>
+            <a:ext cx="4846320" cy="411480"/>
+          </a:xfrm>
+          <a:prstGeom prst="rect">
+            <a:avLst/>
+          </a:prstGeom>
+          <a:noFill/>
+        </p:spPr>
+        <p:txBody>
+          <a:bodyPr wrap="square">
+            <a:spAutoFit/>
+          </a:bodyPr>
+          <a:lstStyle/>
+          <a:p>
+            <a:pPr algn="l"/>
+            <a:r>
+              <a:rPr sz="1600" b="1">
+                <a:solidFill>
+                  <a:srgbClr val="CD2D37"/>
+                </a:solidFill>
+                <a:latin typeface="Arial"/>
+              </a:rPr>
+              <a:t>Aprendizajes metodológicos</a:t>
+            </a:r>
+          </a:p>
+        </p:txBody>
+      </p:sp>
+      <p:sp>
+        <p:nvSpPr>
+          <p:cNvPr id="7" name="TextBox 6"/>
+          <p:cNvSpPr txBox="1"/>
+          <p:nvPr/>
+        </p:nvSpPr>
+        <p:spPr>
+          <a:xfrm>
+            <a:off x="6217920" y="2286000"/>
+            <a:ext cx="4846320" cy="3703320"/>
+          </a:xfrm>
+          <a:prstGeom prst="rect">
+            <a:avLst/>
+          </a:prstGeom>
+          <a:noFill/>
+        </p:spPr>
+        <p:txBody>
+          <a:bodyPr wrap="square">
+            <a:spAutoFit/>
+          </a:bodyPr>
+          <a:lstStyle/>
+          <a:p>
+            <a:r>
+              <a:rPr sz="1600">
+                <a:solidFill>
+                  <a:srgbClr val="CD2D37"/>
+                </a:solidFill>
+                <a:latin typeface="Arial"/>
+              </a:rPr>
+              <a:t>▸  </a:t>
+            </a:r>
+            <a:r>
+              <a:rPr sz="1600">
+                <a:solidFill>
+                  <a:srgbClr val="465461"/>
+                </a:solidFill>
+                <a:latin typeface="Arial"/>
+              </a:rPr>
+              <a:t>Detectar idioma ANTES de cualquier modelo NLP</a:t>
+            </a:r>
+          </a:p>
+          <a:p>
+            <a:r>
+              <a:rPr sz="1600">
+                <a:solidFill>
+                  <a:srgbClr val="CD2D37"/>
+                </a:solidFill>
+                <a:latin typeface="Arial"/>
+              </a:rPr>
+              <a:t>▸  </a:t>
+            </a:r>
+            <a:r>
+              <a:rPr sz="1600">
+                <a:solidFill>
+                  <a:srgbClr val="465461"/>
+                </a:solidFill>
+                <a:latin typeface="Arial"/>
+              </a:rPr>
+              <a:t>Testear parsers con dumps reales — los schemas reales divergen del estándar</a:t>
+            </a:r>
+          </a:p>
+          <a:p>
+            <a:r>
+              <a:rPr sz="1600">
+                <a:solidFill>
+                  <a:srgbClr val="CD2D37"/>
+                </a:solidFill>
+                <a:latin typeface="Arial"/>
+              </a:rPr>
+              <a:t>▸  </a:t>
+            </a:r>
+            <a:r>
+              <a:rPr sz="1600">
+                <a:solidFill>
+                  <a:srgbClr val="465461"/>
+                </a:solidFill>
+                <a:latin typeface="Arial"/>
+              </a:rPr>
+              <a:t>Validar rango de fechas antes de cualquier análisis temporal</a:t>
+            </a:r>
+          </a:p>
+          <a:p>
+            <a:r>
+              <a:rPr sz="1600">
+                <a:solidFill>
+                  <a:srgbClr val="CD2D37"/>
+                </a:solidFill>
+                <a:latin typeface="Arial"/>
+              </a:rPr>
+              <a:t>▸  </a:t>
+            </a:r>
+            <a:r>
+              <a:rPr sz="1600">
+                <a:solidFill>
+                  <a:srgbClr val="465461"/>
+                </a:solidFill>
+                <a:latin typeface="Arial"/>
+              </a:rPr>
+              <a:t>La convergencia de señales supera a cualquier métrica aislada</a:t>
+            </a:r>
+          </a:p>
+          <a:p>
+            <a:r>
+              <a:rPr sz="1600">
+                <a:solidFill>
+                  <a:srgbClr val="CD2D37"/>
+                </a:solidFill>
+                <a:latin typeface="Arial"/>
+              </a:rPr>
+              <a:t>▸  </a:t>
+            </a:r>
+            <a:r>
+              <a:rPr sz="1600">
+                <a:solidFill>
+                  <a:srgbClr val="465461"/>
+                </a:solidFill>
+                <a:latin typeface="Arial"/>
+              </a:rPr>
+              <a:t>El muestreo por longitud (top-N posts más largos) preserva señal estilométrica</a:t>
+            </a:r>
+          </a:p>
+        </p:txBody>
+      </p:sp>
+    </p:spTree>
+  </p:cSld>
+  <p:clrMapOvr>
+    <a:masterClrMapping/>
+  </p:clrMapOvr>
+</p:sld>
+</file>
+
+<file path=ppt/slides/slide23.xml><?xml version="1.0" encoding="utf-8"?>
+<p:sld xmlns:a="http://schemas.openxmlformats.org/drawingml/2006/main" xmlns:p="http://schemas.openxmlformats.org/presentationml/2006/main" xmlns:r="http://schemas.openxmlformats.org/officeDocument/2006/relationships">
+  <p:cSld>
+    <p:spTree>
+      <p:nvGrpSpPr>
+        <p:cNvPr id="1" name=""/>
+        <p:cNvGrpSpPr/>
+        <p:nvPr/>
+      </p:nvGrpSpPr>
+      <p:grpSpPr/>
+      <p:sp>
+        <p:nvSpPr>
+          <p:cNvPr id="2" name="Text Placeholder 1"/>
+          <p:cNvSpPr>
+            <a:spLocks noGrp="1"/>
+          </p:cNvSpPr>
+          <p:nvPr>
+            <p:ph type="body" idx="13" sz="quarter"/>
+          </p:nvPr>
+        </p:nvSpPr>
+        <p:spPr/>
+        <p:txBody>
+          <a:bodyPr wrap="square"/>
+          <a:lstStyle/>
+          <a:p>
+            <a:r>
+              <a:t>¿Por qué este caso importa?</a:t>
+            </a:r>
+          </a:p>
+        </p:txBody>
+      </p:sp>
+      <p:sp>
+        <p:nvSpPr>
+          <p:cNvPr id="3" name="Text Placeholder 2"/>
+          <p:cNvSpPr>
+            <a:spLocks noGrp="1"/>
+          </p:cNvSpPr>
+          <p:nvPr>
+            <p:ph type="body" idx="16" sz="quarter"/>
+          </p:nvPr>
+        </p:nvSpPr>
+        <p:spPr>
+          <a:xfrm>
+            <a:off x="1073427" y="2214736"/>
+            <a:ext cx="10084904" cy="3370138"/>
           </a:xfrm>
         </p:spPr>
         <p:txBody>
@@ -7632,7 +8096,7 @@
           <p:nvPr/>
         </p:nvGraphicFramePr>
         <p:xfrm>
-          <a:off x="1051560" y="2148840"/>
+          <a:off x="1051560" y="2286000"/>
           <a:ext cx="10058400" cy="2926080"/>
         </p:xfrm>
         <a:graphic>
@@ -8811,8 +9275,8 @@
         </p:nvSpPr>
         <p:spPr>
           <a:xfrm>
-            <a:off x="1073427" y="2077576"/>
-            <a:ext cx="10084904" cy="3507298"/>
+            <a:off x="1073427" y="2214736"/>
+            <a:ext cx="10084904" cy="3370138"/>
           </a:xfrm>
         </p:spPr>
         <p:txBody>
@@ -8894,7 +9358,7 @@
           <a:p>
             <a:pPr algn="ctr"/>
             <a:r>
-              <a:rPr sz="1300" b="1">
+              <a:rPr sz="1700" b="1">
                 <a:solidFill>
                   <a:srgbClr val="CD2D37"/>
                 </a:solidFill>
@@ -8974,8 +9438,8 @@
         </p:nvSpPr>
         <p:spPr>
           <a:xfrm>
-            <a:off x="1073427" y="2077576"/>
-            <a:ext cx="10084904" cy="3507298"/>
+            <a:off x="1073427" y="2214736"/>
+            <a:ext cx="10084904" cy="3370138"/>
           </a:xfrm>
         </p:spPr>
         <p:txBody>
@@ -8993,17 +9457,7 @@
           </a:p>
           <a:p>
             <a:r>
-              <a:t>Actividad temporal: cada foro tiene su propio ciclo de vida y eventos de pico</a:t>
-            </a:r>
-          </a:p>
-          <a:p>
-            <a:r>
-              <a:t>Longitud de posts: foros de hacking tienden a posts más cortos y técnicos que los ideológicos</a:t>
-            </a:r>
-          </a:p>
-          <a:p>
-            <a:r>
-              <a:t>El EDA ya revela la especialización: OGUsers = acceso, Exploit.in = técnica, RaidForums = filtraciones</a:t>
+              <a:t>Sirve para tener una foto de tamaño y actividad — no es el foco de este caso</a:t>
             </a:r>
           </a:p>
         </p:txBody>
@@ -9042,7 +9496,7 @@
           <a:lstStyle/>
           <a:p>
             <a:r>
-              <a:t>Detección de idioma — la decisión de pipeline</a:t>
+              <a:t>Detección de idioma — la decisión de pipeline canónica del taller</a:t>
             </a:r>
           </a:p>
         </p:txBody>
@@ -9059,8 +9513,8 @@
         </p:nvSpPr>
         <p:spPr>
           <a:xfrm>
-            <a:off x="1073427" y="2077576"/>
-            <a:ext cx="10084904" cy="3507298"/>
+            <a:off x="1073427" y="2717656"/>
+            <a:ext cx="10084904" cy="2867218"/>
           </a:xfrm>
         </p:spPr>
         <p:txBody>
@@ -9078,12 +9532,17 @@
           </a:p>
           <a:p>
             <a:r>
+              <a:t>Decisión por foro (no por post): el idioma dominante de la muestra fija el pipeline completo</a:t>
+            </a:r>
+          </a:p>
+          <a:p>
+            <a:r>
               <a:t>OGUsers / Cracked.to / Nulled.io / RaidForums: &gt;85% inglés → pipeline estándar</a:t>
             </a:r>
           </a:p>
           <a:p>
             <a:r>
-              <a:t>Exploit.in: ~80%+ ruso → pipeline separado</a:t>
+              <a:t>Exploit.in: ~80%+ ruso → pipeline separado (solo embeddings multilingües)</a:t>
             </a:r>
           </a:p>
           <a:p>
@@ -9097,35 +9556,7 @@
                 </a:solidFill>
                 <a:latin typeface="Arial"/>
               </a:rPr>
-              <a:t>·  BERTopic: modelo multilingüe paraphrase-multilingual-mpnet-base-v2</a:t>
-            </a:r>
-          </a:p>
-          <a:p>
-            <a:pPr lvl="1" marL="274320" indent="-228600">
-              <a:buNone/>
-            </a:pPr>
-            <a:r>
-              <a:rPr sz="1500" b="0">
-                <a:solidFill>
-                  <a:srgbClr val="707888"/>
-                </a:solidFill>
-                <a:latin typeface="Arial"/>
-              </a:rPr>
-              <a:t>·  NER: excluir de qwen2.5:14b (rendimiento inferior en ruso)</a:t>
-            </a:r>
-          </a:p>
-          <a:p>
-            <a:pPr lvl="1" marL="274320" indent="-228600">
-              <a:buNone/>
-            </a:pPr>
-            <a:r>
-              <a:rPr sz="1500" b="0">
-                <a:solidFill>
-                  <a:srgbClr val="707888"/>
-                </a:solidFill>
-                <a:latin typeface="Arial"/>
-              </a:rPr>
-              <a:t>·  Embeddings: qwen3-embedding es multilingual → válido para todos</a:t>
+              <a:t>·  Matiz: langdetect confunde con frecuencia búlgaro/macedonio con ruso — hay que leerlo con cuidado</a:t>
             </a:r>
           </a:p>
         </p:txBody>
@@ -9195,7 +9626,7 @@
           <p:nvPr/>
         </p:nvGraphicFramePr>
         <p:xfrm>
-          <a:off x="1051560" y="2148840"/>
+          <a:off x="1051560" y="2286000"/>
           <a:ext cx="10058400" cy="2194560"/>
         </p:xfrm>
         <a:graphic>
@@ -10055,7 +10486,7 @@
           <a:p>
             <a:pPr algn="ctr"/>
             <a:r>
-              <a:rPr sz="1300" b="1">
+              <a:rPr sz="1700" b="1">
                 <a:solidFill>
                   <a:srgbClr val="CD2D37"/>
                 </a:solidFill>
@@ -10079,7 +10510,7 @@
                 </a:solidFill>
                 <a:latin typeface="Arial"/>
               </a:rPr>
-              <a:t>HackingForums/00_extract_and_explore.ipynb</a:t>
+              <a:t>HackingForums/00_reconocimiento.ipynb</a:t>
             </a:r>
           </a:p>
         </p:txBody>
@@ -10113,7 +10544,7 @@
                 </a:solidFill>
                 <a:latin typeface="Arial"/>
               </a:rPr>
-              <a:t>1.  Abrir notebook 00_extract_and_explore</a:t>
+              <a:t>1.  Abrir notebook 00_reconocimiento</a:t>
             </a:r>
           </a:p>
           <a:p>
@@ -10124,7 +10555,7 @@
                 </a:solidFill>
                 <a:latin typeface="Arial"/>
               </a:rPr>
-              <a:t>2.  Sección 2: tabla comparativa de los 5 foros (usuarios, posts, rango de fechas)</a:t>
+              <a:t>2.  EDA comparativo — tabla resumen de los 5 foros</a:t>
             </a:r>
           </a:p>
           <a:p>
@@ -10135,7 +10566,7 @@
                 </a:solidFill>
                 <a:latin typeface="Arial"/>
               </a:rPr>
-              <a:t>3.  Sección 5: gráfica de distribución de idioma por foro</a:t>
+              <a:t>3.  Detección de idioma por foro — gráfica de distribución</a:t>
             </a:r>
           </a:p>
           <a:p>
